--- a/examples/italy_progress_report/progress_template1_output.pptx
+++ b/examples/italy_progress_report/progress_template1_output.pptx
@@ -1,23 +1,23 @@
 
 <file path=ppt/presentation.xml><?xml version="1.0" encoding="utf-8"?>
-<p:presentation xmlns:a="http://schemas.openxmlformats.org/drawingml/2006/main" xmlns:r="http://schemas.openxmlformats.org/officeDocument/2006/relationships" xmlns:p="http://schemas.openxmlformats.org/presentationml/2006/main" strictFirstAndLastChars="0" saveSubsetFonts="1" autoCompressPictures="0">
+<p:presentation xmlns:a="http://schemas.openxmlformats.org/drawingml/2006/main" xmlns:r="http://schemas.openxmlformats.org/officeDocument/2006/relationships" xmlns:p="http://schemas.openxmlformats.org/presentationml/2006/main" strictFirstAndLastChars="0" autoCompressPictures="0">
   <p:sldMasterIdLst>
-    <p:sldMasterId id="2147483659" r:id="rId1"/>
-    <p:sldMasterId id="2147483660" r:id="rId2"/>
-    <p:sldMasterId id="2157483700" r:id="rId3"/>
+    <p:sldMasterId id="2147483648" r:id="rId1"/>
+    <p:sldMasterId id="2147483660" r:id="rId3"/>
+    <p:sldMasterId id="2147483662" r:id="rId4"/>
   </p:sldMasterIdLst>
   <p:notesMasterIdLst>
-    <p:notesMasterId r:id="rId12"/>
+    <p:notesMasterId r:id="rId6"/>
   </p:notesMasterIdLst>
   <p:sldIdLst>
-    <p:sldId id="678" r:id="rId4"/>
-    <p:sldId id="257" r:id="rId5"/>
-    <p:sldId id="258" r:id="rId6"/>
-    <p:sldId id="259" r:id="rId7"/>
-    <p:sldId id="260" r:id="rId8"/>
-    <p:sldId id="261" r:id="rId9"/>
-    <p:sldId id="262" r:id="rId10"/>
-    <p:sldId id="263" r:id="rId11"/>
+    <p:sldId id="678" r:id="rId5"/>
+    <p:sldId id="257" r:id="rId7"/>
+    <p:sldId id="258" r:id="rId8"/>
+    <p:sldId id="259" r:id="rId9"/>
+    <p:sldId id="260" r:id="rId10"/>
+    <p:sldId id="261" r:id="rId11"/>
+    <p:sldId id="262" r:id="rId12"/>
+    <p:sldId id="263" r:id="rId13"/>
   </p:sldIdLst>
   <p:sldSz cx="12192000" cy="6858000"/>
   <p:notesSz cx="6858000" cy="9144000"/>
@@ -46,15 +46,15 @@
       <a:buClr>
         <a:srgbClr val="000000"/>
       </a:buClr>
-      <a:buFont typeface="Arial"/>
+      <a:buFont typeface="Arial" panose="020B0604020202090204"/>
       <a:defRPr sz="1400" b="0" i="0" u="none" strike="noStrike" cap="none">
         <a:solidFill>
           <a:srgbClr val="000000"/>
         </a:solidFill>
-        <a:latin typeface="Arial"/>
-        <a:ea typeface="Arial"/>
-        <a:cs typeface="Arial"/>
-        <a:sym typeface="Arial"/>
+        <a:latin typeface="Arial" panose="020B0604020202090204"/>
+        <a:ea typeface="Arial" panose="020B0604020202090204"/>
+        <a:cs typeface="Arial" panose="020B0604020202090204"/>
+        <a:sym typeface="Arial" panose="020B0604020202090204"/>
       </a:defRPr>
     </a:lvl1pPr>
     <a:lvl2pPr marL="457200" marR="0" lvl="1" algn="l" rtl="0">
@@ -70,15 +70,15 @@
       <a:buClr>
         <a:srgbClr val="000000"/>
       </a:buClr>
-      <a:buFont typeface="Arial"/>
+      <a:buFont typeface="Arial" panose="020B0604020202090204"/>
       <a:defRPr sz="1400" b="0" i="0" u="none" strike="noStrike" cap="none">
         <a:solidFill>
           <a:srgbClr val="000000"/>
         </a:solidFill>
-        <a:latin typeface="Arial"/>
-        <a:ea typeface="Arial"/>
-        <a:cs typeface="Arial"/>
-        <a:sym typeface="Arial"/>
+        <a:latin typeface="Arial" panose="020B0604020202090204"/>
+        <a:ea typeface="Arial" panose="020B0604020202090204"/>
+        <a:cs typeface="Arial" panose="020B0604020202090204"/>
+        <a:sym typeface="Arial" panose="020B0604020202090204"/>
       </a:defRPr>
     </a:lvl2pPr>
     <a:lvl3pPr marL="914400" marR="0" lvl="2" algn="l" rtl="0">
@@ -94,15 +94,15 @@
       <a:buClr>
         <a:srgbClr val="000000"/>
       </a:buClr>
-      <a:buFont typeface="Arial"/>
+      <a:buFont typeface="Arial" panose="020B0604020202090204"/>
       <a:defRPr sz="1400" b="0" i="0" u="none" strike="noStrike" cap="none">
         <a:solidFill>
           <a:srgbClr val="000000"/>
         </a:solidFill>
-        <a:latin typeface="Arial"/>
-        <a:ea typeface="Arial"/>
-        <a:cs typeface="Arial"/>
-        <a:sym typeface="Arial"/>
+        <a:latin typeface="Arial" panose="020B0604020202090204"/>
+        <a:ea typeface="Arial" panose="020B0604020202090204"/>
+        <a:cs typeface="Arial" panose="020B0604020202090204"/>
+        <a:sym typeface="Arial" panose="020B0604020202090204"/>
       </a:defRPr>
     </a:lvl3pPr>
     <a:lvl4pPr marL="1371600" marR="0" lvl="3" algn="l" rtl="0">
@@ -118,15 +118,15 @@
       <a:buClr>
         <a:srgbClr val="000000"/>
       </a:buClr>
-      <a:buFont typeface="Arial"/>
+      <a:buFont typeface="Arial" panose="020B0604020202090204"/>
       <a:defRPr sz="1400" b="0" i="0" u="none" strike="noStrike" cap="none">
         <a:solidFill>
           <a:srgbClr val="000000"/>
         </a:solidFill>
-        <a:latin typeface="Arial"/>
-        <a:ea typeface="Arial"/>
-        <a:cs typeface="Arial"/>
-        <a:sym typeface="Arial"/>
+        <a:latin typeface="Arial" panose="020B0604020202090204"/>
+        <a:ea typeface="Arial" panose="020B0604020202090204"/>
+        <a:cs typeface="Arial" panose="020B0604020202090204"/>
+        <a:sym typeface="Arial" panose="020B0604020202090204"/>
       </a:defRPr>
     </a:lvl4pPr>
     <a:lvl5pPr marL="1828800" marR="0" lvl="4" algn="l" rtl="0">
@@ -142,15 +142,15 @@
       <a:buClr>
         <a:srgbClr val="000000"/>
       </a:buClr>
-      <a:buFont typeface="Arial"/>
+      <a:buFont typeface="Arial" panose="020B0604020202090204"/>
       <a:defRPr sz="1400" b="0" i="0" u="none" strike="noStrike" cap="none">
         <a:solidFill>
           <a:srgbClr val="000000"/>
         </a:solidFill>
-        <a:latin typeface="Arial"/>
-        <a:ea typeface="Arial"/>
-        <a:cs typeface="Arial"/>
-        <a:sym typeface="Arial"/>
+        <a:latin typeface="Arial" panose="020B0604020202090204"/>
+        <a:ea typeface="Arial" panose="020B0604020202090204"/>
+        <a:cs typeface="Arial" panose="020B0604020202090204"/>
+        <a:sym typeface="Arial" panose="020B0604020202090204"/>
       </a:defRPr>
     </a:lvl5pPr>
     <a:lvl6pPr marL="2286000" marR="0" lvl="5" algn="l" rtl="0">
@@ -166,15 +166,15 @@
       <a:buClr>
         <a:srgbClr val="000000"/>
       </a:buClr>
-      <a:buFont typeface="Arial"/>
+      <a:buFont typeface="Arial" panose="020B0604020202090204"/>
       <a:defRPr sz="1400" b="0" i="0" u="none" strike="noStrike" cap="none">
         <a:solidFill>
           <a:srgbClr val="000000"/>
         </a:solidFill>
-        <a:latin typeface="Arial"/>
-        <a:ea typeface="Arial"/>
-        <a:cs typeface="Arial"/>
-        <a:sym typeface="Arial"/>
+        <a:latin typeface="Arial" panose="020B0604020202090204"/>
+        <a:ea typeface="Arial" panose="020B0604020202090204"/>
+        <a:cs typeface="Arial" panose="020B0604020202090204"/>
+        <a:sym typeface="Arial" panose="020B0604020202090204"/>
       </a:defRPr>
     </a:lvl6pPr>
     <a:lvl7pPr marL="2743200" marR="0" lvl="6" algn="l" rtl="0">
@@ -190,15 +190,15 @@
       <a:buClr>
         <a:srgbClr val="000000"/>
       </a:buClr>
-      <a:buFont typeface="Arial"/>
+      <a:buFont typeface="Arial" panose="020B0604020202090204"/>
       <a:defRPr sz="1400" b="0" i="0" u="none" strike="noStrike" cap="none">
         <a:solidFill>
           <a:srgbClr val="000000"/>
         </a:solidFill>
-        <a:latin typeface="Arial"/>
-        <a:ea typeface="Arial"/>
-        <a:cs typeface="Arial"/>
-        <a:sym typeface="Arial"/>
+        <a:latin typeface="Arial" panose="020B0604020202090204"/>
+        <a:ea typeface="Arial" panose="020B0604020202090204"/>
+        <a:cs typeface="Arial" panose="020B0604020202090204"/>
+        <a:sym typeface="Arial" panose="020B0604020202090204"/>
       </a:defRPr>
     </a:lvl7pPr>
     <a:lvl8pPr marL="3200400" marR="0" lvl="7" algn="l" rtl="0">
@@ -214,15 +214,15 @@
       <a:buClr>
         <a:srgbClr val="000000"/>
       </a:buClr>
-      <a:buFont typeface="Arial"/>
+      <a:buFont typeface="Arial" panose="020B0604020202090204"/>
       <a:defRPr sz="1400" b="0" i="0" u="none" strike="noStrike" cap="none">
         <a:solidFill>
           <a:srgbClr val="000000"/>
         </a:solidFill>
-        <a:latin typeface="Arial"/>
-        <a:ea typeface="Arial"/>
-        <a:cs typeface="Arial"/>
-        <a:sym typeface="Arial"/>
+        <a:latin typeface="Arial" panose="020B0604020202090204"/>
+        <a:ea typeface="Arial" panose="020B0604020202090204"/>
+        <a:cs typeface="Arial" panose="020B0604020202090204"/>
+        <a:sym typeface="Arial" panose="020B0604020202090204"/>
       </a:defRPr>
     </a:lvl8pPr>
     <a:lvl9pPr marL="3657600" marR="0" lvl="8" algn="l" rtl="0">
@@ -238,27 +238,27 @@
       <a:buClr>
         <a:srgbClr val="000000"/>
       </a:buClr>
-      <a:buFont typeface="Arial"/>
+      <a:buFont typeface="Arial" panose="020B0604020202090204"/>
       <a:defRPr sz="1400" b="0" i="0" u="none" strike="noStrike" cap="none">
         <a:solidFill>
           <a:srgbClr val="000000"/>
         </a:solidFill>
-        <a:latin typeface="Arial"/>
-        <a:ea typeface="Arial"/>
-        <a:cs typeface="Arial"/>
-        <a:sym typeface="Arial"/>
+        <a:latin typeface="Arial" panose="020B0604020202090204"/>
+        <a:ea typeface="Arial" panose="020B0604020202090204"/>
+        <a:cs typeface="Arial" panose="020B0604020202090204"/>
+        <a:sym typeface="Arial" panose="020B0604020202090204"/>
       </a:defRPr>
     </a:lvl9pPr>
   </p:defaultTextStyle>
   <p:extLst>
     <p:ext uri="{EFAFB233-063F-42B5-8137-9DF3F51BA10A}">
       <p15:sldGuideLst xmlns:p15="http://schemas.microsoft.com/office/powerpoint/2012/main">
-        <p15:guide id="1" orient="horz" pos="1620">
+        <p15:guide id="1" orient="horz" pos="1629" userDrawn="1">
           <p15:clr>
             <a:srgbClr val="747775"/>
           </p15:clr>
         </p15:guide>
-        <p15:guide id="2" pos="2880">
+        <p15:guide id="2" pos="2880" userDrawn="1">
           <p15:clr>
             <a:srgbClr val="747775"/>
           </p15:clr>
@@ -351,7 +351,6 @@
           <a:p>
             <a:fld id="{B7268E1E-0E44-426D-905E-8AD9B19D2182}" type="datetimeFigureOut">
               <a:rPr lang="cs-CZ" smtClean="0"/>
-              <a:t>10.06.2026</a:t>
             </a:fld>
             <a:endParaRPr lang="cs-CZ"/>
           </a:p>
@@ -418,6 +417,7 @@
               <a:rPr lang="en-US"/>
               <a:t>Click to edit Master text styles</a:t>
             </a:r>
+            <a:endParaRPr lang="en-US"/>
           </a:p>
           <a:p>
             <a:pPr lvl="1"/>
@@ -425,6 +425,7 @@
               <a:rPr lang="en-US"/>
               <a:t>Second level</a:t>
             </a:r>
+            <a:endParaRPr lang="en-US"/>
           </a:p>
           <a:p>
             <a:pPr lvl="2"/>
@@ -432,6 +433,7 @@
               <a:rPr lang="en-US"/>
               <a:t>Third level</a:t>
             </a:r>
+            <a:endParaRPr lang="en-US"/>
           </a:p>
           <a:p>
             <a:pPr lvl="3"/>
@@ -439,6 +441,7 @@
               <a:rPr lang="en-US"/>
               <a:t>Fourth level</a:t>
             </a:r>
+            <a:endParaRPr lang="en-US"/>
           </a:p>
           <a:p>
             <a:pPr lvl="4"/>
@@ -510,18 +513,12 @@
           <a:p>
             <a:fld id="{871B2431-D351-4C6E-A3CF-9DFAC0E3E050}" type="slidenum">
               <a:rPr lang="cs-CZ" smtClean="0"/>
-              <a:t>‹#›</a:t>
             </a:fld>
             <a:endParaRPr lang="cs-CZ"/>
           </a:p>
         </p:txBody>
       </p:sp>
     </p:spTree>
-    <p:extLst>
-      <p:ext uri="{BB962C8B-B14F-4D97-AF65-F5344CB8AC3E}">
-        <p14:creationId xmlns:p14="http://schemas.microsoft.com/office/powerpoint/2010/main" val="1798889115"/>
-      </p:ext>
-    </p:extLst>
   </p:cSld>
   <p:clrMap bg1="lt1" tx1="dk1" bg2="lt2" tx2="dk2" accent1="accent1" accent2="accent2" accent3="accent3" accent4="accent4" accent5="accent5" accent6="accent6" hlink="hlink" folHlink="folHlink"/>
   <p:notesStyle>
@@ -701,7 +698,6 @@
               <a:buSzTx/>
               <a:buFontTx/>
               <a:buNone/>
-              <a:tabLst/>
               <a:defRPr/>
             </a:pPr>
             <a:fld id="{F07326F3-4732-B74B-9C70-D0992466E499}" type="slidenum">
@@ -719,24 +715,6 @@
                 <a:ea typeface="微软雅黑" panose="020B0503020204020204" pitchFamily="34" charset="-122"/>
                 <a:cs typeface="+mn-cs"/>
               </a:rPr>
-              <a:pPr marL="0" marR="0" lvl="0" indent="0" algn="r" defTabSz="914400" rtl="0" eaLnBrk="1" fontAlgn="auto" latinLnBrk="0" hangingPunct="1">
-                <a:lnSpc>
-                  <a:spcPct val="100000"/>
-                </a:lnSpc>
-                <a:spcBef>
-                  <a:spcPts val="0"/>
-                </a:spcBef>
-                <a:spcAft>
-                  <a:spcPts val="0"/>
-                </a:spcAft>
-                <a:buClrTx/>
-                <a:buSzTx/>
-                <a:buFontTx/>
-                <a:buNone/>
-                <a:tabLst/>
-                <a:defRPr/>
-              </a:pPr>
-              <a:t>1</a:t>
             </a:fld>
             <a:endParaRPr kumimoji="0" lang="en-US" sz="1200" b="0" i="0" u="none" strike="noStrike" kern="1200" cap="none" spc="0" normalizeH="0" baseline="0" noProof="0">
               <a:ln>
@@ -806,9 +784,7 @@
               <a:defRPr sz="1200"/>
             </a:lvl1pPr>
           </a:lstStyle>
-          <a:p>
-            <a:endParaRPr/>
-          </a:p>
+          <a:p/>
         </p:txBody>
       </p:sp>
       <p:sp>
@@ -842,6 +818,7 @@
               <a:rPr lang="cs-CZ"/>
               <a:t>1.7.2013</a:t>
             </a:r>
+            <a:endParaRPr lang="cs-CZ"/>
           </a:p>
         </p:txBody>
       </p:sp>
@@ -873,9 +850,7 @@
         <p:txBody>
           <a:bodyPr vert="horz" lIns="91440" tIns="45720" rIns="91440" bIns="45720" rtlCol="0" anchor="ctr"/>
           <a:lstStyle/>
-          <a:p>
-            <a:endParaRPr/>
-          </a:p>
+          <a:p/>
         </p:txBody>
       </p:sp>
       <p:sp>
@@ -918,6 +893,11 @@
               </a:rPr>
               <a:t>原有的表格布局显得呆板，现在我们将其优化为两个并排的卡片。左侧卡片放置项目基本信息，右侧卡片放置管理信息，结构更清晰。卡片标题使用蓝色背景，突出了信息层级，整体视觉效果更现代。</a:t>
             </a:r>
+            <a:endParaRPr lang="en-US" sz="1400" b="0" i="0" u="none" strike="noStrike">
+              <a:solidFill>
+                <a:srgbClr val="000000"/>
+              </a:solidFill>
+            </a:endParaRPr>
           </a:p>
         </p:txBody>
       </p:sp>
@@ -947,9 +927,7 @@
               <a:defRPr sz="1200"/>
             </a:lvl1pPr>
           </a:lstStyle>
-          <a:p>
-            <a:endParaRPr/>
-          </a:p>
+          <a:p/>
         </p:txBody>
       </p:sp>
       <p:sp>
@@ -983,6 +961,7 @@
               <a:rPr lang="cs-CZ"/>
               <a:t>‹#›</a:t>
             </a:r>
+            <a:endParaRPr lang="cs-CZ"/>
           </a:p>
         </p:txBody>
       </p:sp>
@@ -1037,9 +1016,7 @@
               <a:defRPr sz="1200"/>
             </a:lvl1pPr>
           </a:lstStyle>
-          <a:p>
-            <a:endParaRPr/>
-          </a:p>
+          <a:p/>
         </p:txBody>
       </p:sp>
       <p:sp>
@@ -1073,6 +1050,7 @@
               <a:rPr lang="cs-CZ"/>
               <a:t>1.7.2013</a:t>
             </a:r>
+            <a:endParaRPr lang="cs-CZ"/>
           </a:p>
         </p:txBody>
       </p:sp>
@@ -1104,9 +1082,7 @@
         <p:txBody>
           <a:bodyPr vert="horz" lIns="91440" tIns="45720" rIns="91440" bIns="45720" rtlCol="0" anchor="ctr"/>
           <a:lstStyle/>
-          <a:p>
-            <a:endParaRPr/>
-          </a:p>
+          <a:p/>
         </p:txBody>
       </p:sp>
       <p:sp>
@@ -1165,6 +1141,11 @@
               </a:rPr>
               <a:t>。</a:t>
             </a:r>
+            <a:endParaRPr lang="en-US" sz="1400" b="0" i="0" u="none" strike="noStrike" dirty="0">
+              <a:solidFill>
+                <a:srgbClr val="000000"/>
+              </a:solidFill>
+            </a:endParaRPr>
           </a:p>
         </p:txBody>
       </p:sp>
@@ -1194,9 +1175,7 @@
               <a:defRPr sz="1200"/>
             </a:lvl1pPr>
           </a:lstStyle>
-          <a:p>
-            <a:endParaRPr/>
-          </a:p>
+          <a:p/>
         </p:txBody>
       </p:sp>
       <p:sp>
@@ -1230,6 +1209,7 @@
               <a:rPr lang="cs-CZ"/>
               <a:t>‹#›</a:t>
             </a:r>
+            <a:endParaRPr lang="cs-CZ"/>
           </a:p>
         </p:txBody>
       </p:sp>
@@ -1284,9 +1264,7 @@
               <a:defRPr sz="1200"/>
             </a:lvl1pPr>
           </a:lstStyle>
-          <a:p>
-            <a:endParaRPr/>
-          </a:p>
+          <a:p/>
         </p:txBody>
       </p:sp>
       <p:sp>
@@ -1320,6 +1298,7 @@
               <a:rPr lang="cs-CZ"/>
               <a:t>1.7.2013</a:t>
             </a:r>
+            <a:endParaRPr lang="cs-CZ"/>
           </a:p>
         </p:txBody>
       </p:sp>
@@ -1351,9 +1330,7 @@
         <p:txBody>
           <a:bodyPr vert="horz" lIns="91440" tIns="45720" rIns="91440" bIns="45720" rtlCol="0" anchor="ctr"/>
           <a:lstStyle/>
-          <a:p>
-            <a:endParaRPr/>
-          </a:p>
+          <a:p/>
         </p:txBody>
       </p:sp>
       <p:sp>
@@ -1396,6 +1373,11 @@
               </a:rPr>
               <a:t>对于“项目整体进展”页面，我们采用了左右分栏的布局。左侧是对整体情况的高度概括，右侧则分点详细阐述各个模块的进展。这种布局使得信息层次分明，观众可以先建立整体认知，再深入了解细节。</a:t>
             </a:r>
+            <a:endParaRPr lang="en-US" sz="1400" b="0" i="0" u="none" strike="noStrike">
+              <a:solidFill>
+                <a:srgbClr val="000000"/>
+              </a:solidFill>
+            </a:endParaRPr>
           </a:p>
         </p:txBody>
       </p:sp>
@@ -1425,9 +1407,7 @@
               <a:defRPr sz="1200"/>
             </a:lvl1pPr>
           </a:lstStyle>
-          <a:p>
-            <a:endParaRPr/>
-          </a:p>
+          <a:p/>
         </p:txBody>
       </p:sp>
       <p:sp>
@@ -1461,6 +1441,7 @@
               <a:rPr lang="cs-CZ"/>
               <a:t>‹#›</a:t>
             </a:r>
+            <a:endParaRPr lang="cs-CZ"/>
           </a:p>
         </p:txBody>
       </p:sp>
@@ -1515,9 +1496,7 @@
               <a:defRPr sz="1200"/>
             </a:lvl1pPr>
           </a:lstStyle>
-          <a:p>
-            <a:endParaRPr/>
-          </a:p>
+          <a:p/>
         </p:txBody>
       </p:sp>
       <p:sp>
@@ -1551,6 +1530,7 @@
               <a:rPr lang="cs-CZ"/>
               <a:t>1.7.2013</a:t>
             </a:r>
+            <a:endParaRPr lang="cs-CZ"/>
           </a:p>
         </p:txBody>
       </p:sp>
@@ -1582,9 +1562,7 @@
         <p:txBody>
           <a:bodyPr vert="horz" lIns="91440" tIns="45720" rIns="91440" bIns="45720" rtlCol="0" anchor="ctr"/>
           <a:lstStyle/>
-          <a:p>
-            <a:endParaRPr/>
-          </a:p>
+          <a:p/>
         </p:txBody>
       </p:sp>
       <p:sp>
@@ -1627,6 +1605,11 @@
               </a:rPr>
               <a:t>这个页面的优化重点是将时间轴和任务表格进行分离和美化。上半部分的时间轴设计得更具视觉引导性，让观众一眼就能看清项目所处的阶段。下半部分的表格也进行了重新设计，增加了行间距和表头背景色，使其更易读。</a:t>
             </a:r>
+            <a:endParaRPr lang="en-US" sz="1400" b="0" i="0" u="none" strike="noStrike">
+              <a:solidFill>
+                <a:srgbClr val="000000"/>
+              </a:solidFill>
+            </a:endParaRPr>
           </a:p>
         </p:txBody>
       </p:sp>
@@ -1656,9 +1639,7 @@
               <a:defRPr sz="1200"/>
             </a:lvl1pPr>
           </a:lstStyle>
-          <a:p>
-            <a:endParaRPr/>
-          </a:p>
+          <a:p/>
         </p:txBody>
       </p:sp>
       <p:sp>
@@ -1692,6 +1673,7 @@
               <a:rPr lang="cs-CZ"/>
               <a:t>‹#›</a:t>
             </a:r>
+            <a:endParaRPr lang="cs-CZ"/>
           </a:p>
         </p:txBody>
       </p:sp>
@@ -1746,9 +1728,7 @@
               <a:defRPr sz="1200"/>
             </a:lvl1pPr>
           </a:lstStyle>
-          <a:p>
-            <a:endParaRPr/>
-          </a:p>
+          <a:p/>
         </p:txBody>
       </p:sp>
       <p:sp>
@@ -1782,6 +1762,7 @@
               <a:rPr lang="cs-CZ"/>
               <a:t>1.7.2013</a:t>
             </a:r>
+            <a:endParaRPr lang="cs-CZ"/>
           </a:p>
         </p:txBody>
       </p:sp>
@@ -1813,9 +1794,7 @@
         <p:txBody>
           <a:bodyPr vert="horz" lIns="91440" tIns="45720" rIns="91440" bIns="45720" rtlCol="0" anchor="ctr"/>
           <a:lstStyle/>
-          <a:p>
-            <a:endParaRPr/>
-          </a:p>
+          <a:p/>
         </p:txBody>
       </p:sp>
       <p:sp>
@@ -1858,6 +1837,11 @@
               </a:rPr>
               <a:t>在“TOP问题及风险”页面，我们通过颜色来强化优先级的视觉提示。P1级别的问题用红色背景突出，P2用橙色，让观众可以迅速抓住重点。同时，优化了表格的样式，使其更加规整和专业。</a:t>
             </a:r>
+            <a:endParaRPr lang="en-US" sz="1400" b="0" i="0" u="none" strike="noStrike">
+              <a:solidFill>
+                <a:srgbClr val="000000"/>
+              </a:solidFill>
+            </a:endParaRPr>
           </a:p>
         </p:txBody>
       </p:sp>
@@ -1887,9 +1871,7 @@
               <a:defRPr sz="1200"/>
             </a:lvl1pPr>
           </a:lstStyle>
-          <a:p>
-            <a:endParaRPr/>
-          </a:p>
+          <a:p/>
         </p:txBody>
       </p:sp>
       <p:sp>
@@ -1923,6 +1905,7 @@
               <a:rPr lang="cs-CZ"/>
               <a:t>‹#›</a:t>
             </a:r>
+            <a:endParaRPr lang="cs-CZ"/>
           </a:p>
         </p:txBody>
       </p:sp>
@@ -1977,9 +1960,7 @@
               <a:defRPr sz="1200"/>
             </a:lvl1pPr>
           </a:lstStyle>
-          <a:p>
-            <a:endParaRPr/>
-          </a:p>
+          <a:p/>
         </p:txBody>
       </p:sp>
       <p:sp>
@@ -2013,6 +1994,7 @@
               <a:rPr lang="cs-CZ"/>
               <a:t>1.7.2013</a:t>
             </a:r>
+            <a:endParaRPr lang="cs-CZ"/>
           </a:p>
         </p:txBody>
       </p:sp>
@@ -2044,9 +2026,7 @@
         <p:txBody>
           <a:bodyPr vert="horz" lIns="91440" tIns="45720" rIns="91440" bIns="45720" rtlCol="0" anchor="ctr"/>
           <a:lstStyle/>
-          <a:p>
-            <a:endParaRPr/>
-          </a:p>
+          <a:p/>
         </p:txBody>
       </p:sp>
       <p:sp>
@@ -2089,6 +2069,11 @@
               </a:rPr>
               <a:t>“下期计划”页面采用了带序号的卡片式布局。每个计划项都是一个独立的模块，清晰地展示了计划的核心内容。这种设计避免了大段文字的沉闷感，让计划看起来更有条理和可执行性。</a:t>
             </a:r>
+            <a:endParaRPr lang="en-US" sz="1400" b="0" i="0" u="none" strike="noStrike">
+              <a:solidFill>
+                <a:srgbClr val="000000"/>
+              </a:solidFill>
+            </a:endParaRPr>
           </a:p>
         </p:txBody>
       </p:sp>
@@ -2118,9 +2103,7 @@
               <a:defRPr sz="1200"/>
             </a:lvl1pPr>
           </a:lstStyle>
-          <a:p>
-            <a:endParaRPr/>
-          </a:p>
+          <a:p/>
         </p:txBody>
       </p:sp>
       <p:sp>
@@ -2154,6 +2137,7 @@
               <a:rPr lang="cs-CZ"/>
               <a:t>‹#›</a:t>
             </a:r>
+            <a:endParaRPr lang="cs-CZ"/>
           </a:p>
         </p:txBody>
       </p:sp>
@@ -2208,9 +2192,7 @@
               <a:defRPr sz="1200"/>
             </a:lvl1pPr>
           </a:lstStyle>
-          <a:p>
-            <a:endParaRPr/>
-          </a:p>
+          <a:p/>
         </p:txBody>
       </p:sp>
       <p:sp>
@@ -2244,6 +2226,7 @@
               <a:rPr lang="cs-CZ"/>
               <a:t>1.7.2013</a:t>
             </a:r>
+            <a:endParaRPr lang="cs-CZ"/>
           </a:p>
         </p:txBody>
       </p:sp>
@@ -2275,9 +2258,7 @@
         <p:txBody>
           <a:bodyPr vert="horz" lIns="91440" tIns="45720" rIns="91440" bIns="45720" rtlCol="0" anchor="ctr"/>
           <a:lstStyle/>
-          <a:p>
-            <a:endParaRPr/>
-          </a:p>
+          <a:p/>
         </p:txBody>
       </p:sp>
       <p:sp>
@@ -2320,6 +2301,11 @@
               </a:rPr>
               <a:t>最后是结束页。我们将“Thank you”设计为页面的视觉中心，使用简洁优雅的字体和较大的字号，营造出专业而不失亲和力的结束氛围。下方的“Q&amp;A”也清晰地提示了接下来的环节。</a:t>
             </a:r>
+            <a:endParaRPr lang="en-US" sz="1400" b="0" i="0" u="none" strike="noStrike">
+              <a:solidFill>
+                <a:srgbClr val="000000"/>
+              </a:solidFill>
+            </a:endParaRPr>
           </a:p>
         </p:txBody>
       </p:sp>
@@ -2349,9 +2335,7 @@
               <a:defRPr sz="1200"/>
             </a:lvl1pPr>
           </a:lstStyle>
-          <a:p>
-            <a:endParaRPr/>
-          </a:p>
+          <a:p/>
         </p:txBody>
       </p:sp>
       <p:sp>
@@ -2385,6 +2369,7 @@
               <a:rPr lang="cs-CZ"/>
               <a:t>‹#›</a:t>
             </a:r>
+            <a:endParaRPr lang="cs-CZ"/>
           </a:p>
         </p:txBody>
       </p:sp>
@@ -2397,7 +2382,7 @@
 </file>
 
 <file path=ppt/slideLayouts/slideLayout1.xml><?xml version="1.0" encoding="utf-8"?>
-<p:sldLayout xmlns:a="http://schemas.openxmlformats.org/drawingml/2006/main" xmlns:r="http://schemas.openxmlformats.org/officeDocument/2006/relationships" xmlns:p="http://schemas.openxmlformats.org/presentationml/2006/main" matchingName="标题幻灯片" type="title">
+<p:sldLayout xmlns:a="http://schemas.openxmlformats.org/drawingml/2006/main" xmlns:r="http://schemas.openxmlformats.org/officeDocument/2006/relationships" xmlns:p="http://schemas.openxmlformats.org/presentationml/2006/main" type="title" matchingName="标题幻灯片">
   <p:cSld name="TITLE">
     <p:spTree>
       <p:nvGrpSpPr>
@@ -2455,7 +2440,7 @@
                 <a:schemeClr val="dk1"/>
               </a:buClr>
               <a:buSzPts val="4500"/>
-              <a:buFont typeface="Arial"/>
+              <a:buFont typeface="Arial" panose="020B0604020202090204"/>
               <a:buNone/>
               <a:defRPr sz="4500"/>
             </a:lvl1pPr>
@@ -2548,9 +2533,7 @@
               <a:defRPr/>
             </a:lvl9pPr>
           </a:lstStyle>
-          <a:p>
-            <a:endParaRPr/>
-          </a:p>
+          <a:p/>
         </p:txBody>
       </p:sp>
       <p:sp>
@@ -2735,9 +2718,7 @@
               <a:defRPr sz="1200"/>
             </a:lvl9pPr>
           </a:lstStyle>
-          <a:p>
-            <a:endParaRPr/>
-          </a:p>
+          <a:p/>
         </p:txBody>
       </p:sp>
       <p:sp>
@@ -2868,9 +2849,7 @@
               <a:defRPr/>
             </a:lvl9pPr>
           </a:lstStyle>
-          <a:p>
-            <a:endParaRPr/>
-          </a:p>
+          <a:p/>
         </p:txBody>
       </p:sp>
       <p:sp>
@@ -3001,9 +2980,7 @@
               <a:defRPr/>
             </a:lvl9pPr>
           </a:lstStyle>
-          <a:p>
-            <a:endParaRPr/>
-          </a:p>
+          <a:p/>
         </p:txBody>
       </p:sp>
       <p:sp>
@@ -3110,9 +3087,8 @@
             </a:pPr>
             <a:fld id="{00000000-1234-1234-1234-123412341234}" type="slidenum">
               <a:rPr lang="zh-CN"/>
-              <a:t>‹#›</a:t>
             </a:fld>
-            <a:endParaRPr/>
+            <a:endParaRPr lang="zh-CN"/>
           </a:p>
         </p:txBody>
       </p:sp>
@@ -3125,7 +3101,7 @@
 </file>
 
 <file path=ppt/slideLayouts/slideLayout10.xml><?xml version="1.0" encoding="utf-8"?>
-<p:sldLayout xmlns:a="http://schemas.openxmlformats.org/drawingml/2006/main" xmlns:r="http://schemas.openxmlformats.org/officeDocument/2006/relationships" xmlns:p="http://schemas.openxmlformats.org/presentationml/2006/main" matchingName="标题和竖排文字" type="vertTx">
+<p:sldLayout xmlns:a="http://schemas.openxmlformats.org/drawingml/2006/main" xmlns:r="http://schemas.openxmlformats.org/officeDocument/2006/relationships" xmlns:p="http://schemas.openxmlformats.org/presentationml/2006/main" type="vertTx" matchingName="标题和竖排文字">
   <p:cSld name="VERTICAL_TEXT">
     <p:spTree>
       <p:nvGrpSpPr>
@@ -3275,9 +3251,7 @@
               <a:defRPr/>
             </a:lvl9pPr>
           </a:lstStyle>
-          <a:p>
-            <a:endParaRPr/>
-          </a:p>
+          <a:p/>
         </p:txBody>
       </p:sp>
       <p:sp>
@@ -3462,9 +3436,7 @@
               <a:defRPr/>
             </a:lvl9pPr>
           </a:lstStyle>
-          <a:p>
-            <a:endParaRPr/>
-          </a:p>
+          <a:p/>
         </p:txBody>
       </p:sp>
       <p:sp>
@@ -3595,9 +3567,7 @@
               <a:defRPr/>
             </a:lvl9pPr>
           </a:lstStyle>
-          <a:p>
-            <a:endParaRPr/>
-          </a:p>
+          <a:p/>
         </p:txBody>
       </p:sp>
       <p:sp>
@@ -3728,9 +3698,7 @@
               <a:defRPr/>
             </a:lvl9pPr>
           </a:lstStyle>
-          <a:p>
-            <a:endParaRPr/>
-          </a:p>
+          <a:p/>
         </p:txBody>
       </p:sp>
       <p:sp>
@@ -3837,9 +3805,8 @@
             </a:pPr>
             <a:fld id="{00000000-1234-1234-1234-123412341234}" type="slidenum">
               <a:rPr lang="zh-CN"/>
-              <a:t>‹#›</a:t>
             </a:fld>
-            <a:endParaRPr/>
+            <a:endParaRPr lang="zh-CN"/>
           </a:p>
         </p:txBody>
       </p:sp>
@@ -3852,7 +3819,7 @@
 </file>
 
 <file path=ppt/slideLayouts/slideLayout11.xml><?xml version="1.0" encoding="utf-8"?>
-<p:sldLayout xmlns:a="http://schemas.openxmlformats.org/drawingml/2006/main" xmlns:r="http://schemas.openxmlformats.org/officeDocument/2006/relationships" xmlns:p="http://schemas.openxmlformats.org/presentationml/2006/main" matchingName="竖排标题与文本" type="vertTitleAndTx">
+<p:sldLayout xmlns:a="http://schemas.openxmlformats.org/drawingml/2006/main" xmlns:r="http://schemas.openxmlformats.org/officeDocument/2006/relationships" xmlns:p="http://schemas.openxmlformats.org/presentationml/2006/main" type="vertTitleAndTx" matchingName="竖排标题与文本">
   <p:cSld name="VERTICAL_TITLE_AND_VERTICAL_TEXT">
     <p:spTree>
       <p:nvGrpSpPr>
@@ -4002,9 +3969,7 @@
               <a:defRPr/>
             </a:lvl9pPr>
           </a:lstStyle>
-          <a:p>
-            <a:endParaRPr/>
-          </a:p>
+          <a:p/>
         </p:txBody>
       </p:sp>
       <p:sp>
@@ -4189,9 +4154,7 @@
               <a:defRPr/>
             </a:lvl9pPr>
           </a:lstStyle>
-          <a:p>
-            <a:endParaRPr/>
-          </a:p>
+          <a:p/>
         </p:txBody>
       </p:sp>
       <p:sp>
@@ -4322,9 +4285,7 @@
               <a:defRPr/>
             </a:lvl9pPr>
           </a:lstStyle>
-          <a:p>
-            <a:endParaRPr/>
-          </a:p>
+          <a:p/>
         </p:txBody>
       </p:sp>
       <p:sp>
@@ -4455,9 +4416,7 @@
               <a:defRPr/>
             </a:lvl9pPr>
           </a:lstStyle>
-          <a:p>
-            <a:endParaRPr/>
-          </a:p>
+          <a:p/>
         </p:txBody>
       </p:sp>
       <p:sp>
@@ -4564,9 +4523,8 @@
             </a:pPr>
             <a:fld id="{00000000-1234-1234-1234-123412341234}" type="slidenum">
               <a:rPr lang="zh-CN"/>
-              <a:t>‹#›</a:t>
             </a:fld>
-            <a:endParaRPr/>
+            <a:endParaRPr lang="zh-CN"/>
           </a:p>
         </p:txBody>
       </p:sp>
@@ -4648,6 +4606,7 @@
               <a:rPr lang="zh-CN" altLang="en-US"/>
               <a:t>单击此处编辑母版标题样式</a:t>
             </a:r>
+            <a:endParaRPr lang="zh-CN" altLang="en-US"/>
           </a:p>
         </p:txBody>
       </p:sp>
@@ -4712,6 +4671,7 @@
               <a:rPr lang="zh-CN" altLang="en-US"/>
               <a:t>单击此处编辑母版副标题样式</a:t>
             </a:r>
+            <a:endParaRPr lang="zh-CN" altLang="en-US"/>
           </a:p>
         </p:txBody>
       </p:sp>
@@ -4732,7 +4692,6 @@
           <a:p>
             <a:fld id="{BC5B3004-400C-43A5-AC96-1EF96FAF3383}" type="datetimeFigureOut">
               <a:rPr lang="zh-CN" altLang="en-US" smtClean="0"/>
-              <a:t>2026/6/10</a:t>
             </a:fld>
             <a:endParaRPr lang="zh-CN" altLang="en-US"/>
           </a:p>
@@ -4774,18 +4733,12 @@
           <a:p>
             <a:fld id="{2D2F81BE-ADF2-46EA-A947-332EC6F994A9}" type="slidenum">
               <a:rPr lang="zh-CN" altLang="en-US" smtClean="0"/>
-              <a:t>‹#›</a:t>
             </a:fld>
             <a:endParaRPr lang="zh-CN" altLang="en-US"/>
           </a:p>
         </p:txBody>
       </p:sp>
     </p:spTree>
-    <p:extLst>
-      <p:ext uri="{BB962C8B-B14F-4D97-AF65-F5344CB8AC3E}">
-        <p14:creationId xmlns:p14="http://schemas.microsoft.com/office/powerpoint/2010/main" val="2989739364"/>
-      </p:ext>
-    </p:extLst>
   </p:cSld>
   <p:clrMapOvr>
     <a:masterClrMapping/>
@@ -4829,6 +4782,7 @@
               <a:rPr lang="zh-CN" altLang="en-US"/>
               <a:t>单击此处编辑母版标题样式</a:t>
             </a:r>
+            <a:endParaRPr lang="zh-CN" altLang="en-US"/>
           </a:p>
         </p:txBody>
       </p:sp>
@@ -4852,6 +4806,7 @@
               <a:rPr lang="zh-CN" altLang="en-US"/>
               <a:t>单击此处编辑母版文本样式</a:t>
             </a:r>
+            <a:endParaRPr lang="zh-CN" altLang="en-US"/>
           </a:p>
           <a:p>
             <a:pPr lvl="1"/>
@@ -4859,6 +4814,7 @@
               <a:rPr lang="zh-CN" altLang="en-US"/>
               <a:t>二级</a:t>
             </a:r>
+            <a:endParaRPr lang="zh-CN" altLang="en-US"/>
           </a:p>
           <a:p>
             <a:pPr lvl="2"/>
@@ -4866,6 +4822,7 @@
               <a:rPr lang="zh-CN" altLang="en-US"/>
               <a:t>三级</a:t>
             </a:r>
+            <a:endParaRPr lang="zh-CN" altLang="en-US"/>
           </a:p>
           <a:p>
             <a:pPr lvl="3"/>
@@ -4873,6 +4830,7 @@
               <a:rPr lang="zh-CN" altLang="en-US"/>
               <a:t>四级</a:t>
             </a:r>
+            <a:endParaRPr lang="zh-CN" altLang="en-US"/>
           </a:p>
           <a:p>
             <a:pPr lvl="4"/>
@@ -4880,6 +4838,7 @@
               <a:rPr lang="zh-CN" altLang="en-US"/>
               <a:t>五级</a:t>
             </a:r>
+            <a:endParaRPr lang="zh-CN" altLang="en-US"/>
           </a:p>
         </p:txBody>
       </p:sp>
@@ -4900,7 +4859,6 @@
           <a:p>
             <a:fld id="{BC5B3004-400C-43A5-AC96-1EF96FAF3383}" type="datetimeFigureOut">
               <a:rPr lang="zh-CN" altLang="en-US" smtClean="0"/>
-              <a:t>2026/6/10</a:t>
             </a:fld>
             <a:endParaRPr lang="zh-CN" altLang="en-US"/>
           </a:p>
@@ -4942,18 +4900,12 @@
           <a:p>
             <a:fld id="{2D2F81BE-ADF2-46EA-A947-332EC6F994A9}" type="slidenum">
               <a:rPr lang="zh-CN" altLang="en-US" smtClean="0"/>
-              <a:t>‹#›</a:t>
             </a:fld>
             <a:endParaRPr lang="zh-CN" altLang="en-US"/>
           </a:p>
         </p:txBody>
       </p:sp>
     </p:spTree>
-    <p:extLst>
-      <p:ext uri="{BB962C8B-B14F-4D97-AF65-F5344CB8AC3E}">
-        <p14:creationId xmlns:p14="http://schemas.microsoft.com/office/powerpoint/2010/main" val="2178981056"/>
-      </p:ext>
-    </p:extLst>
   </p:cSld>
   <p:clrMapOvr>
     <a:masterClrMapping/>
@@ -5006,6 +4958,7 @@
               <a:rPr lang="zh-CN" altLang="en-US"/>
               <a:t>单击此处编辑母版标题样式</a:t>
             </a:r>
+            <a:endParaRPr lang="zh-CN" altLang="en-US"/>
           </a:p>
         </p:txBody>
       </p:sp>
@@ -5125,6 +5078,7 @@
               <a:rPr lang="zh-CN" altLang="en-US"/>
               <a:t>单击此处编辑母版文本样式</a:t>
             </a:r>
+            <a:endParaRPr lang="zh-CN" altLang="en-US"/>
           </a:p>
         </p:txBody>
       </p:sp>
@@ -5145,7 +5099,6 @@
           <a:p>
             <a:fld id="{BC5B3004-400C-43A5-AC96-1EF96FAF3383}" type="datetimeFigureOut">
               <a:rPr lang="zh-CN" altLang="en-US" smtClean="0"/>
-              <a:t>2026/6/10</a:t>
             </a:fld>
             <a:endParaRPr lang="zh-CN" altLang="en-US"/>
           </a:p>
@@ -5187,18 +5140,12 @@
           <a:p>
             <a:fld id="{2D2F81BE-ADF2-46EA-A947-332EC6F994A9}" type="slidenum">
               <a:rPr lang="zh-CN" altLang="en-US" smtClean="0"/>
-              <a:t>‹#›</a:t>
             </a:fld>
             <a:endParaRPr lang="zh-CN" altLang="en-US"/>
           </a:p>
         </p:txBody>
       </p:sp>
     </p:spTree>
-    <p:extLst>
-      <p:ext uri="{BB962C8B-B14F-4D97-AF65-F5344CB8AC3E}">
-        <p14:creationId xmlns:p14="http://schemas.microsoft.com/office/powerpoint/2010/main" val="4120483451"/>
-      </p:ext>
-    </p:extLst>
   </p:cSld>
   <p:clrMapOvr>
     <a:masterClrMapping/>
@@ -5242,6 +5189,7 @@
               <a:rPr lang="zh-CN" altLang="en-US"/>
               <a:t>单击此处编辑母版标题样式</a:t>
             </a:r>
+            <a:endParaRPr lang="zh-CN" altLang="en-US"/>
           </a:p>
         </p:txBody>
       </p:sp>
@@ -5270,6 +5218,7 @@
               <a:rPr lang="zh-CN" altLang="en-US"/>
               <a:t>单击此处编辑母版文本样式</a:t>
             </a:r>
+            <a:endParaRPr lang="zh-CN" altLang="en-US"/>
           </a:p>
           <a:p>
             <a:pPr lvl="1"/>
@@ -5277,6 +5226,7 @@
               <a:rPr lang="zh-CN" altLang="en-US"/>
               <a:t>二级</a:t>
             </a:r>
+            <a:endParaRPr lang="zh-CN" altLang="en-US"/>
           </a:p>
           <a:p>
             <a:pPr lvl="2"/>
@@ -5284,6 +5234,7 @@
               <a:rPr lang="zh-CN" altLang="en-US"/>
               <a:t>三级</a:t>
             </a:r>
+            <a:endParaRPr lang="zh-CN" altLang="en-US"/>
           </a:p>
           <a:p>
             <a:pPr lvl="3"/>
@@ -5291,6 +5242,7 @@
               <a:rPr lang="zh-CN" altLang="en-US"/>
               <a:t>四级</a:t>
             </a:r>
+            <a:endParaRPr lang="zh-CN" altLang="en-US"/>
           </a:p>
           <a:p>
             <a:pPr lvl="4"/>
@@ -5298,6 +5250,7 @@
               <a:rPr lang="zh-CN" altLang="en-US"/>
               <a:t>五级</a:t>
             </a:r>
+            <a:endParaRPr lang="zh-CN" altLang="en-US"/>
           </a:p>
         </p:txBody>
       </p:sp>
@@ -5326,6 +5279,7 @@
               <a:rPr lang="zh-CN" altLang="en-US"/>
               <a:t>单击此处编辑母版文本样式</a:t>
             </a:r>
+            <a:endParaRPr lang="zh-CN" altLang="en-US"/>
           </a:p>
           <a:p>
             <a:pPr lvl="1"/>
@@ -5333,6 +5287,7 @@
               <a:rPr lang="zh-CN" altLang="en-US"/>
               <a:t>二级</a:t>
             </a:r>
+            <a:endParaRPr lang="zh-CN" altLang="en-US"/>
           </a:p>
           <a:p>
             <a:pPr lvl="2"/>
@@ -5340,6 +5295,7 @@
               <a:rPr lang="zh-CN" altLang="en-US"/>
               <a:t>三级</a:t>
             </a:r>
+            <a:endParaRPr lang="zh-CN" altLang="en-US"/>
           </a:p>
           <a:p>
             <a:pPr lvl="3"/>
@@ -5347,6 +5303,7 @@
               <a:rPr lang="zh-CN" altLang="en-US"/>
               <a:t>四级</a:t>
             </a:r>
+            <a:endParaRPr lang="zh-CN" altLang="en-US"/>
           </a:p>
           <a:p>
             <a:pPr lvl="4"/>
@@ -5354,6 +5311,7 @@
               <a:rPr lang="zh-CN" altLang="en-US"/>
               <a:t>五级</a:t>
             </a:r>
+            <a:endParaRPr lang="zh-CN" altLang="en-US"/>
           </a:p>
         </p:txBody>
       </p:sp>
@@ -5374,7 +5332,6 @@
           <a:p>
             <a:fld id="{BC5B3004-400C-43A5-AC96-1EF96FAF3383}" type="datetimeFigureOut">
               <a:rPr lang="zh-CN" altLang="en-US" smtClean="0"/>
-              <a:t>2026/6/10</a:t>
             </a:fld>
             <a:endParaRPr lang="zh-CN" altLang="en-US"/>
           </a:p>
@@ -5416,18 +5373,12 @@
           <a:p>
             <a:fld id="{2D2F81BE-ADF2-46EA-A947-332EC6F994A9}" type="slidenum">
               <a:rPr lang="zh-CN" altLang="en-US" smtClean="0"/>
-              <a:t>‹#›</a:t>
             </a:fld>
             <a:endParaRPr lang="zh-CN" altLang="en-US"/>
           </a:p>
         </p:txBody>
       </p:sp>
     </p:spTree>
-    <p:extLst>
-      <p:ext uri="{BB962C8B-B14F-4D97-AF65-F5344CB8AC3E}">
-        <p14:creationId xmlns:p14="http://schemas.microsoft.com/office/powerpoint/2010/main" val="2258204897"/>
-      </p:ext>
-    </p:extLst>
   </p:cSld>
   <p:clrMapOvr>
     <a:masterClrMapping/>
@@ -5476,6 +5427,7 @@
               <a:rPr lang="zh-CN" altLang="en-US"/>
               <a:t>单击此处编辑母版标题样式</a:t>
             </a:r>
+            <a:endParaRPr lang="zh-CN" altLang="en-US"/>
           </a:p>
         </p:txBody>
       </p:sp>
@@ -5541,6 +5493,7 @@
               <a:rPr lang="zh-CN" altLang="en-US"/>
               <a:t>单击此处编辑母版文本样式</a:t>
             </a:r>
+            <a:endParaRPr lang="zh-CN" altLang="en-US"/>
           </a:p>
         </p:txBody>
       </p:sp>
@@ -5569,6 +5522,7 @@
               <a:rPr lang="zh-CN" altLang="en-US"/>
               <a:t>单击此处编辑母版文本样式</a:t>
             </a:r>
+            <a:endParaRPr lang="zh-CN" altLang="en-US"/>
           </a:p>
           <a:p>
             <a:pPr lvl="1"/>
@@ -5576,6 +5530,7 @@
               <a:rPr lang="zh-CN" altLang="en-US"/>
               <a:t>二级</a:t>
             </a:r>
+            <a:endParaRPr lang="zh-CN" altLang="en-US"/>
           </a:p>
           <a:p>
             <a:pPr lvl="2"/>
@@ -5583,6 +5538,7 @@
               <a:rPr lang="zh-CN" altLang="en-US"/>
               <a:t>三级</a:t>
             </a:r>
+            <a:endParaRPr lang="zh-CN" altLang="en-US"/>
           </a:p>
           <a:p>
             <a:pPr lvl="3"/>
@@ -5590,6 +5546,7 @@
               <a:rPr lang="zh-CN" altLang="en-US"/>
               <a:t>四级</a:t>
             </a:r>
+            <a:endParaRPr lang="zh-CN" altLang="en-US"/>
           </a:p>
           <a:p>
             <a:pPr lvl="4"/>
@@ -5597,6 +5554,7 @@
               <a:rPr lang="zh-CN" altLang="en-US"/>
               <a:t>五级</a:t>
             </a:r>
+            <a:endParaRPr lang="zh-CN" altLang="en-US"/>
           </a:p>
         </p:txBody>
       </p:sp>
@@ -5662,6 +5620,7 @@
               <a:rPr lang="zh-CN" altLang="en-US"/>
               <a:t>单击此处编辑母版文本样式</a:t>
             </a:r>
+            <a:endParaRPr lang="zh-CN" altLang="en-US"/>
           </a:p>
         </p:txBody>
       </p:sp>
@@ -5690,6 +5649,7 @@
               <a:rPr lang="zh-CN" altLang="en-US"/>
               <a:t>单击此处编辑母版文本样式</a:t>
             </a:r>
+            <a:endParaRPr lang="zh-CN" altLang="en-US"/>
           </a:p>
           <a:p>
             <a:pPr lvl="1"/>
@@ -5697,6 +5657,7 @@
               <a:rPr lang="zh-CN" altLang="en-US"/>
               <a:t>二级</a:t>
             </a:r>
+            <a:endParaRPr lang="zh-CN" altLang="en-US"/>
           </a:p>
           <a:p>
             <a:pPr lvl="2"/>
@@ -5704,6 +5665,7 @@
               <a:rPr lang="zh-CN" altLang="en-US"/>
               <a:t>三级</a:t>
             </a:r>
+            <a:endParaRPr lang="zh-CN" altLang="en-US"/>
           </a:p>
           <a:p>
             <a:pPr lvl="3"/>
@@ -5711,6 +5673,7 @@
               <a:rPr lang="zh-CN" altLang="en-US"/>
               <a:t>四级</a:t>
             </a:r>
+            <a:endParaRPr lang="zh-CN" altLang="en-US"/>
           </a:p>
           <a:p>
             <a:pPr lvl="4"/>
@@ -5718,6 +5681,7 @@
               <a:rPr lang="zh-CN" altLang="en-US"/>
               <a:t>五级</a:t>
             </a:r>
+            <a:endParaRPr lang="zh-CN" altLang="en-US"/>
           </a:p>
         </p:txBody>
       </p:sp>
@@ -5738,7 +5702,6 @@
           <a:p>
             <a:fld id="{BC5B3004-400C-43A5-AC96-1EF96FAF3383}" type="datetimeFigureOut">
               <a:rPr lang="zh-CN" altLang="en-US" smtClean="0"/>
-              <a:t>2026/6/10</a:t>
             </a:fld>
             <a:endParaRPr lang="zh-CN" altLang="en-US"/>
           </a:p>
@@ -5780,18 +5743,12 @@
           <a:p>
             <a:fld id="{2D2F81BE-ADF2-46EA-A947-332EC6F994A9}" type="slidenum">
               <a:rPr lang="zh-CN" altLang="en-US" smtClean="0"/>
-              <a:t>‹#›</a:t>
             </a:fld>
             <a:endParaRPr lang="zh-CN" altLang="en-US"/>
           </a:p>
         </p:txBody>
       </p:sp>
     </p:spTree>
-    <p:extLst>
-      <p:ext uri="{BB962C8B-B14F-4D97-AF65-F5344CB8AC3E}">
-        <p14:creationId xmlns:p14="http://schemas.microsoft.com/office/powerpoint/2010/main" val="3820803527"/>
-      </p:ext>
-    </p:extLst>
   </p:cSld>
   <p:clrMapOvr>
     <a:masterClrMapping/>
@@ -5835,6 +5792,7 @@
               <a:rPr lang="zh-CN" altLang="en-US"/>
               <a:t>单击此处编辑母版标题样式</a:t>
             </a:r>
+            <a:endParaRPr lang="zh-CN" altLang="en-US"/>
           </a:p>
         </p:txBody>
       </p:sp>
@@ -5855,7 +5813,6 @@
           <a:p>
             <a:fld id="{BC5B3004-400C-43A5-AC96-1EF96FAF3383}" type="datetimeFigureOut">
               <a:rPr lang="zh-CN" altLang="en-US" smtClean="0"/>
-              <a:t>2026/6/10</a:t>
             </a:fld>
             <a:endParaRPr lang="zh-CN" altLang="en-US"/>
           </a:p>
@@ -5897,18 +5854,12 @@
           <a:p>
             <a:fld id="{2D2F81BE-ADF2-46EA-A947-332EC6F994A9}" type="slidenum">
               <a:rPr lang="zh-CN" altLang="en-US" smtClean="0"/>
-              <a:t>‹#›</a:t>
             </a:fld>
             <a:endParaRPr lang="zh-CN" altLang="en-US"/>
           </a:p>
         </p:txBody>
       </p:sp>
     </p:spTree>
-    <p:extLst>
-      <p:ext uri="{BB962C8B-B14F-4D97-AF65-F5344CB8AC3E}">
-        <p14:creationId xmlns:p14="http://schemas.microsoft.com/office/powerpoint/2010/main" val="3457095690"/>
-      </p:ext>
-    </p:extLst>
   </p:cSld>
   <p:clrMapOvr>
     <a:masterClrMapping/>
@@ -5950,7 +5901,6 @@
           <a:p>
             <a:fld id="{BC5B3004-400C-43A5-AC96-1EF96FAF3383}" type="datetimeFigureOut">
               <a:rPr lang="zh-CN" altLang="en-US" smtClean="0"/>
-              <a:t>2026/6/10</a:t>
             </a:fld>
             <a:endParaRPr lang="zh-CN" altLang="en-US"/>
           </a:p>
@@ -5992,18 +5942,12 @@
           <a:p>
             <a:fld id="{2D2F81BE-ADF2-46EA-A947-332EC6F994A9}" type="slidenum">
               <a:rPr lang="zh-CN" altLang="en-US" smtClean="0"/>
-              <a:t>‹#›</a:t>
             </a:fld>
             <a:endParaRPr lang="zh-CN" altLang="en-US"/>
           </a:p>
         </p:txBody>
       </p:sp>
     </p:spTree>
-    <p:extLst>
-      <p:ext uri="{BB962C8B-B14F-4D97-AF65-F5344CB8AC3E}">
-        <p14:creationId xmlns:p14="http://schemas.microsoft.com/office/powerpoint/2010/main" val="1022952699"/>
-      </p:ext>
-    </p:extLst>
   </p:cSld>
   <p:clrMapOvr>
     <a:masterClrMapping/>
@@ -6012,7 +5956,7 @@
 </file>
 
 <file path=ppt/slideLayouts/slideLayout2.xml><?xml version="1.0" encoding="utf-8"?>
-<p:sldLayout xmlns:a="http://schemas.openxmlformats.org/drawingml/2006/main" xmlns:r="http://schemas.openxmlformats.org/officeDocument/2006/relationships" xmlns:p="http://schemas.openxmlformats.org/presentationml/2006/main" matchingName="标题和内容" type="obj">
+<p:sldLayout xmlns:a="http://schemas.openxmlformats.org/drawingml/2006/main" xmlns:r="http://schemas.openxmlformats.org/officeDocument/2006/relationships" xmlns:p="http://schemas.openxmlformats.org/presentationml/2006/main" type="obj" matchingName="标题和内容">
   <p:cSld name="OBJECT">
     <p:spTree>
       <p:nvGrpSpPr>
@@ -6162,9 +6106,7 @@
               <a:defRPr/>
             </a:lvl9pPr>
           </a:lstStyle>
-          <a:p>
-            <a:endParaRPr/>
-          </a:p>
+          <a:p/>
         </p:txBody>
       </p:sp>
       <p:sp>
@@ -6349,9 +6291,7 @@
               <a:defRPr/>
             </a:lvl9pPr>
           </a:lstStyle>
-          <a:p>
-            <a:endParaRPr/>
-          </a:p>
+          <a:p/>
         </p:txBody>
       </p:sp>
       <p:sp>
@@ -6482,9 +6422,7 @@
               <a:defRPr/>
             </a:lvl9pPr>
           </a:lstStyle>
-          <a:p>
-            <a:endParaRPr/>
-          </a:p>
+          <a:p/>
         </p:txBody>
       </p:sp>
       <p:sp>
@@ -6615,9 +6553,7 @@
               <a:defRPr/>
             </a:lvl9pPr>
           </a:lstStyle>
-          <a:p>
-            <a:endParaRPr/>
-          </a:p>
+          <a:p/>
         </p:txBody>
       </p:sp>
       <p:sp>
@@ -6724,9 +6660,8 @@
             </a:pPr>
             <a:fld id="{00000000-1234-1234-1234-123412341234}" type="slidenum">
               <a:rPr lang="zh-CN"/>
-              <a:t>‹#›</a:t>
             </a:fld>
-            <a:endParaRPr/>
+            <a:endParaRPr lang="zh-CN"/>
           </a:p>
         </p:txBody>
       </p:sp>
@@ -6783,6 +6718,7 @@
               <a:rPr lang="zh-CN" altLang="en-US"/>
               <a:t>单击此处编辑母版标题样式</a:t>
             </a:r>
+            <a:endParaRPr lang="zh-CN" altLang="en-US"/>
           </a:p>
         </p:txBody>
       </p:sp>
@@ -6839,6 +6775,7 @@
               <a:rPr lang="zh-CN" altLang="en-US"/>
               <a:t>单击此处编辑母版文本样式</a:t>
             </a:r>
+            <a:endParaRPr lang="zh-CN" altLang="en-US"/>
           </a:p>
           <a:p>
             <a:pPr lvl="1"/>
@@ -6846,6 +6783,7 @@
               <a:rPr lang="zh-CN" altLang="en-US"/>
               <a:t>二级</a:t>
             </a:r>
+            <a:endParaRPr lang="zh-CN" altLang="en-US"/>
           </a:p>
           <a:p>
             <a:pPr lvl="2"/>
@@ -6853,6 +6791,7 @@
               <a:rPr lang="zh-CN" altLang="en-US"/>
               <a:t>三级</a:t>
             </a:r>
+            <a:endParaRPr lang="zh-CN" altLang="en-US"/>
           </a:p>
           <a:p>
             <a:pPr lvl="3"/>
@@ -6860,6 +6799,7 @@
               <a:rPr lang="zh-CN" altLang="en-US"/>
               <a:t>四级</a:t>
             </a:r>
+            <a:endParaRPr lang="zh-CN" altLang="en-US"/>
           </a:p>
           <a:p>
             <a:pPr lvl="4"/>
@@ -6867,6 +6807,7 @@
               <a:rPr lang="zh-CN" altLang="en-US"/>
               <a:t>五级</a:t>
             </a:r>
+            <a:endParaRPr lang="zh-CN" altLang="en-US"/>
           </a:p>
         </p:txBody>
       </p:sp>
@@ -6932,6 +6873,7 @@
               <a:rPr lang="zh-CN" altLang="en-US"/>
               <a:t>单击此处编辑母版文本样式</a:t>
             </a:r>
+            <a:endParaRPr lang="zh-CN" altLang="en-US"/>
           </a:p>
         </p:txBody>
       </p:sp>
@@ -6952,7 +6894,6 @@
           <a:p>
             <a:fld id="{BC5B3004-400C-43A5-AC96-1EF96FAF3383}" type="datetimeFigureOut">
               <a:rPr lang="zh-CN" altLang="en-US" smtClean="0"/>
-              <a:t>2026/6/10</a:t>
             </a:fld>
             <a:endParaRPr lang="zh-CN" altLang="en-US"/>
           </a:p>
@@ -6994,18 +6935,12 @@
           <a:p>
             <a:fld id="{2D2F81BE-ADF2-46EA-A947-332EC6F994A9}" type="slidenum">
               <a:rPr lang="zh-CN" altLang="en-US" smtClean="0"/>
-              <a:t>‹#›</a:t>
             </a:fld>
             <a:endParaRPr lang="zh-CN" altLang="en-US"/>
           </a:p>
         </p:txBody>
       </p:sp>
     </p:spTree>
-    <p:extLst>
-      <p:ext uri="{BB962C8B-B14F-4D97-AF65-F5344CB8AC3E}">
-        <p14:creationId xmlns:p14="http://schemas.microsoft.com/office/powerpoint/2010/main" val="2021312931"/>
-      </p:ext>
-    </p:extLst>
   </p:cSld>
   <p:clrMapOvr>
     <a:masterClrMapping/>
@@ -7058,6 +6993,7 @@
               <a:rPr lang="zh-CN" altLang="en-US"/>
               <a:t>单击此处编辑母版标题样式</a:t>
             </a:r>
+            <a:endParaRPr lang="zh-CN" altLang="en-US"/>
           </a:p>
         </p:txBody>
       </p:sp>
@@ -7184,6 +7120,7 @@
               <a:rPr lang="zh-CN" altLang="en-US"/>
               <a:t>单击此处编辑母版文本样式</a:t>
             </a:r>
+            <a:endParaRPr lang="zh-CN" altLang="en-US"/>
           </a:p>
         </p:txBody>
       </p:sp>
@@ -7204,7 +7141,6 @@
           <a:p>
             <a:fld id="{BC5B3004-400C-43A5-AC96-1EF96FAF3383}" type="datetimeFigureOut">
               <a:rPr lang="zh-CN" altLang="en-US" smtClean="0"/>
-              <a:t>2026/6/10</a:t>
             </a:fld>
             <a:endParaRPr lang="zh-CN" altLang="en-US"/>
           </a:p>
@@ -7246,18 +7182,12 @@
           <a:p>
             <a:fld id="{2D2F81BE-ADF2-46EA-A947-332EC6F994A9}" type="slidenum">
               <a:rPr lang="zh-CN" altLang="en-US" smtClean="0"/>
-              <a:t>‹#›</a:t>
             </a:fld>
             <a:endParaRPr lang="zh-CN" altLang="en-US"/>
           </a:p>
         </p:txBody>
       </p:sp>
     </p:spTree>
-    <p:extLst>
-      <p:ext uri="{BB962C8B-B14F-4D97-AF65-F5344CB8AC3E}">
-        <p14:creationId xmlns:p14="http://schemas.microsoft.com/office/powerpoint/2010/main" val="623759258"/>
-      </p:ext>
-    </p:extLst>
   </p:cSld>
   <p:clrMapOvr>
     <a:masterClrMapping/>
@@ -7301,6 +7231,7 @@
               <a:rPr lang="zh-CN" altLang="en-US"/>
               <a:t>单击此处编辑母版标题样式</a:t>
             </a:r>
+            <a:endParaRPr lang="zh-CN" altLang="en-US"/>
           </a:p>
         </p:txBody>
       </p:sp>
@@ -7324,6 +7255,7 @@
               <a:rPr lang="zh-CN" altLang="en-US"/>
               <a:t>单击此处编辑母版文本样式</a:t>
             </a:r>
+            <a:endParaRPr lang="zh-CN" altLang="en-US"/>
           </a:p>
           <a:p>
             <a:pPr lvl="1"/>
@@ -7331,6 +7263,7 @@
               <a:rPr lang="zh-CN" altLang="en-US"/>
               <a:t>二级</a:t>
             </a:r>
+            <a:endParaRPr lang="zh-CN" altLang="en-US"/>
           </a:p>
           <a:p>
             <a:pPr lvl="2"/>
@@ -7338,6 +7271,7 @@
               <a:rPr lang="zh-CN" altLang="en-US"/>
               <a:t>三级</a:t>
             </a:r>
+            <a:endParaRPr lang="zh-CN" altLang="en-US"/>
           </a:p>
           <a:p>
             <a:pPr lvl="3"/>
@@ -7345,6 +7279,7 @@
               <a:rPr lang="zh-CN" altLang="en-US"/>
               <a:t>四级</a:t>
             </a:r>
+            <a:endParaRPr lang="zh-CN" altLang="en-US"/>
           </a:p>
           <a:p>
             <a:pPr lvl="4"/>
@@ -7352,6 +7287,7 @@
               <a:rPr lang="zh-CN" altLang="en-US"/>
               <a:t>五级</a:t>
             </a:r>
+            <a:endParaRPr lang="zh-CN" altLang="en-US"/>
           </a:p>
         </p:txBody>
       </p:sp>
@@ -7372,7 +7308,6 @@
           <a:p>
             <a:fld id="{BC5B3004-400C-43A5-AC96-1EF96FAF3383}" type="datetimeFigureOut">
               <a:rPr lang="zh-CN" altLang="en-US" smtClean="0"/>
-              <a:t>2026/6/10</a:t>
             </a:fld>
             <a:endParaRPr lang="zh-CN" altLang="en-US"/>
           </a:p>
@@ -7414,18 +7349,12 @@
           <a:p>
             <a:fld id="{2D2F81BE-ADF2-46EA-A947-332EC6F994A9}" type="slidenum">
               <a:rPr lang="zh-CN" altLang="en-US" smtClean="0"/>
-              <a:t>‹#›</a:t>
             </a:fld>
             <a:endParaRPr lang="zh-CN" altLang="en-US"/>
           </a:p>
         </p:txBody>
       </p:sp>
     </p:spTree>
-    <p:extLst>
-      <p:ext uri="{BB962C8B-B14F-4D97-AF65-F5344CB8AC3E}">
-        <p14:creationId xmlns:p14="http://schemas.microsoft.com/office/powerpoint/2010/main" val="1042550172"/>
-      </p:ext>
-    </p:extLst>
   </p:cSld>
   <p:clrMapOvr>
     <a:masterClrMapping/>
@@ -7474,6 +7403,7 @@
               <a:rPr lang="zh-CN" altLang="en-US"/>
               <a:t>单击此处编辑母版标题样式</a:t>
             </a:r>
+            <a:endParaRPr lang="zh-CN" altLang="en-US"/>
           </a:p>
         </p:txBody>
       </p:sp>
@@ -7502,6 +7432,7 @@
               <a:rPr lang="zh-CN" altLang="en-US"/>
               <a:t>单击此处编辑母版文本样式</a:t>
             </a:r>
+            <a:endParaRPr lang="zh-CN" altLang="en-US"/>
           </a:p>
           <a:p>
             <a:pPr lvl="1"/>
@@ -7509,6 +7440,7 @@
               <a:rPr lang="zh-CN" altLang="en-US"/>
               <a:t>二级</a:t>
             </a:r>
+            <a:endParaRPr lang="zh-CN" altLang="en-US"/>
           </a:p>
           <a:p>
             <a:pPr lvl="2"/>
@@ -7516,6 +7448,7 @@
               <a:rPr lang="zh-CN" altLang="en-US"/>
               <a:t>三级</a:t>
             </a:r>
+            <a:endParaRPr lang="zh-CN" altLang="en-US"/>
           </a:p>
           <a:p>
             <a:pPr lvl="3"/>
@@ -7523,6 +7456,7 @@
               <a:rPr lang="zh-CN" altLang="en-US"/>
               <a:t>四级</a:t>
             </a:r>
+            <a:endParaRPr lang="zh-CN" altLang="en-US"/>
           </a:p>
           <a:p>
             <a:pPr lvl="4"/>
@@ -7530,6 +7464,7 @@
               <a:rPr lang="zh-CN" altLang="en-US"/>
               <a:t>五级</a:t>
             </a:r>
+            <a:endParaRPr lang="zh-CN" altLang="en-US"/>
           </a:p>
         </p:txBody>
       </p:sp>
@@ -7550,7 +7485,6 @@
           <a:p>
             <a:fld id="{BC5B3004-400C-43A5-AC96-1EF96FAF3383}" type="datetimeFigureOut">
               <a:rPr lang="zh-CN" altLang="en-US" smtClean="0"/>
-              <a:t>2026/6/10</a:t>
             </a:fld>
             <a:endParaRPr lang="zh-CN" altLang="en-US"/>
           </a:p>
@@ -7592,18 +7526,12 @@
           <a:p>
             <a:fld id="{2D2F81BE-ADF2-46EA-A947-332EC6F994A9}" type="slidenum">
               <a:rPr lang="zh-CN" altLang="en-US" smtClean="0"/>
-              <a:t>‹#›</a:t>
             </a:fld>
             <a:endParaRPr lang="zh-CN" altLang="en-US"/>
           </a:p>
         </p:txBody>
       </p:sp>
     </p:spTree>
-    <p:extLst>
-      <p:ext uri="{BB962C8B-B14F-4D97-AF65-F5344CB8AC3E}">
-        <p14:creationId xmlns:p14="http://schemas.microsoft.com/office/powerpoint/2010/main" val="3837980383"/>
-      </p:ext>
-    </p:extLst>
   </p:cSld>
   <p:clrMapOvr>
     <a:masterClrMapping/>
@@ -7647,6 +7575,7 @@
               <a:rPr lang="en-US"/>
               <a:t>Title</a:t>
             </a:r>
+            <a:endParaRPr lang="en-US"/>
           </a:p>
         </p:txBody>
       </p:sp>
@@ -7670,6 +7599,7 @@
               <a:rPr lang="en-US"/>
               <a:t>Text</a:t>
             </a:r>
+            <a:endParaRPr lang="en-US"/>
           </a:p>
           <a:p>
             <a:pPr lvl="1"/>
@@ -7677,6 +7607,7 @@
               <a:rPr lang="en-US"/>
               <a:t>Second level</a:t>
             </a:r>
+            <a:endParaRPr lang="en-US"/>
           </a:p>
           <a:p>
             <a:pPr lvl="2"/>
@@ -7684,6 +7615,7 @@
               <a:rPr lang="en-US"/>
               <a:t>Third level</a:t>
             </a:r>
+            <a:endParaRPr lang="en-US"/>
           </a:p>
           <a:p>
             <a:pPr lvl="3"/>
@@ -7691,6 +7623,7 @@
               <a:rPr lang="en-US"/>
               <a:t>Fourth level</a:t>
             </a:r>
+            <a:endParaRPr lang="en-US"/>
           </a:p>
           <a:p>
             <a:pPr lvl="4"/>
@@ -7698,6 +7631,7 @@
               <a:rPr lang="en-US"/>
               <a:t>Fifth level</a:t>
             </a:r>
+            <a:endParaRPr lang="en-US"/>
           </a:p>
         </p:txBody>
       </p:sp>
@@ -7718,7 +7652,6 @@
           <a:p>
             <a:fld id="{C16525B2-4347-4F72-BAF7-76B19438D329}" type="datetimeFigureOut">
               <a:rPr lang="en-US" smtClean="0"/>
-              <a:t>6/10/2026</a:t>
             </a:fld>
             <a:endParaRPr lang="en-US"/>
           </a:p>
@@ -7760,18 +7693,12 @@
           <a:p>
             <a:fld id="{80F073CC-40D5-4B23-8DF0-9BD0A0C12F2C}" type="slidenum">
               <a:rPr lang="en-US" smtClean="0"/>
-              <a:t>‹#›</a:t>
             </a:fld>
             <a:endParaRPr lang="en-US"/>
           </a:p>
         </p:txBody>
       </p:sp>
     </p:spTree>
-    <p:extLst>
-      <p:ext uri="{BB962C8B-B14F-4D97-AF65-F5344CB8AC3E}">
-        <p14:creationId xmlns:p14="http://schemas.microsoft.com/office/powerpoint/2010/main" val="1745366633"/>
-      </p:ext>
-    </p:extLst>
   </p:cSld>
   <p:clrMapOvr>
     <a:masterClrMapping/>
@@ -7919,11 +7846,11 @@
                 </a:solidFill>
                 <a:latin typeface="微软雅黑" panose="020B0503020204020204" pitchFamily="34" charset="-122"/>
                 <a:ea typeface="微软雅黑" panose="020B0503020204020204" pitchFamily="34" charset="-122"/>
-                <a:cs typeface="Arial" panose="02080604020202020204" pitchFamily="34" charset="0"/>
+                <a:cs typeface="Arial" panose="020B0604020202090204" pitchFamily="34" charset="0"/>
               </a:defRPr>
             </a:lvl1pPr>
             <a:lvl2pPr marL="525780" indent="-170815">
-              <a:buFont typeface="Arial" panose="02080604020202020204" pitchFamily="34" charset="0"/>
+              <a:buFont typeface="Arial" panose="020B0604020202090204" pitchFamily="34" charset="0"/>
               <a:buChar char="•"/>
               <a:tabLst>
                 <a:tab pos="1207770" algn="ctr"/>
@@ -7931,7 +7858,7 @@
               <a:defRPr sz="1300" baseline="0"/>
             </a:lvl2pPr>
             <a:lvl3pPr marL="525780" indent="-170815">
-              <a:buFont typeface="Arial" panose="02080604020202020204" pitchFamily="34" charset="0"/>
+              <a:buFont typeface="Arial" panose="020B0604020202090204" pitchFamily="34" charset="0"/>
               <a:buChar char="•"/>
               <a:tabLst>
                 <a:tab pos="1207770" algn="ctr"/>
@@ -7939,7 +7866,7 @@
               <a:defRPr sz="1300" baseline="0"/>
             </a:lvl3pPr>
             <a:lvl4pPr marL="525780" indent="-170815">
-              <a:buFont typeface="Arial" panose="02080604020202020204" pitchFamily="34" charset="0"/>
+              <a:buFont typeface="Arial" panose="020B0604020202090204" pitchFamily="34" charset="0"/>
               <a:buChar char="•"/>
               <a:tabLst>
                 <a:tab pos="1207770" algn="ctr"/>
@@ -7947,7 +7874,7 @@
               <a:defRPr sz="1300" baseline="0"/>
             </a:lvl4pPr>
             <a:lvl5pPr marL="525780" indent="-170815">
-              <a:buFont typeface="Arial" panose="02080604020202020204" pitchFamily="34" charset="0"/>
+              <a:buFont typeface="Arial" panose="020B0604020202090204" pitchFamily="34" charset="0"/>
               <a:buChar char="•"/>
               <a:tabLst>
                 <a:tab pos="1207770" algn="ctr"/>
@@ -7966,11 +7893,6 @@
         </p:txBody>
       </p:sp>
     </p:spTree>
-    <p:extLst>
-      <p:ext uri="{BB962C8B-B14F-4D97-AF65-F5344CB8AC3E}">
-        <p14:creationId xmlns:p14="http://schemas.microsoft.com/office/powerpoint/2010/main" val="655467074"/>
-      </p:ext>
-    </p:extLst>
   </p:cSld>
   <p:clrMapOvr>
     <a:masterClrMapping/>
@@ -8174,11 +8096,6 @@
         </p:txBody>
       </p:sp>
     </p:spTree>
-    <p:extLst>
-      <p:ext uri="{BB962C8B-B14F-4D97-AF65-F5344CB8AC3E}">
-        <p14:creationId xmlns:p14="http://schemas.microsoft.com/office/powerpoint/2010/main" val="1544929490"/>
-      </p:ext>
-    </p:extLst>
   </p:cSld>
   <p:clrMapOvr>
     <a:masterClrMapping/>
@@ -8243,15 +8160,16 @@
               </a:rPr>
               <a:t>Thank you.</a:t>
             </a:r>
+            <a:endParaRPr lang="en-US" sz="4800" dirty="0">
+              <a:solidFill>
+                <a:schemeClr val="tx1"/>
+              </a:solidFill>
+              <a:latin typeface="微软雅黑" panose="020B0503020204020204" pitchFamily="34" charset="-122"/>
+            </a:endParaRPr>
           </a:p>
         </p:txBody>
       </p:sp>
     </p:spTree>
-    <p:extLst>
-      <p:ext uri="{BB962C8B-B14F-4D97-AF65-F5344CB8AC3E}">
-        <p14:creationId xmlns:p14="http://schemas.microsoft.com/office/powerpoint/2010/main" val="3223685785"/>
-      </p:ext>
-    </p:extLst>
   </p:cSld>
   <p:clrMapOvr>
     <a:masterClrMapping/>
@@ -8260,7 +8178,7 @@
 </file>
 
 <file path=ppt/slideLayouts/slideLayout3.xml><?xml version="1.0" encoding="utf-8"?>
-<p:sldLayout xmlns:a="http://schemas.openxmlformats.org/drawingml/2006/main" xmlns:r="http://schemas.openxmlformats.org/officeDocument/2006/relationships" xmlns:p="http://schemas.openxmlformats.org/presentationml/2006/main" matchingName="节标题" type="secHead">
+<p:sldLayout xmlns:a="http://schemas.openxmlformats.org/drawingml/2006/main" xmlns:r="http://schemas.openxmlformats.org/officeDocument/2006/relationships" xmlns:p="http://schemas.openxmlformats.org/presentationml/2006/main" type="secHead" matchingName="节标题">
   <p:cSld name="SECTION_HEADER">
     <p:spTree>
       <p:nvGrpSpPr>
@@ -8318,7 +8236,7 @@
                 <a:schemeClr val="dk1"/>
               </a:buClr>
               <a:buSzPts val="4500"/>
-              <a:buFont typeface="Arial"/>
+              <a:buFont typeface="Arial" panose="020B0604020202090204"/>
               <a:buNone/>
               <a:defRPr sz="4500"/>
             </a:lvl1pPr>
@@ -8411,9 +8329,7 @@
               <a:defRPr/>
             </a:lvl9pPr>
           </a:lstStyle>
-          <a:p>
-            <a:endParaRPr/>
-          </a:p>
+          <a:p/>
         </p:txBody>
       </p:sp>
       <p:sp>
@@ -8634,9 +8550,7 @@
               </a:defRPr>
             </a:lvl9pPr>
           </a:lstStyle>
-          <a:p>
-            <a:endParaRPr/>
-          </a:p>
+          <a:p/>
         </p:txBody>
       </p:sp>
       <p:sp>
@@ -8767,9 +8681,7 @@
               <a:defRPr/>
             </a:lvl9pPr>
           </a:lstStyle>
-          <a:p>
-            <a:endParaRPr/>
-          </a:p>
+          <a:p/>
         </p:txBody>
       </p:sp>
       <p:sp>
@@ -8900,9 +8812,7 @@
               <a:defRPr/>
             </a:lvl9pPr>
           </a:lstStyle>
-          <a:p>
-            <a:endParaRPr/>
-          </a:p>
+          <a:p/>
         </p:txBody>
       </p:sp>
       <p:sp>
@@ -9009,9 +8919,8 @@
             </a:pPr>
             <a:fld id="{00000000-1234-1234-1234-123412341234}" type="slidenum">
               <a:rPr lang="zh-CN"/>
-              <a:t>‹#›</a:t>
             </a:fld>
-            <a:endParaRPr/>
+            <a:endParaRPr lang="zh-CN"/>
           </a:p>
         </p:txBody>
       </p:sp>
@@ -9024,7 +8933,7 @@
 </file>
 
 <file path=ppt/slideLayouts/slideLayout4.xml><?xml version="1.0" encoding="utf-8"?>
-<p:sldLayout xmlns:a="http://schemas.openxmlformats.org/drawingml/2006/main" xmlns:r="http://schemas.openxmlformats.org/officeDocument/2006/relationships" xmlns:p="http://schemas.openxmlformats.org/presentationml/2006/main" matchingName="两栏内容" type="twoObj">
+<p:sldLayout xmlns:a="http://schemas.openxmlformats.org/drawingml/2006/main" xmlns:r="http://schemas.openxmlformats.org/officeDocument/2006/relationships" xmlns:p="http://schemas.openxmlformats.org/presentationml/2006/main" type="twoObj" matchingName="两栏内容">
   <p:cSld name="TWO_OBJECTS">
     <p:spTree>
       <p:nvGrpSpPr>
@@ -9174,9 +9083,7 @@
               <a:defRPr/>
             </a:lvl9pPr>
           </a:lstStyle>
-          <a:p>
-            <a:endParaRPr/>
-          </a:p>
+          <a:p/>
         </p:txBody>
       </p:sp>
       <p:sp>
@@ -9361,9 +9268,7 @@
               <a:defRPr/>
             </a:lvl9pPr>
           </a:lstStyle>
-          <a:p>
-            <a:endParaRPr/>
-          </a:p>
+          <a:p/>
         </p:txBody>
       </p:sp>
       <p:sp>
@@ -9548,9 +9453,7 @@
               <a:defRPr/>
             </a:lvl9pPr>
           </a:lstStyle>
-          <a:p>
-            <a:endParaRPr/>
-          </a:p>
+          <a:p/>
         </p:txBody>
       </p:sp>
       <p:sp>
@@ -9681,9 +9584,7 @@
               <a:defRPr/>
             </a:lvl9pPr>
           </a:lstStyle>
-          <a:p>
-            <a:endParaRPr/>
-          </a:p>
+          <a:p/>
         </p:txBody>
       </p:sp>
       <p:sp>
@@ -9814,9 +9715,7 @@
               <a:defRPr/>
             </a:lvl9pPr>
           </a:lstStyle>
-          <a:p>
-            <a:endParaRPr/>
-          </a:p>
+          <a:p/>
         </p:txBody>
       </p:sp>
       <p:sp>
@@ -9923,9 +9822,8 @@
             </a:pPr>
             <a:fld id="{00000000-1234-1234-1234-123412341234}" type="slidenum">
               <a:rPr lang="zh-CN"/>
-              <a:t>‹#›</a:t>
             </a:fld>
-            <a:endParaRPr/>
+            <a:endParaRPr lang="zh-CN"/>
           </a:p>
         </p:txBody>
       </p:sp>
@@ -9938,7 +9836,7 @@
 </file>
 
 <file path=ppt/slideLayouts/slideLayout5.xml><?xml version="1.0" encoding="utf-8"?>
-<p:sldLayout xmlns:a="http://schemas.openxmlformats.org/drawingml/2006/main" xmlns:r="http://schemas.openxmlformats.org/officeDocument/2006/relationships" xmlns:p="http://schemas.openxmlformats.org/presentationml/2006/main" matchingName="比较" type="twoTxTwoObj">
+<p:sldLayout xmlns:a="http://schemas.openxmlformats.org/drawingml/2006/main" xmlns:r="http://schemas.openxmlformats.org/officeDocument/2006/relationships" xmlns:p="http://schemas.openxmlformats.org/presentationml/2006/main" type="twoTxTwoObj" matchingName="比较">
   <p:cSld name="TWO_OBJECTS_WITH_TEXT">
     <p:spTree>
       <p:nvGrpSpPr>
@@ -10088,9 +9986,7 @@
               <a:defRPr/>
             </a:lvl9pPr>
           </a:lstStyle>
-          <a:p>
-            <a:endParaRPr/>
-          </a:p>
+          <a:p/>
         </p:txBody>
       </p:sp>
       <p:sp>
@@ -10275,9 +10171,7 @@
               <a:defRPr sz="1200" b="1"/>
             </a:lvl9pPr>
           </a:lstStyle>
-          <a:p>
-            <a:endParaRPr/>
-          </a:p>
+          <a:p/>
         </p:txBody>
       </p:sp>
       <p:sp>
@@ -10462,9 +10356,7 @@
               <a:defRPr/>
             </a:lvl9pPr>
           </a:lstStyle>
-          <a:p>
-            <a:endParaRPr/>
-          </a:p>
+          <a:p/>
         </p:txBody>
       </p:sp>
       <p:sp>
@@ -10649,9 +10541,7 @@
               <a:defRPr sz="1200" b="1"/>
             </a:lvl9pPr>
           </a:lstStyle>
-          <a:p>
-            <a:endParaRPr/>
-          </a:p>
+          <a:p/>
         </p:txBody>
       </p:sp>
       <p:sp>
@@ -10836,9 +10726,7 @@
               <a:defRPr/>
             </a:lvl9pPr>
           </a:lstStyle>
-          <a:p>
-            <a:endParaRPr/>
-          </a:p>
+          <a:p/>
         </p:txBody>
       </p:sp>
       <p:sp>
@@ -10969,9 +10857,7 @@
               <a:defRPr/>
             </a:lvl9pPr>
           </a:lstStyle>
-          <a:p>
-            <a:endParaRPr/>
-          </a:p>
+          <a:p/>
         </p:txBody>
       </p:sp>
       <p:sp>
@@ -11102,9 +10988,7 @@
               <a:defRPr/>
             </a:lvl9pPr>
           </a:lstStyle>
-          <a:p>
-            <a:endParaRPr/>
-          </a:p>
+          <a:p/>
         </p:txBody>
       </p:sp>
       <p:sp>
@@ -11211,9 +11095,8 @@
             </a:pPr>
             <a:fld id="{00000000-1234-1234-1234-123412341234}" type="slidenum">
               <a:rPr lang="zh-CN"/>
-              <a:t>‹#›</a:t>
             </a:fld>
-            <a:endParaRPr/>
+            <a:endParaRPr lang="zh-CN"/>
           </a:p>
         </p:txBody>
       </p:sp>
@@ -11226,7 +11109,7 @@
 </file>
 
 <file path=ppt/slideLayouts/slideLayout6.xml><?xml version="1.0" encoding="utf-8"?>
-<p:sldLayout xmlns:a="http://schemas.openxmlformats.org/drawingml/2006/main" xmlns:r="http://schemas.openxmlformats.org/officeDocument/2006/relationships" xmlns:p="http://schemas.openxmlformats.org/presentationml/2006/main" matchingName="仅标题" type="titleOnly">
+<p:sldLayout xmlns:a="http://schemas.openxmlformats.org/drawingml/2006/main" xmlns:r="http://schemas.openxmlformats.org/officeDocument/2006/relationships" xmlns:p="http://schemas.openxmlformats.org/presentationml/2006/main" type="titleOnly" matchingName="仅标题">
   <p:cSld name="TITLE_ONLY">
     <p:spTree>
       <p:nvGrpSpPr>
@@ -11376,9 +11259,7 @@
               <a:defRPr/>
             </a:lvl9pPr>
           </a:lstStyle>
-          <a:p>
-            <a:endParaRPr/>
-          </a:p>
+          <a:p/>
         </p:txBody>
       </p:sp>
       <p:sp>
@@ -11509,9 +11390,7 @@
               <a:defRPr/>
             </a:lvl9pPr>
           </a:lstStyle>
-          <a:p>
-            <a:endParaRPr/>
-          </a:p>
+          <a:p/>
         </p:txBody>
       </p:sp>
       <p:sp>
@@ -11642,9 +11521,7 @@
               <a:defRPr/>
             </a:lvl9pPr>
           </a:lstStyle>
-          <a:p>
-            <a:endParaRPr/>
-          </a:p>
+          <a:p/>
         </p:txBody>
       </p:sp>
       <p:sp>
@@ -11751,9 +11628,8 @@
             </a:pPr>
             <a:fld id="{00000000-1234-1234-1234-123412341234}" type="slidenum">
               <a:rPr lang="zh-CN"/>
-              <a:t>‹#›</a:t>
             </a:fld>
-            <a:endParaRPr/>
+            <a:endParaRPr lang="zh-CN"/>
           </a:p>
         </p:txBody>
       </p:sp>
@@ -11766,7 +11642,7 @@
 </file>
 
 <file path=ppt/slideLayouts/slideLayout7.xml><?xml version="1.0" encoding="utf-8"?>
-<p:sldLayout xmlns:a="http://schemas.openxmlformats.org/drawingml/2006/main" xmlns:r="http://schemas.openxmlformats.org/officeDocument/2006/relationships" xmlns:p="http://schemas.openxmlformats.org/presentationml/2006/main" matchingName="空白" type="blank">
+<p:sldLayout xmlns:a="http://schemas.openxmlformats.org/drawingml/2006/main" xmlns:r="http://schemas.openxmlformats.org/officeDocument/2006/relationships" xmlns:p="http://schemas.openxmlformats.org/presentationml/2006/main" type="blank" matchingName="空白">
   <p:cSld name="BLANK">
     <p:spTree>
       <p:nvGrpSpPr>
@@ -11910,9 +11786,7 @@
               <a:defRPr/>
             </a:lvl9pPr>
           </a:lstStyle>
-          <a:p>
-            <a:endParaRPr/>
-          </a:p>
+          <a:p/>
         </p:txBody>
       </p:sp>
       <p:sp>
@@ -12043,9 +11917,7 @@
               <a:defRPr/>
             </a:lvl9pPr>
           </a:lstStyle>
-          <a:p>
-            <a:endParaRPr/>
-          </a:p>
+          <a:p/>
         </p:txBody>
       </p:sp>
       <p:sp>
@@ -12152,9 +12024,8 @@
             </a:pPr>
             <a:fld id="{00000000-1234-1234-1234-123412341234}" type="slidenum">
               <a:rPr lang="zh-CN"/>
-              <a:t>‹#›</a:t>
             </a:fld>
-            <a:endParaRPr/>
+            <a:endParaRPr lang="zh-CN"/>
           </a:p>
         </p:txBody>
       </p:sp>
@@ -12167,7 +12038,7 @@
 </file>
 
 <file path=ppt/slideLayouts/slideLayout8.xml><?xml version="1.0" encoding="utf-8"?>
-<p:sldLayout xmlns:a="http://schemas.openxmlformats.org/drawingml/2006/main" xmlns:r="http://schemas.openxmlformats.org/officeDocument/2006/relationships" xmlns:p="http://schemas.openxmlformats.org/presentationml/2006/main" matchingName="内容与标题" type="objTx">
+<p:sldLayout xmlns:a="http://schemas.openxmlformats.org/drawingml/2006/main" xmlns:r="http://schemas.openxmlformats.org/officeDocument/2006/relationships" xmlns:p="http://schemas.openxmlformats.org/presentationml/2006/main" type="objTx" matchingName="内容与标题">
   <p:cSld name="OBJECT_WITH_CAPTION_TEXT">
     <p:spTree>
       <p:nvGrpSpPr>
@@ -12225,7 +12096,7 @@
                 <a:schemeClr val="dk1"/>
               </a:buClr>
               <a:buSzPts val="2400"/>
-              <a:buFont typeface="Arial"/>
+              <a:buFont typeface="Arial" panose="020B0604020202090204"/>
               <a:buNone/>
               <a:defRPr sz="2400"/>
             </a:lvl1pPr>
@@ -12318,9 +12189,7 @@
               <a:defRPr/>
             </a:lvl9pPr>
           </a:lstStyle>
-          <a:p>
-            <a:endParaRPr/>
-          </a:p>
+          <a:p/>
         </p:txBody>
       </p:sp>
       <p:sp>
@@ -12505,9 +12374,7 @@
               <a:defRPr sz="1500"/>
             </a:lvl9pPr>
           </a:lstStyle>
-          <a:p>
-            <a:endParaRPr/>
-          </a:p>
+          <a:p/>
         </p:txBody>
       </p:sp>
       <p:sp>
@@ -12692,9 +12559,7 @@
               <a:defRPr sz="800"/>
             </a:lvl9pPr>
           </a:lstStyle>
-          <a:p>
-            <a:endParaRPr/>
-          </a:p>
+          <a:p/>
         </p:txBody>
       </p:sp>
       <p:sp>
@@ -12825,9 +12690,7 @@
               <a:defRPr/>
             </a:lvl9pPr>
           </a:lstStyle>
-          <a:p>
-            <a:endParaRPr/>
-          </a:p>
+          <a:p/>
         </p:txBody>
       </p:sp>
       <p:sp>
@@ -12958,9 +12821,7 @@
               <a:defRPr/>
             </a:lvl9pPr>
           </a:lstStyle>
-          <a:p>
-            <a:endParaRPr/>
-          </a:p>
+          <a:p/>
         </p:txBody>
       </p:sp>
       <p:sp>
@@ -13067,9 +12928,8 @@
             </a:pPr>
             <a:fld id="{00000000-1234-1234-1234-123412341234}" type="slidenum">
               <a:rPr lang="zh-CN"/>
-              <a:t>‹#›</a:t>
             </a:fld>
-            <a:endParaRPr/>
+            <a:endParaRPr lang="zh-CN"/>
           </a:p>
         </p:txBody>
       </p:sp>
@@ -13082,7 +12942,7 @@
 </file>
 
 <file path=ppt/slideLayouts/slideLayout9.xml><?xml version="1.0" encoding="utf-8"?>
-<p:sldLayout xmlns:a="http://schemas.openxmlformats.org/drawingml/2006/main" xmlns:r="http://schemas.openxmlformats.org/officeDocument/2006/relationships" xmlns:p="http://schemas.openxmlformats.org/presentationml/2006/main" matchingName="图片与标题" type="picTx">
+<p:sldLayout xmlns:a="http://schemas.openxmlformats.org/drawingml/2006/main" xmlns:r="http://schemas.openxmlformats.org/officeDocument/2006/relationships" xmlns:p="http://schemas.openxmlformats.org/presentationml/2006/main" type="picTx" matchingName="图片与标题">
   <p:cSld name="PICTURE_WITH_CAPTION_TEXT">
     <p:spTree>
       <p:nvGrpSpPr>
@@ -13140,7 +13000,7 @@
                 <a:schemeClr val="dk1"/>
               </a:buClr>
               <a:buSzPts val="2400"/>
-              <a:buFont typeface="Arial"/>
+              <a:buFont typeface="Arial" panose="020B0604020202090204"/>
               <a:buNone/>
               <a:defRPr sz="2400"/>
             </a:lvl1pPr>
@@ -13233,9 +13093,7 @@
               <a:defRPr/>
             </a:lvl9pPr>
           </a:lstStyle>
-          <a:p>
-            <a:endParaRPr/>
-          </a:p>
+          <a:p/>
         </p:txBody>
       </p:sp>
       <p:sp>
@@ -13444,9 +13302,7 @@
               <a:defRPr sz="800"/>
             </a:lvl9pPr>
           </a:lstStyle>
-          <a:p>
-            <a:endParaRPr/>
-          </a:p>
+          <a:p/>
         </p:txBody>
       </p:sp>
       <p:sp>
@@ -13577,9 +13433,7 @@
               <a:defRPr/>
             </a:lvl9pPr>
           </a:lstStyle>
-          <a:p>
-            <a:endParaRPr/>
-          </a:p>
+          <a:p/>
         </p:txBody>
       </p:sp>
       <p:sp>
@@ -13710,9 +13564,7 @@
               <a:defRPr/>
             </a:lvl9pPr>
           </a:lstStyle>
-          <a:p>
-            <a:endParaRPr/>
-          </a:p>
+          <a:p/>
         </p:txBody>
       </p:sp>
       <p:sp>
@@ -13819,9 +13671,8 @@
             </a:pPr>
             <a:fld id="{00000000-1234-1234-1234-123412341234}" type="slidenum">
               <a:rPr lang="zh-CN"/>
-              <a:t>‹#›</a:t>
             </a:fld>
-            <a:endParaRPr/>
+            <a:endParaRPr lang="zh-CN"/>
           </a:p>
         </p:txBody>
       </p:sp>
@@ -13900,16 +13751,16 @@
                 <a:schemeClr val="dk1"/>
               </a:buClr>
               <a:buSzPts val="3300"/>
-              <a:buFont typeface="Arial"/>
+              <a:buFont typeface="Arial" panose="020B0604020202090204"/>
               <a:buNone/>
               <a:defRPr sz="3300" b="0" i="0" u="none" strike="noStrike" cap="none">
                 <a:solidFill>
                   <a:schemeClr val="dk1"/>
                 </a:solidFill>
-                <a:latin typeface="Arial"/>
-                <a:ea typeface="Arial"/>
-                <a:cs typeface="Arial"/>
-                <a:sym typeface="Arial"/>
+                <a:latin typeface="Arial" panose="020B0604020202090204"/>
+                <a:ea typeface="Arial" panose="020B0604020202090204"/>
+                <a:cs typeface="Arial" panose="020B0604020202090204"/>
+                <a:sym typeface="Arial" panose="020B0604020202090204"/>
               </a:defRPr>
             </a:lvl1pPr>
             <a:lvl2pPr lvl="1">
@@ -14001,9 +13852,7 @@
               <a:defRPr sz="1400"/>
             </a:lvl9pPr>
           </a:lstStyle>
-          <a:p>
-            <a:endParaRPr/>
-          </a:p>
+          <a:p/>
         </p:txBody>
       </p:sp>
       <p:sp>
@@ -14048,16 +13897,16 @@
                 <a:schemeClr val="dk1"/>
               </a:buClr>
               <a:buSzPts val="2100"/>
-              <a:buFont typeface="Arial"/>
+              <a:buFont typeface="Arial" panose="020B0604020202090204"/>
               <a:buChar char="•"/>
               <a:defRPr sz="2100" b="0" i="0" u="none" strike="noStrike" cap="none">
                 <a:solidFill>
                   <a:schemeClr val="dk1"/>
                 </a:solidFill>
-                <a:latin typeface="Arial"/>
-                <a:ea typeface="Arial"/>
-                <a:cs typeface="Arial"/>
-                <a:sym typeface="Arial"/>
+                <a:latin typeface="Arial" panose="020B0604020202090204"/>
+                <a:ea typeface="Arial" panose="020B0604020202090204"/>
+                <a:cs typeface="Arial" panose="020B0604020202090204"/>
+                <a:sym typeface="Arial" panose="020B0604020202090204"/>
               </a:defRPr>
             </a:lvl1pPr>
             <a:lvl2pPr marL="914400" marR="0" lvl="1" indent="-342900" algn="l" rtl="0">
@@ -14074,16 +13923,16 @@
                 <a:schemeClr val="dk1"/>
               </a:buClr>
               <a:buSzPts val="1800"/>
-              <a:buFont typeface="Arial"/>
+              <a:buFont typeface="Arial" panose="020B0604020202090204"/>
               <a:buChar char="•"/>
               <a:defRPr sz="1800" b="0" i="0" u="none" strike="noStrike" cap="none">
                 <a:solidFill>
                   <a:schemeClr val="dk1"/>
                 </a:solidFill>
-                <a:latin typeface="Arial"/>
-                <a:ea typeface="Arial"/>
-                <a:cs typeface="Arial"/>
-                <a:sym typeface="Arial"/>
+                <a:latin typeface="Arial" panose="020B0604020202090204"/>
+                <a:ea typeface="Arial" panose="020B0604020202090204"/>
+                <a:cs typeface="Arial" panose="020B0604020202090204"/>
+                <a:sym typeface="Arial" panose="020B0604020202090204"/>
               </a:defRPr>
             </a:lvl2pPr>
             <a:lvl3pPr marL="1371600" marR="0" lvl="2" indent="-323850" algn="l" rtl="0">
@@ -14100,16 +13949,16 @@
                 <a:schemeClr val="dk1"/>
               </a:buClr>
               <a:buSzPts val="1500"/>
-              <a:buFont typeface="Arial"/>
+              <a:buFont typeface="Arial" panose="020B0604020202090204"/>
               <a:buChar char="•"/>
               <a:defRPr sz="1500" b="0" i="0" u="none" strike="noStrike" cap="none">
                 <a:solidFill>
                   <a:schemeClr val="dk1"/>
                 </a:solidFill>
-                <a:latin typeface="Arial"/>
-                <a:ea typeface="Arial"/>
-                <a:cs typeface="Arial"/>
-                <a:sym typeface="Arial"/>
+                <a:latin typeface="Arial" panose="020B0604020202090204"/>
+                <a:ea typeface="Arial" panose="020B0604020202090204"/>
+                <a:cs typeface="Arial" panose="020B0604020202090204"/>
+                <a:sym typeface="Arial" panose="020B0604020202090204"/>
               </a:defRPr>
             </a:lvl3pPr>
             <a:lvl4pPr marL="1828800" marR="0" lvl="3" indent="-317500" algn="l" rtl="0">
@@ -14126,16 +13975,16 @@
                 <a:schemeClr val="dk1"/>
               </a:buClr>
               <a:buSzPts val="1400"/>
-              <a:buFont typeface="Arial"/>
+              <a:buFont typeface="Arial" panose="020B0604020202090204"/>
               <a:buChar char="•"/>
               <a:defRPr sz="1400" b="0" i="0" u="none" strike="noStrike" cap="none">
                 <a:solidFill>
                   <a:schemeClr val="dk1"/>
                 </a:solidFill>
-                <a:latin typeface="Arial"/>
-                <a:ea typeface="Arial"/>
-                <a:cs typeface="Arial"/>
-                <a:sym typeface="Arial"/>
+                <a:latin typeface="Arial" panose="020B0604020202090204"/>
+                <a:ea typeface="Arial" panose="020B0604020202090204"/>
+                <a:cs typeface="Arial" panose="020B0604020202090204"/>
+                <a:sym typeface="Arial" panose="020B0604020202090204"/>
               </a:defRPr>
             </a:lvl4pPr>
             <a:lvl5pPr marL="2286000" marR="0" lvl="4" indent="-317500" algn="l" rtl="0">
@@ -14152,16 +14001,16 @@
                 <a:schemeClr val="dk1"/>
               </a:buClr>
               <a:buSzPts val="1400"/>
-              <a:buFont typeface="Arial"/>
+              <a:buFont typeface="Arial" panose="020B0604020202090204"/>
               <a:buChar char="•"/>
               <a:defRPr sz="1400" b="0" i="0" u="none" strike="noStrike" cap="none">
                 <a:solidFill>
                   <a:schemeClr val="dk1"/>
                 </a:solidFill>
-                <a:latin typeface="Arial"/>
-                <a:ea typeface="Arial"/>
-                <a:cs typeface="Arial"/>
-                <a:sym typeface="Arial"/>
+                <a:latin typeface="Arial" panose="020B0604020202090204"/>
+                <a:ea typeface="Arial" panose="020B0604020202090204"/>
+                <a:cs typeface="Arial" panose="020B0604020202090204"/>
+                <a:sym typeface="Arial" panose="020B0604020202090204"/>
               </a:defRPr>
             </a:lvl5pPr>
             <a:lvl6pPr marL="2743200" marR="0" lvl="5" indent="-317500" algn="l" rtl="0">
@@ -14178,16 +14027,16 @@
                 <a:schemeClr val="dk1"/>
               </a:buClr>
               <a:buSzPts val="1400"/>
-              <a:buFont typeface="Arial"/>
+              <a:buFont typeface="Arial" panose="020B0604020202090204"/>
               <a:buChar char="•"/>
               <a:defRPr sz="1400" b="0" i="0" u="none" strike="noStrike" cap="none">
                 <a:solidFill>
                   <a:schemeClr val="dk1"/>
                 </a:solidFill>
-                <a:latin typeface="Arial"/>
-                <a:ea typeface="Arial"/>
-                <a:cs typeface="Arial"/>
-                <a:sym typeface="Arial"/>
+                <a:latin typeface="Arial" panose="020B0604020202090204"/>
+                <a:ea typeface="Arial" panose="020B0604020202090204"/>
+                <a:cs typeface="Arial" panose="020B0604020202090204"/>
+                <a:sym typeface="Arial" panose="020B0604020202090204"/>
               </a:defRPr>
             </a:lvl6pPr>
             <a:lvl7pPr marL="3200400" marR="0" lvl="6" indent="-317500" algn="l" rtl="0">
@@ -14204,16 +14053,16 @@
                 <a:schemeClr val="dk1"/>
               </a:buClr>
               <a:buSzPts val="1400"/>
-              <a:buFont typeface="Arial"/>
+              <a:buFont typeface="Arial" panose="020B0604020202090204"/>
               <a:buChar char="•"/>
               <a:defRPr sz="1400" b="0" i="0" u="none" strike="noStrike" cap="none">
                 <a:solidFill>
                   <a:schemeClr val="dk1"/>
                 </a:solidFill>
-                <a:latin typeface="Arial"/>
-                <a:ea typeface="Arial"/>
-                <a:cs typeface="Arial"/>
-                <a:sym typeface="Arial"/>
+                <a:latin typeface="Arial" panose="020B0604020202090204"/>
+                <a:ea typeface="Arial" panose="020B0604020202090204"/>
+                <a:cs typeface="Arial" panose="020B0604020202090204"/>
+                <a:sym typeface="Arial" panose="020B0604020202090204"/>
               </a:defRPr>
             </a:lvl7pPr>
             <a:lvl8pPr marL="3657600" marR="0" lvl="7" indent="-317500" algn="l" rtl="0">
@@ -14230,16 +14079,16 @@
                 <a:schemeClr val="dk1"/>
               </a:buClr>
               <a:buSzPts val="1400"/>
-              <a:buFont typeface="Arial"/>
+              <a:buFont typeface="Arial" panose="020B0604020202090204"/>
               <a:buChar char="•"/>
               <a:defRPr sz="1400" b="0" i="0" u="none" strike="noStrike" cap="none">
                 <a:solidFill>
                   <a:schemeClr val="dk1"/>
                 </a:solidFill>
-                <a:latin typeface="Arial"/>
-                <a:ea typeface="Arial"/>
-                <a:cs typeface="Arial"/>
-                <a:sym typeface="Arial"/>
+                <a:latin typeface="Arial" panose="020B0604020202090204"/>
+                <a:ea typeface="Arial" panose="020B0604020202090204"/>
+                <a:cs typeface="Arial" panose="020B0604020202090204"/>
+                <a:sym typeface="Arial" panose="020B0604020202090204"/>
               </a:defRPr>
             </a:lvl8pPr>
             <a:lvl9pPr marL="4114800" marR="0" lvl="8" indent="-317500" algn="l" rtl="0">
@@ -14256,22 +14105,20 @@
                 <a:schemeClr val="dk1"/>
               </a:buClr>
               <a:buSzPts val="1400"/>
-              <a:buFont typeface="Arial"/>
+              <a:buFont typeface="Arial" panose="020B0604020202090204"/>
               <a:buChar char="•"/>
               <a:defRPr sz="1400" b="0" i="0" u="none" strike="noStrike" cap="none">
                 <a:solidFill>
                   <a:schemeClr val="dk1"/>
                 </a:solidFill>
-                <a:latin typeface="Arial"/>
-                <a:ea typeface="Arial"/>
-                <a:cs typeface="Arial"/>
-                <a:sym typeface="Arial"/>
+                <a:latin typeface="Arial" panose="020B0604020202090204"/>
+                <a:ea typeface="Arial" panose="020B0604020202090204"/>
+                <a:cs typeface="Arial" panose="020B0604020202090204"/>
+                <a:sym typeface="Arial" panose="020B0604020202090204"/>
               </a:defRPr>
             </a:lvl9pPr>
           </a:lstStyle>
-          <a:p>
-            <a:endParaRPr/>
-          </a:p>
+          <a:p/>
         </p:txBody>
       </p:sp>
       <p:sp>
@@ -14315,10 +14162,10 @@
                 <a:solidFill>
                   <a:srgbClr val="888888"/>
                 </a:solidFill>
-                <a:latin typeface="Arial"/>
-                <a:ea typeface="Arial"/>
-                <a:cs typeface="Arial"/>
-                <a:sym typeface="Arial"/>
+                <a:latin typeface="Arial" panose="020B0604020202090204"/>
+                <a:ea typeface="Arial" panose="020B0604020202090204"/>
+                <a:cs typeface="Arial" panose="020B0604020202090204"/>
+                <a:sym typeface="Arial" panose="020B0604020202090204"/>
               </a:defRPr>
             </a:lvl1pPr>
             <a:lvl2pPr marR="0" lvl="1" algn="l" rtl="0">
@@ -14334,10 +14181,10 @@
                 <a:solidFill>
                   <a:schemeClr val="dk1"/>
                 </a:solidFill>
-                <a:latin typeface="Arial"/>
-                <a:ea typeface="Arial"/>
-                <a:cs typeface="Arial"/>
-                <a:sym typeface="Arial"/>
+                <a:latin typeface="Arial" panose="020B0604020202090204"/>
+                <a:ea typeface="Arial" panose="020B0604020202090204"/>
+                <a:cs typeface="Arial" panose="020B0604020202090204"/>
+                <a:sym typeface="Arial" panose="020B0604020202090204"/>
               </a:defRPr>
             </a:lvl2pPr>
             <a:lvl3pPr marR="0" lvl="2" algn="l" rtl="0">
@@ -14353,10 +14200,10 @@
                 <a:solidFill>
                   <a:schemeClr val="dk1"/>
                 </a:solidFill>
-                <a:latin typeface="Arial"/>
-                <a:ea typeface="Arial"/>
-                <a:cs typeface="Arial"/>
-                <a:sym typeface="Arial"/>
+                <a:latin typeface="Arial" panose="020B0604020202090204"/>
+                <a:ea typeface="Arial" panose="020B0604020202090204"/>
+                <a:cs typeface="Arial" panose="020B0604020202090204"/>
+                <a:sym typeface="Arial" panose="020B0604020202090204"/>
               </a:defRPr>
             </a:lvl3pPr>
             <a:lvl4pPr marR="0" lvl="3" algn="l" rtl="0">
@@ -14372,10 +14219,10 @@
                 <a:solidFill>
                   <a:schemeClr val="dk1"/>
                 </a:solidFill>
-                <a:latin typeface="Arial"/>
-                <a:ea typeface="Arial"/>
-                <a:cs typeface="Arial"/>
-                <a:sym typeface="Arial"/>
+                <a:latin typeface="Arial" panose="020B0604020202090204"/>
+                <a:ea typeface="Arial" panose="020B0604020202090204"/>
+                <a:cs typeface="Arial" panose="020B0604020202090204"/>
+                <a:sym typeface="Arial" panose="020B0604020202090204"/>
               </a:defRPr>
             </a:lvl4pPr>
             <a:lvl5pPr marR="0" lvl="4" algn="l" rtl="0">
@@ -14391,10 +14238,10 @@
                 <a:solidFill>
                   <a:schemeClr val="dk1"/>
                 </a:solidFill>
-                <a:latin typeface="Arial"/>
-                <a:ea typeface="Arial"/>
-                <a:cs typeface="Arial"/>
-                <a:sym typeface="Arial"/>
+                <a:latin typeface="Arial" panose="020B0604020202090204"/>
+                <a:ea typeface="Arial" panose="020B0604020202090204"/>
+                <a:cs typeface="Arial" panose="020B0604020202090204"/>
+                <a:sym typeface="Arial" panose="020B0604020202090204"/>
               </a:defRPr>
             </a:lvl5pPr>
             <a:lvl6pPr marR="0" lvl="5" algn="l" rtl="0">
@@ -14410,10 +14257,10 @@
                 <a:solidFill>
                   <a:schemeClr val="dk1"/>
                 </a:solidFill>
-                <a:latin typeface="Arial"/>
-                <a:ea typeface="Arial"/>
-                <a:cs typeface="Arial"/>
-                <a:sym typeface="Arial"/>
+                <a:latin typeface="Arial" panose="020B0604020202090204"/>
+                <a:ea typeface="Arial" panose="020B0604020202090204"/>
+                <a:cs typeface="Arial" panose="020B0604020202090204"/>
+                <a:sym typeface="Arial" panose="020B0604020202090204"/>
               </a:defRPr>
             </a:lvl6pPr>
             <a:lvl7pPr marR="0" lvl="6" algn="l" rtl="0">
@@ -14429,10 +14276,10 @@
                 <a:solidFill>
                   <a:schemeClr val="dk1"/>
                 </a:solidFill>
-                <a:latin typeface="Arial"/>
-                <a:ea typeface="Arial"/>
-                <a:cs typeface="Arial"/>
-                <a:sym typeface="Arial"/>
+                <a:latin typeface="Arial" panose="020B0604020202090204"/>
+                <a:ea typeface="Arial" panose="020B0604020202090204"/>
+                <a:cs typeface="Arial" panose="020B0604020202090204"/>
+                <a:sym typeface="Arial" panose="020B0604020202090204"/>
               </a:defRPr>
             </a:lvl7pPr>
             <a:lvl8pPr marR="0" lvl="7" algn="l" rtl="0">
@@ -14448,10 +14295,10 @@
                 <a:solidFill>
                   <a:schemeClr val="dk1"/>
                 </a:solidFill>
-                <a:latin typeface="Arial"/>
-                <a:ea typeface="Arial"/>
-                <a:cs typeface="Arial"/>
-                <a:sym typeface="Arial"/>
+                <a:latin typeface="Arial" panose="020B0604020202090204"/>
+                <a:ea typeface="Arial" panose="020B0604020202090204"/>
+                <a:cs typeface="Arial" panose="020B0604020202090204"/>
+                <a:sym typeface="Arial" panose="020B0604020202090204"/>
               </a:defRPr>
             </a:lvl8pPr>
             <a:lvl9pPr marR="0" lvl="8" algn="l" rtl="0">
@@ -14467,16 +14314,14 @@
                 <a:solidFill>
                   <a:schemeClr val="dk1"/>
                 </a:solidFill>
-                <a:latin typeface="Arial"/>
-                <a:ea typeface="Arial"/>
-                <a:cs typeface="Arial"/>
-                <a:sym typeface="Arial"/>
+                <a:latin typeface="Arial" panose="020B0604020202090204"/>
+                <a:ea typeface="Arial" panose="020B0604020202090204"/>
+                <a:cs typeface="Arial" panose="020B0604020202090204"/>
+                <a:sym typeface="Arial" panose="020B0604020202090204"/>
               </a:defRPr>
             </a:lvl9pPr>
           </a:lstStyle>
-          <a:p>
-            <a:endParaRPr/>
-          </a:p>
+          <a:p/>
         </p:txBody>
       </p:sp>
       <p:sp>
@@ -14520,10 +14365,10 @@
                 <a:solidFill>
                   <a:srgbClr val="888888"/>
                 </a:solidFill>
-                <a:latin typeface="Arial"/>
-                <a:ea typeface="Arial"/>
-                <a:cs typeface="Arial"/>
-                <a:sym typeface="Arial"/>
+                <a:latin typeface="Arial" panose="020B0604020202090204"/>
+                <a:ea typeface="Arial" panose="020B0604020202090204"/>
+                <a:cs typeface="Arial" panose="020B0604020202090204"/>
+                <a:sym typeface="Arial" panose="020B0604020202090204"/>
               </a:defRPr>
             </a:lvl1pPr>
             <a:lvl2pPr marR="0" lvl="1" algn="l" rtl="0">
@@ -14539,10 +14384,10 @@
                 <a:solidFill>
                   <a:schemeClr val="dk1"/>
                 </a:solidFill>
-                <a:latin typeface="Arial"/>
-                <a:ea typeface="Arial"/>
-                <a:cs typeface="Arial"/>
-                <a:sym typeface="Arial"/>
+                <a:latin typeface="Arial" panose="020B0604020202090204"/>
+                <a:ea typeface="Arial" panose="020B0604020202090204"/>
+                <a:cs typeface="Arial" panose="020B0604020202090204"/>
+                <a:sym typeface="Arial" panose="020B0604020202090204"/>
               </a:defRPr>
             </a:lvl2pPr>
             <a:lvl3pPr marR="0" lvl="2" algn="l" rtl="0">
@@ -14558,10 +14403,10 @@
                 <a:solidFill>
                   <a:schemeClr val="dk1"/>
                 </a:solidFill>
-                <a:latin typeface="Arial"/>
-                <a:ea typeface="Arial"/>
-                <a:cs typeface="Arial"/>
-                <a:sym typeface="Arial"/>
+                <a:latin typeface="Arial" panose="020B0604020202090204"/>
+                <a:ea typeface="Arial" panose="020B0604020202090204"/>
+                <a:cs typeface="Arial" panose="020B0604020202090204"/>
+                <a:sym typeface="Arial" panose="020B0604020202090204"/>
               </a:defRPr>
             </a:lvl3pPr>
             <a:lvl4pPr marR="0" lvl="3" algn="l" rtl="0">
@@ -14577,10 +14422,10 @@
                 <a:solidFill>
                   <a:schemeClr val="dk1"/>
                 </a:solidFill>
-                <a:latin typeface="Arial"/>
-                <a:ea typeface="Arial"/>
-                <a:cs typeface="Arial"/>
-                <a:sym typeface="Arial"/>
+                <a:latin typeface="Arial" panose="020B0604020202090204"/>
+                <a:ea typeface="Arial" panose="020B0604020202090204"/>
+                <a:cs typeface="Arial" panose="020B0604020202090204"/>
+                <a:sym typeface="Arial" panose="020B0604020202090204"/>
               </a:defRPr>
             </a:lvl4pPr>
             <a:lvl5pPr marR="0" lvl="4" algn="l" rtl="0">
@@ -14596,10 +14441,10 @@
                 <a:solidFill>
                   <a:schemeClr val="dk1"/>
                 </a:solidFill>
-                <a:latin typeface="Arial"/>
-                <a:ea typeface="Arial"/>
-                <a:cs typeface="Arial"/>
-                <a:sym typeface="Arial"/>
+                <a:latin typeface="Arial" panose="020B0604020202090204"/>
+                <a:ea typeface="Arial" panose="020B0604020202090204"/>
+                <a:cs typeface="Arial" panose="020B0604020202090204"/>
+                <a:sym typeface="Arial" panose="020B0604020202090204"/>
               </a:defRPr>
             </a:lvl5pPr>
             <a:lvl6pPr marR="0" lvl="5" algn="l" rtl="0">
@@ -14615,10 +14460,10 @@
                 <a:solidFill>
                   <a:schemeClr val="dk1"/>
                 </a:solidFill>
-                <a:latin typeface="Arial"/>
-                <a:ea typeface="Arial"/>
-                <a:cs typeface="Arial"/>
-                <a:sym typeface="Arial"/>
+                <a:latin typeface="Arial" panose="020B0604020202090204"/>
+                <a:ea typeface="Arial" panose="020B0604020202090204"/>
+                <a:cs typeface="Arial" panose="020B0604020202090204"/>
+                <a:sym typeface="Arial" panose="020B0604020202090204"/>
               </a:defRPr>
             </a:lvl6pPr>
             <a:lvl7pPr marR="0" lvl="6" algn="l" rtl="0">
@@ -14634,10 +14479,10 @@
                 <a:solidFill>
                   <a:schemeClr val="dk1"/>
                 </a:solidFill>
-                <a:latin typeface="Arial"/>
-                <a:ea typeface="Arial"/>
-                <a:cs typeface="Arial"/>
-                <a:sym typeface="Arial"/>
+                <a:latin typeface="Arial" panose="020B0604020202090204"/>
+                <a:ea typeface="Arial" panose="020B0604020202090204"/>
+                <a:cs typeface="Arial" panose="020B0604020202090204"/>
+                <a:sym typeface="Arial" panose="020B0604020202090204"/>
               </a:defRPr>
             </a:lvl7pPr>
             <a:lvl8pPr marR="0" lvl="7" algn="l" rtl="0">
@@ -14653,10 +14498,10 @@
                 <a:solidFill>
                   <a:schemeClr val="dk1"/>
                 </a:solidFill>
-                <a:latin typeface="Arial"/>
-                <a:ea typeface="Arial"/>
-                <a:cs typeface="Arial"/>
-                <a:sym typeface="Arial"/>
+                <a:latin typeface="Arial" panose="020B0604020202090204"/>
+                <a:ea typeface="Arial" panose="020B0604020202090204"/>
+                <a:cs typeface="Arial" panose="020B0604020202090204"/>
+                <a:sym typeface="Arial" panose="020B0604020202090204"/>
               </a:defRPr>
             </a:lvl8pPr>
             <a:lvl9pPr marR="0" lvl="8" algn="l" rtl="0">
@@ -14672,16 +14517,14 @@
                 <a:solidFill>
                   <a:schemeClr val="dk1"/>
                 </a:solidFill>
-                <a:latin typeface="Arial"/>
-                <a:ea typeface="Arial"/>
-                <a:cs typeface="Arial"/>
-                <a:sym typeface="Arial"/>
+                <a:latin typeface="Arial" panose="020B0604020202090204"/>
+                <a:ea typeface="Arial" panose="020B0604020202090204"/>
+                <a:cs typeface="Arial" panose="020B0604020202090204"/>
+                <a:sym typeface="Arial" panose="020B0604020202090204"/>
               </a:defRPr>
             </a:lvl9pPr>
           </a:lstStyle>
-          <a:p>
-            <a:endParaRPr/>
-          </a:p>
+          <a:p/>
         </p:txBody>
       </p:sp>
       <p:sp>
@@ -14721,10 +14564,10 @@
                 <a:solidFill>
                   <a:srgbClr val="888888"/>
                 </a:solidFill>
-                <a:latin typeface="Arial"/>
-                <a:ea typeface="Arial"/>
-                <a:cs typeface="Arial"/>
-                <a:sym typeface="Arial"/>
+                <a:latin typeface="Arial" panose="020B0604020202090204"/>
+                <a:ea typeface="Arial" panose="020B0604020202090204"/>
+                <a:cs typeface="Arial" panose="020B0604020202090204"/>
+                <a:sym typeface="Arial" panose="020B0604020202090204"/>
               </a:defRPr>
             </a:lvl1pPr>
             <a:lvl2pPr marL="0" marR="0" lvl="1" indent="0" algn="r" rtl="0">
@@ -14736,10 +14579,10 @@
                 <a:solidFill>
                   <a:srgbClr val="888888"/>
                 </a:solidFill>
-                <a:latin typeface="Arial"/>
-                <a:ea typeface="Arial"/>
-                <a:cs typeface="Arial"/>
-                <a:sym typeface="Arial"/>
+                <a:latin typeface="Arial" panose="020B0604020202090204"/>
+                <a:ea typeface="Arial" panose="020B0604020202090204"/>
+                <a:cs typeface="Arial" panose="020B0604020202090204"/>
+                <a:sym typeface="Arial" panose="020B0604020202090204"/>
               </a:defRPr>
             </a:lvl2pPr>
             <a:lvl3pPr marL="0" marR="0" lvl="2" indent="0" algn="r" rtl="0">
@@ -14751,10 +14594,10 @@
                 <a:solidFill>
                   <a:srgbClr val="888888"/>
                 </a:solidFill>
-                <a:latin typeface="Arial"/>
-                <a:ea typeface="Arial"/>
-                <a:cs typeface="Arial"/>
-                <a:sym typeface="Arial"/>
+                <a:latin typeface="Arial" panose="020B0604020202090204"/>
+                <a:ea typeface="Arial" panose="020B0604020202090204"/>
+                <a:cs typeface="Arial" panose="020B0604020202090204"/>
+                <a:sym typeface="Arial" panose="020B0604020202090204"/>
               </a:defRPr>
             </a:lvl3pPr>
             <a:lvl4pPr marL="0" marR="0" lvl="3" indent="0" algn="r" rtl="0">
@@ -14766,10 +14609,10 @@
                 <a:solidFill>
                   <a:srgbClr val="888888"/>
                 </a:solidFill>
-                <a:latin typeface="Arial"/>
-                <a:ea typeface="Arial"/>
-                <a:cs typeface="Arial"/>
-                <a:sym typeface="Arial"/>
+                <a:latin typeface="Arial" panose="020B0604020202090204"/>
+                <a:ea typeface="Arial" panose="020B0604020202090204"/>
+                <a:cs typeface="Arial" panose="020B0604020202090204"/>
+                <a:sym typeface="Arial" panose="020B0604020202090204"/>
               </a:defRPr>
             </a:lvl4pPr>
             <a:lvl5pPr marL="0" marR="0" lvl="4" indent="0" algn="r" rtl="0">
@@ -14781,10 +14624,10 @@
                 <a:solidFill>
                   <a:srgbClr val="888888"/>
                 </a:solidFill>
-                <a:latin typeface="Arial"/>
-                <a:ea typeface="Arial"/>
-                <a:cs typeface="Arial"/>
-                <a:sym typeface="Arial"/>
+                <a:latin typeface="Arial" panose="020B0604020202090204"/>
+                <a:ea typeface="Arial" panose="020B0604020202090204"/>
+                <a:cs typeface="Arial" panose="020B0604020202090204"/>
+                <a:sym typeface="Arial" panose="020B0604020202090204"/>
               </a:defRPr>
             </a:lvl5pPr>
             <a:lvl6pPr marL="0" marR="0" lvl="5" indent="0" algn="r" rtl="0">
@@ -14796,10 +14639,10 @@
                 <a:solidFill>
                   <a:srgbClr val="888888"/>
                 </a:solidFill>
-                <a:latin typeface="Arial"/>
-                <a:ea typeface="Arial"/>
-                <a:cs typeface="Arial"/>
-                <a:sym typeface="Arial"/>
+                <a:latin typeface="Arial" panose="020B0604020202090204"/>
+                <a:ea typeface="Arial" panose="020B0604020202090204"/>
+                <a:cs typeface="Arial" panose="020B0604020202090204"/>
+                <a:sym typeface="Arial" panose="020B0604020202090204"/>
               </a:defRPr>
             </a:lvl6pPr>
             <a:lvl7pPr marL="0" marR="0" lvl="6" indent="0" algn="r" rtl="0">
@@ -14811,10 +14654,10 @@
                 <a:solidFill>
                   <a:srgbClr val="888888"/>
                 </a:solidFill>
-                <a:latin typeface="Arial"/>
-                <a:ea typeface="Arial"/>
-                <a:cs typeface="Arial"/>
-                <a:sym typeface="Arial"/>
+                <a:latin typeface="Arial" panose="020B0604020202090204"/>
+                <a:ea typeface="Arial" panose="020B0604020202090204"/>
+                <a:cs typeface="Arial" panose="020B0604020202090204"/>
+                <a:sym typeface="Arial" panose="020B0604020202090204"/>
               </a:defRPr>
             </a:lvl7pPr>
             <a:lvl8pPr marL="0" marR="0" lvl="7" indent="0" algn="r" rtl="0">
@@ -14826,10 +14669,10 @@
                 <a:solidFill>
                   <a:srgbClr val="888888"/>
                 </a:solidFill>
-                <a:latin typeface="Arial"/>
-                <a:ea typeface="Arial"/>
-                <a:cs typeface="Arial"/>
-                <a:sym typeface="Arial"/>
+                <a:latin typeface="Arial" panose="020B0604020202090204"/>
+                <a:ea typeface="Arial" panose="020B0604020202090204"/>
+                <a:cs typeface="Arial" panose="020B0604020202090204"/>
+                <a:sym typeface="Arial" panose="020B0604020202090204"/>
               </a:defRPr>
             </a:lvl8pPr>
             <a:lvl9pPr marL="0" marR="0" lvl="8" indent="0" algn="r" rtl="0">
@@ -14841,10 +14684,10 @@
                 <a:solidFill>
                   <a:srgbClr val="888888"/>
                 </a:solidFill>
-                <a:latin typeface="Arial"/>
-                <a:ea typeface="Arial"/>
-                <a:cs typeface="Arial"/>
-                <a:sym typeface="Arial"/>
+                <a:latin typeface="Arial" panose="020B0604020202090204"/>
+                <a:ea typeface="Arial" panose="020B0604020202090204"/>
+                <a:cs typeface="Arial" panose="020B0604020202090204"/>
+                <a:sym typeface="Arial" panose="020B0604020202090204"/>
               </a:defRPr>
             </a:lvl9pPr>
           </a:lstStyle>
@@ -14860,9 +14703,8 @@
             </a:pPr>
             <a:fld id="{00000000-1234-1234-1234-123412341234}" type="slidenum">
               <a:rPr lang="zh-CN"/>
-              <a:t>‹#›</a:t>
             </a:fld>
-            <a:endParaRPr/>
+            <a:endParaRPr lang="zh-CN"/>
           </a:p>
         </p:txBody>
       </p:sp>
@@ -14870,17 +14712,17 @@
   </p:cSld>
   <p:clrMap bg1="lt1" tx1="dk1" bg2="dk2" tx2="lt2" accent1="accent1" accent2="accent2" accent3="accent3" accent4="accent4" accent5="accent5" accent6="accent6" hlink="hlink" folHlink="folHlink"/>
   <p:sldLayoutIdLst>
-    <p:sldLayoutId id="2147483648" r:id="rId1"/>
-    <p:sldLayoutId id="2147483649" r:id="rId2"/>
-    <p:sldLayoutId id="2147483650" r:id="rId3"/>
-    <p:sldLayoutId id="2147483651" r:id="rId4"/>
-    <p:sldLayoutId id="2147483652" r:id="rId5"/>
-    <p:sldLayoutId id="2147483653" r:id="rId6"/>
-    <p:sldLayoutId id="2147483654" r:id="rId7"/>
-    <p:sldLayoutId id="2147483655" r:id="rId8"/>
-    <p:sldLayoutId id="2147483656" r:id="rId9"/>
-    <p:sldLayoutId id="2147483657" r:id="rId10"/>
-    <p:sldLayoutId id="2147483658" r:id="rId11"/>
+    <p:sldLayoutId id="2147483649" r:id="rId1"/>
+    <p:sldLayoutId id="2147483650" r:id="rId2"/>
+    <p:sldLayoutId id="2147483651" r:id="rId3"/>
+    <p:sldLayoutId id="2147483652" r:id="rId4"/>
+    <p:sldLayoutId id="2147483653" r:id="rId5"/>
+    <p:sldLayoutId id="2147483654" r:id="rId6"/>
+    <p:sldLayoutId id="2147483655" r:id="rId7"/>
+    <p:sldLayoutId id="2147483656" r:id="rId8"/>
+    <p:sldLayoutId id="2147483657" r:id="rId9"/>
+    <p:sldLayoutId id="2147483658" r:id="rId10"/>
+    <p:sldLayoutId id="2147483659" r:id="rId11"/>
   </p:sldLayoutIdLst>
   <p:hf sldNum="0" hdr="0" ftr="0" dt="0"/>
   <p:txStyles>
@@ -14909,15 +14751,15 @@
         <a:buClr>
           <a:srgbClr val="000000"/>
         </a:buClr>
-        <a:buFont typeface="Arial"/>
+        <a:buFont typeface="Arial" panose="020B0604020202090204"/>
         <a:defRPr sz="1400" b="0" i="0" u="none" strike="noStrike" cap="none">
           <a:solidFill>
             <a:srgbClr val="000000"/>
           </a:solidFill>
-          <a:latin typeface="Arial"/>
-          <a:ea typeface="Arial"/>
-          <a:cs typeface="Arial"/>
-          <a:sym typeface="Arial"/>
+          <a:latin typeface="Arial" panose="020B0604020202090204"/>
+          <a:ea typeface="Arial" panose="020B0604020202090204"/>
+          <a:cs typeface="Arial" panose="020B0604020202090204"/>
+          <a:sym typeface="Arial" panose="020B0604020202090204"/>
         </a:defRPr>
       </a:lvl1pPr>
       <a:lvl2pPr marR="0" lvl="1" algn="l" rtl="0">
@@ -14933,15 +14775,15 @@
         <a:buClr>
           <a:srgbClr val="000000"/>
         </a:buClr>
-        <a:buFont typeface="Arial"/>
+        <a:buFont typeface="Arial" panose="020B0604020202090204"/>
         <a:defRPr sz="1400" b="0" i="0" u="none" strike="noStrike" cap="none">
           <a:solidFill>
             <a:srgbClr val="000000"/>
           </a:solidFill>
-          <a:latin typeface="Arial"/>
-          <a:ea typeface="Arial"/>
-          <a:cs typeface="Arial"/>
-          <a:sym typeface="Arial"/>
+          <a:latin typeface="Arial" panose="020B0604020202090204"/>
+          <a:ea typeface="Arial" panose="020B0604020202090204"/>
+          <a:cs typeface="Arial" panose="020B0604020202090204"/>
+          <a:sym typeface="Arial" panose="020B0604020202090204"/>
         </a:defRPr>
       </a:lvl2pPr>
       <a:lvl3pPr marR="0" lvl="2" algn="l" rtl="0">
@@ -14957,15 +14799,15 @@
         <a:buClr>
           <a:srgbClr val="000000"/>
         </a:buClr>
-        <a:buFont typeface="Arial"/>
+        <a:buFont typeface="Arial" panose="020B0604020202090204"/>
         <a:defRPr sz="1400" b="0" i="0" u="none" strike="noStrike" cap="none">
           <a:solidFill>
             <a:srgbClr val="000000"/>
           </a:solidFill>
-          <a:latin typeface="Arial"/>
-          <a:ea typeface="Arial"/>
-          <a:cs typeface="Arial"/>
-          <a:sym typeface="Arial"/>
+          <a:latin typeface="Arial" panose="020B0604020202090204"/>
+          <a:ea typeface="Arial" panose="020B0604020202090204"/>
+          <a:cs typeface="Arial" panose="020B0604020202090204"/>
+          <a:sym typeface="Arial" panose="020B0604020202090204"/>
         </a:defRPr>
       </a:lvl3pPr>
       <a:lvl4pPr marR="0" lvl="3" algn="l" rtl="0">
@@ -14981,15 +14823,15 @@
         <a:buClr>
           <a:srgbClr val="000000"/>
         </a:buClr>
-        <a:buFont typeface="Arial"/>
+        <a:buFont typeface="Arial" panose="020B0604020202090204"/>
         <a:defRPr sz="1400" b="0" i="0" u="none" strike="noStrike" cap="none">
           <a:solidFill>
             <a:srgbClr val="000000"/>
           </a:solidFill>
-          <a:latin typeface="Arial"/>
-          <a:ea typeface="Arial"/>
-          <a:cs typeface="Arial"/>
-          <a:sym typeface="Arial"/>
+          <a:latin typeface="Arial" panose="020B0604020202090204"/>
+          <a:ea typeface="Arial" panose="020B0604020202090204"/>
+          <a:cs typeface="Arial" panose="020B0604020202090204"/>
+          <a:sym typeface="Arial" panose="020B0604020202090204"/>
         </a:defRPr>
       </a:lvl4pPr>
       <a:lvl5pPr marR="0" lvl="4" algn="l" rtl="0">
@@ -15005,15 +14847,15 @@
         <a:buClr>
           <a:srgbClr val="000000"/>
         </a:buClr>
-        <a:buFont typeface="Arial"/>
+        <a:buFont typeface="Arial" panose="020B0604020202090204"/>
         <a:defRPr sz="1400" b="0" i="0" u="none" strike="noStrike" cap="none">
           <a:solidFill>
             <a:srgbClr val="000000"/>
           </a:solidFill>
-          <a:latin typeface="Arial"/>
-          <a:ea typeface="Arial"/>
-          <a:cs typeface="Arial"/>
-          <a:sym typeface="Arial"/>
+          <a:latin typeface="Arial" panose="020B0604020202090204"/>
+          <a:ea typeface="Arial" panose="020B0604020202090204"/>
+          <a:cs typeface="Arial" panose="020B0604020202090204"/>
+          <a:sym typeface="Arial" panose="020B0604020202090204"/>
         </a:defRPr>
       </a:lvl5pPr>
       <a:lvl6pPr marR="0" lvl="5" algn="l" rtl="0">
@@ -15029,15 +14871,15 @@
         <a:buClr>
           <a:srgbClr val="000000"/>
         </a:buClr>
-        <a:buFont typeface="Arial"/>
+        <a:buFont typeface="Arial" panose="020B0604020202090204"/>
         <a:defRPr sz="1400" b="0" i="0" u="none" strike="noStrike" cap="none">
           <a:solidFill>
             <a:srgbClr val="000000"/>
           </a:solidFill>
-          <a:latin typeface="Arial"/>
-          <a:ea typeface="Arial"/>
-          <a:cs typeface="Arial"/>
-          <a:sym typeface="Arial"/>
+          <a:latin typeface="Arial" panose="020B0604020202090204"/>
+          <a:ea typeface="Arial" panose="020B0604020202090204"/>
+          <a:cs typeface="Arial" panose="020B0604020202090204"/>
+          <a:sym typeface="Arial" panose="020B0604020202090204"/>
         </a:defRPr>
       </a:lvl6pPr>
       <a:lvl7pPr marR="0" lvl="6" algn="l" rtl="0">
@@ -15053,15 +14895,15 @@
         <a:buClr>
           <a:srgbClr val="000000"/>
         </a:buClr>
-        <a:buFont typeface="Arial"/>
+        <a:buFont typeface="Arial" panose="020B0604020202090204"/>
         <a:defRPr sz="1400" b="0" i="0" u="none" strike="noStrike" cap="none">
           <a:solidFill>
             <a:srgbClr val="000000"/>
           </a:solidFill>
-          <a:latin typeface="Arial"/>
-          <a:ea typeface="Arial"/>
-          <a:cs typeface="Arial"/>
-          <a:sym typeface="Arial"/>
+          <a:latin typeface="Arial" panose="020B0604020202090204"/>
+          <a:ea typeface="Arial" panose="020B0604020202090204"/>
+          <a:cs typeface="Arial" panose="020B0604020202090204"/>
+          <a:sym typeface="Arial" panose="020B0604020202090204"/>
         </a:defRPr>
       </a:lvl7pPr>
       <a:lvl8pPr marR="0" lvl="7" algn="l" rtl="0">
@@ -15077,15 +14919,15 @@
         <a:buClr>
           <a:srgbClr val="000000"/>
         </a:buClr>
-        <a:buFont typeface="Arial"/>
+        <a:buFont typeface="Arial" panose="020B0604020202090204"/>
         <a:defRPr sz="1400" b="0" i="0" u="none" strike="noStrike" cap="none">
           <a:solidFill>
             <a:srgbClr val="000000"/>
           </a:solidFill>
-          <a:latin typeface="Arial"/>
-          <a:ea typeface="Arial"/>
-          <a:cs typeface="Arial"/>
-          <a:sym typeface="Arial"/>
+          <a:latin typeface="Arial" panose="020B0604020202090204"/>
+          <a:ea typeface="Arial" panose="020B0604020202090204"/>
+          <a:cs typeface="Arial" panose="020B0604020202090204"/>
+          <a:sym typeface="Arial" panose="020B0604020202090204"/>
         </a:defRPr>
       </a:lvl8pPr>
       <a:lvl9pPr marR="0" lvl="8" algn="l" rtl="0">
@@ -15101,15 +14943,15 @@
         <a:buClr>
           <a:srgbClr val="000000"/>
         </a:buClr>
-        <a:buFont typeface="Arial"/>
+        <a:buFont typeface="Arial" panose="020B0604020202090204"/>
         <a:defRPr sz="1400" b="0" i="0" u="none" strike="noStrike" cap="none">
           <a:solidFill>
             <a:srgbClr val="000000"/>
           </a:solidFill>
-          <a:latin typeface="Arial"/>
-          <a:ea typeface="Arial"/>
-          <a:cs typeface="Arial"/>
-          <a:sym typeface="Arial"/>
+          <a:latin typeface="Arial" panose="020B0604020202090204"/>
+          <a:ea typeface="Arial" panose="020B0604020202090204"/>
+          <a:cs typeface="Arial" panose="020B0604020202090204"/>
+          <a:sym typeface="Arial" panose="020B0604020202090204"/>
         </a:defRPr>
       </a:lvl9pPr>
     </p:titleStyle>
@@ -15138,15 +14980,15 @@
         <a:buClr>
           <a:srgbClr val="000000"/>
         </a:buClr>
-        <a:buFont typeface="Arial"/>
+        <a:buFont typeface="Arial" panose="020B0604020202090204"/>
         <a:defRPr sz="1400" b="0" i="0" u="none" strike="noStrike" cap="none">
           <a:solidFill>
             <a:srgbClr val="000000"/>
           </a:solidFill>
-          <a:latin typeface="Arial"/>
-          <a:ea typeface="Arial"/>
-          <a:cs typeface="Arial"/>
-          <a:sym typeface="Arial"/>
+          <a:latin typeface="Arial" panose="020B0604020202090204"/>
+          <a:ea typeface="Arial" panose="020B0604020202090204"/>
+          <a:cs typeface="Arial" panose="020B0604020202090204"/>
+          <a:sym typeface="Arial" panose="020B0604020202090204"/>
         </a:defRPr>
       </a:lvl1pPr>
       <a:lvl2pPr marR="0" lvl="1" algn="l" rtl="0">
@@ -15162,15 +15004,15 @@
         <a:buClr>
           <a:srgbClr val="000000"/>
         </a:buClr>
-        <a:buFont typeface="Arial"/>
+        <a:buFont typeface="Arial" panose="020B0604020202090204"/>
         <a:defRPr sz="1400" b="0" i="0" u="none" strike="noStrike" cap="none">
           <a:solidFill>
             <a:srgbClr val="000000"/>
           </a:solidFill>
-          <a:latin typeface="Arial"/>
-          <a:ea typeface="Arial"/>
-          <a:cs typeface="Arial"/>
-          <a:sym typeface="Arial"/>
+          <a:latin typeface="Arial" panose="020B0604020202090204"/>
+          <a:ea typeface="Arial" panose="020B0604020202090204"/>
+          <a:cs typeface="Arial" panose="020B0604020202090204"/>
+          <a:sym typeface="Arial" panose="020B0604020202090204"/>
         </a:defRPr>
       </a:lvl2pPr>
       <a:lvl3pPr marR="0" lvl="2" algn="l" rtl="0">
@@ -15186,15 +15028,15 @@
         <a:buClr>
           <a:srgbClr val="000000"/>
         </a:buClr>
-        <a:buFont typeface="Arial"/>
+        <a:buFont typeface="Arial" panose="020B0604020202090204"/>
         <a:defRPr sz="1400" b="0" i="0" u="none" strike="noStrike" cap="none">
           <a:solidFill>
             <a:srgbClr val="000000"/>
           </a:solidFill>
-          <a:latin typeface="Arial"/>
-          <a:ea typeface="Arial"/>
-          <a:cs typeface="Arial"/>
-          <a:sym typeface="Arial"/>
+          <a:latin typeface="Arial" panose="020B0604020202090204"/>
+          <a:ea typeface="Arial" panose="020B0604020202090204"/>
+          <a:cs typeface="Arial" panose="020B0604020202090204"/>
+          <a:sym typeface="Arial" panose="020B0604020202090204"/>
         </a:defRPr>
       </a:lvl3pPr>
       <a:lvl4pPr marR="0" lvl="3" algn="l" rtl="0">
@@ -15210,15 +15052,15 @@
         <a:buClr>
           <a:srgbClr val="000000"/>
         </a:buClr>
-        <a:buFont typeface="Arial"/>
+        <a:buFont typeface="Arial" panose="020B0604020202090204"/>
         <a:defRPr sz="1400" b="0" i="0" u="none" strike="noStrike" cap="none">
           <a:solidFill>
             <a:srgbClr val="000000"/>
           </a:solidFill>
-          <a:latin typeface="Arial"/>
-          <a:ea typeface="Arial"/>
-          <a:cs typeface="Arial"/>
-          <a:sym typeface="Arial"/>
+          <a:latin typeface="Arial" panose="020B0604020202090204"/>
+          <a:ea typeface="Arial" panose="020B0604020202090204"/>
+          <a:cs typeface="Arial" panose="020B0604020202090204"/>
+          <a:sym typeface="Arial" panose="020B0604020202090204"/>
         </a:defRPr>
       </a:lvl4pPr>
       <a:lvl5pPr marR="0" lvl="4" algn="l" rtl="0">
@@ -15234,15 +15076,15 @@
         <a:buClr>
           <a:srgbClr val="000000"/>
         </a:buClr>
-        <a:buFont typeface="Arial"/>
+        <a:buFont typeface="Arial" panose="020B0604020202090204"/>
         <a:defRPr sz="1400" b="0" i="0" u="none" strike="noStrike" cap="none">
           <a:solidFill>
             <a:srgbClr val="000000"/>
           </a:solidFill>
-          <a:latin typeface="Arial"/>
-          <a:ea typeface="Arial"/>
-          <a:cs typeface="Arial"/>
-          <a:sym typeface="Arial"/>
+          <a:latin typeface="Arial" panose="020B0604020202090204"/>
+          <a:ea typeface="Arial" panose="020B0604020202090204"/>
+          <a:cs typeface="Arial" panose="020B0604020202090204"/>
+          <a:sym typeface="Arial" panose="020B0604020202090204"/>
         </a:defRPr>
       </a:lvl5pPr>
       <a:lvl6pPr marR="0" lvl="5" algn="l" rtl="0">
@@ -15258,15 +15100,15 @@
         <a:buClr>
           <a:srgbClr val="000000"/>
         </a:buClr>
-        <a:buFont typeface="Arial"/>
+        <a:buFont typeface="Arial" panose="020B0604020202090204"/>
         <a:defRPr sz="1400" b="0" i="0" u="none" strike="noStrike" cap="none">
           <a:solidFill>
             <a:srgbClr val="000000"/>
           </a:solidFill>
-          <a:latin typeface="Arial"/>
-          <a:ea typeface="Arial"/>
-          <a:cs typeface="Arial"/>
-          <a:sym typeface="Arial"/>
+          <a:latin typeface="Arial" panose="020B0604020202090204"/>
+          <a:ea typeface="Arial" panose="020B0604020202090204"/>
+          <a:cs typeface="Arial" panose="020B0604020202090204"/>
+          <a:sym typeface="Arial" panose="020B0604020202090204"/>
         </a:defRPr>
       </a:lvl6pPr>
       <a:lvl7pPr marR="0" lvl="6" algn="l" rtl="0">
@@ -15282,15 +15124,15 @@
         <a:buClr>
           <a:srgbClr val="000000"/>
         </a:buClr>
-        <a:buFont typeface="Arial"/>
+        <a:buFont typeface="Arial" panose="020B0604020202090204"/>
         <a:defRPr sz="1400" b="0" i="0" u="none" strike="noStrike" cap="none">
           <a:solidFill>
             <a:srgbClr val="000000"/>
           </a:solidFill>
-          <a:latin typeface="Arial"/>
-          <a:ea typeface="Arial"/>
-          <a:cs typeface="Arial"/>
-          <a:sym typeface="Arial"/>
+          <a:latin typeface="Arial" panose="020B0604020202090204"/>
+          <a:ea typeface="Arial" panose="020B0604020202090204"/>
+          <a:cs typeface="Arial" panose="020B0604020202090204"/>
+          <a:sym typeface="Arial" panose="020B0604020202090204"/>
         </a:defRPr>
       </a:lvl7pPr>
       <a:lvl8pPr marR="0" lvl="7" algn="l" rtl="0">
@@ -15306,15 +15148,15 @@
         <a:buClr>
           <a:srgbClr val="000000"/>
         </a:buClr>
-        <a:buFont typeface="Arial"/>
+        <a:buFont typeface="Arial" panose="020B0604020202090204"/>
         <a:defRPr sz="1400" b="0" i="0" u="none" strike="noStrike" cap="none">
           <a:solidFill>
             <a:srgbClr val="000000"/>
           </a:solidFill>
-          <a:latin typeface="Arial"/>
-          <a:ea typeface="Arial"/>
-          <a:cs typeface="Arial"/>
-          <a:sym typeface="Arial"/>
+          <a:latin typeface="Arial" panose="020B0604020202090204"/>
+          <a:ea typeface="Arial" panose="020B0604020202090204"/>
+          <a:cs typeface="Arial" panose="020B0604020202090204"/>
+          <a:sym typeface="Arial" panose="020B0604020202090204"/>
         </a:defRPr>
       </a:lvl8pPr>
       <a:lvl9pPr marR="0" lvl="8" algn="l" rtl="0">
@@ -15330,15 +15172,15 @@
         <a:buClr>
           <a:srgbClr val="000000"/>
         </a:buClr>
-        <a:buFont typeface="Arial"/>
+        <a:buFont typeface="Arial" panose="020B0604020202090204"/>
         <a:defRPr sz="1400" b="0" i="0" u="none" strike="noStrike" cap="none">
           <a:solidFill>
             <a:srgbClr val="000000"/>
           </a:solidFill>
-          <a:latin typeface="Arial"/>
-          <a:ea typeface="Arial"/>
-          <a:cs typeface="Arial"/>
-          <a:sym typeface="Arial"/>
+          <a:latin typeface="Arial" panose="020B0604020202090204"/>
+          <a:ea typeface="Arial" panose="020B0604020202090204"/>
+          <a:cs typeface="Arial" panose="020B0604020202090204"/>
+          <a:sym typeface="Arial" panose="020B0604020202090204"/>
         </a:defRPr>
       </a:lvl9pPr>
     </p:bodyStyle>
@@ -15367,15 +15209,15 @@
         <a:buClr>
           <a:srgbClr val="000000"/>
         </a:buClr>
-        <a:buFont typeface="Arial"/>
+        <a:buFont typeface="Arial" panose="020B0604020202090204"/>
         <a:defRPr sz="1400" b="0" i="0" u="none" strike="noStrike" cap="none">
           <a:solidFill>
             <a:srgbClr val="000000"/>
           </a:solidFill>
-          <a:latin typeface="Arial"/>
-          <a:ea typeface="Arial"/>
-          <a:cs typeface="Arial"/>
-          <a:sym typeface="Arial"/>
+          <a:latin typeface="Arial" panose="020B0604020202090204"/>
+          <a:ea typeface="Arial" panose="020B0604020202090204"/>
+          <a:cs typeface="Arial" panose="020B0604020202090204"/>
+          <a:sym typeface="Arial" panose="020B0604020202090204"/>
         </a:defRPr>
       </a:lvl1pPr>
       <a:lvl2pPr marR="0" lvl="1" algn="l" rtl="0">
@@ -15391,15 +15233,15 @@
         <a:buClr>
           <a:srgbClr val="000000"/>
         </a:buClr>
-        <a:buFont typeface="Arial"/>
+        <a:buFont typeface="Arial" panose="020B0604020202090204"/>
         <a:defRPr sz="1400" b="0" i="0" u="none" strike="noStrike" cap="none">
           <a:solidFill>
             <a:srgbClr val="000000"/>
           </a:solidFill>
-          <a:latin typeface="Arial"/>
-          <a:ea typeface="Arial"/>
-          <a:cs typeface="Arial"/>
-          <a:sym typeface="Arial"/>
+          <a:latin typeface="Arial" panose="020B0604020202090204"/>
+          <a:ea typeface="Arial" panose="020B0604020202090204"/>
+          <a:cs typeface="Arial" panose="020B0604020202090204"/>
+          <a:sym typeface="Arial" panose="020B0604020202090204"/>
         </a:defRPr>
       </a:lvl2pPr>
       <a:lvl3pPr marR="0" lvl="2" algn="l" rtl="0">
@@ -15415,15 +15257,15 @@
         <a:buClr>
           <a:srgbClr val="000000"/>
         </a:buClr>
-        <a:buFont typeface="Arial"/>
+        <a:buFont typeface="Arial" panose="020B0604020202090204"/>
         <a:defRPr sz="1400" b="0" i="0" u="none" strike="noStrike" cap="none">
           <a:solidFill>
             <a:srgbClr val="000000"/>
           </a:solidFill>
-          <a:latin typeface="Arial"/>
-          <a:ea typeface="Arial"/>
-          <a:cs typeface="Arial"/>
-          <a:sym typeface="Arial"/>
+          <a:latin typeface="Arial" panose="020B0604020202090204"/>
+          <a:ea typeface="Arial" panose="020B0604020202090204"/>
+          <a:cs typeface="Arial" panose="020B0604020202090204"/>
+          <a:sym typeface="Arial" panose="020B0604020202090204"/>
         </a:defRPr>
       </a:lvl3pPr>
       <a:lvl4pPr marR="0" lvl="3" algn="l" rtl="0">
@@ -15439,15 +15281,15 @@
         <a:buClr>
           <a:srgbClr val="000000"/>
         </a:buClr>
-        <a:buFont typeface="Arial"/>
+        <a:buFont typeface="Arial" panose="020B0604020202090204"/>
         <a:defRPr sz="1400" b="0" i="0" u="none" strike="noStrike" cap="none">
           <a:solidFill>
             <a:srgbClr val="000000"/>
           </a:solidFill>
-          <a:latin typeface="Arial"/>
-          <a:ea typeface="Arial"/>
-          <a:cs typeface="Arial"/>
-          <a:sym typeface="Arial"/>
+          <a:latin typeface="Arial" panose="020B0604020202090204"/>
+          <a:ea typeface="Arial" panose="020B0604020202090204"/>
+          <a:cs typeface="Arial" panose="020B0604020202090204"/>
+          <a:sym typeface="Arial" panose="020B0604020202090204"/>
         </a:defRPr>
       </a:lvl4pPr>
       <a:lvl5pPr marR="0" lvl="4" algn="l" rtl="0">
@@ -15463,15 +15305,15 @@
         <a:buClr>
           <a:srgbClr val="000000"/>
         </a:buClr>
-        <a:buFont typeface="Arial"/>
+        <a:buFont typeface="Arial" panose="020B0604020202090204"/>
         <a:defRPr sz="1400" b="0" i="0" u="none" strike="noStrike" cap="none">
           <a:solidFill>
             <a:srgbClr val="000000"/>
           </a:solidFill>
-          <a:latin typeface="Arial"/>
-          <a:ea typeface="Arial"/>
-          <a:cs typeface="Arial"/>
-          <a:sym typeface="Arial"/>
+          <a:latin typeface="Arial" panose="020B0604020202090204"/>
+          <a:ea typeface="Arial" panose="020B0604020202090204"/>
+          <a:cs typeface="Arial" panose="020B0604020202090204"/>
+          <a:sym typeface="Arial" panose="020B0604020202090204"/>
         </a:defRPr>
       </a:lvl5pPr>
       <a:lvl6pPr marR="0" lvl="5" algn="l" rtl="0">
@@ -15487,15 +15329,15 @@
         <a:buClr>
           <a:srgbClr val="000000"/>
         </a:buClr>
-        <a:buFont typeface="Arial"/>
+        <a:buFont typeface="Arial" panose="020B0604020202090204"/>
         <a:defRPr sz="1400" b="0" i="0" u="none" strike="noStrike" cap="none">
           <a:solidFill>
             <a:srgbClr val="000000"/>
           </a:solidFill>
-          <a:latin typeface="Arial"/>
-          <a:ea typeface="Arial"/>
-          <a:cs typeface="Arial"/>
-          <a:sym typeface="Arial"/>
+          <a:latin typeface="Arial" panose="020B0604020202090204"/>
+          <a:ea typeface="Arial" panose="020B0604020202090204"/>
+          <a:cs typeface="Arial" panose="020B0604020202090204"/>
+          <a:sym typeface="Arial" panose="020B0604020202090204"/>
         </a:defRPr>
       </a:lvl6pPr>
       <a:lvl7pPr marR="0" lvl="6" algn="l" rtl="0">
@@ -15511,15 +15353,15 @@
         <a:buClr>
           <a:srgbClr val="000000"/>
         </a:buClr>
-        <a:buFont typeface="Arial"/>
+        <a:buFont typeface="Arial" panose="020B0604020202090204"/>
         <a:defRPr sz="1400" b="0" i="0" u="none" strike="noStrike" cap="none">
           <a:solidFill>
             <a:srgbClr val="000000"/>
           </a:solidFill>
-          <a:latin typeface="Arial"/>
-          <a:ea typeface="Arial"/>
-          <a:cs typeface="Arial"/>
-          <a:sym typeface="Arial"/>
+          <a:latin typeface="Arial" panose="020B0604020202090204"/>
+          <a:ea typeface="Arial" panose="020B0604020202090204"/>
+          <a:cs typeface="Arial" panose="020B0604020202090204"/>
+          <a:sym typeface="Arial" panose="020B0604020202090204"/>
         </a:defRPr>
       </a:lvl7pPr>
       <a:lvl8pPr marR="0" lvl="7" algn="l" rtl="0">
@@ -15535,15 +15377,15 @@
         <a:buClr>
           <a:srgbClr val="000000"/>
         </a:buClr>
-        <a:buFont typeface="Arial"/>
+        <a:buFont typeface="Arial" panose="020B0604020202090204"/>
         <a:defRPr sz="1400" b="0" i="0" u="none" strike="noStrike" cap="none">
           <a:solidFill>
             <a:srgbClr val="000000"/>
           </a:solidFill>
-          <a:latin typeface="Arial"/>
-          <a:ea typeface="Arial"/>
-          <a:cs typeface="Arial"/>
-          <a:sym typeface="Arial"/>
+          <a:latin typeface="Arial" panose="020B0604020202090204"/>
+          <a:ea typeface="Arial" panose="020B0604020202090204"/>
+          <a:cs typeface="Arial" panose="020B0604020202090204"/>
+          <a:sym typeface="Arial" panose="020B0604020202090204"/>
         </a:defRPr>
       </a:lvl8pPr>
       <a:lvl9pPr marR="0" lvl="8" algn="l" rtl="0">
@@ -15559,15 +15401,15 @@
         <a:buClr>
           <a:srgbClr val="000000"/>
         </a:buClr>
-        <a:buFont typeface="Arial"/>
+        <a:buFont typeface="Arial" panose="020B0604020202090204"/>
         <a:defRPr sz="1400" b="0" i="0" u="none" strike="noStrike" cap="none">
           <a:solidFill>
             <a:srgbClr val="000000"/>
           </a:solidFill>
-          <a:latin typeface="Arial"/>
-          <a:ea typeface="Arial"/>
-          <a:cs typeface="Arial"/>
-          <a:sym typeface="Arial"/>
+          <a:latin typeface="Arial" panose="020B0604020202090204"/>
+          <a:ea typeface="Arial" panose="020B0604020202090204"/>
+          <a:cs typeface="Arial" panose="020B0604020202090204"/>
+          <a:sym typeface="Arial" panose="020B0604020202090204"/>
         </a:defRPr>
       </a:lvl9pPr>
     </p:otherStyle>
@@ -15577,7 +15419,7 @@
 
 <file path=ppt/slideMasters/slideMaster2.xml><?xml version="1.0" encoding="utf-8"?>
 <p:sldMaster xmlns:a="http://schemas.openxmlformats.org/drawingml/2006/main" xmlns:r="http://schemas.openxmlformats.org/officeDocument/2006/relationships" xmlns:p="http://schemas.openxmlformats.org/presentationml/2006/main">
-  <p:cSld name="默认主题">
+  <p:cSld>
     <p:bg>
       <p:bgPr>
         <a:solidFill>
@@ -15606,7 +15448,7 @@
   </p:cSld>
   <p:clrMap bg1="lt1" tx1="dk1" bg2="dk2" tx2="lt2" accent1="accent1" accent2="accent2" accent3="accent3" accent4="accent4" accent5="accent5" accent6="accent6" hlink="hlink" folHlink="folHlink"/>
   <p:sldLayoutIdLst>
-    <p:sldLayoutId id="2157483699" r:id="rId1"/>
+    <p:sldLayoutId id="2147483661" r:id="rId1"/>
   </p:sldLayoutIdLst>
   <p:hf sldNum="0" hdr="0" ftr="0" dt="0"/>
   <p:txStyles>
@@ -15635,15 +15477,15 @@
         <a:buClr>
           <a:srgbClr val="000000"/>
         </a:buClr>
-        <a:buFont typeface="Arial"/>
+        <a:buFont typeface="Arial" panose="020B0604020202090204"/>
         <a:defRPr sz="1400" b="0" i="0" u="none" strike="noStrike" cap="none">
           <a:solidFill>
             <a:srgbClr val="000000"/>
           </a:solidFill>
-          <a:latin typeface="Arial"/>
-          <a:ea typeface="Arial"/>
-          <a:cs typeface="Arial"/>
-          <a:sym typeface="Arial"/>
+          <a:latin typeface="Arial" panose="020B0604020202090204"/>
+          <a:ea typeface="Arial" panose="020B0604020202090204"/>
+          <a:cs typeface="Arial" panose="020B0604020202090204"/>
+          <a:sym typeface="Arial" panose="020B0604020202090204"/>
         </a:defRPr>
       </a:lvl1pPr>
       <a:lvl2pPr marR="0" lvl="1" algn="l" rtl="0">
@@ -15659,15 +15501,15 @@
         <a:buClr>
           <a:srgbClr val="000000"/>
         </a:buClr>
-        <a:buFont typeface="Arial"/>
+        <a:buFont typeface="Arial" panose="020B0604020202090204"/>
         <a:defRPr sz="1400" b="0" i="0" u="none" strike="noStrike" cap="none">
           <a:solidFill>
             <a:srgbClr val="000000"/>
           </a:solidFill>
-          <a:latin typeface="Arial"/>
-          <a:ea typeface="Arial"/>
-          <a:cs typeface="Arial"/>
-          <a:sym typeface="Arial"/>
+          <a:latin typeface="Arial" panose="020B0604020202090204"/>
+          <a:ea typeface="Arial" panose="020B0604020202090204"/>
+          <a:cs typeface="Arial" panose="020B0604020202090204"/>
+          <a:sym typeface="Arial" panose="020B0604020202090204"/>
         </a:defRPr>
       </a:lvl2pPr>
       <a:lvl3pPr marR="0" lvl="2" algn="l" rtl="0">
@@ -15683,15 +15525,15 @@
         <a:buClr>
           <a:srgbClr val="000000"/>
         </a:buClr>
-        <a:buFont typeface="Arial"/>
+        <a:buFont typeface="Arial" panose="020B0604020202090204"/>
         <a:defRPr sz="1400" b="0" i="0" u="none" strike="noStrike" cap="none">
           <a:solidFill>
             <a:srgbClr val="000000"/>
           </a:solidFill>
-          <a:latin typeface="Arial"/>
-          <a:ea typeface="Arial"/>
-          <a:cs typeface="Arial"/>
-          <a:sym typeface="Arial"/>
+          <a:latin typeface="Arial" panose="020B0604020202090204"/>
+          <a:ea typeface="Arial" panose="020B0604020202090204"/>
+          <a:cs typeface="Arial" panose="020B0604020202090204"/>
+          <a:sym typeface="Arial" panose="020B0604020202090204"/>
         </a:defRPr>
       </a:lvl3pPr>
       <a:lvl4pPr marR="0" lvl="3" algn="l" rtl="0">
@@ -15707,15 +15549,15 @@
         <a:buClr>
           <a:srgbClr val="000000"/>
         </a:buClr>
-        <a:buFont typeface="Arial"/>
+        <a:buFont typeface="Arial" panose="020B0604020202090204"/>
         <a:defRPr sz="1400" b="0" i="0" u="none" strike="noStrike" cap="none">
           <a:solidFill>
             <a:srgbClr val="000000"/>
           </a:solidFill>
-          <a:latin typeface="Arial"/>
-          <a:ea typeface="Arial"/>
-          <a:cs typeface="Arial"/>
-          <a:sym typeface="Arial"/>
+          <a:latin typeface="Arial" panose="020B0604020202090204"/>
+          <a:ea typeface="Arial" panose="020B0604020202090204"/>
+          <a:cs typeface="Arial" panose="020B0604020202090204"/>
+          <a:sym typeface="Arial" panose="020B0604020202090204"/>
         </a:defRPr>
       </a:lvl4pPr>
       <a:lvl5pPr marR="0" lvl="4" algn="l" rtl="0">
@@ -15731,15 +15573,15 @@
         <a:buClr>
           <a:srgbClr val="000000"/>
         </a:buClr>
-        <a:buFont typeface="Arial"/>
+        <a:buFont typeface="Arial" panose="020B0604020202090204"/>
         <a:defRPr sz="1400" b="0" i="0" u="none" strike="noStrike" cap="none">
           <a:solidFill>
             <a:srgbClr val="000000"/>
           </a:solidFill>
-          <a:latin typeface="Arial"/>
-          <a:ea typeface="Arial"/>
-          <a:cs typeface="Arial"/>
-          <a:sym typeface="Arial"/>
+          <a:latin typeface="Arial" panose="020B0604020202090204"/>
+          <a:ea typeface="Arial" panose="020B0604020202090204"/>
+          <a:cs typeface="Arial" panose="020B0604020202090204"/>
+          <a:sym typeface="Arial" panose="020B0604020202090204"/>
         </a:defRPr>
       </a:lvl5pPr>
       <a:lvl6pPr marR="0" lvl="5" algn="l" rtl="0">
@@ -15755,15 +15597,15 @@
         <a:buClr>
           <a:srgbClr val="000000"/>
         </a:buClr>
-        <a:buFont typeface="Arial"/>
+        <a:buFont typeface="Arial" panose="020B0604020202090204"/>
         <a:defRPr sz="1400" b="0" i="0" u="none" strike="noStrike" cap="none">
           <a:solidFill>
             <a:srgbClr val="000000"/>
           </a:solidFill>
-          <a:latin typeface="Arial"/>
-          <a:ea typeface="Arial"/>
-          <a:cs typeface="Arial"/>
-          <a:sym typeface="Arial"/>
+          <a:latin typeface="Arial" panose="020B0604020202090204"/>
+          <a:ea typeface="Arial" panose="020B0604020202090204"/>
+          <a:cs typeface="Arial" panose="020B0604020202090204"/>
+          <a:sym typeface="Arial" panose="020B0604020202090204"/>
         </a:defRPr>
       </a:lvl6pPr>
       <a:lvl7pPr marR="0" lvl="6" algn="l" rtl="0">
@@ -15779,15 +15621,15 @@
         <a:buClr>
           <a:srgbClr val="000000"/>
         </a:buClr>
-        <a:buFont typeface="Arial"/>
+        <a:buFont typeface="Arial" panose="020B0604020202090204"/>
         <a:defRPr sz="1400" b="0" i="0" u="none" strike="noStrike" cap="none">
           <a:solidFill>
             <a:srgbClr val="000000"/>
           </a:solidFill>
-          <a:latin typeface="Arial"/>
-          <a:ea typeface="Arial"/>
-          <a:cs typeface="Arial"/>
-          <a:sym typeface="Arial"/>
+          <a:latin typeface="Arial" panose="020B0604020202090204"/>
+          <a:ea typeface="Arial" panose="020B0604020202090204"/>
+          <a:cs typeface="Arial" panose="020B0604020202090204"/>
+          <a:sym typeface="Arial" panose="020B0604020202090204"/>
         </a:defRPr>
       </a:lvl7pPr>
       <a:lvl8pPr marR="0" lvl="7" algn="l" rtl="0">
@@ -15803,15 +15645,15 @@
         <a:buClr>
           <a:srgbClr val="000000"/>
         </a:buClr>
-        <a:buFont typeface="Arial"/>
+        <a:buFont typeface="Arial" panose="020B0604020202090204"/>
         <a:defRPr sz="1400" b="0" i="0" u="none" strike="noStrike" cap="none">
           <a:solidFill>
             <a:srgbClr val="000000"/>
           </a:solidFill>
-          <a:latin typeface="Arial"/>
-          <a:ea typeface="Arial"/>
-          <a:cs typeface="Arial"/>
-          <a:sym typeface="Arial"/>
+          <a:latin typeface="Arial" panose="020B0604020202090204"/>
+          <a:ea typeface="Arial" panose="020B0604020202090204"/>
+          <a:cs typeface="Arial" panose="020B0604020202090204"/>
+          <a:sym typeface="Arial" panose="020B0604020202090204"/>
         </a:defRPr>
       </a:lvl8pPr>
       <a:lvl9pPr marR="0" lvl="8" algn="l" rtl="0">
@@ -15827,15 +15669,15 @@
         <a:buClr>
           <a:srgbClr val="000000"/>
         </a:buClr>
-        <a:buFont typeface="Arial"/>
+        <a:buFont typeface="Arial" panose="020B0604020202090204"/>
         <a:defRPr sz="1400" b="0" i="0" u="none" strike="noStrike" cap="none">
           <a:solidFill>
             <a:srgbClr val="000000"/>
           </a:solidFill>
-          <a:latin typeface="Arial"/>
-          <a:ea typeface="Arial"/>
-          <a:cs typeface="Arial"/>
-          <a:sym typeface="Arial"/>
+          <a:latin typeface="Arial" panose="020B0604020202090204"/>
+          <a:ea typeface="Arial" panose="020B0604020202090204"/>
+          <a:cs typeface="Arial" panose="020B0604020202090204"/>
+          <a:sym typeface="Arial" panose="020B0604020202090204"/>
         </a:defRPr>
       </a:lvl9pPr>
     </p:titleStyle>
@@ -15864,15 +15706,15 @@
         <a:buClr>
           <a:srgbClr val="000000"/>
         </a:buClr>
-        <a:buFont typeface="Arial"/>
+        <a:buFont typeface="Arial" panose="020B0604020202090204"/>
         <a:defRPr sz="1400" b="0" i="0" u="none" strike="noStrike" cap="none">
           <a:solidFill>
             <a:srgbClr val="000000"/>
           </a:solidFill>
-          <a:latin typeface="Arial"/>
-          <a:ea typeface="Arial"/>
-          <a:cs typeface="Arial"/>
-          <a:sym typeface="Arial"/>
+          <a:latin typeface="Arial" panose="020B0604020202090204"/>
+          <a:ea typeface="Arial" panose="020B0604020202090204"/>
+          <a:cs typeface="Arial" panose="020B0604020202090204"/>
+          <a:sym typeface="Arial" panose="020B0604020202090204"/>
         </a:defRPr>
       </a:lvl1pPr>
       <a:lvl2pPr marR="0" lvl="1" algn="l" rtl="0">
@@ -15888,15 +15730,15 @@
         <a:buClr>
           <a:srgbClr val="000000"/>
         </a:buClr>
-        <a:buFont typeface="Arial"/>
+        <a:buFont typeface="Arial" panose="020B0604020202090204"/>
         <a:defRPr sz="1400" b="0" i="0" u="none" strike="noStrike" cap="none">
           <a:solidFill>
             <a:srgbClr val="000000"/>
           </a:solidFill>
-          <a:latin typeface="Arial"/>
-          <a:ea typeface="Arial"/>
-          <a:cs typeface="Arial"/>
-          <a:sym typeface="Arial"/>
+          <a:latin typeface="Arial" panose="020B0604020202090204"/>
+          <a:ea typeface="Arial" panose="020B0604020202090204"/>
+          <a:cs typeface="Arial" panose="020B0604020202090204"/>
+          <a:sym typeface="Arial" panose="020B0604020202090204"/>
         </a:defRPr>
       </a:lvl2pPr>
       <a:lvl3pPr marR="0" lvl="2" algn="l" rtl="0">
@@ -15912,15 +15754,15 @@
         <a:buClr>
           <a:srgbClr val="000000"/>
         </a:buClr>
-        <a:buFont typeface="Arial"/>
+        <a:buFont typeface="Arial" panose="020B0604020202090204"/>
         <a:defRPr sz="1400" b="0" i="0" u="none" strike="noStrike" cap="none">
           <a:solidFill>
             <a:srgbClr val="000000"/>
           </a:solidFill>
-          <a:latin typeface="Arial"/>
-          <a:ea typeface="Arial"/>
-          <a:cs typeface="Arial"/>
-          <a:sym typeface="Arial"/>
+          <a:latin typeface="Arial" panose="020B0604020202090204"/>
+          <a:ea typeface="Arial" panose="020B0604020202090204"/>
+          <a:cs typeface="Arial" panose="020B0604020202090204"/>
+          <a:sym typeface="Arial" panose="020B0604020202090204"/>
         </a:defRPr>
       </a:lvl3pPr>
       <a:lvl4pPr marR="0" lvl="3" algn="l" rtl="0">
@@ -15936,15 +15778,15 @@
         <a:buClr>
           <a:srgbClr val="000000"/>
         </a:buClr>
-        <a:buFont typeface="Arial"/>
+        <a:buFont typeface="Arial" panose="020B0604020202090204"/>
         <a:defRPr sz="1400" b="0" i="0" u="none" strike="noStrike" cap="none">
           <a:solidFill>
             <a:srgbClr val="000000"/>
           </a:solidFill>
-          <a:latin typeface="Arial"/>
-          <a:ea typeface="Arial"/>
-          <a:cs typeface="Arial"/>
-          <a:sym typeface="Arial"/>
+          <a:latin typeface="Arial" panose="020B0604020202090204"/>
+          <a:ea typeface="Arial" panose="020B0604020202090204"/>
+          <a:cs typeface="Arial" panose="020B0604020202090204"/>
+          <a:sym typeface="Arial" panose="020B0604020202090204"/>
         </a:defRPr>
       </a:lvl4pPr>
       <a:lvl5pPr marR="0" lvl="4" algn="l" rtl="0">
@@ -15960,15 +15802,15 @@
         <a:buClr>
           <a:srgbClr val="000000"/>
         </a:buClr>
-        <a:buFont typeface="Arial"/>
+        <a:buFont typeface="Arial" panose="020B0604020202090204"/>
         <a:defRPr sz="1400" b="0" i="0" u="none" strike="noStrike" cap="none">
           <a:solidFill>
             <a:srgbClr val="000000"/>
           </a:solidFill>
-          <a:latin typeface="Arial"/>
-          <a:ea typeface="Arial"/>
-          <a:cs typeface="Arial"/>
-          <a:sym typeface="Arial"/>
+          <a:latin typeface="Arial" panose="020B0604020202090204"/>
+          <a:ea typeface="Arial" panose="020B0604020202090204"/>
+          <a:cs typeface="Arial" panose="020B0604020202090204"/>
+          <a:sym typeface="Arial" panose="020B0604020202090204"/>
         </a:defRPr>
       </a:lvl5pPr>
       <a:lvl6pPr marR="0" lvl="5" algn="l" rtl="0">
@@ -15984,15 +15826,15 @@
         <a:buClr>
           <a:srgbClr val="000000"/>
         </a:buClr>
-        <a:buFont typeface="Arial"/>
+        <a:buFont typeface="Arial" panose="020B0604020202090204"/>
         <a:defRPr sz="1400" b="0" i="0" u="none" strike="noStrike" cap="none">
           <a:solidFill>
             <a:srgbClr val="000000"/>
           </a:solidFill>
-          <a:latin typeface="Arial"/>
-          <a:ea typeface="Arial"/>
-          <a:cs typeface="Arial"/>
-          <a:sym typeface="Arial"/>
+          <a:latin typeface="Arial" panose="020B0604020202090204"/>
+          <a:ea typeface="Arial" panose="020B0604020202090204"/>
+          <a:cs typeface="Arial" panose="020B0604020202090204"/>
+          <a:sym typeface="Arial" panose="020B0604020202090204"/>
         </a:defRPr>
       </a:lvl6pPr>
       <a:lvl7pPr marR="0" lvl="6" algn="l" rtl="0">
@@ -16008,15 +15850,15 @@
         <a:buClr>
           <a:srgbClr val="000000"/>
         </a:buClr>
-        <a:buFont typeface="Arial"/>
+        <a:buFont typeface="Arial" panose="020B0604020202090204"/>
         <a:defRPr sz="1400" b="0" i="0" u="none" strike="noStrike" cap="none">
           <a:solidFill>
             <a:srgbClr val="000000"/>
           </a:solidFill>
-          <a:latin typeface="Arial"/>
-          <a:ea typeface="Arial"/>
-          <a:cs typeface="Arial"/>
-          <a:sym typeface="Arial"/>
+          <a:latin typeface="Arial" panose="020B0604020202090204"/>
+          <a:ea typeface="Arial" panose="020B0604020202090204"/>
+          <a:cs typeface="Arial" panose="020B0604020202090204"/>
+          <a:sym typeface="Arial" panose="020B0604020202090204"/>
         </a:defRPr>
       </a:lvl7pPr>
       <a:lvl8pPr marR="0" lvl="7" algn="l" rtl="0">
@@ -16032,15 +15874,15 @@
         <a:buClr>
           <a:srgbClr val="000000"/>
         </a:buClr>
-        <a:buFont typeface="Arial"/>
+        <a:buFont typeface="Arial" panose="020B0604020202090204"/>
         <a:defRPr sz="1400" b="0" i="0" u="none" strike="noStrike" cap="none">
           <a:solidFill>
             <a:srgbClr val="000000"/>
           </a:solidFill>
-          <a:latin typeface="Arial"/>
-          <a:ea typeface="Arial"/>
-          <a:cs typeface="Arial"/>
-          <a:sym typeface="Arial"/>
+          <a:latin typeface="Arial" panose="020B0604020202090204"/>
+          <a:ea typeface="Arial" panose="020B0604020202090204"/>
+          <a:cs typeface="Arial" panose="020B0604020202090204"/>
+          <a:sym typeface="Arial" panose="020B0604020202090204"/>
         </a:defRPr>
       </a:lvl8pPr>
       <a:lvl9pPr marR="0" lvl="8" algn="l" rtl="0">
@@ -16056,15 +15898,15 @@
         <a:buClr>
           <a:srgbClr val="000000"/>
         </a:buClr>
-        <a:buFont typeface="Arial"/>
+        <a:buFont typeface="Arial" panose="020B0604020202090204"/>
         <a:defRPr sz="1400" b="0" i="0" u="none" strike="noStrike" cap="none">
           <a:solidFill>
             <a:srgbClr val="000000"/>
           </a:solidFill>
-          <a:latin typeface="Arial"/>
-          <a:ea typeface="Arial"/>
-          <a:cs typeface="Arial"/>
-          <a:sym typeface="Arial"/>
+          <a:latin typeface="Arial" panose="020B0604020202090204"/>
+          <a:ea typeface="Arial" panose="020B0604020202090204"/>
+          <a:cs typeface="Arial" panose="020B0604020202090204"/>
+          <a:sym typeface="Arial" panose="020B0604020202090204"/>
         </a:defRPr>
       </a:lvl9pPr>
     </p:bodyStyle>
@@ -16093,15 +15935,15 @@
         <a:buClr>
           <a:srgbClr val="000000"/>
         </a:buClr>
-        <a:buFont typeface="Arial"/>
+        <a:buFont typeface="Arial" panose="020B0604020202090204"/>
         <a:defRPr sz="1400" b="0" i="0" u="none" strike="noStrike" cap="none">
           <a:solidFill>
             <a:srgbClr val="000000"/>
           </a:solidFill>
-          <a:latin typeface="Arial"/>
-          <a:ea typeface="Arial"/>
-          <a:cs typeface="Arial"/>
-          <a:sym typeface="Arial"/>
+          <a:latin typeface="Arial" panose="020B0604020202090204"/>
+          <a:ea typeface="Arial" panose="020B0604020202090204"/>
+          <a:cs typeface="Arial" panose="020B0604020202090204"/>
+          <a:sym typeface="Arial" panose="020B0604020202090204"/>
         </a:defRPr>
       </a:lvl1pPr>
       <a:lvl2pPr marR="0" lvl="1" algn="l" rtl="0">
@@ -16117,15 +15959,15 @@
         <a:buClr>
           <a:srgbClr val="000000"/>
         </a:buClr>
-        <a:buFont typeface="Arial"/>
+        <a:buFont typeface="Arial" panose="020B0604020202090204"/>
         <a:defRPr sz="1400" b="0" i="0" u="none" strike="noStrike" cap="none">
           <a:solidFill>
             <a:srgbClr val="000000"/>
           </a:solidFill>
-          <a:latin typeface="Arial"/>
-          <a:ea typeface="Arial"/>
-          <a:cs typeface="Arial"/>
-          <a:sym typeface="Arial"/>
+          <a:latin typeface="Arial" panose="020B0604020202090204"/>
+          <a:ea typeface="Arial" panose="020B0604020202090204"/>
+          <a:cs typeface="Arial" panose="020B0604020202090204"/>
+          <a:sym typeface="Arial" panose="020B0604020202090204"/>
         </a:defRPr>
       </a:lvl2pPr>
       <a:lvl3pPr marR="0" lvl="2" algn="l" rtl="0">
@@ -16141,15 +15983,15 @@
         <a:buClr>
           <a:srgbClr val="000000"/>
         </a:buClr>
-        <a:buFont typeface="Arial"/>
+        <a:buFont typeface="Arial" panose="020B0604020202090204"/>
         <a:defRPr sz="1400" b="0" i="0" u="none" strike="noStrike" cap="none">
           <a:solidFill>
             <a:srgbClr val="000000"/>
           </a:solidFill>
-          <a:latin typeface="Arial"/>
-          <a:ea typeface="Arial"/>
-          <a:cs typeface="Arial"/>
-          <a:sym typeface="Arial"/>
+          <a:latin typeface="Arial" panose="020B0604020202090204"/>
+          <a:ea typeface="Arial" panose="020B0604020202090204"/>
+          <a:cs typeface="Arial" panose="020B0604020202090204"/>
+          <a:sym typeface="Arial" panose="020B0604020202090204"/>
         </a:defRPr>
       </a:lvl3pPr>
       <a:lvl4pPr marR="0" lvl="3" algn="l" rtl="0">
@@ -16165,15 +16007,15 @@
         <a:buClr>
           <a:srgbClr val="000000"/>
         </a:buClr>
-        <a:buFont typeface="Arial"/>
+        <a:buFont typeface="Arial" panose="020B0604020202090204"/>
         <a:defRPr sz="1400" b="0" i="0" u="none" strike="noStrike" cap="none">
           <a:solidFill>
             <a:srgbClr val="000000"/>
           </a:solidFill>
-          <a:latin typeface="Arial"/>
-          <a:ea typeface="Arial"/>
-          <a:cs typeface="Arial"/>
-          <a:sym typeface="Arial"/>
+          <a:latin typeface="Arial" panose="020B0604020202090204"/>
+          <a:ea typeface="Arial" panose="020B0604020202090204"/>
+          <a:cs typeface="Arial" panose="020B0604020202090204"/>
+          <a:sym typeface="Arial" panose="020B0604020202090204"/>
         </a:defRPr>
       </a:lvl4pPr>
       <a:lvl5pPr marR="0" lvl="4" algn="l" rtl="0">
@@ -16189,15 +16031,15 @@
         <a:buClr>
           <a:srgbClr val="000000"/>
         </a:buClr>
-        <a:buFont typeface="Arial"/>
+        <a:buFont typeface="Arial" panose="020B0604020202090204"/>
         <a:defRPr sz="1400" b="0" i="0" u="none" strike="noStrike" cap="none">
           <a:solidFill>
             <a:srgbClr val="000000"/>
           </a:solidFill>
-          <a:latin typeface="Arial"/>
-          <a:ea typeface="Arial"/>
-          <a:cs typeface="Arial"/>
-          <a:sym typeface="Arial"/>
+          <a:latin typeface="Arial" panose="020B0604020202090204"/>
+          <a:ea typeface="Arial" panose="020B0604020202090204"/>
+          <a:cs typeface="Arial" panose="020B0604020202090204"/>
+          <a:sym typeface="Arial" panose="020B0604020202090204"/>
         </a:defRPr>
       </a:lvl5pPr>
       <a:lvl6pPr marR="0" lvl="5" algn="l" rtl="0">
@@ -16213,15 +16055,15 @@
         <a:buClr>
           <a:srgbClr val="000000"/>
         </a:buClr>
-        <a:buFont typeface="Arial"/>
+        <a:buFont typeface="Arial" panose="020B0604020202090204"/>
         <a:defRPr sz="1400" b="0" i="0" u="none" strike="noStrike" cap="none">
           <a:solidFill>
             <a:srgbClr val="000000"/>
           </a:solidFill>
-          <a:latin typeface="Arial"/>
-          <a:ea typeface="Arial"/>
-          <a:cs typeface="Arial"/>
-          <a:sym typeface="Arial"/>
+          <a:latin typeface="Arial" panose="020B0604020202090204"/>
+          <a:ea typeface="Arial" panose="020B0604020202090204"/>
+          <a:cs typeface="Arial" panose="020B0604020202090204"/>
+          <a:sym typeface="Arial" panose="020B0604020202090204"/>
         </a:defRPr>
       </a:lvl6pPr>
       <a:lvl7pPr marR="0" lvl="6" algn="l" rtl="0">
@@ -16237,15 +16079,15 @@
         <a:buClr>
           <a:srgbClr val="000000"/>
         </a:buClr>
-        <a:buFont typeface="Arial"/>
+        <a:buFont typeface="Arial" panose="020B0604020202090204"/>
         <a:defRPr sz="1400" b="0" i="0" u="none" strike="noStrike" cap="none">
           <a:solidFill>
             <a:srgbClr val="000000"/>
           </a:solidFill>
-          <a:latin typeface="Arial"/>
-          <a:ea typeface="Arial"/>
-          <a:cs typeface="Arial"/>
-          <a:sym typeface="Arial"/>
+          <a:latin typeface="Arial" panose="020B0604020202090204"/>
+          <a:ea typeface="Arial" panose="020B0604020202090204"/>
+          <a:cs typeface="Arial" panose="020B0604020202090204"/>
+          <a:sym typeface="Arial" panose="020B0604020202090204"/>
         </a:defRPr>
       </a:lvl7pPr>
       <a:lvl8pPr marR="0" lvl="7" algn="l" rtl="0">
@@ -16261,15 +16103,15 @@
         <a:buClr>
           <a:srgbClr val="000000"/>
         </a:buClr>
-        <a:buFont typeface="Arial"/>
+        <a:buFont typeface="Arial" panose="020B0604020202090204"/>
         <a:defRPr sz="1400" b="0" i="0" u="none" strike="noStrike" cap="none">
           <a:solidFill>
             <a:srgbClr val="000000"/>
           </a:solidFill>
-          <a:latin typeface="Arial"/>
-          <a:ea typeface="Arial"/>
-          <a:cs typeface="Arial"/>
-          <a:sym typeface="Arial"/>
+          <a:latin typeface="Arial" panose="020B0604020202090204"/>
+          <a:ea typeface="Arial" panose="020B0604020202090204"/>
+          <a:cs typeface="Arial" panose="020B0604020202090204"/>
+          <a:sym typeface="Arial" panose="020B0604020202090204"/>
         </a:defRPr>
       </a:lvl8pPr>
       <a:lvl9pPr marR="0" lvl="8" algn="l" rtl="0">
@@ -16285,15 +16127,15 @@
         <a:buClr>
           <a:srgbClr val="000000"/>
         </a:buClr>
-        <a:buFont typeface="Arial"/>
+        <a:buFont typeface="Arial" panose="020B0604020202090204"/>
         <a:defRPr sz="1400" b="0" i="0" u="none" strike="noStrike" cap="none">
           <a:solidFill>
             <a:srgbClr val="000000"/>
           </a:solidFill>
-          <a:latin typeface="Arial"/>
-          <a:ea typeface="Arial"/>
-          <a:cs typeface="Arial"/>
-          <a:sym typeface="Arial"/>
+          <a:latin typeface="Arial" panose="020B0604020202090204"/>
+          <a:ea typeface="Arial" panose="020B0604020202090204"/>
+          <a:cs typeface="Arial" panose="020B0604020202090204"/>
+          <a:sym typeface="Arial" panose="020B0604020202090204"/>
         </a:defRPr>
       </a:lvl9pPr>
     </p:otherStyle>
@@ -16352,6 +16194,7 @@
               <a:rPr lang="zh-CN" altLang="en-US"/>
               <a:t>单击此处编辑母版标题样式</a:t>
             </a:r>
+            <a:endParaRPr lang="zh-CN" altLang="en-US"/>
           </a:p>
         </p:txBody>
       </p:sp>
@@ -16385,6 +16228,7 @@
               <a:rPr lang="zh-CN" altLang="en-US" dirty="0"/>
               <a:t>单击此处编辑母版文本样式</a:t>
             </a:r>
+            <a:endParaRPr lang="zh-CN" altLang="en-US" dirty="0"/>
           </a:p>
           <a:p>
             <a:pPr lvl="1"/>
@@ -16392,6 +16236,7 @@
               <a:rPr lang="zh-CN" altLang="en-US" dirty="0"/>
               <a:t>二级</a:t>
             </a:r>
+            <a:endParaRPr lang="zh-CN" altLang="en-US" dirty="0"/>
           </a:p>
           <a:p>
             <a:pPr lvl="2"/>
@@ -16399,6 +16244,7 @@
               <a:rPr lang="zh-CN" altLang="en-US" dirty="0"/>
               <a:t>三级</a:t>
             </a:r>
+            <a:endParaRPr lang="zh-CN" altLang="en-US" dirty="0"/>
           </a:p>
           <a:p>
             <a:pPr lvl="3"/>
@@ -16406,6 +16252,7 @@
               <a:rPr lang="zh-CN" altLang="en-US" dirty="0"/>
               <a:t>四级</a:t>
             </a:r>
+            <a:endParaRPr lang="zh-CN" altLang="en-US" dirty="0"/>
           </a:p>
           <a:p>
             <a:pPr lvl="4"/>
@@ -16413,6 +16260,7 @@
               <a:rPr lang="zh-CN" altLang="en-US" dirty="0"/>
               <a:t>五级</a:t>
             </a:r>
+            <a:endParaRPr lang="zh-CN" altLang="en-US" dirty="0"/>
           </a:p>
         </p:txBody>
       </p:sp>
@@ -16453,8 +16301,6 @@
           <a:p>
             <a:fld id="{BC5B3004-400C-43A5-AC96-1EF96FAF3383}" type="datetimeFigureOut">
               <a:rPr lang="zh-CN" altLang="en-US" smtClean="0"/>
-              <a:pPr/>
-              <a:t>2026/6/10</a:t>
             </a:fld>
             <a:endParaRPr lang="zh-CN" altLang="en-US" dirty="0"/>
           </a:p>
@@ -16536,37 +16382,30 @@
           <a:p>
             <a:fld id="{2D2F81BE-ADF2-46EA-A947-332EC6F994A9}" type="slidenum">
               <a:rPr lang="zh-CN" altLang="en-US" smtClean="0"/>
-              <a:pPr/>
-              <a:t>‹#›</a:t>
             </a:fld>
             <a:endParaRPr lang="zh-CN" altLang="en-US" dirty="0"/>
           </a:p>
         </p:txBody>
       </p:sp>
     </p:spTree>
-    <p:extLst>
-      <p:ext uri="{BB962C8B-B14F-4D97-AF65-F5344CB8AC3E}">
-        <p14:creationId xmlns:p14="http://schemas.microsoft.com/office/powerpoint/2010/main" val="1937156391"/>
-      </p:ext>
-    </p:extLst>
   </p:cSld>
   <p:clrMap bg1="lt1" tx1="dk1" bg2="lt2" tx2="dk2" accent1="accent1" accent2="accent2" accent3="accent3" accent4="accent4" accent5="accent5" accent6="accent6" hlink="hlink" folHlink="folHlink"/>
   <p:sldLayoutIdLst>
-    <p:sldLayoutId id="2157483701" r:id="rId1"/>
-    <p:sldLayoutId id="2157483702" r:id="rId2"/>
-    <p:sldLayoutId id="2157483703" r:id="rId3"/>
-    <p:sldLayoutId id="2157483704" r:id="rId4"/>
-    <p:sldLayoutId id="2157483705" r:id="rId5"/>
-    <p:sldLayoutId id="2157483706" r:id="rId6"/>
-    <p:sldLayoutId id="2157483707" r:id="rId7"/>
-    <p:sldLayoutId id="2157483708" r:id="rId8"/>
-    <p:sldLayoutId id="2157483709" r:id="rId9"/>
-    <p:sldLayoutId id="2157483710" r:id="rId10"/>
-    <p:sldLayoutId id="2157483711" r:id="rId11"/>
-    <p:sldLayoutId id="2157483712" r:id="rId12"/>
-    <p:sldLayoutId id="2157483713" r:id="rId13"/>
-    <p:sldLayoutId id="2157483714" r:id="rId14"/>
-    <p:sldLayoutId id="2157483715" r:id="rId15"/>
+    <p:sldLayoutId id="2147483663" r:id="rId1"/>
+    <p:sldLayoutId id="2147483664" r:id="rId2"/>
+    <p:sldLayoutId id="2147483665" r:id="rId3"/>
+    <p:sldLayoutId id="2147483666" r:id="rId4"/>
+    <p:sldLayoutId id="2147483667" r:id="rId5"/>
+    <p:sldLayoutId id="2147483668" r:id="rId6"/>
+    <p:sldLayoutId id="2147483669" r:id="rId7"/>
+    <p:sldLayoutId id="2147483670" r:id="rId8"/>
+    <p:sldLayoutId id="2147483671" r:id="rId9"/>
+    <p:sldLayoutId id="2147483672" r:id="rId10"/>
+    <p:sldLayoutId id="2147483673" r:id="rId11"/>
+    <p:sldLayoutId id="2147483674" r:id="rId12"/>
+    <p:sldLayoutId id="2147483675" r:id="rId13"/>
+    <p:sldLayoutId id="2147483676" r:id="rId14"/>
+    <p:sldLayoutId id="2147483677" r:id="rId15"/>
   </p:sldLayoutIdLst>
   <p:txStyles>
     <p:titleStyle>
@@ -16596,7 +16435,7 @@
         <a:spcBef>
           <a:spcPts val="1000"/>
         </a:spcBef>
-        <a:buFont typeface="Arial" panose="02080604020202020204" pitchFamily="34" charset="0"/>
+        <a:buFont typeface="Arial" panose="020B0604020202090204" pitchFamily="34" charset="0"/>
         <a:buChar char="•"/>
         <a:defRPr sz="2800" kern="1200">
           <a:solidFill>
@@ -16614,7 +16453,7 @@
         <a:spcBef>
           <a:spcPts val="500"/>
         </a:spcBef>
-        <a:buFont typeface="Arial" panose="02080604020202020204" pitchFamily="34" charset="0"/>
+        <a:buFont typeface="Arial" panose="020B0604020202090204" pitchFamily="34" charset="0"/>
         <a:buChar char="•"/>
         <a:defRPr sz="2400" kern="1200">
           <a:solidFill>
@@ -16632,7 +16471,7 @@
         <a:spcBef>
           <a:spcPts val="500"/>
         </a:spcBef>
-        <a:buFont typeface="Arial" panose="02080604020202020204" pitchFamily="34" charset="0"/>
+        <a:buFont typeface="Arial" panose="020B0604020202090204" pitchFamily="34" charset="0"/>
         <a:buChar char="•"/>
         <a:defRPr sz="2000" kern="1200">
           <a:solidFill>
@@ -16650,7 +16489,7 @@
         <a:spcBef>
           <a:spcPts val="500"/>
         </a:spcBef>
-        <a:buFont typeface="Arial" panose="02080604020202020204" pitchFamily="34" charset="0"/>
+        <a:buFont typeface="Arial" panose="020B0604020202090204" pitchFamily="34" charset="0"/>
         <a:buChar char="•"/>
         <a:defRPr sz="1800" kern="1200">
           <a:solidFill>
@@ -16668,7 +16507,7 @@
         <a:spcBef>
           <a:spcPts val="500"/>
         </a:spcBef>
-        <a:buFont typeface="Arial" panose="02080604020202020204" pitchFamily="34" charset="0"/>
+        <a:buFont typeface="Arial" panose="020B0604020202090204" pitchFamily="34" charset="0"/>
         <a:buChar char="•"/>
         <a:defRPr sz="1800" kern="1200">
           <a:solidFill>
@@ -16686,7 +16525,7 @@
         <a:spcBef>
           <a:spcPts val="500"/>
         </a:spcBef>
-        <a:buFont typeface="Arial" panose="02080604020202020204" pitchFamily="34" charset="0"/>
+        <a:buFont typeface="Arial" panose="020B0604020202090204" pitchFamily="34" charset="0"/>
         <a:buChar char="•"/>
         <a:defRPr sz="1800" kern="1200">
           <a:solidFill>
@@ -16704,7 +16543,7 @@
         <a:spcBef>
           <a:spcPts val="500"/>
         </a:spcBef>
-        <a:buFont typeface="Arial" panose="02080604020202020204" pitchFamily="34" charset="0"/>
+        <a:buFont typeface="Arial" panose="020B0604020202090204" pitchFamily="34" charset="0"/>
         <a:buChar char="•"/>
         <a:defRPr sz="1800" kern="1200">
           <a:solidFill>
@@ -16722,7 +16561,7 @@
         <a:spcBef>
           <a:spcPts val="500"/>
         </a:spcBef>
-        <a:buFont typeface="Arial" panose="02080604020202020204" pitchFamily="34" charset="0"/>
+        <a:buFont typeface="Arial" panose="020B0604020202090204" pitchFamily="34" charset="0"/>
         <a:buChar char="•"/>
         <a:defRPr sz="1800" kern="1200">
           <a:solidFill>
@@ -16740,7 +16579,7 @@
         <a:spcBef>
           <a:spcPts val="500"/>
         </a:spcBef>
-        <a:buFont typeface="Arial" panose="02080604020202020204" pitchFamily="34" charset="0"/>
+        <a:buFont typeface="Arial" panose="020B0604020202090204" pitchFamily="34" charset="0"/>
         <a:buChar char="•"/>
         <a:defRPr sz="1800" kern="1200">
           <a:solidFill>
@@ -16904,6 +16743,10 @@
               </a:rPr>
               <a:t/>
             </a:r>
+            <a:endParaRPr lang="zh-CN" altLang="en-US" sz="4800" b="1" spc="16" dirty="0">
+              <a:cs typeface="等线" panose="02010600030101010101" charset="-122"/>
+              <a:sym typeface="+mn-ea"/>
+            </a:endParaRPr>
           </a:p>
         </p:txBody>
       </p:sp>
@@ -16940,6 +16783,7 @@
               <a:rPr lang="en-US" altLang="zh-CN" sz="2000" b="1" dirty="0"/>
               <a:t/>
             </a:r>
+            <a:endParaRPr lang="en-US" altLang="zh-CN" sz="2000" b="1" dirty="0"/>
           </a:p>
         </p:txBody>
       </p:sp>
@@ -16948,13 +16792,13 @@
   <p:clrMapOvr>
     <a:masterClrMapping/>
   </p:clrMapOvr>
-  <mc:AlternateContent xmlns:mc="http://schemas.openxmlformats.org/markup-compatibility/2006" xmlns:p14="http://schemas.microsoft.com/office/powerpoint/2010/main">
-    <mc:Choice Requires="p14">
+  <mc:AlternateContent xmlns:mc="http://schemas.openxmlformats.org/markup-compatibility/2006">
+    <mc:Choice xmlns:p14="http://schemas.microsoft.com/office/powerpoint/2010/main" Requires="p14">
       <p:transition spd="med" p14:dur="700">
         <p:fade/>
       </p:transition>
     </mc:Choice>
-    <mc:Fallback xmlns="">
+    <mc:Fallback>
       <p:transition spd="med">
         <p:fade/>
       </p:transition>
@@ -17037,13 +16881,7 @@
       </p:sp>
       <p:sp>
         <p:nvSpPr>
-          <p:cNvPr id="39" name="AutoShape 5">
-            <a:extLst>
-              <a:ext uri="{FF2B5EF4-FFF2-40B4-BE49-F238E27FC236}">
-                <a16:creationId xmlns:a16="http://schemas.microsoft.com/office/drawing/2014/main" id="{5B242649-18F9-4966-A261-29F5F6606005}"/>
-              </a:ext>
-            </a:extLst>
-          </p:cNvPr>
+          <p:cNvPr id="39" name="AutoShape 5"/>
           <p:cNvSpPr/>
           <p:nvPr/>
         </p:nvSpPr>
@@ -17223,13 +17061,13 @@
           <p:nvPr/>
         </p:nvPicPr>
         <p:blipFill>
-          <a:blip r:embed="rId3">
+          <a:blip r:embed="rId1">
             <a:extLst>
               <a:ext uri="{28A0092B-C50C-407E-A947-70E740481C1C}">
                 <a14:useLocalDpi xmlns:a14="http://schemas.microsoft.com/office/drawing/2010/main" val="0"/>
               </a:ext>
               <a:ext uri="{96DAC541-7B7A-43D3-8B79-37D633B846F1}">
-                <asvg:svgBlip xmlns:asvg="http://schemas.microsoft.com/office/drawing/2016/SVG/main" r:embed="rId4"/>
+                <asvg:svgBlip xmlns:asvg="http://schemas.microsoft.com/office/drawing/2016/SVG/main" r:embed="rId2"/>
               </a:ext>
             </a:extLst>
           </a:blip>
@@ -17300,9 +17138,7 @@
       <p:cxnSp>
         <p:nvCxnSpPr>
           <p:cNvPr id="9" name="Connector 9"/>
-          <p:cNvCxnSpPr>
-            <a:cxnSpLocks/>
-          </p:cNvCxnSpPr>
+          <p:cNvCxnSpPr/>
           <p:nvPr/>
         </p:nvCxnSpPr>
         <p:spPr>
@@ -17381,16 +17217,48 @@
           </a:p>
         </p:txBody>
       </p:sp>
-      <p:sp>
-        <p:nvSpPr>
-          <p:cNvPr id="11" name="text.project_overview_summary"/>
+      <p:cxnSp>
+        <p:nvCxnSpPr>
+          <p:cNvPr id="12" name="Connector 12"/>
+          <p:cNvCxnSpPr/>
+          <p:nvPr/>
+        </p:nvCxnSpPr>
+        <p:spPr>
+          <a:xfrm>
+            <a:off x="913943" y="4513451"/>
+            <a:ext cx="4826016" cy="0"/>
+          </a:xfrm>
+          <a:prstGeom prst="straightConnector1">
+            <a:avLst/>
+          </a:prstGeom>
+          <a:solidFill>
+            <a:srgbClr val="DEE0E3">
+              <a:alpha val="100000"/>
+            </a:srgbClr>
+          </a:solidFill>
+          <a:ln w="6350" cap="flat" cmpd="sng">
+            <a:solidFill>
+              <a:schemeClr val="bg1">
+                <a:lumMod val="75000"/>
+              </a:schemeClr>
+            </a:solidFill>
+            <a:prstDash val="dash"/>
+            <a:round/>
+            <a:headEnd type="none" w="med" len="med"/>
+            <a:tailEnd type="none" w="med" len="med"/>
+          </a:ln>
+        </p:spPr>
+      </p:cxnSp>
+      <p:sp>
+        <p:nvSpPr>
+          <p:cNvPr id="13" name="AutoShape 13"/>
           <p:cNvSpPr/>
           <p:nvPr/>
         </p:nvSpPr>
         <p:spPr>
           <a:xfrm>
-            <a:off x="2362430" y="3159513"/>
-            <a:ext cx="3365500" cy="609351"/>
+            <a:off x="868809" y="3963433"/>
+            <a:ext cx="1270000" cy="421006"/>
           </a:xfrm>
           <a:prstGeom prst="rect">
             <a:avLst/>
@@ -17408,7 +17276,1299 @@
           <a:p>
             <a:pPr marL="0" indent="0" algn="l">
               <a:lnSpc>
-                <a:spcPct val="116666"/>
+                <a:spcPct val="125000"/>
+              </a:lnSpc>
+              <a:defRPr/>
+            </a:pPr>
+            <a:r>
+              <a:rPr lang="en-US" sz="1600" b="1" i="0" u="none" strike="noStrike" dirty="0">
+                <a:solidFill>
+                  <a:srgbClr val="333333"/>
+                </a:solidFill>
+                <a:latin typeface="微软雅黑" panose="020B0503020204020204" pitchFamily="34" charset="-122"/>
+                <a:ea typeface="微软雅黑" panose="020B0503020204020204" pitchFamily="34" charset="-122"/>
+                <a:cs typeface="Noto Sans SC"/>
+                <a:sym typeface="Noto Sans SC"/>
+              </a:rPr>
+              <a:t>项目编码</a:t>
+            </a:r>
+            <a:endParaRPr lang="en-US" sz="1100" dirty="0">
+              <a:latin typeface="微软雅黑" panose="020B0503020204020204" pitchFamily="34" charset="-122"/>
+              <a:ea typeface="微软雅黑" panose="020B0503020204020204" pitchFamily="34" charset="-122"/>
+            </a:endParaRPr>
+          </a:p>
+        </p:txBody>
+      </p:sp>
+      <p:sp>
+        <p:nvSpPr>
+          <p:cNvPr id="14" name="text.project_name"/>
+          <p:cNvSpPr/>
+          <p:nvPr/>
+        </p:nvSpPr>
+        <p:spPr>
+          <a:xfrm>
+            <a:off x="2138892" y="3113218"/>
+            <a:ext cx="3365500" cy="664746"/>
+          </a:xfrm>
+          <a:prstGeom prst="rect">
+            <a:avLst/>
+          </a:prstGeom>
+          <a:noFill/>
+          <a:ln w="12700" cap="flat" cmpd="sng">
+            <a:noFill/>
+            <a:prstDash val="solid"/>
+            <a:round/>
+          </a:ln>
+        </p:spPr>
+        <p:txBody>
+          <a:bodyPr vert="horz" wrap="square" lIns="0" tIns="0" rIns="0" bIns="0" rtlCol="0" anchor="ctr" anchorCtr="0"/>
+          <a:lstStyle/>
+          <a:p>
+            <a:pPr marL="0" indent="0" algn="l">
+              <a:lnSpc>
+                <a:spcPct val="117000"/>
+              </a:lnSpc>
+              <a:defRPr/>
+            </a:pPr>
+            <a:r>
+              <a:rPr lang="en-US" sz="1600" b="0" i="0" u="none" strike="noStrike" dirty="0">
+                <a:solidFill>
+                  <a:schemeClr val="tx1"/>
+                </a:solidFill>
+                <a:latin typeface="微软雅黑" panose="020B0503020204020204" pitchFamily="34" charset="-122"/>
+                <a:ea typeface="微软雅黑" panose="020B0503020204020204" pitchFamily="34" charset="-122"/>
+                <a:cs typeface="Noto Sans SC"/>
+                <a:sym typeface="Noto Sans SC"/>
+              </a:rPr>
+              <a:t>智能制造中台项目</a:t>
+            </a:r>
+            <a:r>
+              <a:rPr lang="en-US" sz="1600" b="0" i="0" u="none" strike="noStrike" dirty="0">
+                <a:solidFill>
+                  <a:srgbClr val="C00000"/>
+                </a:solidFill>
+                <a:latin typeface="微软雅黑" panose="020B0503020204020204" pitchFamily="34" charset="-122"/>
+                <a:ea typeface="微软雅黑" panose="020B0503020204020204" pitchFamily="34" charset="-122"/>
+                <a:cs typeface="Noto Sans SC"/>
+                <a:sym typeface="Noto Sans SC"/>
+              </a:rPr>
+              <a:t/>
+            </a:r>
+            <a:r>
+              <a:rPr lang="en-US" sz="1600" b="0" i="0" u="none" strike="noStrike" dirty="0">
+                <a:solidFill>
+                  <a:schemeClr val="tx1"/>
+                </a:solidFill>
+                <a:latin typeface="微软雅黑" panose="020B0503020204020204" pitchFamily="34" charset="-122"/>
+                <a:ea typeface="微软雅黑" panose="020B0503020204020204" pitchFamily="34" charset="-122"/>
+                <a:cs typeface="Noto Sans SC"/>
+                <a:sym typeface="Noto Sans SC"/>
+              </a:rPr>
+              <a:t/>
+            </a:r>
+            <a:endParaRPr lang="en-US" sz="1100" dirty="0">
+              <a:solidFill>
+                <a:schemeClr val="tx1"/>
+              </a:solidFill>
+              <a:latin typeface="微软雅黑" panose="020B0503020204020204" pitchFamily="34" charset="-122"/>
+              <a:ea typeface="微软雅黑" panose="020B0503020204020204" pitchFamily="34" charset="-122"/>
+            </a:endParaRPr>
+          </a:p>
+        </p:txBody>
+      </p:sp>
+      <p:sp>
+        <p:nvSpPr>
+          <p:cNvPr id="15" name="AutoShape 15"/>
+          <p:cNvSpPr/>
+          <p:nvPr/>
+        </p:nvSpPr>
+        <p:spPr>
+          <a:xfrm>
+            <a:off x="868809" y="4532604"/>
+            <a:ext cx="1270000" cy="561208"/>
+          </a:xfrm>
+          <a:prstGeom prst="rect">
+            <a:avLst/>
+          </a:prstGeom>
+          <a:noFill/>
+          <a:ln w="12700" cap="flat" cmpd="sng">
+            <a:noFill/>
+            <a:prstDash val="solid"/>
+            <a:round/>
+          </a:ln>
+        </p:spPr>
+        <p:txBody>
+          <a:bodyPr vert="horz" wrap="square" lIns="0" tIns="0" rIns="0" bIns="0" rtlCol="0" anchor="ctr" anchorCtr="0"/>
+          <a:lstStyle/>
+          <a:p>
+            <a:pPr marL="0" indent="0" algn="l">
+              <a:lnSpc>
+                <a:spcPct val="125000"/>
+              </a:lnSpc>
+              <a:defRPr/>
+            </a:pPr>
+            <a:r>
+              <a:rPr lang="en-US" sz="1600" b="1" i="0" u="none" strike="noStrike" dirty="0">
+                <a:solidFill>
+                  <a:srgbClr val="333333"/>
+                </a:solidFill>
+                <a:latin typeface="微软雅黑" panose="020B0503020204020204" pitchFamily="34" charset="-122"/>
+                <a:ea typeface="微软雅黑" panose="020B0503020204020204" pitchFamily="34" charset="-122"/>
+                <a:cs typeface="Noto Sans SC"/>
+                <a:sym typeface="Noto Sans SC"/>
+              </a:rPr>
+              <a:t>客户名称</a:t>
+            </a:r>
+            <a:endParaRPr lang="en-US" sz="1100" dirty="0">
+              <a:latin typeface="微软雅黑" panose="020B0503020204020204" pitchFamily="34" charset="-122"/>
+              <a:ea typeface="微软雅黑" panose="020B0503020204020204" pitchFamily="34" charset="-122"/>
+            </a:endParaRPr>
+          </a:p>
+        </p:txBody>
+      </p:sp>
+      <p:sp>
+        <p:nvSpPr>
+          <p:cNvPr id="16" name="text.project_code"/>
+          <p:cNvSpPr/>
+          <p:nvPr/>
+        </p:nvSpPr>
+        <p:spPr>
+          <a:xfrm>
+            <a:off x="2289796" y="3897841"/>
+            <a:ext cx="3365500" cy="545494"/>
+          </a:xfrm>
+          <a:prstGeom prst="rect">
+            <a:avLst/>
+          </a:prstGeom>
+          <a:noFill/>
+          <a:ln w="12700" cap="flat" cmpd="sng">
+            <a:noFill/>
+            <a:prstDash val="solid"/>
+            <a:round/>
+          </a:ln>
+        </p:spPr>
+        <p:txBody>
+          <a:bodyPr vert="horz" wrap="square" lIns="0" tIns="0" rIns="0" bIns="0" rtlCol="0" anchor="ctr" anchorCtr="0"/>
+          <a:lstStyle/>
+          <a:p>
+            <a:pPr marL="0" indent="0" algn="l">
+              <a:lnSpc>
+                <a:spcPct val="117000"/>
+              </a:lnSpc>
+              <a:defRPr/>
+            </a:pPr>
+            <a:r>
+              <a:rPr lang="en-US" sz="1600" b="0" i="0" u="none" strike="noStrike" dirty="0">
+                <a:solidFill>
+                  <a:schemeClr val="tx1"/>
+                </a:solidFill>
+                <a:latin typeface="微软雅黑" panose="020B0503020204020204" pitchFamily="34" charset="-122"/>
+                <a:ea typeface="微软雅黑" panose="020B0503020204020204" pitchFamily="34" charset="-122"/>
+                <a:cs typeface="Noto Sans SC"/>
+                <a:sym typeface="Noto Sans SC"/>
+              </a:rPr>
+              <a:t>PRJ-2026-0610</a:t>
+            </a:r>
+            <a:r>
+              <a:rPr lang="en-US" sz="1600" b="0" i="0" u="none" strike="noStrike" dirty="0">
+                <a:solidFill>
+                  <a:srgbClr val="C00000"/>
+                </a:solidFill>
+                <a:latin typeface="微软雅黑" panose="020B0503020204020204" pitchFamily="34" charset="-122"/>
+                <a:ea typeface="微软雅黑" panose="020B0503020204020204" pitchFamily="34" charset="-122"/>
+                <a:cs typeface="Noto Sans SC"/>
+                <a:sym typeface="Noto Sans SC"/>
+              </a:rPr>
+              <a:t/>
+            </a:r>
+            <a:r>
+              <a:rPr lang="en-US" sz="1600" b="0" i="0" u="none" strike="noStrike" dirty="0">
+                <a:solidFill>
+                  <a:schemeClr val="tx1"/>
+                </a:solidFill>
+                <a:latin typeface="微软雅黑" panose="020B0503020204020204" pitchFamily="34" charset="-122"/>
+                <a:ea typeface="微软雅黑" panose="020B0503020204020204" pitchFamily="34" charset="-122"/>
+                <a:cs typeface="Noto Sans SC"/>
+                <a:sym typeface="Noto Sans SC"/>
+              </a:rPr>
+              <a:t/>
+            </a:r>
+            <a:endParaRPr lang="en-US" sz="1100" dirty="0">
+              <a:solidFill>
+                <a:schemeClr val="tx1"/>
+              </a:solidFill>
+              <a:latin typeface="微软雅黑" panose="020B0503020204020204" pitchFamily="34" charset="-122"/>
+              <a:ea typeface="微软雅黑" panose="020B0503020204020204" pitchFamily="34" charset="-122"/>
+            </a:endParaRPr>
+          </a:p>
+        </p:txBody>
+      </p:sp>
+      <p:sp>
+        <p:nvSpPr>
+          <p:cNvPr id="17" name="AutoShape 17"/>
+          <p:cNvSpPr/>
+          <p:nvPr/>
+        </p:nvSpPr>
+        <p:spPr>
+          <a:xfrm>
+            <a:off x="6184207" y="2544951"/>
+            <a:ext cx="5207000" cy="3403601"/>
+          </a:xfrm>
+          <a:prstGeom prst="roundRect">
+            <a:avLst>
+              <a:gd name="adj" fmla="val 0"/>
+            </a:avLst>
+          </a:prstGeom>
+          <a:solidFill>
+            <a:srgbClr val="F9FAFB">
+              <a:alpha val="100000"/>
+            </a:srgbClr>
+          </a:solidFill>
+          <a:ln w="12700" cap="flat" cmpd="sng">
+            <a:solidFill>
+              <a:srgbClr val="E5E7EB">
+                <a:alpha val="100000"/>
+              </a:srgbClr>
+            </a:solidFill>
+            <a:prstDash val="solid"/>
+            <a:round/>
+          </a:ln>
+        </p:spPr>
+        <p:txBody>
+          <a:bodyPr vert="horz" wrap="square" lIns="63500" tIns="63500" rIns="63500" bIns="63500" rtlCol="0" anchor="ctr"/>
+          <a:lstStyle/>
+          <a:p>
+            <a:pPr algn="ctr">
+              <a:defRPr/>
+            </a:pPr>
+            <a:endParaRPr>
+              <a:latin typeface="微软雅黑" panose="020B0503020204020204" pitchFamily="34" charset="-122"/>
+              <a:ea typeface="微软雅黑" panose="020B0503020204020204" pitchFamily="34" charset="-122"/>
+            </a:endParaRPr>
+          </a:p>
+        </p:txBody>
+      </p:sp>
+      <p:sp>
+        <p:nvSpPr>
+          <p:cNvPr id="18" name="AutoShape 18"/>
+          <p:cNvSpPr/>
+          <p:nvPr/>
+        </p:nvSpPr>
+        <p:spPr>
+          <a:xfrm>
+            <a:off x="6178319" y="2544951"/>
+            <a:ext cx="5207000" cy="531797"/>
+          </a:xfrm>
+          <a:prstGeom prst="roundRect">
+            <a:avLst>
+              <a:gd name="adj" fmla="val 0"/>
+            </a:avLst>
+          </a:prstGeom>
+          <a:solidFill>
+            <a:srgbClr val="0052CC">
+              <a:alpha val="100000"/>
+            </a:srgbClr>
+          </a:solidFill>
+          <a:ln w="25400" cap="flat" cmpd="sng">
+            <a:noFill/>
+            <a:prstDash val="solid"/>
+            <a:round/>
+          </a:ln>
+        </p:spPr>
+        <p:txBody>
+          <a:bodyPr vert="horz" wrap="square" lIns="63500" tIns="63500" rIns="63500" bIns="63500" rtlCol="0" anchor="ctr"/>
+          <a:lstStyle/>
+          <a:p>
+            <a:pPr algn="ctr">
+              <a:defRPr/>
+            </a:pPr>
+            <a:endParaRPr>
+              <a:latin typeface="微软雅黑" panose="020B0503020204020204" pitchFamily="34" charset="-122"/>
+              <a:ea typeface="微软雅黑" panose="020B0503020204020204" pitchFamily="34" charset="-122"/>
+            </a:endParaRPr>
+          </a:p>
+        </p:txBody>
+      </p:sp>
+      <p:pic>
+        <p:nvPicPr>
+          <p:cNvPr id="19" name="Picture 19"/>
+          <p:cNvPicPr>
+            <a:picLocks noChangeAspect="1"/>
+          </p:cNvPicPr>
+          <p:nvPr/>
+        </p:nvPicPr>
+        <p:blipFill>
+          <a:blip r:embed="rId3">
+            <a:extLst>
+              <a:ext uri="{28A0092B-C50C-407E-A947-70E740481C1C}">
+                <a14:useLocalDpi xmlns:a14="http://schemas.microsoft.com/office/drawing/2010/main" val="0"/>
+              </a:ext>
+              <a:ext uri="{96DAC541-7B7A-43D3-8B79-37D633B846F1}">
+                <asvg:svgBlip xmlns:asvg="http://schemas.microsoft.com/office/drawing/2016/SVG/main" r:embed="rId4"/>
+              </a:ext>
+            </a:extLst>
+          </a:blip>
+          <a:stretch>
+            <a:fillRect/>
+          </a:stretch>
+        </p:blipFill>
+        <p:spPr>
+          <a:xfrm>
+            <a:off x="6368819" y="2697351"/>
+            <a:ext cx="304800" cy="265899"/>
+          </a:xfrm>
+          <a:prstGeom prst="rect">
+            <a:avLst/>
+          </a:prstGeom>
+        </p:spPr>
+      </p:pic>
+      <p:sp>
+        <p:nvSpPr>
+          <p:cNvPr id="20" name="AutoShape 20"/>
+          <p:cNvSpPr/>
+          <p:nvPr/>
+        </p:nvSpPr>
+        <p:spPr>
+          <a:xfrm>
+            <a:off x="6813319" y="2589267"/>
+            <a:ext cx="4318000" cy="443164"/>
+          </a:xfrm>
+          <a:prstGeom prst="rect">
+            <a:avLst/>
+          </a:prstGeom>
+          <a:noFill/>
+          <a:ln w="12700" cap="flat" cmpd="sng">
+            <a:noFill/>
+            <a:prstDash val="solid"/>
+            <a:round/>
+          </a:ln>
+        </p:spPr>
+        <p:txBody>
+          <a:bodyPr vert="horz" wrap="square" lIns="0" tIns="0" rIns="0" bIns="0" rtlCol="0" anchor="ctr" anchorCtr="0"/>
+          <a:lstStyle/>
+          <a:p>
+            <a:pPr marL="0" indent="0" algn="l">
+              <a:lnSpc>
+                <a:spcPct val="125000"/>
+              </a:lnSpc>
+              <a:defRPr/>
+            </a:pPr>
+            <a:r>
+              <a:rPr lang="en-US" sz="1600" b="1" i="0" u="none" strike="noStrike" dirty="0">
+                <a:solidFill>
+                  <a:srgbClr val="FFFFFF"/>
+                </a:solidFill>
+                <a:latin typeface="微软雅黑" panose="020B0503020204020204" pitchFamily="34" charset="-122"/>
+                <a:ea typeface="微软雅黑" panose="020B0503020204020204" pitchFamily="34" charset="-122"/>
+                <a:cs typeface="Noto Sans SC"/>
+                <a:sym typeface="Noto Sans SC"/>
+              </a:rPr>
+              <a:t>项目</a:t>
+            </a:r>
+            <a:r>
+              <a:rPr lang="zh-CN" altLang="en-US" sz="1600" b="1" i="0" u="none" strike="noStrike" dirty="0">
+                <a:solidFill>
+                  <a:srgbClr val="FFFFFF"/>
+                </a:solidFill>
+                <a:latin typeface="微软雅黑" panose="020B0503020204020204" pitchFamily="34" charset="-122"/>
+                <a:ea typeface="微软雅黑" panose="020B0503020204020204" pitchFamily="34" charset="-122"/>
+                <a:cs typeface="Noto Sans SC"/>
+                <a:sym typeface="Noto Sans SC"/>
+              </a:rPr>
+              <a:t>时间</a:t>
+            </a:r>
+            <a:r>
+              <a:rPr lang="en-US" sz="1600" b="1" i="0" u="none" strike="noStrike" dirty="0">
+                <a:solidFill>
+                  <a:srgbClr val="FFFFFF"/>
+                </a:solidFill>
+                <a:latin typeface="微软雅黑" panose="020B0503020204020204" pitchFamily="34" charset="-122"/>
+                <a:ea typeface="微软雅黑" panose="020B0503020204020204" pitchFamily="34" charset="-122"/>
+                <a:cs typeface="Noto Sans SC"/>
+                <a:sym typeface="Noto Sans SC"/>
+              </a:rPr>
+              <a:t>信息</a:t>
+            </a:r>
+            <a:endParaRPr lang="en-US" sz="1100" dirty="0">
+              <a:latin typeface="微软雅黑" panose="020B0503020204020204" pitchFamily="34" charset="-122"/>
+              <a:ea typeface="微软雅黑" panose="020B0503020204020204" pitchFamily="34" charset="-122"/>
+            </a:endParaRPr>
+          </a:p>
+        </p:txBody>
+      </p:sp>
+      <p:sp>
+        <p:nvSpPr>
+          <p:cNvPr id="22" name="AutoShape 22"/>
+          <p:cNvSpPr/>
+          <p:nvPr/>
+        </p:nvSpPr>
+        <p:spPr>
+          <a:xfrm>
+            <a:off x="6368819" y="3159513"/>
+            <a:ext cx="1270000" cy="609351"/>
+          </a:xfrm>
+          <a:prstGeom prst="rect">
+            <a:avLst/>
+          </a:prstGeom>
+          <a:noFill/>
+          <a:ln w="12700" cap="flat" cmpd="sng">
+            <a:noFill/>
+            <a:prstDash val="solid"/>
+            <a:round/>
+          </a:ln>
+        </p:spPr>
+        <p:txBody>
+          <a:bodyPr vert="horz" wrap="square" lIns="0" tIns="0" rIns="0" bIns="0" rtlCol="0" anchor="ctr" anchorCtr="0"/>
+          <a:lstStyle/>
+          <a:p>
+            <a:pPr marL="0" indent="0" algn="l">
+              <a:lnSpc>
+                <a:spcPct val="125000"/>
+              </a:lnSpc>
+              <a:defRPr/>
+            </a:pPr>
+            <a:r>
+              <a:rPr lang="zh-CN" altLang="en-US" sz="1600" b="1" dirty="0">
+                <a:solidFill>
+                  <a:srgbClr val="333333"/>
+                </a:solidFill>
+                <a:latin typeface="微软雅黑" panose="020B0503020204020204" pitchFamily="34" charset="-122"/>
+                <a:ea typeface="微软雅黑" panose="020B0503020204020204" pitchFamily="34" charset="-122"/>
+                <a:sym typeface="Noto Sans SC"/>
+              </a:rPr>
+              <a:t>计划开始时间</a:t>
+            </a:r>
+            <a:endParaRPr lang="en-US" sz="1100" dirty="0">
+              <a:latin typeface="微软雅黑" panose="020B0503020204020204" pitchFamily="34" charset="-122"/>
+              <a:ea typeface="微软雅黑" panose="020B0503020204020204" pitchFamily="34" charset="-122"/>
+            </a:endParaRPr>
+          </a:p>
+        </p:txBody>
+      </p:sp>
+      <p:sp>
+        <p:nvSpPr>
+          <p:cNvPr id="25" name="AutoShape 25"/>
+          <p:cNvSpPr/>
+          <p:nvPr/>
+        </p:nvSpPr>
+        <p:spPr>
+          <a:xfrm>
+            <a:off x="6368819" y="3963433"/>
+            <a:ext cx="1270000" cy="460517"/>
+          </a:xfrm>
+          <a:prstGeom prst="rect">
+            <a:avLst/>
+          </a:prstGeom>
+          <a:noFill/>
+          <a:ln w="12700" cap="flat" cmpd="sng">
+            <a:noFill/>
+            <a:prstDash val="solid"/>
+            <a:round/>
+          </a:ln>
+        </p:spPr>
+        <p:txBody>
+          <a:bodyPr vert="horz" wrap="square" lIns="0" tIns="0" rIns="0" bIns="0" rtlCol="0" anchor="ctr" anchorCtr="0"/>
+          <a:lstStyle/>
+          <a:p>
+            <a:pPr marL="0" indent="0" algn="l">
+              <a:lnSpc>
+                <a:spcPct val="125000"/>
+              </a:lnSpc>
+              <a:defRPr/>
+            </a:pPr>
+            <a:r>
+              <a:rPr lang="en-US" sz="1600" b="1" i="0" u="none" strike="noStrike" dirty="0">
+                <a:solidFill>
+                  <a:srgbClr val="333333"/>
+                </a:solidFill>
+                <a:latin typeface="微软雅黑" panose="020B0503020204020204" pitchFamily="34" charset="-122"/>
+                <a:ea typeface="微软雅黑" panose="020B0503020204020204" pitchFamily="34" charset="-122"/>
+                <a:cs typeface="Noto Sans SC"/>
+                <a:sym typeface="Noto Sans SC"/>
+              </a:rPr>
+              <a:t>计划</a:t>
+            </a:r>
+            <a:r>
+              <a:rPr lang="zh-CN" altLang="en-US" sz="1600" b="1" i="0" u="none" strike="noStrike" dirty="0">
+                <a:solidFill>
+                  <a:srgbClr val="333333"/>
+                </a:solidFill>
+                <a:latin typeface="微软雅黑" panose="020B0503020204020204" pitchFamily="34" charset="-122"/>
+                <a:ea typeface="微软雅黑" panose="020B0503020204020204" pitchFamily="34" charset="-122"/>
+                <a:cs typeface="Noto Sans SC"/>
+                <a:sym typeface="Noto Sans SC"/>
+              </a:rPr>
+              <a:t>结束</a:t>
+            </a:r>
+            <a:r>
+              <a:rPr lang="en-US" sz="1600" b="1" i="0" u="none" strike="noStrike" dirty="0">
+                <a:solidFill>
+                  <a:srgbClr val="333333"/>
+                </a:solidFill>
+                <a:latin typeface="微软雅黑" panose="020B0503020204020204" pitchFamily="34" charset="-122"/>
+                <a:ea typeface="微软雅黑" panose="020B0503020204020204" pitchFamily="34" charset="-122"/>
+                <a:cs typeface="Noto Sans SC"/>
+                <a:sym typeface="Noto Sans SC"/>
+              </a:rPr>
+              <a:t>时间</a:t>
+            </a:r>
+            <a:endParaRPr lang="en-US" sz="1100" dirty="0">
+              <a:latin typeface="微软雅黑" panose="020B0503020204020204" pitchFamily="34" charset="-122"/>
+              <a:ea typeface="微软雅黑" panose="020B0503020204020204" pitchFamily="34" charset="-122"/>
+            </a:endParaRPr>
+          </a:p>
+        </p:txBody>
+      </p:sp>
+      <p:sp>
+        <p:nvSpPr>
+          <p:cNvPr id="27" name="AutoShape 27"/>
+          <p:cNvSpPr/>
+          <p:nvPr/>
+        </p:nvSpPr>
+        <p:spPr>
+          <a:xfrm>
+            <a:off x="6368819" y="4501914"/>
+            <a:ext cx="1270000" cy="664746"/>
+          </a:xfrm>
+          <a:prstGeom prst="rect">
+            <a:avLst/>
+          </a:prstGeom>
+          <a:noFill/>
+          <a:ln w="12700" cap="flat" cmpd="sng">
+            <a:noFill/>
+            <a:prstDash val="solid"/>
+            <a:round/>
+          </a:ln>
+        </p:spPr>
+        <p:txBody>
+          <a:bodyPr vert="horz" wrap="square" lIns="0" tIns="0" rIns="0" bIns="0" rtlCol="0" anchor="ctr" anchorCtr="0"/>
+          <a:lstStyle/>
+          <a:p>
+            <a:pPr marL="0" indent="0" algn="l">
+              <a:lnSpc>
+                <a:spcPct val="125000"/>
+              </a:lnSpc>
+              <a:defRPr/>
+            </a:pPr>
+            <a:r>
+              <a:rPr lang="en-US" sz="1600" b="1" i="0" u="none" strike="noStrike" dirty="0">
+                <a:solidFill>
+                  <a:srgbClr val="333333"/>
+                </a:solidFill>
+                <a:latin typeface="微软雅黑" panose="020B0503020204020204" pitchFamily="34" charset="-122"/>
+                <a:ea typeface="微软雅黑" panose="020B0503020204020204" pitchFamily="34" charset="-122"/>
+                <a:cs typeface="Noto Sans SC"/>
+                <a:sym typeface="Noto Sans SC"/>
+              </a:rPr>
+              <a:t>报告日期</a:t>
+            </a:r>
+            <a:endParaRPr lang="en-US" sz="1100" dirty="0">
+              <a:latin typeface="微软雅黑" panose="020B0503020204020204" pitchFamily="34" charset="-122"/>
+              <a:ea typeface="微软雅黑" panose="020B0503020204020204" pitchFamily="34" charset="-122"/>
+            </a:endParaRPr>
+          </a:p>
+        </p:txBody>
+      </p:sp>
+      <p:cxnSp>
+        <p:nvCxnSpPr>
+          <p:cNvPr id="29" name="Connector 12"/>
+          <p:cNvCxnSpPr/>
+          <p:nvPr/>
+        </p:nvCxnSpPr>
+        <p:spPr>
+          <a:xfrm>
+            <a:off x="913943" y="5168539"/>
+            <a:ext cx="4826016" cy="0"/>
+          </a:xfrm>
+          <a:prstGeom prst="straightConnector1">
+            <a:avLst/>
+          </a:prstGeom>
+          <a:solidFill>
+            <a:srgbClr val="DEE0E3">
+              <a:alpha val="100000"/>
+            </a:srgbClr>
+          </a:solidFill>
+          <a:ln w="6350" cap="flat" cmpd="sng">
+            <a:solidFill>
+              <a:schemeClr val="bg1">
+                <a:lumMod val="75000"/>
+              </a:schemeClr>
+            </a:solidFill>
+            <a:prstDash val="dash"/>
+            <a:round/>
+            <a:headEnd type="none" w="med" len="med"/>
+            <a:tailEnd type="none" w="med" len="med"/>
+          </a:ln>
+        </p:spPr>
+      </p:cxnSp>
+      <p:sp>
+        <p:nvSpPr>
+          <p:cNvPr id="30" name="AutoShape 15"/>
+          <p:cNvSpPr/>
+          <p:nvPr/>
+        </p:nvSpPr>
+        <p:spPr>
+          <a:xfrm>
+            <a:off x="868809" y="5248970"/>
+            <a:ext cx="1270000" cy="561208"/>
+          </a:xfrm>
+          <a:prstGeom prst="rect">
+            <a:avLst/>
+          </a:prstGeom>
+          <a:noFill/>
+          <a:ln w="12700" cap="flat" cmpd="sng">
+            <a:noFill/>
+            <a:prstDash val="solid"/>
+            <a:round/>
+          </a:ln>
+        </p:spPr>
+        <p:txBody>
+          <a:bodyPr vert="horz" wrap="square" lIns="0" tIns="0" rIns="0" bIns="0" rtlCol="0" anchor="ctr" anchorCtr="0"/>
+          <a:lstStyle/>
+          <a:p>
+            <a:pPr marL="0" indent="0" algn="l">
+              <a:lnSpc>
+                <a:spcPct val="125000"/>
+              </a:lnSpc>
+              <a:defRPr/>
+            </a:pPr>
+            <a:r>
+              <a:rPr lang="zh-CN" altLang="en-US" sz="1600" b="1" dirty="0">
+                <a:solidFill>
+                  <a:srgbClr val="333333"/>
+                </a:solidFill>
+                <a:latin typeface="微软雅黑" panose="020B0503020204020204" pitchFamily="34" charset="-122"/>
+                <a:ea typeface="微软雅黑" panose="020B0503020204020204" pitchFamily="34" charset="-122"/>
+                <a:sym typeface="Noto Sans SC"/>
+              </a:rPr>
+              <a:t>项目</a:t>
+            </a:r>
+            <a:r>
+              <a:rPr lang="en-US" altLang="zh-CN" sz="1600" b="1" dirty="0">
+                <a:solidFill>
+                  <a:srgbClr val="333333"/>
+                </a:solidFill>
+                <a:latin typeface="微软雅黑" panose="020B0503020204020204" pitchFamily="34" charset="-122"/>
+                <a:ea typeface="微软雅黑" panose="020B0503020204020204" pitchFamily="34" charset="-122"/>
+                <a:sym typeface="Noto Sans SC"/>
+              </a:rPr>
+              <a:t>PD</a:t>
+            </a:r>
+            <a:endParaRPr lang="en-US" sz="1100" dirty="0">
+              <a:latin typeface="微软雅黑" panose="020B0503020204020204" pitchFamily="34" charset="-122"/>
+              <a:ea typeface="微软雅黑" panose="020B0503020204020204" pitchFamily="34" charset="-122"/>
+            </a:endParaRPr>
+          </a:p>
+        </p:txBody>
+      </p:sp>
+      <p:sp>
+        <p:nvSpPr>
+          <p:cNvPr id="31" name="text.customer_name"/>
+          <p:cNvSpPr/>
+          <p:nvPr/>
+        </p:nvSpPr>
+        <p:spPr>
+          <a:xfrm>
+            <a:off x="2138629" y="4510131"/>
+            <a:ext cx="3365500" cy="664746"/>
+          </a:xfrm>
+          <a:prstGeom prst="rect">
+            <a:avLst/>
+          </a:prstGeom>
+          <a:noFill/>
+          <a:ln w="12700" cap="flat" cmpd="sng">
+            <a:noFill/>
+            <a:prstDash val="solid"/>
+            <a:round/>
+          </a:ln>
+        </p:spPr>
+        <p:txBody>
+          <a:bodyPr vert="horz" wrap="square" lIns="0" tIns="0" rIns="0" bIns="0" rtlCol="0" anchor="ctr" anchorCtr="0"/>
+          <a:lstStyle/>
+          <a:p>
+            <a:pPr marL="0" indent="0" algn="l">
+              <a:lnSpc>
+                <a:spcPct val="117000"/>
+              </a:lnSpc>
+              <a:defRPr/>
+            </a:pPr>
+            <a:r>
+              <a:rPr lang="en-US" sz="1600" b="0" i="0" u="none" strike="noStrike" dirty="0">
+                <a:solidFill>
+                  <a:schemeClr val="tx1"/>
+                </a:solidFill>
+                <a:latin typeface="微软雅黑" panose="020B0503020204020204" pitchFamily="34" charset="-122"/>
+                <a:ea typeface="微软雅黑" panose="020B0503020204020204" pitchFamily="34" charset="-122"/>
+                <a:cs typeface="Noto Sans SC"/>
+                <a:sym typeface="Noto Sans SC"/>
+              </a:rPr>
+              <a:t>星河科技集团</a:t>
+            </a:r>
+            <a:r>
+              <a:rPr lang="en-US" sz="1600" b="0" i="0" u="none" strike="noStrike" dirty="0">
+                <a:solidFill>
+                  <a:srgbClr val="C00000"/>
+                </a:solidFill>
+                <a:latin typeface="微软雅黑" panose="020B0503020204020204" pitchFamily="34" charset="-122"/>
+                <a:ea typeface="微软雅黑" panose="020B0503020204020204" pitchFamily="34" charset="-122"/>
+                <a:cs typeface="Noto Sans SC"/>
+                <a:sym typeface="Noto Sans SC"/>
+              </a:rPr>
+              <a:t/>
+            </a:r>
+            <a:r>
+              <a:rPr lang="en-US" sz="1600" b="0" i="0" u="none" strike="noStrike" dirty="0">
+                <a:solidFill>
+                  <a:schemeClr val="tx1"/>
+                </a:solidFill>
+                <a:latin typeface="微软雅黑" panose="020B0503020204020204" pitchFamily="34" charset="-122"/>
+                <a:ea typeface="微软雅黑" panose="020B0503020204020204" pitchFamily="34" charset="-122"/>
+                <a:cs typeface="Noto Sans SC"/>
+                <a:sym typeface="Noto Sans SC"/>
+              </a:rPr>
+              <a:t/>
+            </a:r>
+            <a:endParaRPr lang="en-US" sz="1100" dirty="0">
+              <a:solidFill>
+                <a:schemeClr val="tx1"/>
+              </a:solidFill>
+              <a:latin typeface="微软雅黑" panose="020B0503020204020204" pitchFamily="34" charset="-122"/>
+              <a:ea typeface="微软雅黑" panose="020B0503020204020204" pitchFamily="34" charset="-122"/>
+            </a:endParaRPr>
+          </a:p>
+        </p:txBody>
+      </p:sp>
+      <p:sp>
+        <p:nvSpPr>
+          <p:cNvPr id="37" name="AutoShape 7"/>
+          <p:cNvSpPr/>
+          <p:nvPr/>
+        </p:nvSpPr>
+        <p:spPr>
+          <a:xfrm>
+            <a:off x="968397" y="1569729"/>
+            <a:ext cx="856096" cy="443164"/>
+          </a:xfrm>
+          <a:prstGeom prst="rect">
+            <a:avLst/>
+          </a:prstGeom>
+          <a:noFill/>
+          <a:ln w="12700" cap="flat" cmpd="sng">
+            <a:noFill/>
+            <a:prstDash val="solid"/>
+            <a:round/>
+          </a:ln>
+        </p:spPr>
+        <p:txBody>
+          <a:bodyPr vert="horz" wrap="square" lIns="0" tIns="0" rIns="0" bIns="0" rtlCol="0" anchor="ctr" anchorCtr="0"/>
+          <a:lstStyle/>
+          <a:p>
+            <a:pPr marL="0" indent="0" algn="l">
+              <a:lnSpc>
+                <a:spcPct val="125000"/>
+              </a:lnSpc>
+              <a:defRPr/>
+            </a:pPr>
+            <a:r>
+              <a:rPr lang="en-US" sz="1600" b="1" i="0" u="none" strike="noStrike" dirty="0">
+                <a:solidFill>
+                  <a:srgbClr val="FFFFFF"/>
+                </a:solidFill>
+                <a:latin typeface="微软雅黑" panose="020B0503020204020204" pitchFamily="34" charset="-122"/>
+                <a:ea typeface="微软雅黑" panose="020B0503020204020204" pitchFamily="34" charset="-122"/>
+                <a:cs typeface="Noto Sans SC"/>
+                <a:sym typeface="Noto Sans SC"/>
+              </a:rPr>
+              <a:t>项目</a:t>
+            </a:r>
+            <a:endParaRPr lang="en-US" sz="1600" b="1" i="0" u="none" strike="noStrike" dirty="0">
+              <a:solidFill>
+                <a:srgbClr val="FFFFFF"/>
+              </a:solidFill>
+              <a:latin typeface="微软雅黑" panose="020B0503020204020204" pitchFamily="34" charset="-122"/>
+              <a:ea typeface="微软雅黑" panose="020B0503020204020204" pitchFamily="34" charset="-122"/>
+              <a:cs typeface="Noto Sans SC"/>
+              <a:sym typeface="Noto Sans SC"/>
+            </a:endParaRPr>
+          </a:p>
+          <a:p>
+            <a:pPr marL="0" indent="0" algn="l">
+              <a:lnSpc>
+                <a:spcPct val="125000"/>
+              </a:lnSpc>
+              <a:defRPr/>
+            </a:pPr>
+            <a:r>
+              <a:rPr lang="zh-CN" altLang="en-US" sz="1600" b="1" dirty="0">
+                <a:solidFill>
+                  <a:srgbClr val="FFFFFF"/>
+                </a:solidFill>
+                <a:latin typeface="微软雅黑" panose="020B0503020204020204" pitchFamily="34" charset="-122"/>
+                <a:ea typeface="微软雅黑" panose="020B0503020204020204" pitchFamily="34" charset="-122"/>
+                <a:sym typeface="Noto Sans SC"/>
+              </a:rPr>
+              <a:t>概述</a:t>
+            </a:r>
+            <a:endParaRPr lang="en-US" sz="1100" dirty="0">
+              <a:latin typeface="微软雅黑" panose="020B0503020204020204" pitchFamily="34" charset="-122"/>
+              <a:ea typeface="微软雅黑" panose="020B0503020204020204" pitchFamily="34" charset="-122"/>
+            </a:endParaRPr>
+          </a:p>
+        </p:txBody>
+      </p:sp>
+      <p:sp>
+        <p:nvSpPr>
+          <p:cNvPr id="40" name="AutoShape 4"/>
+          <p:cNvSpPr/>
+          <p:nvPr/>
+        </p:nvSpPr>
+        <p:spPr>
+          <a:xfrm>
+            <a:off x="1706418" y="1412974"/>
+            <a:ext cx="9696723" cy="751241"/>
+          </a:xfrm>
+          <a:prstGeom prst="roundRect">
+            <a:avLst>
+              <a:gd name="adj" fmla="val 0"/>
+            </a:avLst>
+          </a:prstGeom>
+          <a:solidFill>
+            <a:srgbClr val="F9FAFB">
+              <a:alpha val="100000"/>
+            </a:srgbClr>
+          </a:solidFill>
+          <a:ln w="12700" cap="flat" cmpd="sng">
+            <a:solidFill>
+              <a:srgbClr val="E5E7EB">
+                <a:alpha val="100000"/>
+              </a:srgbClr>
+            </a:solidFill>
+            <a:prstDash val="solid"/>
+            <a:round/>
+          </a:ln>
+        </p:spPr>
+        <p:txBody>
+          <a:bodyPr vert="horz" wrap="square" lIns="63500" tIns="63500" rIns="63500" bIns="63500" rtlCol="0" anchor="ctr"/>
+          <a:lstStyle/>
+          <a:p>
+            <a:pPr algn="ctr">
+              <a:defRPr/>
+            </a:pPr>
+            <a:endParaRPr>
+              <a:latin typeface="微软雅黑" panose="020B0503020204020204" pitchFamily="34" charset="-122"/>
+              <a:ea typeface="微软雅黑" panose="020B0503020204020204" pitchFamily="34" charset="-122"/>
+            </a:endParaRPr>
+          </a:p>
+        </p:txBody>
+      </p:sp>
+      <p:sp>
+        <p:nvSpPr>
+          <p:cNvPr id="41" name="text.project_manager"/>
+          <p:cNvSpPr/>
+          <p:nvPr/>
+        </p:nvSpPr>
+        <p:spPr>
+          <a:xfrm>
+            <a:off x="2138472" y="5297530"/>
+            <a:ext cx="1561558" cy="521377"/>
+          </a:xfrm>
+          <a:prstGeom prst="rect">
+            <a:avLst/>
+          </a:prstGeom>
+          <a:noFill/>
+          <a:ln w="12700" cap="flat" cmpd="sng">
+            <a:noFill/>
+            <a:prstDash val="solid"/>
+            <a:round/>
+          </a:ln>
+        </p:spPr>
+        <p:txBody>
+          <a:bodyPr vert="horz" wrap="square" lIns="0" tIns="0" rIns="0" bIns="0" rtlCol="0" anchor="ctr" anchorCtr="0"/>
+          <a:lstStyle/>
+          <a:p>
+            <a:pPr marL="0" indent="0" algn="l">
+              <a:lnSpc>
+                <a:spcPct val="117000"/>
+              </a:lnSpc>
+              <a:defRPr/>
+            </a:pPr>
+            <a:r>
+              <a:rPr lang="en-US" sz="1600" b="0" i="0" u="none" strike="noStrike" dirty="0">
+                <a:solidFill>
+                  <a:schemeClr val="tx1"/>
+                </a:solidFill>
+                <a:latin typeface="微软雅黑" panose="020B0503020204020204" pitchFamily="34" charset="-122"/>
+                <a:ea typeface="微软雅黑" panose="020B0503020204020204" pitchFamily="34" charset="-122"/>
+                <a:cs typeface="Noto Sans SC"/>
+                <a:sym typeface="Noto Sans SC"/>
+              </a:rPr>
+              <a:t>张明</a:t>
+            </a:r>
+            <a:endParaRPr lang="en-US" sz="1100" dirty="0">
+              <a:solidFill>
+                <a:schemeClr val="tx1"/>
+              </a:solidFill>
+              <a:latin typeface="微软雅黑" panose="020B0503020204020204" pitchFamily="34" charset="-122"/>
+              <a:ea typeface="微软雅黑" panose="020B0503020204020204" pitchFamily="34" charset="-122"/>
+            </a:endParaRPr>
+          </a:p>
+        </p:txBody>
+      </p:sp>
+      <p:sp>
+        <p:nvSpPr>
+          <p:cNvPr id="42" name="text.planned_start_date"/>
+          <p:cNvSpPr/>
+          <p:nvPr/>
+        </p:nvSpPr>
+        <p:spPr>
+          <a:xfrm>
+            <a:off x="8328197" y="3159513"/>
+            <a:ext cx="2922076" cy="609351"/>
+          </a:xfrm>
+          <a:prstGeom prst="rect">
+            <a:avLst/>
+          </a:prstGeom>
+          <a:noFill/>
+          <a:ln w="12700" cap="flat" cmpd="sng">
+            <a:noFill/>
+            <a:prstDash val="solid"/>
+            <a:round/>
+          </a:ln>
+        </p:spPr>
+        <p:txBody>
+          <a:bodyPr vert="horz" wrap="square" lIns="0" tIns="0" rIns="0" bIns="0" rtlCol="0" anchor="ctr" anchorCtr="0"/>
+          <a:lstStyle/>
+          <a:p>
+            <a:pPr marL="0" indent="0" algn="l">
+              <a:lnSpc>
+                <a:spcPct val="117000"/>
+              </a:lnSpc>
+              <a:defRPr/>
+            </a:pPr>
+            <a:r>
+              <a:rPr lang="en-US" sz="1600" b="0" i="0" u="none" strike="noStrike" dirty="0">
+                <a:solidFill>
+                  <a:schemeClr val="tx1"/>
+                </a:solidFill>
+                <a:latin typeface="微软雅黑" panose="020B0503020204020204" pitchFamily="34" charset="-122"/>
+                <a:ea typeface="微软雅黑" panose="020B0503020204020204" pitchFamily="34" charset="-122"/>
+                <a:cs typeface="Noto Sans SC"/>
+                <a:sym typeface="Noto Sans SC"/>
+              </a:rPr>
+              <a:t>2026-04-01</a:t>
+            </a:r>
+            <a:r>
+              <a:rPr lang="en-US" sz="1600" b="0" i="0" u="none" strike="noStrike" dirty="0">
+                <a:solidFill>
+                  <a:srgbClr val="C00000"/>
+                </a:solidFill>
+                <a:latin typeface="微软雅黑" panose="020B0503020204020204" pitchFamily="34" charset="-122"/>
+                <a:ea typeface="微软雅黑" panose="020B0503020204020204" pitchFamily="34" charset="-122"/>
+                <a:cs typeface="Noto Sans SC"/>
+                <a:sym typeface="Noto Sans SC"/>
+              </a:rPr>
+              <a:t/>
+            </a:r>
+            <a:r>
+              <a:rPr lang="en-US" sz="1600" b="0" i="0" u="none" strike="noStrike" dirty="0">
+                <a:solidFill>
+                  <a:schemeClr val="tx1"/>
+                </a:solidFill>
+                <a:latin typeface="微软雅黑" panose="020B0503020204020204" pitchFamily="34" charset="-122"/>
+                <a:ea typeface="微软雅黑" panose="020B0503020204020204" pitchFamily="34" charset="-122"/>
+                <a:cs typeface="Noto Sans SC"/>
+                <a:sym typeface="Noto Sans SC"/>
+              </a:rPr>
+              <a:t/>
+            </a:r>
+            <a:endParaRPr lang="en-US" sz="1100" dirty="0">
+              <a:solidFill>
+                <a:schemeClr val="tx1"/>
+              </a:solidFill>
+              <a:latin typeface="微软雅黑" panose="020B0503020204020204" pitchFamily="34" charset="-122"/>
+              <a:ea typeface="微软雅黑" panose="020B0503020204020204" pitchFamily="34" charset="-122"/>
+            </a:endParaRPr>
+          </a:p>
+        </p:txBody>
+      </p:sp>
+      <p:cxnSp>
+        <p:nvCxnSpPr>
+          <p:cNvPr id="44" name="Connector 9"/>
+          <p:cNvCxnSpPr/>
+          <p:nvPr/>
+        </p:nvCxnSpPr>
+        <p:spPr>
+          <a:xfrm>
+            <a:off x="6368819" y="3768864"/>
+            <a:ext cx="4826016" cy="0"/>
+          </a:xfrm>
+          <a:prstGeom prst="straightConnector1">
+            <a:avLst/>
+          </a:prstGeom>
+          <a:solidFill>
+            <a:srgbClr val="DEE0E3">
+              <a:alpha val="100000"/>
+            </a:srgbClr>
+          </a:solidFill>
+          <a:ln w="6350" cap="flat" cmpd="sng">
+            <a:solidFill>
+              <a:schemeClr val="bg1">
+                <a:lumMod val="75000"/>
+              </a:schemeClr>
+            </a:solidFill>
+            <a:prstDash val="dash"/>
+            <a:round/>
+            <a:headEnd type="none" w="med" len="med"/>
+            <a:tailEnd type="none" w="med" len="med"/>
+          </a:ln>
+        </p:spPr>
+      </p:cxnSp>
+      <p:cxnSp>
+        <p:nvCxnSpPr>
+          <p:cNvPr id="45" name="Connector 12"/>
+          <p:cNvCxnSpPr/>
+          <p:nvPr/>
+        </p:nvCxnSpPr>
+        <p:spPr>
+          <a:xfrm>
+            <a:off x="6368819" y="4510905"/>
+            <a:ext cx="4826016" cy="0"/>
+          </a:xfrm>
+          <a:prstGeom prst="straightConnector1">
+            <a:avLst/>
+          </a:prstGeom>
+          <a:solidFill>
+            <a:srgbClr val="DEE0E3">
+              <a:alpha val="100000"/>
+            </a:srgbClr>
+          </a:solidFill>
+          <a:ln w="6350" cap="flat" cmpd="sng">
+            <a:solidFill>
+              <a:schemeClr val="bg1">
+                <a:lumMod val="75000"/>
+              </a:schemeClr>
+            </a:solidFill>
+            <a:prstDash val="dash"/>
+            <a:round/>
+            <a:headEnd type="none" w="med" len="med"/>
+            <a:tailEnd type="none" w="med" len="med"/>
+          </a:ln>
+        </p:spPr>
+      </p:cxnSp>
+      <p:cxnSp>
+        <p:nvCxnSpPr>
+          <p:cNvPr id="46" name="Connector 12"/>
+          <p:cNvCxnSpPr/>
+          <p:nvPr/>
+        </p:nvCxnSpPr>
+        <p:spPr>
+          <a:xfrm>
+            <a:off x="6368819" y="5165993"/>
+            <a:ext cx="4826016" cy="0"/>
+          </a:xfrm>
+          <a:prstGeom prst="straightConnector1">
+            <a:avLst/>
+          </a:prstGeom>
+          <a:solidFill>
+            <a:srgbClr val="DEE0E3">
+              <a:alpha val="100000"/>
+            </a:srgbClr>
+          </a:solidFill>
+          <a:ln w="6350" cap="flat" cmpd="sng">
+            <a:solidFill>
+              <a:schemeClr val="bg1">
+                <a:lumMod val="75000"/>
+              </a:schemeClr>
+            </a:solidFill>
+            <a:prstDash val="dash"/>
+            <a:round/>
+            <a:headEnd type="none" w="med" len="med"/>
+            <a:tailEnd type="none" w="med" len="med"/>
+          </a:ln>
+        </p:spPr>
+      </p:cxnSp>
+      <p:sp>
+        <p:nvSpPr>
+          <p:cNvPr id="48" name="text.planned_end_date"/>
+          <p:cNvSpPr/>
+          <p:nvPr/>
+        </p:nvSpPr>
+        <p:spPr>
+          <a:xfrm>
+            <a:off x="8328197" y="3837168"/>
+            <a:ext cx="2866638" cy="664746"/>
+          </a:xfrm>
+          <a:prstGeom prst="rect">
+            <a:avLst/>
+          </a:prstGeom>
+          <a:noFill/>
+          <a:ln w="12700" cap="flat" cmpd="sng">
+            <a:noFill/>
+            <a:prstDash val="solid"/>
+            <a:round/>
+          </a:ln>
+        </p:spPr>
+        <p:txBody>
+          <a:bodyPr vert="horz" wrap="square" lIns="0" tIns="0" rIns="0" bIns="0" rtlCol="0" anchor="ctr" anchorCtr="0"/>
+          <a:lstStyle/>
+          <a:p>
+            <a:pPr marL="0" indent="0" algn="l">
+              <a:lnSpc>
+                <a:spcPct val="117000"/>
+              </a:lnSpc>
+              <a:defRPr/>
+            </a:pPr>
+            <a:r>
+              <a:rPr lang="en-US" sz="1600" b="0" i="0" u="none" strike="noStrike" dirty="0">
+                <a:solidFill>
+                  <a:schemeClr val="tx1"/>
+                </a:solidFill>
+                <a:latin typeface="微软雅黑" panose="020B0503020204020204" pitchFamily="34" charset="-122"/>
+                <a:ea typeface="微软雅黑" panose="020B0503020204020204" pitchFamily="34" charset="-122"/>
+                <a:cs typeface="Noto Sans SC"/>
+                <a:sym typeface="Noto Sans SC"/>
+              </a:rPr>
+              <a:t>2026-08-31</a:t>
+            </a:r>
+            <a:r>
+              <a:rPr lang="en-US" sz="1600" b="0" i="0" u="none" strike="noStrike" dirty="0">
+                <a:solidFill>
+                  <a:srgbClr val="C00000"/>
+                </a:solidFill>
+                <a:latin typeface="微软雅黑" panose="020B0503020204020204" pitchFamily="34" charset="-122"/>
+                <a:ea typeface="微软雅黑" panose="020B0503020204020204" pitchFamily="34" charset="-122"/>
+                <a:cs typeface="Noto Sans SC"/>
+                <a:sym typeface="Noto Sans SC"/>
+              </a:rPr>
+              <a:t/>
+            </a:r>
+            <a:r>
+              <a:rPr lang="en-US" sz="1600" b="0" i="0" u="none" strike="noStrike" dirty="0">
+                <a:solidFill>
+                  <a:schemeClr val="tx1"/>
+                </a:solidFill>
+                <a:latin typeface="微软雅黑" panose="020B0503020204020204" pitchFamily="34" charset="-122"/>
+                <a:ea typeface="微软雅黑" panose="020B0503020204020204" pitchFamily="34" charset="-122"/>
+                <a:cs typeface="Noto Sans SC"/>
+                <a:sym typeface="Noto Sans SC"/>
+              </a:rPr>
+              <a:t/>
+            </a:r>
+            <a:endParaRPr lang="en-US" sz="1100" dirty="0">
+              <a:solidFill>
+                <a:schemeClr val="tx1"/>
+              </a:solidFill>
+              <a:latin typeface="微软雅黑" panose="020B0503020204020204" pitchFamily="34" charset="-122"/>
+              <a:ea typeface="微软雅黑" panose="020B0503020204020204" pitchFamily="34" charset="-122"/>
+            </a:endParaRPr>
+          </a:p>
+        </p:txBody>
+      </p:sp>
+      <p:sp>
+        <p:nvSpPr>
+          <p:cNvPr id="49" name="text.report_date"/>
+          <p:cNvSpPr/>
+          <p:nvPr/>
+        </p:nvSpPr>
+        <p:spPr>
+          <a:xfrm>
+            <a:off x="8328197" y="4496762"/>
+            <a:ext cx="2922076" cy="609351"/>
+          </a:xfrm>
+          <a:prstGeom prst="rect">
+            <a:avLst/>
+          </a:prstGeom>
+          <a:noFill/>
+          <a:ln w="12700" cap="flat" cmpd="sng">
+            <a:noFill/>
+            <a:prstDash val="solid"/>
+            <a:round/>
+          </a:ln>
+        </p:spPr>
+        <p:txBody>
+          <a:bodyPr vert="horz" wrap="square" lIns="0" tIns="0" rIns="0" bIns="0" rtlCol="0" anchor="ctr" anchorCtr="0"/>
+          <a:lstStyle/>
+          <a:p>
+            <a:pPr marL="0" indent="0" algn="l">
+              <a:lnSpc>
+                <a:spcPct val="117000"/>
+              </a:lnSpc>
+              <a:defRPr/>
+            </a:pPr>
+            <a:r>
+              <a:rPr lang="en-US" sz="1600" b="0" i="0" u="none" strike="noStrike" dirty="0">
+                <a:solidFill>
+                  <a:schemeClr val="tx1"/>
+                </a:solidFill>
+                <a:latin typeface="微软雅黑" panose="020B0503020204020204" pitchFamily="34" charset="-122"/>
+                <a:ea typeface="微软雅黑" panose="020B0503020204020204" pitchFamily="34" charset="-122"/>
+                <a:cs typeface="Noto Sans SC"/>
+                <a:sym typeface="Noto Sans SC"/>
+              </a:rPr>
+              <a:t>2026-06-10</a:t>
+            </a:r>
+            <a:r>
+              <a:rPr lang="en-US" sz="1600" b="0" i="0" u="none" strike="noStrike" dirty="0">
+                <a:solidFill>
+                  <a:srgbClr val="C00000"/>
+                </a:solidFill>
+                <a:latin typeface="微软雅黑" panose="020B0503020204020204" pitchFamily="34" charset="-122"/>
+                <a:ea typeface="微软雅黑" panose="020B0503020204020204" pitchFamily="34" charset="-122"/>
+                <a:cs typeface="Noto Sans SC"/>
+                <a:sym typeface="Noto Sans SC"/>
+              </a:rPr>
+              <a:t/>
+            </a:r>
+            <a:r>
+              <a:rPr lang="en-US" sz="1600" b="0" i="0" u="none" strike="noStrike" dirty="0">
+                <a:solidFill>
+                  <a:schemeClr val="tx1"/>
+                </a:solidFill>
+                <a:latin typeface="微软雅黑" panose="020B0503020204020204" pitchFamily="34" charset="-122"/>
+                <a:ea typeface="微软雅黑" panose="020B0503020204020204" pitchFamily="34" charset="-122"/>
+                <a:cs typeface="Noto Sans SC"/>
+                <a:sym typeface="Noto Sans SC"/>
+              </a:rPr>
+              <a:t/>
+            </a:r>
+            <a:endParaRPr lang="en-US" sz="1100" dirty="0">
+              <a:solidFill>
+                <a:schemeClr val="tx1"/>
+              </a:solidFill>
+              <a:latin typeface="微软雅黑" panose="020B0503020204020204" pitchFamily="34" charset="-122"/>
+              <a:ea typeface="微软雅黑" panose="020B0503020204020204" pitchFamily="34" charset="-122"/>
+            </a:endParaRPr>
+          </a:p>
+        </p:txBody>
+      </p:sp>
+      <p:sp>
+        <p:nvSpPr>
+          <p:cNvPr id="11" name="text.project_overview_summary"/>
+          <p:cNvSpPr/>
+          <p:nvPr/>
+        </p:nvSpPr>
+        <p:spPr>
+          <a:xfrm>
+            <a:off x="1706245" y="1483360"/>
+            <a:ext cx="9544685" cy="609600"/>
+          </a:xfrm>
+          <a:prstGeom prst="rect">
+            <a:avLst/>
+          </a:prstGeom>
+          <a:noFill/>
+          <a:ln w="12700" cap="flat" cmpd="sng">
+            <a:noFill/>
+            <a:prstDash val="solid"/>
+            <a:round/>
+          </a:ln>
+        </p:spPr>
+        <p:txBody>
+          <a:bodyPr vert="horz" wrap="square" lIns="0" tIns="0" rIns="0" bIns="0" rtlCol="0" anchor="ctr" anchorCtr="0"/>
+          <a:lstStyle/>
+          <a:p>
+            <a:pPr marL="0" indent="0" algn="l">
+              <a:lnSpc>
+                <a:spcPct val="117000"/>
               </a:lnSpc>
               <a:defRPr/>
             </a:pPr>
@@ -17458,1403 +18618,6 @@
           </a:p>
         </p:txBody>
       </p:sp>
-      <p:cxnSp>
-        <p:nvCxnSpPr>
-          <p:cNvPr id="12" name="Connector 12"/>
-          <p:cNvCxnSpPr>
-            <a:cxnSpLocks/>
-          </p:cNvCxnSpPr>
-          <p:nvPr/>
-        </p:nvCxnSpPr>
-        <p:spPr>
-          <a:xfrm>
-            <a:off x="913943" y="4513451"/>
-            <a:ext cx="4826016" cy="0"/>
-          </a:xfrm>
-          <a:prstGeom prst="straightConnector1">
-            <a:avLst/>
-          </a:prstGeom>
-          <a:solidFill>
-            <a:srgbClr val="DEE0E3">
-              <a:alpha val="100000"/>
-            </a:srgbClr>
-          </a:solidFill>
-          <a:ln w="6350" cap="flat" cmpd="sng">
-            <a:solidFill>
-              <a:schemeClr val="bg1">
-                <a:lumMod val="75000"/>
-              </a:schemeClr>
-            </a:solidFill>
-            <a:prstDash val="dash"/>
-            <a:round/>
-            <a:headEnd type="none" w="med" len="med"/>
-            <a:tailEnd type="none" w="med" len="med"/>
-          </a:ln>
-        </p:spPr>
-      </p:cxnSp>
-      <p:sp>
-        <p:nvSpPr>
-          <p:cNvPr id="13" name="AutoShape 13"/>
-          <p:cNvSpPr/>
-          <p:nvPr/>
-        </p:nvSpPr>
-        <p:spPr>
-          <a:xfrm>
-            <a:off x="868809" y="3963433"/>
-            <a:ext cx="1270000" cy="421006"/>
-          </a:xfrm>
-          <a:prstGeom prst="rect">
-            <a:avLst/>
-          </a:prstGeom>
-          <a:noFill/>
-          <a:ln w="12700" cap="flat" cmpd="sng">
-            <a:noFill/>
-            <a:prstDash val="solid"/>
-            <a:round/>
-          </a:ln>
-        </p:spPr>
-        <p:txBody>
-          <a:bodyPr vert="horz" wrap="square" lIns="0" tIns="0" rIns="0" bIns="0" rtlCol="0" anchor="ctr" anchorCtr="0"/>
-          <a:lstStyle/>
-          <a:p>
-            <a:pPr marL="0" indent="0" algn="l">
-              <a:lnSpc>
-                <a:spcPct val="125000"/>
-              </a:lnSpc>
-              <a:defRPr/>
-            </a:pPr>
-            <a:r>
-              <a:rPr lang="en-US" sz="1600" b="1" i="0" u="none" strike="noStrike" dirty="0">
-                <a:solidFill>
-                  <a:srgbClr val="333333"/>
-                </a:solidFill>
-                <a:latin typeface="微软雅黑" panose="020B0503020204020204" pitchFamily="34" charset="-122"/>
-                <a:ea typeface="微软雅黑" panose="020B0503020204020204" pitchFamily="34" charset="-122"/>
-                <a:cs typeface="Noto Sans SC"/>
-                <a:sym typeface="Noto Sans SC"/>
-              </a:rPr>
-              <a:t>项目编码</a:t>
-            </a:r>
-            <a:endParaRPr lang="en-US" sz="1100" dirty="0">
-              <a:latin typeface="微软雅黑" panose="020B0503020204020204" pitchFamily="34" charset="-122"/>
-              <a:ea typeface="微软雅黑" panose="020B0503020204020204" pitchFamily="34" charset="-122"/>
-            </a:endParaRPr>
-          </a:p>
-        </p:txBody>
-      </p:sp>
-      <p:sp>
-        <p:nvSpPr>
-          <p:cNvPr id="14" name="text.project_name"/>
-          <p:cNvSpPr/>
-          <p:nvPr/>
-        </p:nvSpPr>
-        <p:spPr>
-          <a:xfrm>
-            <a:off x="2362412" y="3841563"/>
-            <a:ext cx="3365500" cy="664746"/>
-          </a:xfrm>
-          <a:prstGeom prst="rect">
-            <a:avLst/>
-          </a:prstGeom>
-          <a:noFill/>
-          <a:ln w="12700" cap="flat" cmpd="sng">
-            <a:noFill/>
-            <a:prstDash val="solid"/>
-            <a:round/>
-          </a:ln>
-        </p:spPr>
-        <p:txBody>
-          <a:bodyPr vert="horz" wrap="square" lIns="0" tIns="0" rIns="0" bIns="0" rtlCol="0" anchor="ctr" anchorCtr="0"/>
-          <a:lstStyle/>
-          <a:p>
-            <a:pPr marL="0" indent="0" algn="l">
-              <a:lnSpc>
-                <a:spcPct val="116666"/>
-              </a:lnSpc>
-              <a:defRPr/>
-            </a:pPr>
-            <a:r>
-              <a:rPr lang="en-US" sz="1600" b="0" i="0" u="none" strike="noStrike" dirty="0">
-                <a:solidFill>
-                  <a:schemeClr val="tx1"/>
-                </a:solidFill>
-                <a:latin typeface="微软雅黑" panose="020B0503020204020204" pitchFamily="34" charset="-122"/>
-                <a:ea typeface="微软雅黑" panose="020B0503020204020204" pitchFamily="34" charset="-122"/>
-                <a:cs typeface="Noto Sans SC"/>
-                <a:sym typeface="Noto Sans SC"/>
-              </a:rPr>
-              <a:t>智能制造中台项目</a:t>
-            </a:r>
-            <a:r>
-              <a:rPr lang="en-US" sz="1600" b="0" i="0" u="none" strike="noStrike" dirty="0">
-                <a:solidFill>
-                  <a:srgbClr val="C00000"/>
-                </a:solidFill>
-                <a:latin typeface="微软雅黑" panose="020B0503020204020204" pitchFamily="34" charset="-122"/>
-                <a:ea typeface="微软雅黑" panose="020B0503020204020204" pitchFamily="34" charset="-122"/>
-                <a:cs typeface="Noto Sans SC"/>
-                <a:sym typeface="Noto Sans SC"/>
-              </a:rPr>
-              <a:t/>
-            </a:r>
-            <a:r>
-              <a:rPr lang="en-US" sz="1600" b="0" i="0" u="none" strike="noStrike" dirty="0">
-                <a:solidFill>
-                  <a:schemeClr val="tx1"/>
-                </a:solidFill>
-                <a:latin typeface="微软雅黑" panose="020B0503020204020204" pitchFamily="34" charset="-122"/>
-                <a:ea typeface="微软雅黑" panose="020B0503020204020204" pitchFamily="34" charset="-122"/>
-                <a:cs typeface="Noto Sans SC"/>
-                <a:sym typeface="Noto Sans SC"/>
-              </a:rPr>
-              <a:t/>
-            </a:r>
-            <a:endParaRPr lang="en-US" sz="1100" dirty="0">
-              <a:solidFill>
-                <a:schemeClr val="tx1"/>
-              </a:solidFill>
-              <a:latin typeface="微软雅黑" panose="020B0503020204020204" pitchFamily="34" charset="-122"/>
-              <a:ea typeface="微软雅黑" panose="020B0503020204020204" pitchFamily="34" charset="-122"/>
-            </a:endParaRPr>
-          </a:p>
-        </p:txBody>
-      </p:sp>
-      <p:sp>
-        <p:nvSpPr>
-          <p:cNvPr id="15" name="AutoShape 15"/>
-          <p:cNvSpPr/>
-          <p:nvPr/>
-        </p:nvSpPr>
-        <p:spPr>
-          <a:xfrm>
-            <a:off x="868809" y="4532604"/>
-            <a:ext cx="1270000" cy="561208"/>
-          </a:xfrm>
-          <a:prstGeom prst="rect">
-            <a:avLst/>
-          </a:prstGeom>
-          <a:noFill/>
-          <a:ln w="12700" cap="flat" cmpd="sng">
-            <a:noFill/>
-            <a:prstDash val="solid"/>
-            <a:round/>
-          </a:ln>
-        </p:spPr>
-        <p:txBody>
-          <a:bodyPr vert="horz" wrap="square" lIns="0" tIns="0" rIns="0" bIns="0" rtlCol="0" anchor="ctr" anchorCtr="0"/>
-          <a:lstStyle/>
-          <a:p>
-            <a:pPr marL="0" indent="0" algn="l">
-              <a:lnSpc>
-                <a:spcPct val="125000"/>
-              </a:lnSpc>
-              <a:defRPr/>
-            </a:pPr>
-            <a:r>
-              <a:rPr lang="en-US" sz="1600" b="1" i="0" u="none" strike="noStrike" dirty="0">
-                <a:solidFill>
-                  <a:srgbClr val="333333"/>
-                </a:solidFill>
-                <a:latin typeface="微软雅黑" panose="020B0503020204020204" pitchFamily="34" charset="-122"/>
-                <a:ea typeface="微软雅黑" panose="020B0503020204020204" pitchFamily="34" charset="-122"/>
-                <a:cs typeface="Noto Sans SC"/>
-                <a:sym typeface="Noto Sans SC"/>
-              </a:rPr>
-              <a:t>客户名称</a:t>
-            </a:r>
-            <a:endParaRPr lang="en-US" sz="1100" dirty="0">
-              <a:latin typeface="微软雅黑" panose="020B0503020204020204" pitchFamily="34" charset="-122"/>
-              <a:ea typeface="微软雅黑" panose="020B0503020204020204" pitchFamily="34" charset="-122"/>
-            </a:endParaRPr>
-          </a:p>
-        </p:txBody>
-      </p:sp>
-      <p:sp>
-        <p:nvSpPr>
-          <p:cNvPr id="16" name="text.project_code"/>
-          <p:cNvSpPr/>
-          <p:nvPr/>
-        </p:nvSpPr>
-        <p:spPr>
-          <a:xfrm>
-            <a:off x="2356471" y="4540461"/>
-            <a:ext cx="3365500" cy="545494"/>
-          </a:xfrm>
-          <a:prstGeom prst="rect">
-            <a:avLst/>
-          </a:prstGeom>
-          <a:noFill/>
-          <a:ln w="12700" cap="flat" cmpd="sng">
-            <a:noFill/>
-            <a:prstDash val="solid"/>
-            <a:round/>
-          </a:ln>
-        </p:spPr>
-        <p:txBody>
-          <a:bodyPr vert="horz" wrap="square" lIns="0" tIns="0" rIns="0" bIns="0" rtlCol="0" anchor="ctr" anchorCtr="0"/>
-          <a:lstStyle/>
-          <a:p>
-            <a:pPr marL="0" indent="0" algn="l">
-              <a:lnSpc>
-                <a:spcPct val="116666"/>
-              </a:lnSpc>
-              <a:defRPr/>
-            </a:pPr>
-            <a:r>
-              <a:rPr lang="en-US" sz="1600" b="0" i="0" u="none" strike="noStrike" dirty="0">
-                <a:solidFill>
-                  <a:schemeClr val="tx1"/>
-                </a:solidFill>
-                <a:latin typeface="微软雅黑" panose="020B0503020204020204" pitchFamily="34" charset="-122"/>
-                <a:ea typeface="微软雅黑" panose="020B0503020204020204" pitchFamily="34" charset="-122"/>
-                <a:cs typeface="Noto Sans SC"/>
-                <a:sym typeface="Noto Sans SC"/>
-              </a:rPr>
-              <a:t>PRJ-2026-0610</a:t>
-            </a:r>
-            <a:r>
-              <a:rPr lang="en-US" sz="1600" b="0" i="0" u="none" strike="noStrike" dirty="0">
-                <a:solidFill>
-                  <a:srgbClr val="C00000"/>
-                </a:solidFill>
-                <a:latin typeface="微软雅黑" panose="020B0503020204020204" pitchFamily="34" charset="-122"/>
-                <a:ea typeface="微软雅黑" panose="020B0503020204020204" pitchFamily="34" charset="-122"/>
-                <a:cs typeface="Noto Sans SC"/>
-                <a:sym typeface="Noto Sans SC"/>
-              </a:rPr>
-              <a:t/>
-            </a:r>
-            <a:r>
-              <a:rPr lang="en-US" sz="1600" b="0" i="0" u="none" strike="noStrike" dirty="0">
-                <a:solidFill>
-                  <a:schemeClr val="tx1"/>
-                </a:solidFill>
-                <a:latin typeface="微软雅黑" panose="020B0503020204020204" pitchFamily="34" charset="-122"/>
-                <a:ea typeface="微软雅黑" panose="020B0503020204020204" pitchFamily="34" charset="-122"/>
-                <a:cs typeface="Noto Sans SC"/>
-                <a:sym typeface="Noto Sans SC"/>
-              </a:rPr>
-              <a:t/>
-            </a:r>
-            <a:endParaRPr lang="en-US" sz="1100" dirty="0">
-              <a:solidFill>
-                <a:schemeClr val="tx1"/>
-              </a:solidFill>
-              <a:latin typeface="微软雅黑" panose="020B0503020204020204" pitchFamily="34" charset="-122"/>
-              <a:ea typeface="微软雅黑" panose="020B0503020204020204" pitchFamily="34" charset="-122"/>
-            </a:endParaRPr>
-          </a:p>
-        </p:txBody>
-      </p:sp>
-      <p:sp>
-        <p:nvSpPr>
-          <p:cNvPr id="17" name="AutoShape 17"/>
-          <p:cNvSpPr/>
-          <p:nvPr/>
-        </p:nvSpPr>
-        <p:spPr>
-          <a:xfrm>
-            <a:off x="6184207" y="2544951"/>
-            <a:ext cx="5207000" cy="3403601"/>
-          </a:xfrm>
-          <a:prstGeom prst="roundRect">
-            <a:avLst>
-              <a:gd name="adj" fmla="val 0"/>
-            </a:avLst>
-          </a:prstGeom>
-          <a:solidFill>
-            <a:srgbClr val="F9FAFB">
-              <a:alpha val="100000"/>
-            </a:srgbClr>
-          </a:solidFill>
-          <a:ln w="12700" cap="flat" cmpd="sng">
-            <a:solidFill>
-              <a:srgbClr val="E5E7EB">
-                <a:alpha val="100000"/>
-              </a:srgbClr>
-            </a:solidFill>
-            <a:prstDash val="solid"/>
-            <a:round/>
-          </a:ln>
-        </p:spPr>
-        <p:txBody>
-          <a:bodyPr vert="horz" wrap="square" lIns="63500" tIns="63500" rIns="63500" bIns="63500" rtlCol="0" anchor="ctr"/>
-          <a:lstStyle/>
-          <a:p>
-            <a:pPr algn="ctr">
-              <a:defRPr/>
-            </a:pPr>
-            <a:endParaRPr>
-              <a:latin typeface="微软雅黑" panose="020B0503020204020204" pitchFamily="34" charset="-122"/>
-              <a:ea typeface="微软雅黑" panose="020B0503020204020204" pitchFamily="34" charset="-122"/>
-            </a:endParaRPr>
-          </a:p>
-        </p:txBody>
-      </p:sp>
-      <p:sp>
-        <p:nvSpPr>
-          <p:cNvPr id="18" name="AutoShape 18"/>
-          <p:cNvSpPr/>
-          <p:nvPr/>
-        </p:nvSpPr>
-        <p:spPr>
-          <a:xfrm>
-            <a:off x="6178319" y="2544951"/>
-            <a:ext cx="5207000" cy="531797"/>
-          </a:xfrm>
-          <a:prstGeom prst="roundRect">
-            <a:avLst>
-              <a:gd name="adj" fmla="val 0"/>
-            </a:avLst>
-          </a:prstGeom>
-          <a:solidFill>
-            <a:srgbClr val="0052CC">
-              <a:alpha val="100000"/>
-            </a:srgbClr>
-          </a:solidFill>
-          <a:ln w="25400" cap="flat" cmpd="sng">
-            <a:noFill/>
-            <a:prstDash val="solid"/>
-            <a:round/>
-          </a:ln>
-        </p:spPr>
-        <p:txBody>
-          <a:bodyPr vert="horz" wrap="square" lIns="63500" tIns="63500" rIns="63500" bIns="63500" rtlCol="0" anchor="ctr"/>
-          <a:lstStyle/>
-          <a:p>
-            <a:pPr algn="ctr">
-              <a:defRPr/>
-            </a:pPr>
-            <a:endParaRPr>
-              <a:latin typeface="微软雅黑" panose="020B0503020204020204" pitchFamily="34" charset="-122"/>
-              <a:ea typeface="微软雅黑" panose="020B0503020204020204" pitchFamily="34" charset="-122"/>
-            </a:endParaRPr>
-          </a:p>
-        </p:txBody>
-      </p:sp>
-      <p:pic>
-        <p:nvPicPr>
-          <p:cNvPr id="19" name="Picture 19"/>
-          <p:cNvPicPr>
-            <a:picLocks noChangeAspect="1"/>
-          </p:cNvPicPr>
-          <p:nvPr/>
-        </p:nvPicPr>
-        <p:blipFill>
-          <a:blip r:embed="rId5">
-            <a:extLst>
-              <a:ext uri="{28A0092B-C50C-407E-A947-70E740481C1C}">
-                <a14:useLocalDpi xmlns:a14="http://schemas.microsoft.com/office/drawing/2010/main" val="0"/>
-              </a:ext>
-              <a:ext uri="{96DAC541-7B7A-43D3-8B79-37D633B846F1}">
-                <asvg:svgBlip xmlns:asvg="http://schemas.microsoft.com/office/drawing/2016/SVG/main" r:embed="rId6"/>
-              </a:ext>
-            </a:extLst>
-          </a:blip>
-          <a:stretch>
-            <a:fillRect/>
-          </a:stretch>
-        </p:blipFill>
-        <p:spPr>
-          <a:xfrm>
-            <a:off x="6368819" y="2697351"/>
-            <a:ext cx="304800" cy="265899"/>
-          </a:xfrm>
-          <a:prstGeom prst="rect">
-            <a:avLst/>
-          </a:prstGeom>
-        </p:spPr>
-      </p:pic>
-      <p:sp>
-        <p:nvSpPr>
-          <p:cNvPr id="20" name="AutoShape 20"/>
-          <p:cNvSpPr/>
-          <p:nvPr/>
-        </p:nvSpPr>
-        <p:spPr>
-          <a:xfrm>
-            <a:off x="6813319" y="2589267"/>
-            <a:ext cx="4318000" cy="443164"/>
-          </a:xfrm>
-          <a:prstGeom prst="rect">
-            <a:avLst/>
-          </a:prstGeom>
-          <a:noFill/>
-          <a:ln w="12700" cap="flat" cmpd="sng">
-            <a:noFill/>
-            <a:prstDash val="solid"/>
-            <a:round/>
-          </a:ln>
-        </p:spPr>
-        <p:txBody>
-          <a:bodyPr vert="horz" wrap="square" lIns="0" tIns="0" rIns="0" bIns="0" rtlCol="0" anchor="ctr" anchorCtr="0"/>
-          <a:lstStyle/>
-          <a:p>
-            <a:pPr marL="0" indent="0" algn="l">
-              <a:lnSpc>
-                <a:spcPct val="125000"/>
-              </a:lnSpc>
-              <a:defRPr/>
-            </a:pPr>
-            <a:r>
-              <a:rPr lang="en-US" sz="1600" b="1" i="0" u="none" strike="noStrike" dirty="0">
-                <a:solidFill>
-                  <a:srgbClr val="FFFFFF"/>
-                </a:solidFill>
-                <a:latin typeface="微软雅黑" panose="020B0503020204020204" pitchFamily="34" charset="-122"/>
-                <a:ea typeface="微软雅黑" panose="020B0503020204020204" pitchFamily="34" charset="-122"/>
-                <a:cs typeface="Noto Sans SC"/>
-                <a:sym typeface="Noto Sans SC"/>
-              </a:rPr>
-              <a:t>项目</a:t>
-            </a:r>
-            <a:r>
-              <a:rPr lang="zh-CN" altLang="en-US" sz="1600" b="1" i="0" u="none" strike="noStrike" dirty="0">
-                <a:solidFill>
-                  <a:srgbClr val="FFFFFF"/>
-                </a:solidFill>
-                <a:latin typeface="微软雅黑" panose="020B0503020204020204" pitchFamily="34" charset="-122"/>
-                <a:ea typeface="微软雅黑" panose="020B0503020204020204" pitchFamily="34" charset="-122"/>
-                <a:cs typeface="Noto Sans SC"/>
-                <a:sym typeface="Noto Sans SC"/>
-              </a:rPr>
-              <a:t>时间</a:t>
-            </a:r>
-            <a:r>
-              <a:rPr lang="en-US" sz="1600" b="1" i="0" u="none" strike="noStrike" dirty="0">
-                <a:solidFill>
-                  <a:srgbClr val="FFFFFF"/>
-                </a:solidFill>
-                <a:latin typeface="微软雅黑" panose="020B0503020204020204" pitchFamily="34" charset="-122"/>
-                <a:ea typeface="微软雅黑" panose="020B0503020204020204" pitchFamily="34" charset="-122"/>
-                <a:cs typeface="Noto Sans SC"/>
-                <a:sym typeface="Noto Sans SC"/>
-              </a:rPr>
-              <a:t>信息</a:t>
-            </a:r>
-            <a:endParaRPr lang="en-US" sz="1100" dirty="0">
-              <a:latin typeface="微软雅黑" panose="020B0503020204020204" pitchFamily="34" charset="-122"/>
-              <a:ea typeface="微软雅黑" panose="020B0503020204020204" pitchFamily="34" charset="-122"/>
-            </a:endParaRPr>
-          </a:p>
-        </p:txBody>
-      </p:sp>
-      <p:sp>
-        <p:nvSpPr>
-          <p:cNvPr id="22" name="AutoShape 22"/>
-          <p:cNvSpPr/>
-          <p:nvPr/>
-        </p:nvSpPr>
-        <p:spPr>
-          <a:xfrm>
-            <a:off x="6368819" y="3159513"/>
-            <a:ext cx="1270000" cy="609351"/>
-          </a:xfrm>
-          <a:prstGeom prst="rect">
-            <a:avLst/>
-          </a:prstGeom>
-          <a:noFill/>
-          <a:ln w="12700" cap="flat" cmpd="sng">
-            <a:noFill/>
-            <a:prstDash val="solid"/>
-            <a:round/>
-          </a:ln>
-        </p:spPr>
-        <p:txBody>
-          <a:bodyPr vert="horz" wrap="square" lIns="0" tIns="0" rIns="0" bIns="0" rtlCol="0" anchor="ctr" anchorCtr="0"/>
-          <a:lstStyle/>
-          <a:p>
-            <a:pPr marL="0" indent="0" algn="l">
-              <a:lnSpc>
-                <a:spcPct val="125000"/>
-              </a:lnSpc>
-              <a:defRPr/>
-            </a:pPr>
-            <a:r>
-              <a:rPr lang="zh-CN" altLang="en-US" sz="1600" b="1" dirty="0">
-                <a:solidFill>
-                  <a:srgbClr val="333333"/>
-                </a:solidFill>
-                <a:latin typeface="微软雅黑" panose="020B0503020204020204" pitchFamily="34" charset="-122"/>
-                <a:ea typeface="微软雅黑" panose="020B0503020204020204" pitchFamily="34" charset="-122"/>
-                <a:sym typeface="Noto Sans SC"/>
-              </a:rPr>
-              <a:t>计划开始时间</a:t>
-            </a:r>
-            <a:endParaRPr lang="en-US" sz="1100" dirty="0">
-              <a:latin typeface="微软雅黑" panose="020B0503020204020204" pitchFamily="34" charset="-122"/>
-              <a:ea typeface="微软雅黑" panose="020B0503020204020204" pitchFamily="34" charset="-122"/>
-            </a:endParaRPr>
-          </a:p>
-        </p:txBody>
-      </p:sp>
-      <p:sp>
-        <p:nvSpPr>
-          <p:cNvPr id="25" name="AutoShape 25"/>
-          <p:cNvSpPr/>
-          <p:nvPr/>
-        </p:nvSpPr>
-        <p:spPr>
-          <a:xfrm>
-            <a:off x="6368819" y="3963433"/>
-            <a:ext cx="1270000" cy="460517"/>
-          </a:xfrm>
-          <a:prstGeom prst="rect">
-            <a:avLst/>
-          </a:prstGeom>
-          <a:noFill/>
-          <a:ln w="12700" cap="flat" cmpd="sng">
-            <a:noFill/>
-            <a:prstDash val="solid"/>
-            <a:round/>
-          </a:ln>
-        </p:spPr>
-        <p:txBody>
-          <a:bodyPr vert="horz" wrap="square" lIns="0" tIns="0" rIns="0" bIns="0" rtlCol="0" anchor="ctr" anchorCtr="0"/>
-          <a:lstStyle/>
-          <a:p>
-            <a:pPr marL="0" indent="0" algn="l">
-              <a:lnSpc>
-                <a:spcPct val="125000"/>
-              </a:lnSpc>
-              <a:defRPr/>
-            </a:pPr>
-            <a:r>
-              <a:rPr lang="en-US" sz="1600" b="1" i="0" u="none" strike="noStrike" dirty="0">
-                <a:solidFill>
-                  <a:srgbClr val="333333"/>
-                </a:solidFill>
-                <a:latin typeface="微软雅黑" panose="020B0503020204020204" pitchFamily="34" charset="-122"/>
-                <a:ea typeface="微软雅黑" panose="020B0503020204020204" pitchFamily="34" charset="-122"/>
-                <a:cs typeface="Noto Sans SC"/>
-                <a:sym typeface="Noto Sans SC"/>
-              </a:rPr>
-              <a:t>计划</a:t>
-            </a:r>
-            <a:r>
-              <a:rPr lang="zh-CN" altLang="en-US" sz="1600" b="1" i="0" u="none" strike="noStrike" dirty="0">
-                <a:solidFill>
-                  <a:srgbClr val="333333"/>
-                </a:solidFill>
-                <a:latin typeface="微软雅黑" panose="020B0503020204020204" pitchFamily="34" charset="-122"/>
-                <a:ea typeface="微软雅黑" panose="020B0503020204020204" pitchFamily="34" charset="-122"/>
-                <a:cs typeface="Noto Sans SC"/>
-                <a:sym typeface="Noto Sans SC"/>
-              </a:rPr>
-              <a:t>结束</a:t>
-            </a:r>
-            <a:r>
-              <a:rPr lang="en-US" sz="1600" b="1" i="0" u="none" strike="noStrike" dirty="0">
-                <a:solidFill>
-                  <a:srgbClr val="333333"/>
-                </a:solidFill>
-                <a:latin typeface="微软雅黑" panose="020B0503020204020204" pitchFamily="34" charset="-122"/>
-                <a:ea typeface="微软雅黑" panose="020B0503020204020204" pitchFamily="34" charset="-122"/>
-                <a:cs typeface="Noto Sans SC"/>
-                <a:sym typeface="Noto Sans SC"/>
-              </a:rPr>
-              <a:t>时间</a:t>
-            </a:r>
-            <a:endParaRPr lang="en-US" sz="1100" dirty="0">
-              <a:latin typeface="微软雅黑" panose="020B0503020204020204" pitchFamily="34" charset="-122"/>
-              <a:ea typeface="微软雅黑" panose="020B0503020204020204" pitchFamily="34" charset="-122"/>
-            </a:endParaRPr>
-          </a:p>
-        </p:txBody>
-      </p:sp>
-      <p:sp>
-        <p:nvSpPr>
-          <p:cNvPr id="27" name="AutoShape 27"/>
-          <p:cNvSpPr/>
-          <p:nvPr/>
-        </p:nvSpPr>
-        <p:spPr>
-          <a:xfrm>
-            <a:off x="6368819" y="4501914"/>
-            <a:ext cx="1270000" cy="664746"/>
-          </a:xfrm>
-          <a:prstGeom prst="rect">
-            <a:avLst/>
-          </a:prstGeom>
-          <a:noFill/>
-          <a:ln w="12700" cap="flat" cmpd="sng">
-            <a:noFill/>
-            <a:prstDash val="solid"/>
-            <a:round/>
-          </a:ln>
-        </p:spPr>
-        <p:txBody>
-          <a:bodyPr vert="horz" wrap="square" lIns="0" tIns="0" rIns="0" bIns="0" rtlCol="0" anchor="ctr" anchorCtr="0"/>
-          <a:lstStyle/>
-          <a:p>
-            <a:pPr marL="0" indent="0" algn="l">
-              <a:lnSpc>
-                <a:spcPct val="125000"/>
-              </a:lnSpc>
-              <a:defRPr/>
-            </a:pPr>
-            <a:r>
-              <a:rPr lang="en-US" sz="1600" b="1" i="0" u="none" strike="noStrike" dirty="0">
-                <a:solidFill>
-                  <a:srgbClr val="333333"/>
-                </a:solidFill>
-                <a:latin typeface="微软雅黑" panose="020B0503020204020204" pitchFamily="34" charset="-122"/>
-                <a:ea typeface="微软雅黑" panose="020B0503020204020204" pitchFamily="34" charset="-122"/>
-                <a:cs typeface="Noto Sans SC"/>
-                <a:sym typeface="Noto Sans SC"/>
-              </a:rPr>
-              <a:t>报告日期</a:t>
-            </a:r>
-            <a:endParaRPr lang="en-US" sz="1100" dirty="0">
-              <a:latin typeface="微软雅黑" panose="020B0503020204020204" pitchFamily="34" charset="-122"/>
-              <a:ea typeface="微软雅黑" panose="020B0503020204020204" pitchFamily="34" charset="-122"/>
-            </a:endParaRPr>
-          </a:p>
-        </p:txBody>
-      </p:sp>
-      <p:cxnSp>
-        <p:nvCxnSpPr>
-          <p:cNvPr id="29" name="Connector 12">
-            <a:extLst>
-              <a:ext uri="{FF2B5EF4-FFF2-40B4-BE49-F238E27FC236}">
-                <a16:creationId xmlns:a16="http://schemas.microsoft.com/office/drawing/2014/main" id="{475DD880-5164-4E97-A926-5186886CA707}"/>
-              </a:ext>
-            </a:extLst>
-          </p:cNvPr>
-          <p:cNvCxnSpPr>
-            <a:cxnSpLocks/>
-          </p:cNvCxnSpPr>
-          <p:nvPr/>
-        </p:nvCxnSpPr>
-        <p:spPr>
-          <a:xfrm>
-            <a:off x="913943" y="5168539"/>
-            <a:ext cx="4826016" cy="0"/>
-          </a:xfrm>
-          <a:prstGeom prst="straightConnector1">
-            <a:avLst/>
-          </a:prstGeom>
-          <a:solidFill>
-            <a:srgbClr val="DEE0E3">
-              <a:alpha val="100000"/>
-            </a:srgbClr>
-          </a:solidFill>
-          <a:ln w="6350" cap="flat" cmpd="sng">
-            <a:solidFill>
-              <a:schemeClr val="bg1">
-                <a:lumMod val="75000"/>
-              </a:schemeClr>
-            </a:solidFill>
-            <a:prstDash val="dash"/>
-            <a:round/>
-            <a:headEnd type="none" w="med" len="med"/>
-            <a:tailEnd type="none" w="med" len="med"/>
-          </a:ln>
-        </p:spPr>
-      </p:cxnSp>
-      <p:sp>
-        <p:nvSpPr>
-          <p:cNvPr id="30" name="AutoShape 15">
-            <a:extLst>
-              <a:ext uri="{FF2B5EF4-FFF2-40B4-BE49-F238E27FC236}">
-                <a16:creationId xmlns:a16="http://schemas.microsoft.com/office/drawing/2014/main" id="{41517B5A-A666-4952-8520-69792DB234C5}"/>
-              </a:ext>
-            </a:extLst>
-          </p:cNvPr>
-          <p:cNvSpPr/>
-          <p:nvPr/>
-        </p:nvSpPr>
-        <p:spPr>
-          <a:xfrm>
-            <a:off x="868809" y="5248970"/>
-            <a:ext cx="1270000" cy="561208"/>
-          </a:xfrm>
-          <a:prstGeom prst="rect">
-            <a:avLst/>
-          </a:prstGeom>
-          <a:noFill/>
-          <a:ln w="12700" cap="flat" cmpd="sng">
-            <a:noFill/>
-            <a:prstDash val="solid"/>
-            <a:round/>
-          </a:ln>
-        </p:spPr>
-        <p:txBody>
-          <a:bodyPr vert="horz" wrap="square" lIns="0" tIns="0" rIns="0" bIns="0" rtlCol="0" anchor="ctr" anchorCtr="0"/>
-          <a:lstStyle/>
-          <a:p>
-            <a:pPr marL="0" indent="0" algn="l">
-              <a:lnSpc>
-                <a:spcPct val="125000"/>
-              </a:lnSpc>
-              <a:defRPr/>
-            </a:pPr>
-            <a:r>
-              <a:rPr lang="zh-CN" altLang="en-US" sz="1600" b="1" dirty="0">
-                <a:solidFill>
-                  <a:srgbClr val="333333"/>
-                </a:solidFill>
-                <a:latin typeface="微软雅黑" panose="020B0503020204020204" pitchFamily="34" charset="-122"/>
-                <a:ea typeface="微软雅黑" panose="020B0503020204020204" pitchFamily="34" charset="-122"/>
-                <a:sym typeface="Noto Sans SC"/>
-              </a:rPr>
-              <a:t>项目</a:t>
-            </a:r>
-            <a:r>
-              <a:rPr lang="en-US" altLang="zh-CN" sz="1600" b="1" dirty="0">
-                <a:solidFill>
-                  <a:srgbClr val="333333"/>
-                </a:solidFill>
-                <a:latin typeface="微软雅黑" panose="020B0503020204020204" pitchFamily="34" charset="-122"/>
-                <a:ea typeface="微软雅黑" panose="020B0503020204020204" pitchFamily="34" charset="-122"/>
-                <a:sym typeface="Noto Sans SC"/>
-              </a:rPr>
-              <a:t>PD</a:t>
-            </a:r>
-            <a:endParaRPr lang="en-US" sz="1100" dirty="0">
-              <a:latin typeface="微软雅黑" panose="020B0503020204020204" pitchFamily="34" charset="-122"/>
-              <a:ea typeface="微软雅黑" panose="020B0503020204020204" pitchFamily="34" charset="-122"/>
-            </a:endParaRPr>
-          </a:p>
-        </p:txBody>
-      </p:sp>
-      <p:sp>
-        <p:nvSpPr>
-          <p:cNvPr id="31" name="text.customer_name">
-            <a:extLst>
-              <a:ext uri="{FF2B5EF4-FFF2-40B4-BE49-F238E27FC236}">
-                <a16:creationId xmlns:a16="http://schemas.microsoft.com/office/drawing/2014/main" id="{97CBACC2-5868-45C6-B2B2-2260090FB17E}"/>
-              </a:ext>
-            </a:extLst>
-          </p:cNvPr>
-          <p:cNvSpPr/>
-          <p:nvPr/>
-        </p:nvSpPr>
-        <p:spPr>
-          <a:xfrm>
-            <a:off x="2348814" y="5197201"/>
-            <a:ext cx="3365500" cy="664746"/>
-          </a:xfrm>
-          <a:prstGeom prst="rect">
-            <a:avLst/>
-          </a:prstGeom>
-          <a:noFill/>
-          <a:ln w="12700" cap="flat" cmpd="sng">
-            <a:noFill/>
-            <a:prstDash val="solid"/>
-            <a:round/>
-          </a:ln>
-        </p:spPr>
-        <p:txBody>
-          <a:bodyPr vert="horz" wrap="square" lIns="0" tIns="0" rIns="0" bIns="0" rtlCol="0" anchor="ctr" anchorCtr="0"/>
-          <a:lstStyle/>
-          <a:p>
-            <a:pPr marL="0" indent="0" algn="l">
-              <a:lnSpc>
-                <a:spcPct val="116666"/>
-              </a:lnSpc>
-              <a:defRPr/>
-            </a:pPr>
-            <a:r>
-              <a:rPr lang="en-US" sz="1600" b="0" i="0" u="none" strike="noStrike" dirty="0">
-                <a:solidFill>
-                  <a:schemeClr val="tx1"/>
-                </a:solidFill>
-                <a:latin typeface="微软雅黑" panose="020B0503020204020204" pitchFamily="34" charset="-122"/>
-                <a:ea typeface="微软雅黑" panose="020B0503020204020204" pitchFamily="34" charset="-122"/>
-                <a:cs typeface="Noto Sans SC"/>
-                <a:sym typeface="Noto Sans SC"/>
-              </a:rPr>
-              <a:t>星河科技集团</a:t>
-            </a:r>
-            <a:r>
-              <a:rPr lang="en-US" sz="1600" b="0" i="0" u="none" strike="noStrike" dirty="0">
-                <a:solidFill>
-                  <a:srgbClr val="C00000"/>
-                </a:solidFill>
-                <a:latin typeface="微软雅黑" panose="020B0503020204020204" pitchFamily="34" charset="-122"/>
-                <a:ea typeface="微软雅黑" panose="020B0503020204020204" pitchFamily="34" charset="-122"/>
-                <a:cs typeface="Noto Sans SC"/>
-                <a:sym typeface="Noto Sans SC"/>
-              </a:rPr>
-              <a:t/>
-            </a:r>
-            <a:r>
-              <a:rPr lang="en-US" sz="1600" b="0" i="0" u="none" strike="noStrike" dirty="0">
-                <a:solidFill>
-                  <a:schemeClr val="tx1"/>
-                </a:solidFill>
-                <a:latin typeface="微软雅黑" panose="020B0503020204020204" pitchFamily="34" charset="-122"/>
-                <a:ea typeface="微软雅黑" panose="020B0503020204020204" pitchFamily="34" charset="-122"/>
-                <a:cs typeface="Noto Sans SC"/>
-                <a:sym typeface="Noto Sans SC"/>
-              </a:rPr>
-              <a:t/>
-            </a:r>
-            <a:endParaRPr lang="en-US" sz="1100" dirty="0">
-              <a:solidFill>
-                <a:schemeClr val="tx1"/>
-              </a:solidFill>
-              <a:latin typeface="微软雅黑" panose="020B0503020204020204" pitchFamily="34" charset="-122"/>
-              <a:ea typeface="微软雅黑" panose="020B0503020204020204" pitchFamily="34" charset="-122"/>
-            </a:endParaRPr>
-          </a:p>
-        </p:txBody>
-      </p:sp>
-      <p:sp>
-        <p:nvSpPr>
-          <p:cNvPr id="37" name="AutoShape 7">
-            <a:extLst>
-              <a:ext uri="{FF2B5EF4-FFF2-40B4-BE49-F238E27FC236}">
-                <a16:creationId xmlns:a16="http://schemas.microsoft.com/office/drawing/2014/main" id="{22009973-3726-478C-A932-A1FCA6D04E44}"/>
-              </a:ext>
-            </a:extLst>
-          </p:cNvPr>
-          <p:cNvSpPr/>
-          <p:nvPr/>
-        </p:nvSpPr>
-        <p:spPr>
-          <a:xfrm>
-            <a:off x="968397" y="1569729"/>
-            <a:ext cx="856096" cy="443164"/>
-          </a:xfrm>
-          <a:prstGeom prst="rect">
-            <a:avLst/>
-          </a:prstGeom>
-          <a:noFill/>
-          <a:ln w="12700" cap="flat" cmpd="sng">
-            <a:noFill/>
-            <a:prstDash val="solid"/>
-            <a:round/>
-          </a:ln>
-        </p:spPr>
-        <p:txBody>
-          <a:bodyPr vert="horz" wrap="square" lIns="0" tIns="0" rIns="0" bIns="0" rtlCol="0" anchor="ctr" anchorCtr="0"/>
-          <a:lstStyle/>
-          <a:p>
-            <a:pPr marL="0" indent="0" algn="l">
-              <a:lnSpc>
-                <a:spcPct val="125000"/>
-              </a:lnSpc>
-              <a:defRPr/>
-            </a:pPr>
-            <a:r>
-              <a:rPr lang="en-US" sz="1600" b="1" i="0" u="none" strike="noStrike" dirty="0">
-                <a:solidFill>
-                  <a:srgbClr val="FFFFFF"/>
-                </a:solidFill>
-                <a:latin typeface="微软雅黑" panose="020B0503020204020204" pitchFamily="34" charset="-122"/>
-                <a:ea typeface="微软雅黑" panose="020B0503020204020204" pitchFamily="34" charset="-122"/>
-                <a:cs typeface="Noto Sans SC"/>
-                <a:sym typeface="Noto Sans SC"/>
-              </a:rPr>
-              <a:t>项目</a:t>
-            </a:r>
-          </a:p>
-          <a:p>
-            <a:pPr marL="0" indent="0" algn="l">
-              <a:lnSpc>
-                <a:spcPct val="125000"/>
-              </a:lnSpc>
-              <a:defRPr/>
-            </a:pPr>
-            <a:r>
-              <a:rPr lang="zh-CN" altLang="en-US" sz="1600" b="1" dirty="0">
-                <a:solidFill>
-                  <a:srgbClr val="FFFFFF"/>
-                </a:solidFill>
-                <a:latin typeface="微软雅黑" panose="020B0503020204020204" pitchFamily="34" charset="-122"/>
-                <a:ea typeface="微软雅黑" panose="020B0503020204020204" pitchFamily="34" charset="-122"/>
-                <a:sym typeface="Noto Sans SC"/>
-              </a:rPr>
-              <a:t>概述</a:t>
-            </a:r>
-            <a:endParaRPr lang="en-US" sz="1100" dirty="0">
-              <a:latin typeface="微软雅黑" panose="020B0503020204020204" pitchFamily="34" charset="-122"/>
-              <a:ea typeface="微软雅黑" panose="020B0503020204020204" pitchFamily="34" charset="-122"/>
-            </a:endParaRPr>
-          </a:p>
-        </p:txBody>
-      </p:sp>
-      <p:sp>
-        <p:nvSpPr>
-          <p:cNvPr id="40" name="AutoShape 4">
-            <a:extLst>
-              <a:ext uri="{FF2B5EF4-FFF2-40B4-BE49-F238E27FC236}">
-                <a16:creationId xmlns:a16="http://schemas.microsoft.com/office/drawing/2014/main" id="{EE6D0313-DDEF-4535-BB5C-EE47199F0D5C}"/>
-              </a:ext>
-            </a:extLst>
-          </p:cNvPr>
-          <p:cNvSpPr/>
-          <p:nvPr/>
-        </p:nvSpPr>
-        <p:spPr>
-          <a:xfrm>
-            <a:off x="1706418" y="1412974"/>
-            <a:ext cx="9696723" cy="751241"/>
-          </a:xfrm>
-          <a:prstGeom prst="roundRect">
-            <a:avLst>
-              <a:gd name="adj" fmla="val 0"/>
-            </a:avLst>
-          </a:prstGeom>
-          <a:solidFill>
-            <a:srgbClr val="F9FAFB">
-              <a:alpha val="100000"/>
-            </a:srgbClr>
-          </a:solidFill>
-          <a:ln w="12700" cap="flat" cmpd="sng">
-            <a:solidFill>
-              <a:srgbClr val="E5E7EB">
-                <a:alpha val="100000"/>
-              </a:srgbClr>
-            </a:solidFill>
-            <a:prstDash val="solid"/>
-            <a:round/>
-          </a:ln>
-        </p:spPr>
-        <p:txBody>
-          <a:bodyPr vert="horz" wrap="square" lIns="63500" tIns="63500" rIns="63500" bIns="63500" rtlCol="0" anchor="ctr"/>
-          <a:lstStyle/>
-          <a:p>
-            <a:pPr algn="ctr">
-              <a:defRPr/>
-            </a:pPr>
-            <a:endParaRPr>
-              <a:latin typeface="微软雅黑" panose="020B0503020204020204" pitchFamily="34" charset="-122"/>
-              <a:ea typeface="微软雅黑" panose="020B0503020204020204" pitchFamily="34" charset="-122"/>
-            </a:endParaRPr>
-          </a:p>
-        </p:txBody>
-      </p:sp>
-      <p:sp>
-        <p:nvSpPr>
-          <p:cNvPr id="41" name="text.project_manager">
-            <a:extLst>
-              <a:ext uri="{FF2B5EF4-FFF2-40B4-BE49-F238E27FC236}">
-                <a16:creationId xmlns:a16="http://schemas.microsoft.com/office/drawing/2014/main" id="{AE3EA21B-40DE-4C7C-B435-9E1EDFDC6890}"/>
-              </a:ext>
-            </a:extLst>
-          </p:cNvPr>
-          <p:cNvSpPr/>
-          <p:nvPr/>
-        </p:nvSpPr>
-        <p:spPr>
-          <a:xfrm>
-            <a:off x="1957497" y="1507215"/>
-            <a:ext cx="1561558" cy="521377"/>
-          </a:xfrm>
-          <a:prstGeom prst="rect">
-            <a:avLst/>
-          </a:prstGeom>
-          <a:noFill/>
-          <a:ln w="12700" cap="flat" cmpd="sng">
-            <a:noFill/>
-            <a:prstDash val="solid"/>
-            <a:round/>
-          </a:ln>
-        </p:spPr>
-        <p:txBody>
-          <a:bodyPr vert="horz" wrap="square" lIns="0" tIns="0" rIns="0" bIns="0" rtlCol="0" anchor="ctr" anchorCtr="0"/>
-          <a:lstStyle/>
-          <a:p>
-            <a:pPr marL="0" indent="0" algn="l">
-              <a:lnSpc>
-                <a:spcPct val="116666"/>
-              </a:lnSpc>
-              <a:defRPr/>
-            </a:pPr>
-            <a:r>
-              <a:rPr lang="en-US" sz="1600" b="0" i="0" u="none" strike="noStrike" dirty="0">
-                <a:solidFill>
-                  <a:schemeClr val="tx1"/>
-                </a:solidFill>
-                <a:latin typeface="微软雅黑" panose="020B0503020204020204" pitchFamily="34" charset="-122"/>
-                <a:ea typeface="微软雅黑" panose="020B0503020204020204" pitchFamily="34" charset="-122"/>
-                <a:cs typeface="Noto Sans SC"/>
-                <a:sym typeface="Noto Sans SC"/>
-              </a:rPr>
-              <a:t>张明</a:t>
-            </a:r>
-            <a:endParaRPr lang="en-US" sz="1100" dirty="0">
-              <a:solidFill>
-                <a:schemeClr val="tx1"/>
-              </a:solidFill>
-              <a:latin typeface="微软雅黑" panose="020B0503020204020204" pitchFamily="34" charset="-122"/>
-              <a:ea typeface="微软雅黑" panose="020B0503020204020204" pitchFamily="34" charset="-122"/>
-            </a:endParaRPr>
-          </a:p>
-        </p:txBody>
-      </p:sp>
-      <p:sp>
-        <p:nvSpPr>
-          <p:cNvPr id="42" name="text.planned_start_date">
-            <a:extLst>
-              <a:ext uri="{FF2B5EF4-FFF2-40B4-BE49-F238E27FC236}">
-                <a16:creationId xmlns:a16="http://schemas.microsoft.com/office/drawing/2014/main" id="{9D0517A7-BC0D-42FA-9444-CE6E37E8C07B}"/>
-              </a:ext>
-            </a:extLst>
-          </p:cNvPr>
-          <p:cNvSpPr/>
-          <p:nvPr/>
-        </p:nvSpPr>
-        <p:spPr>
-          <a:xfrm>
-            <a:off x="8328197" y="3159513"/>
-            <a:ext cx="2922076" cy="609351"/>
-          </a:xfrm>
-          <a:prstGeom prst="rect">
-            <a:avLst/>
-          </a:prstGeom>
-          <a:noFill/>
-          <a:ln w="12700" cap="flat" cmpd="sng">
-            <a:noFill/>
-            <a:prstDash val="solid"/>
-            <a:round/>
-          </a:ln>
-        </p:spPr>
-        <p:txBody>
-          <a:bodyPr vert="horz" wrap="square" lIns="0" tIns="0" rIns="0" bIns="0" rtlCol="0" anchor="ctr" anchorCtr="0"/>
-          <a:lstStyle/>
-          <a:p>
-            <a:pPr marL="0" indent="0" algn="l">
-              <a:lnSpc>
-                <a:spcPct val="116666"/>
-              </a:lnSpc>
-              <a:defRPr/>
-            </a:pPr>
-            <a:r>
-              <a:rPr lang="en-US" sz="1600" b="0" i="0" u="none" strike="noStrike" dirty="0">
-                <a:solidFill>
-                  <a:schemeClr val="tx1"/>
-                </a:solidFill>
-                <a:latin typeface="微软雅黑" panose="020B0503020204020204" pitchFamily="34" charset="-122"/>
-                <a:ea typeface="微软雅黑" panose="020B0503020204020204" pitchFamily="34" charset="-122"/>
-                <a:cs typeface="Noto Sans SC"/>
-                <a:sym typeface="Noto Sans SC"/>
-              </a:rPr>
-              <a:t>2026-04-01</a:t>
-            </a:r>
-            <a:r>
-              <a:rPr lang="en-US" sz="1600" b="0" i="0" u="none" strike="noStrike" dirty="0">
-                <a:solidFill>
-                  <a:srgbClr val="C00000"/>
-                </a:solidFill>
-                <a:latin typeface="微软雅黑" panose="020B0503020204020204" pitchFamily="34" charset="-122"/>
-                <a:ea typeface="微软雅黑" panose="020B0503020204020204" pitchFamily="34" charset="-122"/>
-                <a:cs typeface="Noto Sans SC"/>
-                <a:sym typeface="Noto Sans SC"/>
-              </a:rPr>
-              <a:t/>
-            </a:r>
-            <a:r>
-              <a:rPr lang="en-US" sz="1600" b="0" i="0" u="none" strike="noStrike" dirty="0">
-                <a:solidFill>
-                  <a:schemeClr val="tx1"/>
-                </a:solidFill>
-                <a:latin typeface="微软雅黑" panose="020B0503020204020204" pitchFamily="34" charset="-122"/>
-                <a:ea typeface="微软雅黑" panose="020B0503020204020204" pitchFamily="34" charset="-122"/>
-                <a:cs typeface="Noto Sans SC"/>
-                <a:sym typeface="Noto Sans SC"/>
-              </a:rPr>
-              <a:t/>
-            </a:r>
-            <a:endParaRPr lang="en-US" sz="1100" dirty="0">
-              <a:solidFill>
-                <a:schemeClr val="tx1"/>
-              </a:solidFill>
-              <a:latin typeface="微软雅黑" panose="020B0503020204020204" pitchFamily="34" charset="-122"/>
-              <a:ea typeface="微软雅黑" panose="020B0503020204020204" pitchFamily="34" charset="-122"/>
-            </a:endParaRPr>
-          </a:p>
-        </p:txBody>
-      </p:sp>
-      <p:cxnSp>
-        <p:nvCxnSpPr>
-          <p:cNvPr id="44" name="Connector 9">
-            <a:extLst>
-              <a:ext uri="{FF2B5EF4-FFF2-40B4-BE49-F238E27FC236}">
-                <a16:creationId xmlns:a16="http://schemas.microsoft.com/office/drawing/2014/main" id="{BB59E68C-3618-4669-912F-E67E3E7F8C59}"/>
-              </a:ext>
-            </a:extLst>
-          </p:cNvPr>
-          <p:cNvCxnSpPr>
-            <a:cxnSpLocks/>
-          </p:cNvCxnSpPr>
-          <p:nvPr/>
-        </p:nvCxnSpPr>
-        <p:spPr>
-          <a:xfrm>
-            <a:off x="6368819" y="3768864"/>
-            <a:ext cx="4826016" cy="0"/>
-          </a:xfrm>
-          <a:prstGeom prst="straightConnector1">
-            <a:avLst/>
-          </a:prstGeom>
-          <a:solidFill>
-            <a:srgbClr val="DEE0E3">
-              <a:alpha val="100000"/>
-            </a:srgbClr>
-          </a:solidFill>
-          <a:ln w="6350" cap="flat" cmpd="sng">
-            <a:solidFill>
-              <a:schemeClr val="bg1">
-                <a:lumMod val="75000"/>
-              </a:schemeClr>
-            </a:solidFill>
-            <a:prstDash val="dash"/>
-            <a:round/>
-            <a:headEnd type="none" w="med" len="med"/>
-            <a:tailEnd type="none" w="med" len="med"/>
-          </a:ln>
-        </p:spPr>
-      </p:cxnSp>
-      <p:cxnSp>
-        <p:nvCxnSpPr>
-          <p:cNvPr id="45" name="Connector 12">
-            <a:extLst>
-              <a:ext uri="{FF2B5EF4-FFF2-40B4-BE49-F238E27FC236}">
-                <a16:creationId xmlns:a16="http://schemas.microsoft.com/office/drawing/2014/main" id="{F6DE8F45-3E88-44D2-8FB0-605FCCA0E511}"/>
-              </a:ext>
-            </a:extLst>
-          </p:cNvPr>
-          <p:cNvCxnSpPr>
-            <a:cxnSpLocks/>
-          </p:cNvCxnSpPr>
-          <p:nvPr/>
-        </p:nvCxnSpPr>
-        <p:spPr>
-          <a:xfrm>
-            <a:off x="6368819" y="4510905"/>
-            <a:ext cx="4826016" cy="0"/>
-          </a:xfrm>
-          <a:prstGeom prst="straightConnector1">
-            <a:avLst/>
-          </a:prstGeom>
-          <a:solidFill>
-            <a:srgbClr val="DEE0E3">
-              <a:alpha val="100000"/>
-            </a:srgbClr>
-          </a:solidFill>
-          <a:ln w="6350" cap="flat" cmpd="sng">
-            <a:solidFill>
-              <a:schemeClr val="bg1">
-                <a:lumMod val="75000"/>
-              </a:schemeClr>
-            </a:solidFill>
-            <a:prstDash val="dash"/>
-            <a:round/>
-            <a:headEnd type="none" w="med" len="med"/>
-            <a:tailEnd type="none" w="med" len="med"/>
-          </a:ln>
-        </p:spPr>
-      </p:cxnSp>
-      <p:cxnSp>
-        <p:nvCxnSpPr>
-          <p:cNvPr id="46" name="Connector 12">
-            <a:extLst>
-              <a:ext uri="{FF2B5EF4-FFF2-40B4-BE49-F238E27FC236}">
-                <a16:creationId xmlns:a16="http://schemas.microsoft.com/office/drawing/2014/main" id="{81CB12E1-9FAE-4121-8C2A-1A4CEBBA2506}"/>
-              </a:ext>
-            </a:extLst>
-          </p:cNvPr>
-          <p:cNvCxnSpPr>
-            <a:cxnSpLocks/>
-          </p:cNvCxnSpPr>
-          <p:nvPr/>
-        </p:nvCxnSpPr>
-        <p:spPr>
-          <a:xfrm>
-            <a:off x="6368819" y="5165993"/>
-            <a:ext cx="4826016" cy="0"/>
-          </a:xfrm>
-          <a:prstGeom prst="straightConnector1">
-            <a:avLst/>
-          </a:prstGeom>
-          <a:solidFill>
-            <a:srgbClr val="DEE0E3">
-              <a:alpha val="100000"/>
-            </a:srgbClr>
-          </a:solidFill>
-          <a:ln w="6350" cap="flat" cmpd="sng">
-            <a:solidFill>
-              <a:schemeClr val="bg1">
-                <a:lumMod val="75000"/>
-              </a:schemeClr>
-            </a:solidFill>
-            <a:prstDash val="dash"/>
-            <a:round/>
-            <a:headEnd type="none" w="med" len="med"/>
-            <a:tailEnd type="none" w="med" len="med"/>
-          </a:ln>
-        </p:spPr>
-      </p:cxnSp>
-      <p:sp>
-        <p:nvSpPr>
-          <p:cNvPr id="48" name="text.planned_end_date">
-            <a:extLst>
-              <a:ext uri="{FF2B5EF4-FFF2-40B4-BE49-F238E27FC236}">
-                <a16:creationId xmlns:a16="http://schemas.microsoft.com/office/drawing/2014/main" id="{96275EB1-43E7-4178-8278-7EDB6FEADCA8}"/>
-              </a:ext>
-            </a:extLst>
-          </p:cNvPr>
-          <p:cNvSpPr/>
-          <p:nvPr/>
-        </p:nvSpPr>
-        <p:spPr>
-          <a:xfrm>
-            <a:off x="8328197" y="3837168"/>
-            <a:ext cx="2866638" cy="664746"/>
-          </a:xfrm>
-          <a:prstGeom prst="rect">
-            <a:avLst/>
-          </a:prstGeom>
-          <a:noFill/>
-          <a:ln w="12700" cap="flat" cmpd="sng">
-            <a:noFill/>
-            <a:prstDash val="solid"/>
-            <a:round/>
-          </a:ln>
-        </p:spPr>
-        <p:txBody>
-          <a:bodyPr vert="horz" wrap="square" lIns="0" tIns="0" rIns="0" bIns="0" rtlCol="0" anchor="ctr" anchorCtr="0"/>
-          <a:lstStyle/>
-          <a:p>
-            <a:pPr marL="0" indent="0" algn="l">
-              <a:lnSpc>
-                <a:spcPct val="116666"/>
-              </a:lnSpc>
-              <a:defRPr/>
-            </a:pPr>
-            <a:r>
-              <a:rPr lang="en-US" sz="1600" b="0" i="0" u="none" strike="noStrike" dirty="0">
-                <a:solidFill>
-                  <a:schemeClr val="tx1"/>
-                </a:solidFill>
-                <a:latin typeface="微软雅黑" panose="020B0503020204020204" pitchFamily="34" charset="-122"/>
-                <a:ea typeface="微软雅黑" panose="020B0503020204020204" pitchFamily="34" charset="-122"/>
-                <a:cs typeface="Noto Sans SC"/>
-                <a:sym typeface="Noto Sans SC"/>
-              </a:rPr>
-              <a:t>2026-08-31</a:t>
-            </a:r>
-            <a:r>
-              <a:rPr lang="en-US" sz="1600" b="0" i="0" u="none" strike="noStrike" dirty="0">
-                <a:solidFill>
-                  <a:srgbClr val="C00000"/>
-                </a:solidFill>
-                <a:latin typeface="微软雅黑" panose="020B0503020204020204" pitchFamily="34" charset="-122"/>
-                <a:ea typeface="微软雅黑" panose="020B0503020204020204" pitchFamily="34" charset="-122"/>
-                <a:cs typeface="Noto Sans SC"/>
-                <a:sym typeface="Noto Sans SC"/>
-              </a:rPr>
-              <a:t/>
-            </a:r>
-            <a:r>
-              <a:rPr lang="en-US" sz="1600" b="0" i="0" u="none" strike="noStrike" dirty="0">
-                <a:solidFill>
-                  <a:schemeClr val="tx1"/>
-                </a:solidFill>
-                <a:latin typeface="微软雅黑" panose="020B0503020204020204" pitchFamily="34" charset="-122"/>
-                <a:ea typeface="微软雅黑" panose="020B0503020204020204" pitchFamily="34" charset="-122"/>
-                <a:cs typeface="Noto Sans SC"/>
-                <a:sym typeface="Noto Sans SC"/>
-              </a:rPr>
-              <a:t/>
-            </a:r>
-            <a:endParaRPr lang="en-US" sz="1100" dirty="0">
-              <a:solidFill>
-                <a:schemeClr val="tx1"/>
-              </a:solidFill>
-              <a:latin typeface="微软雅黑" panose="020B0503020204020204" pitchFamily="34" charset="-122"/>
-              <a:ea typeface="微软雅黑" panose="020B0503020204020204" pitchFamily="34" charset="-122"/>
-            </a:endParaRPr>
-          </a:p>
-        </p:txBody>
-      </p:sp>
-      <p:sp>
-        <p:nvSpPr>
-          <p:cNvPr id="49" name="text.report_date">
-            <a:extLst>
-              <a:ext uri="{FF2B5EF4-FFF2-40B4-BE49-F238E27FC236}">
-                <a16:creationId xmlns:a16="http://schemas.microsoft.com/office/drawing/2014/main" id="{1149CFAC-BA12-4F9E-AF73-D20A05C20E18}"/>
-              </a:ext>
-            </a:extLst>
-          </p:cNvPr>
-          <p:cNvSpPr/>
-          <p:nvPr/>
-        </p:nvSpPr>
-        <p:spPr>
-          <a:xfrm>
-            <a:off x="8328197" y="4496762"/>
-            <a:ext cx="2922076" cy="609351"/>
-          </a:xfrm>
-          <a:prstGeom prst="rect">
-            <a:avLst/>
-          </a:prstGeom>
-          <a:noFill/>
-          <a:ln w="12700" cap="flat" cmpd="sng">
-            <a:noFill/>
-            <a:prstDash val="solid"/>
-            <a:round/>
-          </a:ln>
-        </p:spPr>
-        <p:txBody>
-          <a:bodyPr vert="horz" wrap="square" lIns="0" tIns="0" rIns="0" bIns="0" rtlCol="0" anchor="ctr" anchorCtr="0"/>
-          <a:lstStyle/>
-          <a:p>
-            <a:pPr marL="0" indent="0" algn="l">
-              <a:lnSpc>
-                <a:spcPct val="116666"/>
-              </a:lnSpc>
-              <a:defRPr/>
-            </a:pPr>
-            <a:r>
-              <a:rPr lang="en-US" sz="1600" b="0" i="0" u="none" strike="noStrike" dirty="0">
-                <a:solidFill>
-                  <a:schemeClr val="tx1"/>
-                </a:solidFill>
-                <a:latin typeface="微软雅黑" panose="020B0503020204020204" pitchFamily="34" charset="-122"/>
-                <a:ea typeface="微软雅黑" panose="020B0503020204020204" pitchFamily="34" charset="-122"/>
-                <a:cs typeface="Noto Sans SC"/>
-                <a:sym typeface="Noto Sans SC"/>
-              </a:rPr>
-              <a:t>2026-06-10</a:t>
-            </a:r>
-            <a:r>
-              <a:rPr lang="en-US" sz="1600" b="0" i="0" u="none" strike="noStrike" dirty="0">
-                <a:solidFill>
-                  <a:srgbClr val="C00000"/>
-                </a:solidFill>
-                <a:latin typeface="微软雅黑" panose="020B0503020204020204" pitchFamily="34" charset="-122"/>
-                <a:ea typeface="微软雅黑" panose="020B0503020204020204" pitchFamily="34" charset="-122"/>
-                <a:cs typeface="Noto Sans SC"/>
-                <a:sym typeface="Noto Sans SC"/>
-              </a:rPr>
-              <a:t/>
-            </a:r>
-            <a:r>
-              <a:rPr lang="en-US" sz="1600" b="0" i="0" u="none" strike="noStrike" dirty="0">
-                <a:solidFill>
-                  <a:schemeClr val="tx1"/>
-                </a:solidFill>
-                <a:latin typeface="微软雅黑" panose="020B0503020204020204" pitchFamily="34" charset="-122"/>
-                <a:ea typeface="微软雅黑" panose="020B0503020204020204" pitchFamily="34" charset="-122"/>
-                <a:cs typeface="Noto Sans SC"/>
-                <a:sym typeface="Noto Sans SC"/>
-              </a:rPr>
-              <a:t/>
-            </a:r>
-            <a:endParaRPr lang="en-US" sz="1100" dirty="0">
-              <a:solidFill>
-                <a:schemeClr val="tx1"/>
-              </a:solidFill>
-              <a:latin typeface="微软雅黑" panose="020B0503020204020204" pitchFamily="34" charset="-122"/>
-              <a:ea typeface="微软雅黑" panose="020B0503020204020204" pitchFamily="34" charset="-122"/>
-            </a:endParaRPr>
-          </a:p>
-        </p:txBody>
-      </p:sp>
     </p:spTree>
   </p:cSld>
   <p:clrMapOvr>
@@ -18894,7 +18657,11 @@
         <p:nvSpPr>
           <p:cNvPr id="4" name="AutoShape 4"/>
           <p:cNvSpPr/>
-          <p:nvPr/>
+          <p:nvPr>
+            <p:custDataLst>
+              <p:tags r:id="rId1"/>
+            </p:custDataLst>
+          </p:nvPr>
         </p:nvSpPr>
         <p:spPr>
           <a:xfrm>
@@ -18935,7 +18702,11 @@
         <p:nvSpPr>
           <p:cNvPr id="5" name="AutoShape 5"/>
           <p:cNvSpPr/>
-          <p:nvPr/>
+          <p:nvPr>
+            <p:custDataLst>
+              <p:tags r:id="rId2"/>
+            </p:custDataLst>
+          </p:nvPr>
         </p:nvSpPr>
         <p:spPr>
           <a:xfrm>
@@ -18976,7 +18747,11 @@
         <p:nvSpPr>
           <p:cNvPr id="6" name="AutoShape 6"/>
           <p:cNvSpPr/>
-          <p:nvPr/>
+          <p:nvPr>
+            <p:custDataLst>
+              <p:tags r:id="rId3"/>
+            </p:custDataLst>
+          </p:nvPr>
         </p:nvSpPr>
         <p:spPr>
           <a:xfrm>
@@ -19026,7 +18801,11 @@
         <p:nvCxnSpPr>
           <p:cNvPr id="7" name="Connector 7"/>
           <p:cNvCxnSpPr/>
-          <p:nvPr/>
+          <p:nvPr>
+            <p:custDataLst>
+              <p:tags r:id="rId4"/>
+            </p:custDataLst>
+          </p:nvPr>
         </p:nvCxnSpPr>
         <p:spPr>
           <a:xfrm rot="-14946">
@@ -19058,7 +18837,11 @@
         <p:nvSpPr>
           <p:cNvPr id="8" name="text.project_status_value"/>
           <p:cNvSpPr/>
-          <p:nvPr/>
+          <p:nvPr>
+            <p:custDataLst>
+              <p:tags r:id="rId5"/>
+            </p:custDataLst>
+          </p:nvPr>
         </p:nvSpPr>
         <p:spPr>
           <a:xfrm>
@@ -19108,15 +18891,13 @@
       </p:sp>
       <p:grpSp>
         <p:nvGrpSpPr>
-          <p:cNvPr id="53" name="组合 52">
-            <a:extLst>
-              <a:ext uri="{FF2B5EF4-FFF2-40B4-BE49-F238E27FC236}">
-                <a16:creationId xmlns:a16="http://schemas.microsoft.com/office/drawing/2014/main" id="{92D88D1C-24F0-4833-883B-80460BD8B1B4}"/>
-              </a:ext>
-            </a:extLst>
-          </p:cNvPr>
+          <p:cNvPr id="53" name="组合 52"/>
           <p:cNvGrpSpPr/>
-          <p:nvPr/>
+          <p:nvPr>
+            <p:custDataLst>
+              <p:tags r:id="rId6"/>
+            </p:custDataLst>
+          </p:nvPr>
         </p:nvGrpSpPr>
         <p:grpSpPr>
           <a:xfrm>
@@ -19130,7 +18911,11 @@
           <p:nvSpPr>
             <p:cNvPr id="9" name="AutoShape 9"/>
             <p:cNvSpPr/>
-            <p:nvPr/>
+            <p:nvPr>
+              <p:custDataLst>
+                <p:tags r:id="rId7"/>
+              </p:custDataLst>
+            </p:nvPr>
           </p:nvSpPr>
           <p:spPr>
             <a:xfrm>
@@ -19171,7 +18956,11 @@
           <p:nvSpPr>
             <p:cNvPr id="10" name="AutoShape 10"/>
             <p:cNvSpPr/>
-            <p:nvPr/>
+            <p:nvPr>
+              <p:custDataLst>
+                <p:tags r:id="rId8"/>
+              </p:custDataLst>
+            </p:nvPr>
           </p:nvSpPr>
           <p:spPr>
             <a:xfrm>
@@ -19222,7 +19011,11 @@
         <p:nvSpPr>
           <p:cNvPr id="11" name="AutoShape 11"/>
           <p:cNvSpPr/>
-          <p:nvPr/>
+          <p:nvPr>
+            <p:custDataLst>
+              <p:tags r:id="rId9"/>
+            </p:custDataLst>
+          </p:nvPr>
         </p:nvSpPr>
         <p:spPr>
           <a:xfrm>
@@ -19263,7 +19056,11 @@
         <p:nvSpPr>
           <p:cNvPr id="12" name="AutoShape 12"/>
           <p:cNvSpPr/>
-          <p:nvPr/>
+          <p:nvPr>
+            <p:custDataLst>
+              <p:tags r:id="rId10"/>
+            </p:custDataLst>
+          </p:nvPr>
         </p:nvSpPr>
         <p:spPr>
           <a:xfrm>
@@ -19304,7 +19101,11 @@
         <p:nvSpPr>
           <p:cNvPr id="13" name="AutoShape 13"/>
           <p:cNvSpPr/>
-          <p:nvPr/>
+          <p:nvPr>
+            <p:custDataLst>
+              <p:tags r:id="rId11"/>
+            </p:custDataLst>
+          </p:nvPr>
         </p:nvSpPr>
         <p:spPr>
           <a:xfrm>
@@ -19366,7 +19167,11 @@
         <p:nvCxnSpPr>
           <p:cNvPr id="14" name="Connector 14"/>
           <p:cNvCxnSpPr/>
-          <p:nvPr/>
+          <p:nvPr>
+            <p:custDataLst>
+              <p:tags r:id="rId12"/>
+            </p:custDataLst>
+          </p:nvPr>
         </p:nvCxnSpPr>
         <p:spPr>
           <a:xfrm rot="-14946">
@@ -19398,7 +19203,11 @@
         <p:nvSpPr>
           <p:cNvPr id="16" name="AutoShape 16"/>
           <p:cNvSpPr/>
-          <p:nvPr/>
+          <p:nvPr>
+            <p:custDataLst>
+              <p:tags r:id="rId13"/>
+            </p:custDataLst>
+          </p:nvPr>
         </p:nvSpPr>
         <p:spPr>
           <a:xfrm>
@@ -19439,7 +19248,11 @@
         <p:nvSpPr>
           <p:cNvPr id="17" name="shape.technical_status_badge"/>
           <p:cNvSpPr/>
-          <p:nvPr/>
+          <p:nvPr>
+            <p:custDataLst>
+              <p:tags r:id="rId14"/>
+            </p:custDataLst>
+          </p:nvPr>
         </p:nvSpPr>
         <p:spPr>
           <a:xfrm>
@@ -19474,7 +19287,11 @@
         <p:nvSpPr>
           <p:cNvPr id="18" name="AutoShape 18"/>
           <p:cNvSpPr/>
-          <p:nvPr/>
+          <p:nvPr>
+            <p:custDataLst>
+              <p:tags r:id="rId15"/>
+            </p:custDataLst>
+          </p:nvPr>
         </p:nvSpPr>
         <p:spPr>
           <a:xfrm>
@@ -19515,7 +19332,11 @@
         <p:nvSpPr>
           <p:cNvPr id="19" name="AutoShape 19"/>
           <p:cNvSpPr/>
-          <p:nvPr/>
+          <p:nvPr>
+            <p:custDataLst>
+              <p:tags r:id="rId16"/>
+            </p:custDataLst>
+          </p:nvPr>
         </p:nvSpPr>
         <p:spPr>
           <a:xfrm>
@@ -19556,7 +19377,11 @@
         <p:nvSpPr>
           <p:cNvPr id="20" name="AutoShape 20"/>
           <p:cNvSpPr/>
-          <p:nvPr/>
+          <p:nvPr>
+            <p:custDataLst>
+              <p:tags r:id="rId17"/>
+            </p:custDataLst>
+          </p:nvPr>
         </p:nvSpPr>
         <p:spPr>
           <a:xfrm>
@@ -19618,7 +19443,11 @@
         <p:nvCxnSpPr>
           <p:cNvPr id="21" name="Connector 21"/>
           <p:cNvCxnSpPr/>
-          <p:nvPr/>
+          <p:nvPr>
+            <p:custDataLst>
+              <p:tags r:id="rId18"/>
+            </p:custDataLst>
+          </p:nvPr>
         </p:nvCxnSpPr>
         <p:spPr>
           <a:xfrm rot="-14946">
@@ -19650,7 +19479,11 @@
         <p:nvSpPr>
           <p:cNvPr id="25" name="AutoShape 25"/>
           <p:cNvSpPr/>
-          <p:nvPr/>
+          <p:nvPr>
+            <p:custDataLst>
+              <p:tags r:id="rId19"/>
+            </p:custDataLst>
+          </p:nvPr>
         </p:nvSpPr>
         <p:spPr>
           <a:xfrm>
@@ -19691,7 +19524,11 @@
         <p:nvSpPr>
           <p:cNvPr id="26" name="AutoShape 26"/>
           <p:cNvSpPr/>
-          <p:nvPr/>
+          <p:nvPr>
+            <p:custDataLst>
+              <p:tags r:id="rId20"/>
+            </p:custDataLst>
+          </p:nvPr>
         </p:nvSpPr>
         <p:spPr>
           <a:xfrm>
@@ -19732,7 +19569,11 @@
         <p:nvSpPr>
           <p:cNvPr id="27" name="AutoShape 27"/>
           <p:cNvSpPr/>
-          <p:nvPr/>
+          <p:nvPr>
+            <p:custDataLst>
+              <p:tags r:id="rId21"/>
+            </p:custDataLst>
+          </p:nvPr>
         </p:nvSpPr>
         <p:spPr>
           <a:xfrm>
@@ -19794,7 +19635,11 @@
         <p:nvCxnSpPr>
           <p:cNvPr id="28" name="Connector 28"/>
           <p:cNvCxnSpPr/>
-          <p:nvPr/>
+          <p:nvPr>
+            <p:custDataLst>
+              <p:tags r:id="rId22"/>
+            </p:custDataLst>
+          </p:nvPr>
         </p:nvCxnSpPr>
         <p:spPr>
           <a:xfrm rot="-14946">
@@ -19826,7 +19671,11 @@
         <p:nvSpPr>
           <p:cNvPr id="29" name="text.progress_status_value"/>
           <p:cNvSpPr/>
-          <p:nvPr/>
+          <p:nvPr>
+            <p:custDataLst>
+              <p:tags r:id="rId23"/>
+            </p:custDataLst>
+          </p:nvPr>
         </p:nvSpPr>
         <p:spPr>
           <a:xfrm>
@@ -19876,7 +19725,11 @@
         <p:nvSpPr>
           <p:cNvPr id="32" name="AutoShape 32"/>
           <p:cNvSpPr/>
-          <p:nvPr/>
+          <p:nvPr>
+            <p:custDataLst>
+              <p:tags r:id="rId24"/>
+            </p:custDataLst>
+          </p:nvPr>
         </p:nvSpPr>
         <p:spPr>
           <a:xfrm>
@@ -19917,7 +19770,11 @@
         <p:nvSpPr>
           <p:cNvPr id="33" name="AutoShape 33"/>
           <p:cNvSpPr/>
-          <p:nvPr/>
+          <p:nvPr>
+            <p:custDataLst>
+              <p:tags r:id="rId25"/>
+            </p:custDataLst>
+          </p:nvPr>
         </p:nvSpPr>
         <p:spPr>
           <a:xfrm>
@@ -19958,7 +19815,11 @@
         <p:nvSpPr>
           <p:cNvPr id="34" name="AutoShape 34"/>
           <p:cNvSpPr/>
-          <p:nvPr/>
+          <p:nvPr>
+            <p:custDataLst>
+              <p:tags r:id="rId26"/>
+            </p:custDataLst>
+          </p:nvPr>
         </p:nvSpPr>
         <p:spPr>
           <a:xfrm>
@@ -20020,7 +19881,11 @@
         <p:nvCxnSpPr>
           <p:cNvPr id="35" name="Connector 35"/>
           <p:cNvCxnSpPr/>
-          <p:nvPr/>
+          <p:nvPr>
+            <p:custDataLst>
+              <p:tags r:id="rId27"/>
+            </p:custDataLst>
+          </p:nvPr>
         </p:nvCxnSpPr>
         <p:spPr>
           <a:xfrm rot="-14946">
@@ -20052,7 +19917,11 @@
         <p:nvSpPr>
           <p:cNvPr id="36" name="text.project_progress_value"/>
           <p:cNvSpPr/>
-          <p:nvPr/>
+          <p:nvPr>
+            <p:custDataLst>
+              <p:tags r:id="rId28"/>
+            </p:custDataLst>
+          </p:nvPr>
         </p:nvSpPr>
         <p:spPr>
           <a:xfrm>
@@ -20136,15 +20005,13 @@
       </p:sp>
       <p:grpSp>
         <p:nvGrpSpPr>
-          <p:cNvPr id="57" name="组合 56">
-            <a:extLst>
-              <a:ext uri="{FF2B5EF4-FFF2-40B4-BE49-F238E27FC236}">
-                <a16:creationId xmlns:a16="http://schemas.microsoft.com/office/drawing/2014/main" id="{6BFD8B92-D7AA-4063-9EA6-B44E78DC4414}"/>
-              </a:ext>
-            </a:extLst>
-          </p:cNvPr>
+          <p:cNvPr id="57" name="组合 56"/>
           <p:cNvGrpSpPr/>
-          <p:nvPr/>
+          <p:nvPr>
+            <p:custDataLst>
+              <p:tags r:id="rId29"/>
+            </p:custDataLst>
+          </p:nvPr>
         </p:nvGrpSpPr>
         <p:grpSpPr>
           <a:xfrm>
@@ -20158,7 +20025,11 @@
           <p:nvSpPr>
             <p:cNvPr id="37" name="AutoShape 37"/>
             <p:cNvSpPr/>
-            <p:nvPr/>
+            <p:nvPr>
+              <p:custDataLst>
+                <p:tags r:id="rId30"/>
+              </p:custDataLst>
+            </p:nvPr>
           </p:nvSpPr>
           <p:spPr>
             <a:xfrm>
@@ -20199,7 +20070,11 @@
           <p:nvSpPr>
             <p:cNvPr id="38" name="AutoShape 38"/>
             <p:cNvSpPr/>
-            <p:nvPr/>
+            <p:nvPr>
+              <p:custDataLst>
+                <p:tags r:id="rId31"/>
+              </p:custDataLst>
+            </p:nvPr>
           </p:nvSpPr>
           <p:spPr>
             <a:xfrm>
@@ -20260,7 +20135,11 @@
         <p:nvSpPr>
           <p:cNvPr id="39" name="AutoShape 39"/>
           <p:cNvSpPr/>
-          <p:nvPr/>
+          <p:nvPr>
+            <p:custDataLst>
+              <p:tags r:id="rId32"/>
+            </p:custDataLst>
+          </p:nvPr>
         </p:nvSpPr>
         <p:spPr>
           <a:xfrm>
@@ -20301,7 +20180,11 @@
         <p:nvSpPr>
           <p:cNvPr id="40" name="AutoShape 40"/>
           <p:cNvSpPr/>
-          <p:nvPr/>
+          <p:nvPr>
+            <p:custDataLst>
+              <p:tags r:id="rId33"/>
+            </p:custDataLst>
+          </p:nvPr>
         </p:nvSpPr>
         <p:spPr>
           <a:xfrm>
@@ -20342,7 +20225,11 @@
         <p:nvSpPr>
           <p:cNvPr id="41" name="AutoShape 41"/>
           <p:cNvSpPr/>
-          <p:nvPr/>
+          <p:nvPr>
+            <p:custDataLst>
+              <p:tags r:id="rId34"/>
+            </p:custDataLst>
+          </p:nvPr>
         </p:nvSpPr>
         <p:spPr>
           <a:xfrm>
@@ -20404,7 +20291,11 @@
         <p:nvCxnSpPr>
           <p:cNvPr id="42" name="Connector 42"/>
           <p:cNvCxnSpPr/>
-          <p:nvPr/>
+          <p:nvPr>
+            <p:custDataLst>
+              <p:tags r:id="rId35"/>
+            </p:custDataLst>
+          </p:nvPr>
         </p:nvCxnSpPr>
         <p:spPr>
           <a:xfrm rot="-14946">
@@ -20436,7 +20327,11 @@
         <p:nvSpPr>
           <p:cNvPr id="43" name="text.business_status_value"/>
           <p:cNvSpPr/>
-          <p:nvPr/>
+          <p:nvPr>
+            <p:custDataLst>
+              <p:tags r:id="rId36"/>
+            </p:custDataLst>
+          </p:nvPr>
         </p:nvSpPr>
         <p:spPr>
           <a:xfrm>
@@ -20508,15 +20403,13 @@
       </p:sp>
       <p:grpSp>
         <p:nvGrpSpPr>
-          <p:cNvPr id="58" name="组合 57">
-            <a:extLst>
-              <a:ext uri="{FF2B5EF4-FFF2-40B4-BE49-F238E27FC236}">
-                <a16:creationId xmlns:a16="http://schemas.microsoft.com/office/drawing/2014/main" id="{73AE374D-D40F-40DA-AB22-814A3C811946}"/>
-              </a:ext>
-            </a:extLst>
-          </p:cNvPr>
+          <p:cNvPr id="58" name="组合 57"/>
           <p:cNvGrpSpPr/>
-          <p:nvPr/>
+          <p:nvPr>
+            <p:custDataLst>
+              <p:tags r:id="rId37"/>
+            </p:custDataLst>
+          </p:nvPr>
         </p:nvGrpSpPr>
         <p:grpSpPr>
           <a:xfrm>
@@ -20530,7 +20423,11 @@
           <p:nvSpPr>
             <p:cNvPr id="44" name="AutoShape 44"/>
             <p:cNvSpPr/>
-            <p:nvPr/>
+            <p:nvPr>
+              <p:custDataLst>
+                <p:tags r:id="rId38"/>
+              </p:custDataLst>
+            </p:nvPr>
           </p:nvSpPr>
           <p:spPr>
             <a:xfrm>
@@ -20571,7 +20468,11 @@
           <p:nvSpPr>
             <p:cNvPr id="45" name="AutoShape 45"/>
             <p:cNvSpPr/>
-            <p:nvPr/>
+            <p:nvPr>
+              <p:custDataLst>
+                <p:tags r:id="rId39"/>
+              </p:custDataLst>
+            </p:nvPr>
           </p:nvSpPr>
           <p:spPr>
             <a:xfrm>
@@ -20621,13 +20522,7 @@
       </p:grpSp>
       <p:sp>
         <p:nvSpPr>
-          <p:cNvPr id="46" name="text.dashboard_title">
-            <a:extLst>
-              <a:ext uri="{FF2B5EF4-FFF2-40B4-BE49-F238E27FC236}">
-                <a16:creationId xmlns:a16="http://schemas.microsoft.com/office/drawing/2014/main" id="{B537450D-8D3C-4F0F-BD71-89DF053850BD}"/>
-              </a:ext>
-            </a:extLst>
-          </p:cNvPr>
+          <p:cNvPr id="46" name="text.dashboard_title"/>
           <p:cNvSpPr/>
           <p:nvPr/>
         </p:nvSpPr>
@@ -20689,13 +20584,7 @@
       </p:sp>
       <p:sp>
         <p:nvSpPr>
-          <p:cNvPr id="47" name="AutoShape 3">
-            <a:extLst>
-              <a:ext uri="{FF2B5EF4-FFF2-40B4-BE49-F238E27FC236}">
-                <a16:creationId xmlns:a16="http://schemas.microsoft.com/office/drawing/2014/main" id="{F58E4053-AEE7-41CA-878E-EA3AEF1D9DD9}"/>
-              </a:ext>
-            </a:extLst>
-          </p:cNvPr>
+          <p:cNvPr id="47" name="AutoShape 3"/>
           <p:cNvSpPr/>
           <p:nvPr/>
         </p:nvSpPr>
@@ -20738,7 +20627,11 @@
         <p:nvSpPr>
           <p:cNvPr id="22" name="text.technical_status_value"/>
           <p:cNvSpPr/>
-          <p:nvPr/>
+          <p:nvPr>
+            <p:custDataLst>
+              <p:tags r:id="rId40"/>
+            </p:custDataLst>
+          </p:nvPr>
         </p:nvSpPr>
         <p:spPr>
           <a:xfrm>
@@ -20810,15 +20703,13 @@
       </p:sp>
       <p:sp>
         <p:nvSpPr>
-          <p:cNvPr id="49" name="AutoShape 23">
-            <a:extLst>
-              <a:ext uri="{FF2B5EF4-FFF2-40B4-BE49-F238E27FC236}">
-                <a16:creationId xmlns:a16="http://schemas.microsoft.com/office/drawing/2014/main" id="{C09128E5-EE5B-4604-8145-1935E694A316}"/>
-              </a:ext>
-            </a:extLst>
-          </p:cNvPr>
+          <p:cNvPr id="49" name="AutoShape 23"/>
           <p:cNvSpPr/>
-          <p:nvPr/>
+          <p:nvPr>
+            <p:custDataLst>
+              <p:tags r:id="rId41"/>
+            </p:custDataLst>
+          </p:nvPr>
         </p:nvSpPr>
         <p:spPr>
           <a:xfrm>
@@ -20857,15 +20748,13 @@
       </p:sp>
       <p:sp>
         <p:nvSpPr>
-          <p:cNvPr id="50" name="shape.resource_status_badge">
-            <a:extLst>
-              <a:ext uri="{FF2B5EF4-FFF2-40B4-BE49-F238E27FC236}">
-                <a16:creationId xmlns:a16="http://schemas.microsoft.com/office/drawing/2014/main" id="{43A6A115-3E0F-4E7F-AB73-BA6917C45CBA}"/>
-              </a:ext>
-            </a:extLst>
-          </p:cNvPr>
+          <p:cNvPr id="50" name="shape.resource_status_badge"/>
           <p:cNvSpPr/>
-          <p:nvPr/>
+          <p:nvPr>
+            <p:custDataLst>
+              <p:tags r:id="rId42"/>
+            </p:custDataLst>
+          </p:nvPr>
         </p:nvSpPr>
         <p:spPr>
           <a:xfrm>
@@ -20898,13 +20787,7 @@
       </p:sp>
       <p:sp>
         <p:nvSpPr>
-          <p:cNvPr id="52" name="shape.progress_status_badge">
-            <a:extLst>
-              <a:ext uri="{FF2B5EF4-FFF2-40B4-BE49-F238E27FC236}">
-                <a16:creationId xmlns:a16="http://schemas.microsoft.com/office/drawing/2014/main" id="{6B3EF87F-F276-44EB-BAD1-37054693076B}"/>
-              </a:ext>
-            </a:extLst>
-          </p:cNvPr>
+          <p:cNvPr id="52" name="shape.progress_status_badge"/>
           <p:cNvSpPr/>
           <p:nvPr/>
         </p:nvSpPr>
@@ -20939,15 +20822,13 @@
       </p:sp>
       <p:grpSp>
         <p:nvGrpSpPr>
-          <p:cNvPr id="54" name="组合 53">
-            <a:extLst>
-              <a:ext uri="{FF2B5EF4-FFF2-40B4-BE49-F238E27FC236}">
-                <a16:creationId xmlns:a16="http://schemas.microsoft.com/office/drawing/2014/main" id="{E8AB95B9-E431-41DA-980B-87112902B146}"/>
-              </a:ext>
-            </a:extLst>
-          </p:cNvPr>
+          <p:cNvPr id="54" name="组合 53"/>
           <p:cNvGrpSpPr/>
-          <p:nvPr/>
+          <p:nvPr>
+            <p:custDataLst>
+              <p:tags r:id="rId43"/>
+            </p:custDataLst>
+          </p:nvPr>
         </p:nvGrpSpPr>
         <p:grpSpPr>
           <a:xfrm>
@@ -20959,15 +20840,13 @@
         </p:grpSpPr>
         <p:sp>
           <p:nvSpPr>
-            <p:cNvPr id="55" name="AutoShape 9">
-              <a:extLst>
-                <a:ext uri="{FF2B5EF4-FFF2-40B4-BE49-F238E27FC236}">
-                  <a16:creationId xmlns:a16="http://schemas.microsoft.com/office/drawing/2014/main" id="{8DF699AD-26DE-4874-8D78-5829E1D0D9D1}"/>
-                </a:ext>
-              </a:extLst>
-            </p:cNvPr>
+            <p:cNvPr id="55" name="AutoShape 9"/>
             <p:cNvSpPr/>
-            <p:nvPr/>
+            <p:nvPr>
+              <p:custDataLst>
+                <p:tags r:id="rId44"/>
+              </p:custDataLst>
+            </p:nvPr>
           </p:nvSpPr>
           <p:spPr>
             <a:xfrm>
@@ -21006,15 +20885,13 @@
         </p:sp>
         <p:sp>
           <p:nvSpPr>
-            <p:cNvPr id="56" name="AutoShape 10">
-              <a:extLst>
-                <a:ext uri="{FF2B5EF4-FFF2-40B4-BE49-F238E27FC236}">
-                  <a16:creationId xmlns:a16="http://schemas.microsoft.com/office/drawing/2014/main" id="{D0509D4C-E1B6-438A-B477-083EE83EDC7A}"/>
-                </a:ext>
-              </a:extLst>
-            </p:cNvPr>
+            <p:cNvPr id="56" name="AutoShape 10"/>
             <p:cNvSpPr/>
-            <p:nvPr/>
+            <p:nvPr>
+              <p:custDataLst>
+                <p:tags r:id="rId45"/>
+              </p:custDataLst>
+            </p:nvPr>
           </p:nvSpPr>
           <p:spPr>
             <a:xfrm>
@@ -21065,7 +20942,11 @@
         <p:nvSpPr>
           <p:cNvPr id="15" name="text.resource_status_value"/>
           <p:cNvSpPr/>
-          <p:nvPr/>
+          <p:nvPr>
+            <p:custDataLst>
+              <p:tags r:id="rId46"/>
+            </p:custDataLst>
+          </p:nvPr>
         </p:nvSpPr>
         <p:spPr>
           <a:xfrm>
@@ -21287,7 +21168,7 @@
         </p:nvSpPr>
         <p:spPr>
           <a:xfrm>
-            <a:off x="971319" y="2484120"/>
+            <a:off x="971319" y="2217420"/>
             <a:ext cx="4318000" cy="1905000"/>
           </a:xfrm>
           <a:prstGeom prst="rect">
@@ -21301,7 +21182,7 @@
           </a:ln>
         </p:spPr>
         <p:txBody>
-          <a:bodyPr vert="horz" wrap="square" lIns="0" tIns="0" rIns="0" bIns="0" rtlCol="0" anchor="ctr" anchorCtr="0"/>
+          <a:bodyPr vert="horz" wrap="square" lIns="0" tIns="0" rIns="0" bIns="0" rtlCol="0" anchor="t" anchorCtr="0"/>
           <a:lstStyle/>
           <a:p>
             <a:pPr marL="0" indent="0" algn="l">
@@ -21400,7 +21281,7 @@
           <a:p>
             <a:pPr marL="0" indent="0" algn="l">
               <a:lnSpc>
-                <a:spcPct val="116666"/>
+                <a:spcPct val="117000"/>
               </a:lnSpc>
               <a:defRPr/>
             </a:pPr>
@@ -21557,7 +21438,7 @@
           </a:ln>
         </p:spPr>
         <p:txBody>
-          <a:bodyPr vert="horz" wrap="square" lIns="0" tIns="0" rIns="0" bIns="0" rtlCol="0" anchor="ctr" anchorCtr="0"/>
+          <a:bodyPr vert="horz" wrap="square" lIns="0" tIns="0" rIns="0" bIns="0" rtlCol="0" anchor="t" anchorCtr="0"/>
           <a:lstStyle/>
           <a:p>
             <a:pPr>
@@ -21718,7 +21599,7 @@
           <a:p>
             <a:pPr marL="0" indent="0" algn="l">
               <a:lnSpc>
-                <a:spcPct val="116666"/>
+                <a:spcPct val="117000"/>
               </a:lnSpc>
               <a:defRPr/>
             </a:pPr>
@@ -21860,13 +21741,7 @@
       </p:sp>
       <p:sp>
         <p:nvSpPr>
-          <p:cNvPr id="16" name="text.overall_progress_title">
-            <a:extLst>
-              <a:ext uri="{FF2B5EF4-FFF2-40B4-BE49-F238E27FC236}">
-                <a16:creationId xmlns:a16="http://schemas.microsoft.com/office/drawing/2014/main" id="{91C5E60D-E388-42AE-AF96-21195E0717FB}"/>
-              </a:ext>
-            </a:extLst>
-          </p:cNvPr>
+          <p:cNvPr id="16" name="text.overall_progress_title"/>
           <p:cNvSpPr/>
           <p:nvPr/>
         </p:nvSpPr>
@@ -21928,13 +21803,7 @@
       </p:sp>
       <p:sp>
         <p:nvSpPr>
-          <p:cNvPr id="17" name="AutoShape 3">
-            <a:extLst>
-              <a:ext uri="{FF2B5EF4-FFF2-40B4-BE49-F238E27FC236}">
-                <a16:creationId xmlns:a16="http://schemas.microsoft.com/office/drawing/2014/main" id="{7E6A677F-EC09-4783-86FB-3168955A939E}"/>
-              </a:ext>
-            </a:extLst>
-          </p:cNvPr>
+          <p:cNvPr id="17" name="AutoShape 3"/>
           <p:cNvSpPr/>
           <p:nvPr/>
         </p:nvSpPr>
@@ -22014,13 +21883,7 @@
           <p:cNvGraphicFramePr>
             <a:graphicFrameLocks noGrp="1"/>
           </p:cNvGraphicFramePr>
-          <p:nvPr>
-            <p:extLst>
-              <p:ext uri="{D42A27DB-BD31-4B8C-83A1-F6EECF244321}">
-                <p14:modId xmlns:p14="http://schemas.microsoft.com/office/powerpoint/2010/main" val="536641145"/>
-              </p:ext>
-            </p:extLst>
-          </p:nvPr>
+          <p:nvPr/>
         </p:nvGraphicFramePr>
         <p:xfrm>
           <a:off x="655554" y="2577148"/>
@@ -22033,55 +21896,13 @@
                 <a:effectLst/>
               </a:tblPr>
               <a:tblGrid>
-                <a:gridCol w="1383836">
-                  <a:extLst>
-                    <a:ext uri="{9D8B030D-6E8A-4147-A177-3AD203B41FA5}">
-                      <a16:colId xmlns:a16="http://schemas.microsoft.com/office/drawing/2014/main" val="20000"/>
-                    </a:ext>
-                  </a:extLst>
-                </a:gridCol>
-                <a:gridCol w="1634837">
-                  <a:extLst>
-                    <a:ext uri="{9D8B030D-6E8A-4147-A177-3AD203B41FA5}">
-                      <a16:colId xmlns:a16="http://schemas.microsoft.com/office/drawing/2014/main" val="20001"/>
-                    </a:ext>
-                  </a:extLst>
-                </a:gridCol>
-                <a:gridCol w="2111432">
-                  <a:extLst>
-                    <a:ext uri="{9D8B030D-6E8A-4147-A177-3AD203B41FA5}">
-                      <a16:colId xmlns:a16="http://schemas.microsoft.com/office/drawing/2014/main" val="20002"/>
-                    </a:ext>
-                  </a:extLst>
-                </a:gridCol>
-                <a:gridCol w="1473895">
-                  <a:extLst>
-                    <a:ext uri="{9D8B030D-6E8A-4147-A177-3AD203B41FA5}">
-                      <a16:colId xmlns:a16="http://schemas.microsoft.com/office/drawing/2014/main" val="20003"/>
-                    </a:ext>
-                  </a:extLst>
-                </a:gridCol>
-                <a:gridCol w="1397000">
-                  <a:extLst>
-                    <a:ext uri="{9D8B030D-6E8A-4147-A177-3AD203B41FA5}">
-                      <a16:colId xmlns:a16="http://schemas.microsoft.com/office/drawing/2014/main" val="20004"/>
-                    </a:ext>
-                  </a:extLst>
-                </a:gridCol>
-                <a:gridCol w="1397000">
-                  <a:extLst>
-                    <a:ext uri="{9D8B030D-6E8A-4147-A177-3AD203B41FA5}">
-                      <a16:colId xmlns:a16="http://schemas.microsoft.com/office/drawing/2014/main" val="20005"/>
-                    </a:ext>
-                  </a:extLst>
-                </a:gridCol>
-                <a:gridCol w="1397000">
-                  <a:extLst>
-                    <a:ext uri="{9D8B030D-6E8A-4147-A177-3AD203B41FA5}">
-                      <a16:colId xmlns:a16="http://schemas.microsoft.com/office/drawing/2014/main" val="20006"/>
-                    </a:ext>
-                  </a:extLst>
-                </a:gridCol>
+                <a:gridCol w="1383836"/>
+                <a:gridCol w="1634837"/>
+                <a:gridCol w="2111432"/>
+                <a:gridCol w="1473895"/>
+                <a:gridCol w="1397000"/>
+                <a:gridCol w="1397000"/>
+                <a:gridCol w="1397000"/>
               </a:tblGrid>
               <a:tr h="313580">
                 <a:tc>
@@ -22498,11 +22319,6 @@
                     </a:solidFill>
                   </a:tcPr>
                 </a:tc>
-                <a:extLst>
-                  <a:ext uri="{0D108BD9-81ED-4DB2-BD59-A6C34878D82A}">
-                    <a16:rowId xmlns:a16="http://schemas.microsoft.com/office/drawing/2014/main" val="10000"/>
-                  </a:ext>
-                </a:extLst>
               </a:tr>
               <a:tr h="313580">
                 <a:tc>
@@ -22990,11 +22806,6 @@
                     <a:noFill/>
                   </a:tcPr>
                 </a:tc>
-                <a:extLst>
-                  <a:ext uri="{0D108BD9-81ED-4DB2-BD59-A6C34878D82A}">
-                    <a16:rowId xmlns:a16="http://schemas.microsoft.com/office/drawing/2014/main" val="10001"/>
-                  </a:ext>
-                </a:extLst>
               </a:tr>
               <a:tr h="313580">
                 <a:tc>
@@ -23482,11 +23293,6 @@
                     <a:noFill/>
                   </a:tcPr>
                 </a:tc>
-                <a:extLst>
-                  <a:ext uri="{0D108BD9-81ED-4DB2-BD59-A6C34878D82A}">
-                    <a16:rowId xmlns:a16="http://schemas.microsoft.com/office/drawing/2014/main" val="10002"/>
-                  </a:ext>
-                </a:extLst>
               </a:tr>
               <a:tr h="313580">
                 <a:tc>
@@ -23620,9 +23426,8 @@
                           <a:srgbClr val="000000"/>
                         </a:buClr>
                         <a:buSzTx/>
-                        <a:buFont typeface="Arial"/>
+                        <a:buFont typeface="Arial" panose="020B0604020202090204"/>
                         <a:buNone/>
-                        <a:tabLst/>
                         <a:defRPr/>
                       </a:pPr>
                       <a:r>
@@ -23979,11 +23784,6 @@
                     <a:noFill/>
                   </a:tcPr>
                 </a:tc>
-                <a:extLst>
-                  <a:ext uri="{0D108BD9-81ED-4DB2-BD59-A6C34878D82A}">
-                    <a16:rowId xmlns:a16="http://schemas.microsoft.com/office/drawing/2014/main" val="1295253238"/>
-                  </a:ext>
-                </a:extLst>
               </a:tr>
               <a:tr h="313580">
                 <a:tc>
@@ -24463,11 +24263,6 @@
                     <a:noFill/>
                   </a:tcPr>
                 </a:tc>
-                <a:extLst>
-                  <a:ext uri="{0D108BD9-81ED-4DB2-BD59-A6C34878D82A}">
-                    <a16:rowId xmlns:a16="http://schemas.microsoft.com/office/drawing/2014/main" val="2621246782"/>
-                  </a:ext>
-                </a:extLst>
               </a:tr>
               <a:tr h="313580">
                 <a:tc>
@@ -24947,11 +24742,6 @@
                     <a:noFill/>
                   </a:tcPr>
                 </a:tc>
-                <a:extLst>
-                  <a:ext uri="{0D108BD9-81ED-4DB2-BD59-A6C34878D82A}">
-                    <a16:rowId xmlns:a16="http://schemas.microsoft.com/office/drawing/2014/main" val="2893738107"/>
-                  </a:ext>
-                </a:extLst>
               </a:tr>
               <a:tr h="313580">
                 <a:tc>
@@ -25085,9 +24875,8 @@
                           <a:srgbClr val="000000"/>
                         </a:buClr>
                         <a:buSzTx/>
-                        <a:buFont typeface="Arial"/>
+                        <a:buFont typeface="Arial" panose="020B0604020202090204"/>
                         <a:buNone/>
-                        <a:tabLst/>
                         <a:defRPr/>
                       </a:pPr>
                       <a:r>
@@ -25162,9 +24951,8 @@
                           <a:srgbClr val="000000"/>
                         </a:buClr>
                         <a:buSzTx/>
-                        <a:buFont typeface="Arial"/>
+                        <a:buFont typeface="Arial" panose="020B0604020202090204"/>
                         <a:buNone/>
-                        <a:tabLst/>
                         <a:defRPr/>
                       </a:pPr>
                       <a:r>
@@ -25458,11 +25246,6 @@
                     <a:noFill/>
                   </a:tcPr>
                 </a:tc>
-                <a:extLst>
-                  <a:ext uri="{0D108BD9-81ED-4DB2-BD59-A6C34878D82A}">
-                    <a16:rowId xmlns:a16="http://schemas.microsoft.com/office/drawing/2014/main" val="3238691906"/>
-                  </a:ext>
-                </a:extLst>
               </a:tr>
               <a:tr h="313580">
                 <a:tc>
@@ -25660,9 +25443,8 @@
                           <a:srgbClr val="000000"/>
                         </a:buClr>
                         <a:buSzTx/>
-                        <a:buFont typeface="Arial"/>
+                        <a:buFont typeface="Arial" panose="020B0604020202090204"/>
                         <a:buNone/>
-                        <a:tabLst/>
                         <a:defRPr/>
                       </a:pPr>
                       <a:r>
@@ -25956,11 +25738,6 @@
                     <a:noFill/>
                   </a:tcPr>
                 </a:tc>
-                <a:extLst>
-                  <a:ext uri="{0D108BD9-81ED-4DB2-BD59-A6C34878D82A}">
-                    <a16:rowId xmlns:a16="http://schemas.microsoft.com/office/drawing/2014/main" val="4267177001"/>
-                  </a:ext>
-                </a:extLst>
               </a:tr>
               <a:tr h="313580">
                 <a:tc>
@@ -26172,9 +25949,8 @@
                           <a:srgbClr val="000000"/>
                         </a:buClr>
                         <a:buSzTx/>
-                        <a:buFont typeface="Arial"/>
+                        <a:buFont typeface="Arial" panose="020B0604020202090204"/>
                         <a:buNone/>
-                        <a:tabLst/>
                         <a:defRPr/>
                       </a:pPr>
                       <a:r>
@@ -26465,11 +26241,6 @@
                     <a:noFill/>
                   </a:tcPr>
                 </a:tc>
-                <a:extLst>
-                  <a:ext uri="{0D108BD9-81ED-4DB2-BD59-A6C34878D82A}">
-                    <a16:rowId xmlns:a16="http://schemas.microsoft.com/office/drawing/2014/main" val="1203537344"/>
-                  </a:ext>
-                </a:extLst>
               </a:tr>
               <a:tr h="313580">
                 <a:tc>
@@ -26603,9 +26374,8 @@
                           <a:srgbClr val="000000"/>
                         </a:buClr>
                         <a:buSzTx/>
-                        <a:buFont typeface="Arial"/>
+                        <a:buFont typeface="Arial" panose="020B0604020202090204"/>
                         <a:buNone/>
-                        <a:tabLst/>
                         <a:defRPr/>
                       </a:pPr>
                       <a:r>
@@ -26680,9 +26450,8 @@
                           <a:srgbClr val="000000"/>
                         </a:buClr>
                         <a:buSzTx/>
-                        <a:buFont typeface="Arial"/>
+                        <a:buFont typeface="Arial" panose="020B0604020202090204"/>
                         <a:buNone/>
-                        <a:tabLst/>
                         <a:defRPr/>
                       </a:pPr>
                       <a:r>
@@ -26973,11 +26742,6 @@
                     <a:noFill/>
                   </a:tcPr>
                 </a:tc>
-                <a:extLst>
-                  <a:ext uri="{0D108BD9-81ED-4DB2-BD59-A6C34878D82A}">
-                    <a16:rowId xmlns:a16="http://schemas.microsoft.com/office/drawing/2014/main" val="2538624590"/>
-                  </a:ext>
-                </a:extLst>
               </a:tr>
               <a:tr h="313580">
                 <a:tc>
@@ -27103,9 +26867,8 @@
                           <a:srgbClr val="000000"/>
                         </a:buClr>
                         <a:buSzTx/>
-                        <a:buFont typeface="Arial"/>
+                        <a:buFont typeface="Arial" panose="020B0604020202090204"/>
                         <a:buNone/>
-                        <a:tabLst/>
                         <a:defRPr/>
                       </a:pPr>
                       <a:r>
@@ -27168,9 +26931,8 @@
                           <a:srgbClr val="000000"/>
                         </a:buClr>
                         <a:buSzTx/>
-                        <a:buFont typeface="Arial"/>
+                        <a:buFont typeface="Arial" panose="020B0604020202090204"/>
                         <a:buNone/>
-                        <a:tabLst/>
                         <a:defRPr/>
                       </a:pPr>
                       <a:r>
@@ -27370,11 +27132,6 @@
                     <a:noFill/>
                   </a:tcPr>
                 </a:tc>
-                <a:extLst>
-                  <a:ext uri="{0D108BD9-81ED-4DB2-BD59-A6C34878D82A}">
-                    <a16:rowId xmlns:a16="http://schemas.microsoft.com/office/drawing/2014/main" val="3925147420"/>
-                  </a:ext>
-                </a:extLst>
               </a:tr>
             </a:tbl>
           </a:graphicData>
@@ -27382,13 +27139,7 @@
       </p:graphicFrame>
       <p:sp>
         <p:nvSpPr>
-          <p:cNvPr id="17" name="text.delivery_plan_title">
-            <a:extLst>
-              <a:ext uri="{FF2B5EF4-FFF2-40B4-BE49-F238E27FC236}">
-                <a16:creationId xmlns:a16="http://schemas.microsoft.com/office/drawing/2014/main" id="{7FB107B8-4260-4704-B353-41F789B5A1E8}"/>
-              </a:ext>
-            </a:extLst>
-          </p:cNvPr>
+          <p:cNvPr id="17" name="text.delivery_plan_title"/>
           <p:cNvSpPr/>
           <p:nvPr/>
         </p:nvSpPr>
@@ -27450,13 +27201,7 @@
       </p:sp>
       <p:sp>
         <p:nvSpPr>
-          <p:cNvPr id="18" name="AutoShape 3">
-            <a:extLst>
-              <a:ext uri="{FF2B5EF4-FFF2-40B4-BE49-F238E27FC236}">
-                <a16:creationId xmlns:a16="http://schemas.microsoft.com/office/drawing/2014/main" id="{F3BA4692-E2DA-435A-AE2C-90BEC5460C28}"/>
-              </a:ext>
-            </a:extLst>
-          </p:cNvPr>
+          <p:cNvPr id="18" name="AutoShape 3"/>
           <p:cNvSpPr/>
           <p:nvPr/>
         </p:nvSpPr>
@@ -27666,11 +27411,7 @@
           <a:solidFill>
             <a:srgbClr val="0052CC"/>
           </a:solidFill>
-          <a:ln w="19050">
-            <a:solidFill>
-              <a:srgbClr val="0052CC"/>
-            </a:solidFill>
-          </a:ln>
+          <a:ln/>
         </p:spPr>
         <p:style>
           <a:lnRef idx="1">
@@ -27779,11 +27520,7 @@
           <a:solidFill>
             <a:srgbClr val="0052CC"/>
           </a:solidFill>
-          <a:ln w="19050">
-            <a:solidFill>
-              <a:srgbClr val="0052CC"/>
-            </a:solidFill>
-          </a:ln>
+          <a:ln/>
         </p:spPr>
         <p:style>
           <a:lnRef idx="1">
@@ -27892,11 +27629,7 @@
           <a:solidFill>
             <a:srgbClr val="0052CC"/>
           </a:solidFill>
-          <a:ln w="19050">
-            <a:solidFill>
-              <a:srgbClr val="0052CC"/>
-            </a:solidFill>
-          </a:ln>
+          <a:ln/>
         </p:spPr>
         <p:style>
           <a:lnRef idx="1">
@@ -28005,11 +27738,7 @@
           <a:solidFill>
             <a:srgbClr val="0052CC"/>
           </a:solidFill>
-          <a:ln w="19050">
-            <a:solidFill>
-              <a:srgbClr val="0052CC"/>
-            </a:solidFill>
-          </a:ln>
+          <a:ln/>
         </p:spPr>
         <p:style>
           <a:lnRef idx="1">
@@ -28118,11 +27847,7 @@
           <a:solidFill>
             <a:srgbClr val="0052CC"/>
           </a:solidFill>
-          <a:ln w="19050">
-            <a:solidFill>
-              <a:srgbClr val="0052CC"/>
-            </a:solidFill>
-          </a:ln>
+          <a:ln/>
         </p:spPr>
         <p:style>
           <a:lnRef idx="1">
@@ -28229,13 +27954,9 @@
             <a:avLst/>
           </a:prstGeom>
           <a:solidFill>
-            <a:srgbClr val="FFFFFF"/>
+            <a:srgbClr val="0052CC"/>
           </a:solidFill>
-          <a:ln w="19050">
-            <a:solidFill>
-              <a:srgbClr val="0052CC"/>
-            </a:solidFill>
-          </a:ln>
+          <a:ln/>
         </p:spPr>
         <p:style>
           <a:lnRef idx="1">
@@ -28261,7 +27982,48 @@
       </p:sp>
       <p:sp>
         <p:nvSpPr>
-          <p:cNvPr id="38" name="milestone.delivery.item_6.label"/>
+          <p:cNvPr id="38" name="milestone.delivery.item_6.node.inner"/>
+          <p:cNvSpPr/>
+          <p:nvPr/>
+        </p:nvSpPr>
+        <p:spPr>
+          <a:xfrm>
+            <a:off x="9298112" y="1658387"/>
+            <a:ext cx="104606" cy="104606"/>
+          </a:xfrm>
+          <a:prstGeom prst="ellipse">
+            <a:avLst/>
+          </a:prstGeom>
+          <a:solidFill>
+            <a:srgbClr val="FFFFFF"/>
+          </a:solidFill>
+          <a:ln/>
+        </p:spPr>
+        <p:style>
+          <a:lnRef idx="1">
+            <a:schemeClr val="accent1"/>
+          </a:lnRef>
+          <a:fillRef idx="3">
+            <a:schemeClr val="accent1"/>
+          </a:fillRef>
+          <a:effectRef idx="2">
+            <a:schemeClr val="accent1"/>
+          </a:effectRef>
+          <a:fontRef idx="minor">
+            <a:schemeClr val="lt1"/>
+          </a:fontRef>
+        </p:style>
+        <p:txBody>
+          <a:bodyPr rtlCol="0" anchor="ctr"/>
+          <a:lstStyle/>
+          <a:p>
+            <a:pPr algn="ctr"/>
+          </a:p>
+        </p:txBody>
+      </p:sp>
+      <p:sp>
+        <p:nvSpPr>
+          <p:cNvPr id="39" name="milestone.delivery.item_6.label"/>
           <p:cNvSpPr txBox="1"/>
           <p:nvPr/>
         </p:nvSpPr>
@@ -28295,7 +28057,7 @@
       </p:sp>
       <p:sp>
         <p:nvSpPr>
-          <p:cNvPr id="39" name="milestone.delivery.item_7.date"/>
+          <p:cNvPr id="40" name="milestone.delivery.item_7.date"/>
           <p:cNvSpPr txBox="1"/>
           <p:nvPr/>
         </p:nvSpPr>
@@ -28329,7 +28091,7 @@
       </p:sp>
       <p:sp>
         <p:nvSpPr>
-          <p:cNvPr id="40" name="milestone.delivery.item_7.node"/>
+          <p:cNvPr id="41" name="milestone.delivery.item_7.node"/>
           <p:cNvSpPr/>
           <p:nvPr/>
         </p:nvSpPr>
@@ -28342,13 +28104,9 @@
             <a:avLst/>
           </a:prstGeom>
           <a:solidFill>
-            <a:srgbClr val="FFFFFF"/>
+            <a:srgbClr val="0052CC"/>
           </a:solidFill>
-          <a:ln w="19050">
-            <a:solidFill>
-              <a:srgbClr val="0052CC"/>
-            </a:solidFill>
-          </a:ln>
+          <a:ln/>
         </p:spPr>
         <p:style>
           <a:lnRef idx="1">
@@ -28374,7 +28132,48 @@
       </p:sp>
       <p:sp>
         <p:nvSpPr>
-          <p:cNvPr id="41" name="milestone.delivery.item_7.label"/>
+          <p:cNvPr id="42" name="milestone.delivery.item_7.node.inner"/>
+          <p:cNvSpPr/>
+          <p:nvPr/>
+        </p:nvSpPr>
+        <p:spPr>
+          <a:xfrm>
+            <a:off x="10954788" y="1658387"/>
+            <a:ext cx="104606" cy="104606"/>
+          </a:xfrm>
+          <a:prstGeom prst="ellipse">
+            <a:avLst/>
+          </a:prstGeom>
+          <a:solidFill>
+            <a:srgbClr val="FFFFFF"/>
+          </a:solidFill>
+          <a:ln/>
+        </p:spPr>
+        <p:style>
+          <a:lnRef idx="1">
+            <a:schemeClr val="accent1"/>
+          </a:lnRef>
+          <a:fillRef idx="3">
+            <a:schemeClr val="accent1"/>
+          </a:fillRef>
+          <a:effectRef idx="2">
+            <a:schemeClr val="accent1"/>
+          </a:effectRef>
+          <a:fontRef idx="minor">
+            <a:schemeClr val="lt1"/>
+          </a:fontRef>
+        </p:style>
+        <p:txBody>
+          <a:bodyPr rtlCol="0" anchor="ctr"/>
+          <a:lstStyle/>
+          <a:p>
+            <a:pPr algn="ctr"/>
+          </a:p>
+        </p:txBody>
+      </p:sp>
+      <p:sp>
+        <p:nvSpPr>
+          <p:cNvPr id="43" name="milestone.delivery.item_7.label"/>
           <p:cNvSpPr txBox="1"/>
           <p:nvPr/>
         </p:nvSpPr>
@@ -28443,13 +28242,7 @@
       </p:grpSpPr>
       <p:sp>
         <p:nvSpPr>
-          <p:cNvPr id="16" name="text.top_issues_title">
-            <a:extLst>
-              <a:ext uri="{FF2B5EF4-FFF2-40B4-BE49-F238E27FC236}">
-                <a16:creationId xmlns:a16="http://schemas.microsoft.com/office/drawing/2014/main" id="{B2A4F3A7-3D29-4BDB-A52E-E40C4BEA109A}"/>
-              </a:ext>
-            </a:extLst>
-          </p:cNvPr>
+          <p:cNvPr id="16" name="text.top_issues_title"/>
           <p:cNvSpPr/>
           <p:nvPr/>
         </p:nvSpPr>
@@ -28509,13 +28302,7 @@
       </p:sp>
       <p:sp>
         <p:nvSpPr>
-          <p:cNvPr id="17" name="AutoShape 3">
-            <a:extLst>
-              <a:ext uri="{FF2B5EF4-FFF2-40B4-BE49-F238E27FC236}">
-                <a16:creationId xmlns:a16="http://schemas.microsoft.com/office/drawing/2014/main" id="{96704883-E55B-4E9B-96B0-A5C2CD1AE112}"/>
-              </a:ext>
-            </a:extLst>
-          </p:cNvPr>
+          <p:cNvPr id="17" name="AutoShape 3"/>
           <p:cNvSpPr/>
           <p:nvPr/>
         </p:nvSpPr>
@@ -29565,14 +29352,14 @@
       </p:sp>
       <p:sp>
         <p:nvSpPr>
-          <p:cNvPr id="6" name="text.next_plan_item_1"/>
+          <p:cNvPr id="6" name="text.next_plan_item"/>
           <p:cNvSpPr/>
           <p:nvPr/>
         </p:nvSpPr>
         <p:spPr>
           <a:xfrm>
-            <a:off x="1334539" y="2331534"/>
-            <a:ext cx="9610552" cy="508000"/>
+            <a:off x="1334770" y="2331720"/>
+            <a:ext cx="9610725" cy="2945130"/>
           </a:xfrm>
           <a:prstGeom prst="rect">
             <a:avLst/>
@@ -29585,7 +29372,7 @@
           </a:ln>
         </p:spPr>
         <p:txBody>
-          <a:bodyPr vert="horz" wrap="square" lIns="0" tIns="0" rIns="0" bIns="0" rtlCol="0" anchor="ctr" anchorCtr="0"/>
+          <a:bodyPr vert="horz" wrap="square" lIns="0" tIns="0" rIns="0" bIns="0" rtlCol="0" anchor="t" anchorCtr="0"/>
           <a:lstStyle/>
           <a:p>
             <a:pPr marL="0" indent="0" algn="l">
@@ -29595,7 +29382,7 @@
               <a:defRPr/>
             </a:pPr>
             <a:r>
-              <a:rPr lang="en-US" sz="1800" b="1" i="0" u="none" strike="noStrike" dirty="0">
+              <a:rPr lang="en-US" sz="1800" b="1" dirty="0">
                 <a:solidFill>
                   <a:schemeClr val="tx1"/>
                 </a:solidFill>
@@ -29607,7 +29394,7 @@
               <a:t>1. 完成系统调测收尾并输出调测报告。</a:t>
             </a:r>
             <a:r>
-              <a:rPr lang="en-US" altLang="zh-CN" sz="1800" b="1" i="0" u="none" strike="noStrike" dirty="0">
+              <a:rPr lang="en-US" altLang="zh-CN" sz="1800" b="1" dirty="0">
                 <a:solidFill>
                   <a:srgbClr val="C00000"/>
                 </a:solidFill>
@@ -29618,6 +29405,64 @@
               </a:rPr>
               <a:t/>
             </a:r>
+            <a:endParaRPr lang="en-US" altLang="zh-CN" sz="1800" b="1" dirty="0">
+              <a:solidFill>
+                <a:srgbClr val="C00000"/>
+              </a:solidFill>
+              <a:latin typeface="微软雅黑" panose="020B0503020204020204" pitchFamily="34" charset="-122"/>
+              <a:ea typeface="微软雅黑" panose="020B0503020204020204" pitchFamily="34" charset="-122"/>
+              <a:cs typeface="Noto Sans SC"/>
+              <a:sym typeface="Noto Sans SC"/>
+            </a:endParaRPr>
+          </a:p>
+          <a:p>
+            <a:pPr marL="0" indent="0" algn="l">
+              <a:lnSpc>
+                <a:spcPct val="125000"/>
+              </a:lnSpc>
+              <a:defRPr/>
+            </a:pPr>
+            <a:r>
+              <a:rPr lang="en-US" altLang="zh-CN" sz="1800" b="1" dirty="0">
+                <a:solidFill>
+                  <a:schemeClr val="tx1"/>
+                </a:solidFill>
+                <a:latin typeface="微软雅黑" panose="020B0503020204020204" pitchFamily="34" charset="-122"/>
+                <a:ea typeface="微软雅黑" panose="020B0503020204020204" pitchFamily="34" charset="-122"/>
+                <a:cs typeface="Noto Sans SC"/>
+                <a:sym typeface="Noto Sans SC"/>
+              </a:rPr>
+              <a:t>2. 完成验收脚本确认，组织客户验收评审。</a:t>
+            </a:r>
+            <a:r>
+              <a:rPr lang="en-US" altLang="zh-CN" sz="1800" b="1" dirty="0">
+                <a:solidFill>
+                  <a:srgbClr val="C00000"/>
+                </a:solidFill>
+                <a:latin typeface="微软雅黑" panose="020B0503020204020204" pitchFamily="34" charset="-122"/>
+                <a:ea typeface="微软雅黑" panose="020B0503020204020204" pitchFamily="34" charset="-122"/>
+                <a:cs typeface="Noto Sans SC"/>
+                <a:sym typeface="Noto Sans SC"/>
+              </a:rPr>
+              <a:t/>
+            </a:r>
+            <a:endParaRPr lang="en-US" altLang="zh-CN" sz="1100" b="1" i="0" u="none" strike="noStrike" dirty="0">
+              <a:solidFill>
+                <a:srgbClr val="C00000"/>
+              </a:solidFill>
+              <a:latin typeface="微软雅黑" panose="020B0503020204020204" pitchFamily="34" charset="-122"/>
+              <a:ea typeface="微软雅黑" panose="020B0503020204020204" pitchFamily="34" charset="-122"/>
+              <a:cs typeface="Noto Sans SC"/>
+              <a:sym typeface="Noto Sans SC"/>
+            </a:endParaRPr>
+          </a:p>
+          <a:p>
+            <a:pPr marL="0" indent="0" algn="l">
+              <a:lnSpc>
+                <a:spcPct val="125000"/>
+              </a:lnSpc>
+              <a:defRPr/>
+            </a:pPr>
             <a:endParaRPr lang="en-US" sz="1100" dirty="0">
               <a:solidFill>
                 <a:srgbClr val="C00000"/>
@@ -29626,17 +29471,26 @@
               <a:ea typeface="微软雅黑" panose="020B0503020204020204" pitchFamily="34" charset="-122"/>
             </a:endParaRPr>
           </a:p>
-        </p:txBody>
-      </p:sp>
-      <p:sp>
-        <p:nvSpPr>
-          <p:cNvPr id="22" name="text.next_plan_title">
-            <a:extLst>
-              <a:ext uri="{FF2B5EF4-FFF2-40B4-BE49-F238E27FC236}">
-                <a16:creationId xmlns:a16="http://schemas.microsoft.com/office/drawing/2014/main" id="{C7725FE3-97F9-47D8-B2C2-24A44643B7BF}"/>
-              </a:ext>
-            </a:extLst>
-          </p:cNvPr>
+          <a:p>
+            <a:pPr marL="0" indent="0" algn="l">
+              <a:lnSpc>
+                <a:spcPct val="125000"/>
+              </a:lnSpc>
+              <a:defRPr/>
+            </a:pPr>
+            <a:endParaRPr lang="en-US" sz="1100" dirty="0">
+              <a:solidFill>
+                <a:srgbClr val="C00000"/>
+              </a:solidFill>
+              <a:latin typeface="微软雅黑" panose="020B0503020204020204" pitchFamily="34" charset="-122"/>
+              <a:ea typeface="微软雅黑" panose="020B0503020204020204" pitchFamily="34" charset="-122"/>
+            </a:endParaRPr>
+          </a:p>
+        </p:txBody>
+      </p:sp>
+      <p:sp>
+        <p:nvSpPr>
+          <p:cNvPr id="22" name="text.next_plan_title"/>
           <p:cNvSpPr/>
           <p:nvPr/>
         </p:nvSpPr>
@@ -29685,13 +29539,7 @@
       </p:sp>
       <p:sp>
         <p:nvSpPr>
-          <p:cNvPr id="23" name="AutoShape 3">
-            <a:extLst>
-              <a:ext uri="{FF2B5EF4-FFF2-40B4-BE49-F238E27FC236}">
-                <a16:creationId xmlns:a16="http://schemas.microsoft.com/office/drawing/2014/main" id="{10AB9B96-01D5-4A78-8AF0-68F0504A3E4C}"/>
-              </a:ext>
-            </a:extLst>
-          </p:cNvPr>
+          <p:cNvPr id="23" name="AutoShape 3"/>
           <p:cNvSpPr/>
           <p:nvPr/>
         </p:nvSpPr>
@@ -29724,89 +29572,6 @@
               <a:defRPr/>
             </a:pPr>
             <a:endParaRPr>
-              <a:latin typeface="微软雅黑" panose="020B0503020204020204" pitchFamily="34" charset="-122"/>
-              <a:ea typeface="微软雅黑" panose="020B0503020204020204" pitchFamily="34" charset="-122"/>
-            </a:endParaRPr>
-          </a:p>
-        </p:txBody>
-      </p:sp>
-      <p:sp>
-        <p:nvSpPr>
-          <p:cNvPr id="14" name="text.next_plan_item_2">
-            <a:extLst>
-              <a:ext uri="{FF2B5EF4-FFF2-40B4-BE49-F238E27FC236}">
-                <a16:creationId xmlns:a16="http://schemas.microsoft.com/office/drawing/2014/main" id="{C9ED0DEB-92D5-4212-A051-56429C1C935E}"/>
-              </a:ext>
-            </a:extLst>
-          </p:cNvPr>
-          <p:cNvSpPr/>
-          <p:nvPr/>
-        </p:nvSpPr>
-        <p:spPr>
-          <a:xfrm>
-            <a:off x="1334539" y="3289975"/>
-            <a:ext cx="9610552" cy="508000"/>
-          </a:xfrm>
-          <a:prstGeom prst="rect">
-            <a:avLst/>
-          </a:prstGeom>
-          <a:noFill/>
-          <a:ln w="12700" cap="flat" cmpd="sng">
-            <a:noFill/>
-            <a:prstDash val="solid"/>
-            <a:round/>
-          </a:ln>
-        </p:spPr>
-        <p:txBody>
-          <a:bodyPr vert="horz" wrap="square" lIns="0" tIns="0" rIns="0" bIns="0" rtlCol="0" anchor="ctr" anchorCtr="0"/>
-          <a:lstStyle/>
-          <a:p>
-            <a:pPr marL="0" indent="0" algn="l">
-              <a:lnSpc>
-                <a:spcPct val="125000"/>
-              </a:lnSpc>
-              <a:defRPr/>
-            </a:pPr>
-            <a:r>
-              <a:rPr lang="en-US" sz="1800" b="1" dirty="0">
-                <a:solidFill>
-                  <a:schemeClr val="tx1"/>
-                </a:solidFill>
-                <a:latin typeface="微软雅黑" panose="020B0503020204020204" pitchFamily="34" charset="-122"/>
-                <a:ea typeface="微软雅黑" panose="020B0503020204020204" pitchFamily="34" charset="-122"/>
-                <a:cs typeface="Noto Sans SC"/>
-                <a:sym typeface="Noto Sans SC"/>
-              </a:rPr>
-              <a:t>2. 完成验收脚本确认，组织客户验收评审。</a:t>
-            </a:r>
-            <a:r>
-              <a:rPr lang="en-US" sz="1800" b="1" i="0" u="none" strike="noStrike" dirty="0">
-                <a:solidFill>
-                  <a:schemeClr val="tx1"/>
-                </a:solidFill>
-                <a:latin typeface="微软雅黑" panose="020B0503020204020204" pitchFamily="34" charset="-122"/>
-                <a:ea typeface="微软雅黑" panose="020B0503020204020204" pitchFamily="34" charset="-122"/>
-                <a:cs typeface="Noto Sans SC"/>
-                <a:sym typeface="Noto Sans SC"/>
-              </a:rPr>
-              <a:t/>
-            </a:r>
-            <a:r>
-              <a:rPr lang="en-US" altLang="zh-CN" sz="1800" b="1" i="0" u="none" strike="noStrike" dirty="0">
-                <a:solidFill>
-                  <a:srgbClr val="C00000"/>
-                </a:solidFill>
-                <a:latin typeface="微软雅黑" panose="020B0503020204020204" pitchFamily="34" charset="-122"/>
-                <a:ea typeface="微软雅黑" panose="020B0503020204020204" pitchFamily="34" charset="-122"/>
-                <a:cs typeface="Noto Sans SC"/>
-                <a:sym typeface="Noto Sans SC"/>
-              </a:rPr>
-              <a:t/>
-            </a:r>
-            <a:endParaRPr lang="en-US" sz="1100" dirty="0">
-              <a:solidFill>
-                <a:srgbClr val="C00000"/>
-              </a:solidFill>
               <a:latin typeface="微软雅黑" panose="020B0503020204020204" pitchFamily="34" charset="-122"/>
               <a:ea typeface="微软雅黑" panose="020B0503020204020204" pitchFamily="34" charset="-122"/>
             </a:endParaRPr>
@@ -29929,7 +29694,6 @@
             <a:pPr algn="ctr">
               <a:defRPr/>
             </a:pPr>
-            <a:endParaRPr/>
           </a:p>
         </p:txBody>
       </p:sp>
@@ -29967,7 +29731,6 @@
             <a:pPr algn="ctr">
               <a:defRPr/>
             </a:pPr>
-            <a:endParaRPr/>
           </a:p>
         </p:txBody>
       </p:sp>
@@ -29977,6 +29740,282 @@
     <a:masterClrMapping/>
   </p:clrMapOvr>
 </p:sld>
+</file>
+
+<file path=ppt/tags/tag1.xml><?xml version="1.0" encoding="utf-8"?>
+<p:tagLst xmlns:p="http://schemas.openxmlformats.org/presentationml/2006/main">
+  <p:tag name="KSO_WM_DIAGRAM_VIRTUALLY_FRAME" val="{&quot;height&quot;:340.5796062992125,&quot;left&quot;:53.51826771653543,&quot;top&quot;:119.71401574803149,&quot;width&quot;:854.1092913385826}"/>
+</p:tagLst>
+</file>
+
+<file path=ppt/tags/tag10.xml><?xml version="1.0" encoding="utf-8"?>
+<p:tagLst xmlns:p="http://schemas.openxmlformats.org/presentationml/2006/main">
+  <p:tag name="KSO_WM_DIAGRAM_VIRTUALLY_FRAME" val="{&quot;height&quot;:340.5796062992125,&quot;left&quot;:53.51826771653543,&quot;top&quot;:119.71401574803149,&quot;width&quot;:854.1092913385826}"/>
+</p:tagLst>
+</file>
+
+<file path=ppt/tags/tag11.xml><?xml version="1.0" encoding="utf-8"?>
+<p:tagLst xmlns:p="http://schemas.openxmlformats.org/presentationml/2006/main">
+  <p:tag name="KSO_WM_DIAGRAM_VIRTUALLY_FRAME" val="{&quot;height&quot;:340.5796062992125,&quot;left&quot;:53.51826771653543,&quot;top&quot;:119.71401574803149,&quot;width&quot;:854.1092913385826}"/>
+</p:tagLst>
+</file>
+
+<file path=ppt/tags/tag12.xml><?xml version="1.0" encoding="utf-8"?>
+<p:tagLst xmlns:p="http://schemas.openxmlformats.org/presentationml/2006/main">
+  <p:tag name="KSO_WM_DIAGRAM_VIRTUALLY_FRAME" val="{&quot;height&quot;:340.5796062992125,&quot;left&quot;:53.51826771653543,&quot;top&quot;:119.71401574803149,&quot;width&quot;:854.1092913385826}"/>
+</p:tagLst>
+</file>
+
+<file path=ppt/tags/tag13.xml><?xml version="1.0" encoding="utf-8"?>
+<p:tagLst xmlns:p="http://schemas.openxmlformats.org/presentationml/2006/main">
+  <p:tag name="KSO_WM_DIAGRAM_VIRTUALLY_FRAME" val="{&quot;height&quot;:340.5796062992125,&quot;left&quot;:53.51826771653543,&quot;top&quot;:119.71401574803149,&quot;width&quot;:854.1092913385826}"/>
+</p:tagLst>
+</file>
+
+<file path=ppt/tags/tag14.xml><?xml version="1.0" encoding="utf-8"?>
+<p:tagLst xmlns:p="http://schemas.openxmlformats.org/presentationml/2006/main">
+  <p:tag name="KSO_WM_DIAGRAM_VIRTUALLY_FRAME" val="{&quot;height&quot;:340.5796062992125,&quot;left&quot;:53.51826771653543,&quot;top&quot;:119.71401574803149,&quot;width&quot;:854.1092913385826}"/>
+</p:tagLst>
+</file>
+
+<file path=ppt/tags/tag15.xml><?xml version="1.0" encoding="utf-8"?>
+<p:tagLst xmlns:p="http://schemas.openxmlformats.org/presentationml/2006/main">
+  <p:tag name="KSO_WM_DIAGRAM_VIRTUALLY_FRAME" val="{&quot;height&quot;:340.5796062992125,&quot;left&quot;:53.51826771653543,&quot;top&quot;:119.71401574803149,&quot;width&quot;:854.1092913385826}"/>
+</p:tagLst>
+</file>
+
+<file path=ppt/tags/tag16.xml><?xml version="1.0" encoding="utf-8"?>
+<p:tagLst xmlns:p="http://schemas.openxmlformats.org/presentationml/2006/main">
+  <p:tag name="KSO_WM_DIAGRAM_VIRTUALLY_FRAME" val="{&quot;height&quot;:340.5796062992125,&quot;left&quot;:53.51826771653543,&quot;top&quot;:119.71401574803149,&quot;width&quot;:854.1092913385826}"/>
+</p:tagLst>
+</file>
+
+<file path=ppt/tags/tag17.xml><?xml version="1.0" encoding="utf-8"?>
+<p:tagLst xmlns:p="http://schemas.openxmlformats.org/presentationml/2006/main">
+  <p:tag name="KSO_WM_DIAGRAM_VIRTUALLY_FRAME" val="{&quot;height&quot;:340.5796062992125,&quot;left&quot;:53.51826771653543,&quot;top&quot;:119.71401574803149,&quot;width&quot;:854.1092913385826}"/>
+</p:tagLst>
+</file>
+
+<file path=ppt/tags/tag18.xml><?xml version="1.0" encoding="utf-8"?>
+<p:tagLst xmlns:p="http://schemas.openxmlformats.org/presentationml/2006/main">
+  <p:tag name="KSO_WM_DIAGRAM_VIRTUALLY_FRAME" val="{&quot;height&quot;:340.5796062992125,&quot;left&quot;:53.51826771653543,&quot;top&quot;:119.71401574803149,&quot;width&quot;:854.1092913385826}"/>
+</p:tagLst>
+</file>
+
+<file path=ppt/tags/tag19.xml><?xml version="1.0" encoding="utf-8"?>
+<p:tagLst xmlns:p="http://schemas.openxmlformats.org/presentationml/2006/main">
+  <p:tag name="KSO_WM_DIAGRAM_VIRTUALLY_FRAME" val="{&quot;height&quot;:340.5796062992125,&quot;left&quot;:53.51826771653543,&quot;top&quot;:119.71401574803149,&quot;width&quot;:854.1092913385826}"/>
+</p:tagLst>
+</file>
+
+<file path=ppt/tags/tag2.xml><?xml version="1.0" encoding="utf-8"?>
+<p:tagLst xmlns:p="http://schemas.openxmlformats.org/presentationml/2006/main">
+  <p:tag name="KSO_WM_DIAGRAM_VIRTUALLY_FRAME" val="{&quot;height&quot;:340.5796062992125,&quot;left&quot;:53.51826771653543,&quot;top&quot;:119.71401574803149,&quot;width&quot;:854.1092913385826}"/>
+</p:tagLst>
+</file>
+
+<file path=ppt/tags/tag20.xml><?xml version="1.0" encoding="utf-8"?>
+<p:tagLst xmlns:p="http://schemas.openxmlformats.org/presentationml/2006/main">
+  <p:tag name="KSO_WM_DIAGRAM_VIRTUALLY_FRAME" val="{&quot;height&quot;:340.5796062992125,&quot;left&quot;:53.51826771653543,&quot;top&quot;:119.71401574803149,&quot;width&quot;:854.1092913385826}"/>
+</p:tagLst>
+</file>
+
+<file path=ppt/tags/tag21.xml><?xml version="1.0" encoding="utf-8"?>
+<p:tagLst xmlns:p="http://schemas.openxmlformats.org/presentationml/2006/main">
+  <p:tag name="KSO_WM_DIAGRAM_VIRTUALLY_FRAME" val="{&quot;height&quot;:340.5796062992125,&quot;left&quot;:53.51826771653543,&quot;top&quot;:119.71401574803149,&quot;width&quot;:854.1092913385826}"/>
+</p:tagLst>
+</file>
+
+<file path=ppt/tags/tag22.xml><?xml version="1.0" encoding="utf-8"?>
+<p:tagLst xmlns:p="http://schemas.openxmlformats.org/presentationml/2006/main">
+  <p:tag name="KSO_WM_DIAGRAM_VIRTUALLY_FRAME" val="{&quot;height&quot;:340.5796062992125,&quot;left&quot;:53.51826771653543,&quot;top&quot;:119.71401574803149,&quot;width&quot;:854.1092913385826}"/>
+</p:tagLst>
+</file>
+
+<file path=ppt/tags/tag23.xml><?xml version="1.0" encoding="utf-8"?>
+<p:tagLst xmlns:p="http://schemas.openxmlformats.org/presentationml/2006/main">
+  <p:tag name="KSO_WM_DIAGRAM_VIRTUALLY_FRAME" val="{&quot;height&quot;:340.5796062992125,&quot;left&quot;:53.51826771653543,&quot;top&quot;:119.71401574803149,&quot;width&quot;:854.1092913385826}"/>
+</p:tagLst>
+</file>
+
+<file path=ppt/tags/tag24.xml><?xml version="1.0" encoding="utf-8"?>
+<p:tagLst xmlns:p="http://schemas.openxmlformats.org/presentationml/2006/main">
+  <p:tag name="KSO_WM_DIAGRAM_VIRTUALLY_FRAME" val="{&quot;height&quot;:340.5796062992125,&quot;left&quot;:53.51826771653543,&quot;top&quot;:119.71401574803149,&quot;width&quot;:854.1092913385826}"/>
+</p:tagLst>
+</file>
+
+<file path=ppt/tags/tag25.xml><?xml version="1.0" encoding="utf-8"?>
+<p:tagLst xmlns:p="http://schemas.openxmlformats.org/presentationml/2006/main">
+  <p:tag name="KSO_WM_DIAGRAM_VIRTUALLY_FRAME" val="{&quot;height&quot;:340.5796062992125,&quot;left&quot;:53.51826771653543,&quot;top&quot;:119.71401574803149,&quot;width&quot;:854.1092913385826}"/>
+</p:tagLst>
+</file>
+
+<file path=ppt/tags/tag26.xml><?xml version="1.0" encoding="utf-8"?>
+<p:tagLst xmlns:p="http://schemas.openxmlformats.org/presentationml/2006/main">
+  <p:tag name="KSO_WM_DIAGRAM_VIRTUALLY_FRAME" val="{&quot;height&quot;:340.5796062992125,&quot;left&quot;:53.51826771653543,&quot;top&quot;:119.71401574803149,&quot;width&quot;:854.1092913385826}"/>
+</p:tagLst>
+</file>
+
+<file path=ppt/tags/tag27.xml><?xml version="1.0" encoding="utf-8"?>
+<p:tagLst xmlns:p="http://schemas.openxmlformats.org/presentationml/2006/main">
+  <p:tag name="KSO_WM_DIAGRAM_VIRTUALLY_FRAME" val="{&quot;height&quot;:340.5796062992125,&quot;left&quot;:53.51826771653543,&quot;top&quot;:119.71401574803149,&quot;width&quot;:854.1092913385826}"/>
+</p:tagLst>
+</file>
+
+<file path=ppt/tags/tag28.xml><?xml version="1.0" encoding="utf-8"?>
+<p:tagLst xmlns:p="http://schemas.openxmlformats.org/presentationml/2006/main">
+  <p:tag name="KSO_WM_DIAGRAM_VIRTUALLY_FRAME" val="{&quot;height&quot;:340.5796062992125,&quot;left&quot;:53.51826771653543,&quot;top&quot;:119.71401574803149,&quot;width&quot;:854.1092913385826}"/>
+</p:tagLst>
+</file>
+
+<file path=ppt/tags/tag29.xml><?xml version="1.0" encoding="utf-8"?>
+<p:tagLst xmlns:p="http://schemas.openxmlformats.org/presentationml/2006/main">
+  <p:tag name="KSO_WM_DIAGRAM_VIRTUALLY_FRAME" val="{&quot;height&quot;:340.5796062992125,&quot;left&quot;:53.51826771653543,&quot;top&quot;:119.71401574803149,&quot;width&quot;:854.1092913385826}"/>
+</p:tagLst>
+</file>
+
+<file path=ppt/tags/tag3.xml><?xml version="1.0" encoding="utf-8"?>
+<p:tagLst xmlns:p="http://schemas.openxmlformats.org/presentationml/2006/main">
+  <p:tag name="KSO_WM_DIAGRAM_VIRTUALLY_FRAME" val="{&quot;height&quot;:340.5796062992125,&quot;left&quot;:53.51826771653543,&quot;top&quot;:119.71401574803149,&quot;width&quot;:854.1092913385826}"/>
+</p:tagLst>
+</file>
+
+<file path=ppt/tags/tag30.xml><?xml version="1.0" encoding="utf-8"?>
+<p:tagLst xmlns:p="http://schemas.openxmlformats.org/presentationml/2006/main">
+  <p:tag name="KSO_WM_DIAGRAM_VIRTUALLY_FRAME" val="{&quot;height&quot;:340.5796062992125,&quot;left&quot;:53.51826771653543,&quot;top&quot;:119.71401574803149,&quot;width&quot;:854.1092913385826}"/>
+</p:tagLst>
+</file>
+
+<file path=ppt/tags/tag31.xml><?xml version="1.0" encoding="utf-8"?>
+<p:tagLst xmlns:p="http://schemas.openxmlformats.org/presentationml/2006/main">
+  <p:tag name="KSO_WM_DIAGRAM_VIRTUALLY_FRAME" val="{&quot;height&quot;:340.5796062992125,&quot;left&quot;:53.51826771653543,&quot;top&quot;:119.71401574803149,&quot;width&quot;:854.1092913385826}"/>
+</p:tagLst>
+</file>
+
+<file path=ppt/tags/tag32.xml><?xml version="1.0" encoding="utf-8"?>
+<p:tagLst xmlns:p="http://schemas.openxmlformats.org/presentationml/2006/main">
+  <p:tag name="KSO_WM_DIAGRAM_VIRTUALLY_FRAME" val="{&quot;height&quot;:340.5796062992125,&quot;left&quot;:53.51826771653543,&quot;top&quot;:119.71401574803149,&quot;width&quot;:854.1092913385826}"/>
+</p:tagLst>
+</file>
+
+<file path=ppt/tags/tag33.xml><?xml version="1.0" encoding="utf-8"?>
+<p:tagLst xmlns:p="http://schemas.openxmlformats.org/presentationml/2006/main">
+  <p:tag name="KSO_WM_DIAGRAM_VIRTUALLY_FRAME" val="{&quot;height&quot;:340.5796062992125,&quot;left&quot;:53.51826771653543,&quot;top&quot;:119.71401574803149,&quot;width&quot;:854.1092913385826}"/>
+</p:tagLst>
+</file>
+
+<file path=ppt/tags/tag34.xml><?xml version="1.0" encoding="utf-8"?>
+<p:tagLst xmlns:p="http://schemas.openxmlformats.org/presentationml/2006/main">
+  <p:tag name="KSO_WM_DIAGRAM_VIRTUALLY_FRAME" val="{&quot;height&quot;:340.5796062992125,&quot;left&quot;:53.51826771653543,&quot;top&quot;:119.71401574803149,&quot;width&quot;:854.1092913385826}"/>
+</p:tagLst>
+</file>
+
+<file path=ppt/tags/tag35.xml><?xml version="1.0" encoding="utf-8"?>
+<p:tagLst xmlns:p="http://schemas.openxmlformats.org/presentationml/2006/main">
+  <p:tag name="KSO_WM_DIAGRAM_VIRTUALLY_FRAME" val="{&quot;height&quot;:340.5796062992125,&quot;left&quot;:53.51826771653543,&quot;top&quot;:119.71401574803149,&quot;width&quot;:854.1092913385826}"/>
+</p:tagLst>
+</file>
+
+<file path=ppt/tags/tag36.xml><?xml version="1.0" encoding="utf-8"?>
+<p:tagLst xmlns:p="http://schemas.openxmlformats.org/presentationml/2006/main">
+  <p:tag name="KSO_WM_DIAGRAM_VIRTUALLY_FRAME" val="{&quot;height&quot;:340.5796062992125,&quot;left&quot;:53.51826771653543,&quot;top&quot;:119.71401574803149,&quot;width&quot;:854.1092913385826}"/>
+</p:tagLst>
+</file>
+
+<file path=ppt/tags/tag37.xml><?xml version="1.0" encoding="utf-8"?>
+<p:tagLst xmlns:p="http://schemas.openxmlformats.org/presentationml/2006/main">
+  <p:tag name="KSO_WM_DIAGRAM_VIRTUALLY_FRAME" val="{&quot;height&quot;:340.5796062992125,&quot;left&quot;:53.51826771653543,&quot;top&quot;:119.71401574803149,&quot;width&quot;:854.1092913385826}"/>
+</p:tagLst>
+</file>
+
+<file path=ppt/tags/tag38.xml><?xml version="1.0" encoding="utf-8"?>
+<p:tagLst xmlns:p="http://schemas.openxmlformats.org/presentationml/2006/main">
+  <p:tag name="KSO_WM_DIAGRAM_VIRTUALLY_FRAME" val="{&quot;height&quot;:340.5796062992125,&quot;left&quot;:53.51826771653543,&quot;top&quot;:119.71401574803149,&quot;width&quot;:854.1092913385826}"/>
+</p:tagLst>
+</file>
+
+<file path=ppt/tags/tag39.xml><?xml version="1.0" encoding="utf-8"?>
+<p:tagLst xmlns:p="http://schemas.openxmlformats.org/presentationml/2006/main">
+  <p:tag name="KSO_WM_DIAGRAM_VIRTUALLY_FRAME" val="{&quot;height&quot;:340.5796062992125,&quot;left&quot;:53.51826771653543,&quot;top&quot;:119.71401574803149,&quot;width&quot;:854.1092913385826}"/>
+</p:tagLst>
+</file>
+
+<file path=ppt/tags/tag4.xml><?xml version="1.0" encoding="utf-8"?>
+<p:tagLst xmlns:p="http://schemas.openxmlformats.org/presentationml/2006/main">
+  <p:tag name="KSO_WM_DIAGRAM_VIRTUALLY_FRAME" val="{&quot;height&quot;:340.5796062992125,&quot;left&quot;:53.51826771653543,&quot;top&quot;:119.71401574803149,&quot;width&quot;:854.1092913385826}"/>
+</p:tagLst>
+</file>
+
+<file path=ppt/tags/tag40.xml><?xml version="1.0" encoding="utf-8"?>
+<p:tagLst xmlns:p="http://schemas.openxmlformats.org/presentationml/2006/main">
+  <p:tag name="KSO_WM_DIAGRAM_VIRTUALLY_FRAME" val="{&quot;height&quot;:340.5796062992125,&quot;left&quot;:53.51826771653543,&quot;top&quot;:119.71401574803149,&quot;width&quot;:854.1092913385826}"/>
+</p:tagLst>
+</file>
+
+<file path=ppt/tags/tag41.xml><?xml version="1.0" encoding="utf-8"?>
+<p:tagLst xmlns:p="http://schemas.openxmlformats.org/presentationml/2006/main">
+  <p:tag name="KSO_WM_DIAGRAM_VIRTUALLY_FRAME" val="{&quot;height&quot;:340.5796062992125,&quot;left&quot;:53.51826771653543,&quot;top&quot;:119.71401574803149,&quot;width&quot;:854.1092913385826}"/>
+</p:tagLst>
+</file>
+
+<file path=ppt/tags/tag42.xml><?xml version="1.0" encoding="utf-8"?>
+<p:tagLst xmlns:p="http://schemas.openxmlformats.org/presentationml/2006/main">
+  <p:tag name="KSO_WM_DIAGRAM_VIRTUALLY_FRAME" val="{&quot;height&quot;:340.5796062992125,&quot;left&quot;:53.51826771653543,&quot;top&quot;:119.71401574803149,&quot;width&quot;:854.1092913385826}"/>
+</p:tagLst>
+</file>
+
+<file path=ppt/tags/tag43.xml><?xml version="1.0" encoding="utf-8"?>
+<p:tagLst xmlns:p="http://schemas.openxmlformats.org/presentationml/2006/main">
+  <p:tag name="KSO_WM_DIAGRAM_VIRTUALLY_FRAME" val="{&quot;height&quot;:340.5796062992125,&quot;left&quot;:53.51826771653543,&quot;top&quot;:119.71401574803149,&quot;width&quot;:854.1092913385826}"/>
+</p:tagLst>
+</file>
+
+<file path=ppt/tags/tag44.xml><?xml version="1.0" encoding="utf-8"?>
+<p:tagLst xmlns:p="http://schemas.openxmlformats.org/presentationml/2006/main">
+  <p:tag name="KSO_WM_DIAGRAM_VIRTUALLY_FRAME" val="{&quot;height&quot;:340.5796062992125,&quot;left&quot;:53.51826771653543,&quot;top&quot;:119.71401574803149,&quot;width&quot;:854.1092913385826}"/>
+</p:tagLst>
+</file>
+
+<file path=ppt/tags/tag45.xml><?xml version="1.0" encoding="utf-8"?>
+<p:tagLst xmlns:p="http://schemas.openxmlformats.org/presentationml/2006/main">
+  <p:tag name="KSO_WM_DIAGRAM_VIRTUALLY_FRAME" val="{&quot;height&quot;:340.5796062992125,&quot;left&quot;:53.51826771653543,&quot;top&quot;:119.71401574803149,&quot;width&quot;:854.1092913385826}"/>
+</p:tagLst>
+</file>
+
+<file path=ppt/tags/tag46.xml><?xml version="1.0" encoding="utf-8"?>
+<p:tagLst xmlns:p="http://schemas.openxmlformats.org/presentationml/2006/main">
+  <p:tag name="KSO_WM_DIAGRAM_VIRTUALLY_FRAME" val="{&quot;height&quot;:340.5796062992125,&quot;left&quot;:53.51826771653543,&quot;top&quot;:119.71401574803149,&quot;width&quot;:854.1092913385826}"/>
+</p:tagLst>
+</file>
+
+<file path=ppt/tags/tag5.xml><?xml version="1.0" encoding="utf-8"?>
+<p:tagLst xmlns:p="http://schemas.openxmlformats.org/presentationml/2006/main">
+  <p:tag name="KSO_WM_DIAGRAM_VIRTUALLY_FRAME" val="{&quot;height&quot;:340.5796062992125,&quot;left&quot;:53.51826771653543,&quot;top&quot;:119.71401574803149,&quot;width&quot;:854.1092913385826}"/>
+</p:tagLst>
+</file>
+
+<file path=ppt/tags/tag6.xml><?xml version="1.0" encoding="utf-8"?>
+<p:tagLst xmlns:p="http://schemas.openxmlformats.org/presentationml/2006/main">
+  <p:tag name="KSO_WM_DIAGRAM_VIRTUALLY_FRAME" val="{&quot;height&quot;:340.5796062992125,&quot;left&quot;:53.51826771653543,&quot;top&quot;:119.71401574803149,&quot;width&quot;:854.1092913385826}"/>
+</p:tagLst>
+</file>
+
+<file path=ppt/tags/tag7.xml><?xml version="1.0" encoding="utf-8"?>
+<p:tagLst xmlns:p="http://schemas.openxmlformats.org/presentationml/2006/main">
+  <p:tag name="KSO_WM_DIAGRAM_VIRTUALLY_FRAME" val="{&quot;height&quot;:340.5796062992125,&quot;left&quot;:53.51826771653543,&quot;top&quot;:119.71401574803149,&quot;width&quot;:854.1092913385826}"/>
+</p:tagLst>
+</file>
+
+<file path=ppt/tags/tag8.xml><?xml version="1.0" encoding="utf-8"?>
+<p:tagLst xmlns:p="http://schemas.openxmlformats.org/presentationml/2006/main">
+  <p:tag name="KSO_WM_DIAGRAM_VIRTUALLY_FRAME" val="{&quot;height&quot;:340.5796062992125,&quot;left&quot;:53.51826771653543,&quot;top&quot;:119.71401574803149,&quot;width&quot;:854.1092913385826}"/>
+</p:tagLst>
+</file>
+
+<file path=ppt/tags/tag9.xml><?xml version="1.0" encoding="utf-8"?>
+<p:tagLst xmlns:p="http://schemas.openxmlformats.org/presentationml/2006/main">
+  <p:tag name="KSO_WM_DIAGRAM_VIRTUALLY_FRAME" val="{&quot;height&quot;:340.5796062992125,&quot;left&quot;:53.51826771653543,&quot;top&quot;:119.71401574803149,&quot;width&quot;:854.1092913385826}"/>
+</p:tagLst>
 </file>
 
 <file path=ppt/theme/theme1.xml><?xml version="1.0" encoding="utf-8"?>
@@ -30255,8 +30294,11 @@
       </a:bgFillStyleLst>
     </a:fmtScheme>
   </a:themeElements>
-  <a:objectDefaults/>
-  <a:extraClrSchemeLst/>
+  <a:extLst>
+    <a:ext uri="{05A4C25C-085E-4340-85A3-A5531E510DB2}">
+      <thm15:themeFamily xmlns:thm15="http://schemas.microsoft.com/office/thememl/2012/main" name="Office Theme" id="{62F939B6-93AF-4DB8-9C6B-D6C7DFDC589F}" vid="{4A3C46E8-61CC-4603-A589-7422A47A8E4A}"/>
+    </a:ext>
+  </a:extLst>
 </a:theme>
 </file>
 
@@ -30536,8 +30578,11 @@
       </a:bgFillStyleLst>
     </a:fmtScheme>
   </a:themeElements>
-  <a:objectDefaults/>
-  <a:extraClrSchemeLst/>
+  <a:extLst>
+    <a:ext uri="{05A4C25C-085E-4340-85A3-A5531E510DB2}">
+      <thm15:themeFamily xmlns:thm15="http://schemas.microsoft.com/office/thememl/2012/main" name="Office Theme" id="{62F939B6-93AF-4DB8-9C6B-D6C7DFDC589F}" vid="{4A3C46E8-61CC-4603-A589-7422A47A8E4A}"/>
+    </a:ext>
+  </a:extLst>
 </a:theme>
 </file>
 
@@ -30792,8 +30837,6 @@
       </a:bgFillStyleLst>
     </a:fmtScheme>
   </a:themeElements>
-  <a:objectDefaults/>
-  <a:extraClrSchemeLst/>
   <a:extLst>
     <a:ext uri="{05A4C25C-085E-4340-85A3-A5531E510DB2}">
       <thm15:themeFamily xmlns:thm15="http://schemas.microsoft.com/office/thememl/2012/main" name="Office Theme" id="{62F939B6-93AF-4DB8-9C6B-D6C7DFDC589F}" vid="{4A3C46E8-61CC-4603-A589-7422A47A8E4A}"/>
@@ -31078,7 +31121,10 @@
       </a:bgFillStyleLst>
     </a:fmtScheme>
   </a:themeElements>
-  <a:objectDefaults/>
-  <a:extraClrSchemeLst/>
+  <a:extLst>
+    <a:ext uri="{05A4C25C-085E-4340-85A3-A5531E510DB2}">
+      <thm15:themeFamily xmlns:thm15="http://schemas.microsoft.com/office/thememl/2012/main" name="Office Theme" id="{62F939B6-93AF-4DB8-9C6B-D6C7DFDC589F}" vid="{4A3C46E8-61CC-4603-A589-7422A47A8E4A}"/>
+    </a:ext>
+  </a:extLst>
 </a:theme>
 </file>